--- a/presentation/SAR_Security_Program_Presentation.pptx
+++ b/presentation/SAR_Security_Program_Presentation.pptx
@@ -8,9 +8,11 @@
     <p:sldId id="256" r:id="rId2"/>
     <p:sldId id="257" r:id="rId3"/>
     <p:sldId id="258" r:id="rId4"/>
+    <p:sldId id="259" r:id="rId5"/>
+    <p:sldId id="260" r:id="rId6"/>
   </p:sldIdLst>
   <p:notesMasterIdLst>
-    <p:notesMasterId r:id="rId5"/>
+    <p:notesMasterId r:id="rId7"/>
   </p:notesMasterIdLst>
   <p:sldSz cx="12192000" cy="6858000"/>
   <p:notesSz cx="6858000" cy="12192000"/>
@@ -1554,7 +1556,7 @@
           <a:p>
             <a:r>
               <a:rPr lang="en-US" dirty="0"/>
-              <a:t>Source: draft contract between SAR and ETECHS (22 Jan 2024) with Annexes 1 to 5. Station list: Annex 1 deliverables. Quantities and sub-systems: Annex 3 price table (Revised-02, SAR 62,000,000 ex-VAT; EWR 11,113,215, NSR 20,499,295, HHR 30,387,490). Boundaries: Annex 3 terms (exclusions) and Annex 5 SAR responses (inner areas only). Madinah is priced at 50% of the Makkah BOQ.</a:t>
+              <a:t>Cover. Prepared for Saudi Arabia Railways (SAR) from the draft SAR and ETECHS contract and its annexes.</a:t>
             </a:r>
             <a:endParaRPr lang="en-US" dirty="0"/>
           </a:p>
@@ -1642,7 +1644,7 @@
           <a:p>
             <a:r>
               <a:rPr lang="en-US" dirty="0"/>
-              <a:t>Contract facts: 36-month term from Notice to Proceed (Annex 1); initial baseline within 10 days of the effective date, detailed baseline 21 days after the mobilization and survey works, SAR review at most 21 days (clause 3, Baseline Programme); trial operation maximum 45 days; defects liability 1 year from each Taking-Over Certificate. Everything else is a planning assumption: Riyadh starts in weeks 6 and 8 with expedited procurement; other stations are spread so the last final acceptance falls at month 36; NTP 1 Nov 2026 is an editable assumption. Level 3 and 4 detail is in the interactive dashboard.</a:t>
+              <a:t>Source: draft contract between SAR and ETECHS (22 Jan 2024) with Annexes 1 to 5. Station list: Annex 1 deliverables. Quantities and sub-systems: Annex 3 price table (Revised-02, SAR 62,000,000 ex-VAT; EWR 11,113,215, NSR 20,499,295, HHR 30,387,490). Boundaries: Annex 3 terms (exclusions) and Annex 5 SAR responses (inner areas only). Madinah is priced at 50% of the Makkah BOQ.</a:t>
             </a:r>
             <a:endParaRPr lang="en-US" dirty="0"/>
           </a:p>
@@ -1730,6 +1732,94 @@
           <a:p>
             <a:r>
               <a:rPr lang="en-US" dirty="0"/>
+              <a:t>Contract facts: 36-month term from Notice to Proceed (Annex 1); initial baseline within 10 days of the effective date, detailed baseline 21 days after the mobilization and survey works, SAR review at most 21 days (clause 3, Baseline Programme); trial operation maximum 45 days; defects liability 1 year from each Taking-Over Certificate. Everything else is a planning assumption: Riyadh starts in weeks 6 and 8 with expedited procurement; other stations are spread so the last final acceptance falls at month 36; NTP 1 Nov 2026 is an editable assumption. Level 3 and 4 detail is in the interactive dashboard.</a:t>
+            </a:r>
+            <a:endParaRPr lang="en-US" dirty="0"/>
+          </a:p>
+        </p:txBody>
+      </p:sp>
+      <p:sp>
+        <p:nvSpPr>
+          <p:cNvPr id="4" name="Slide Number Placeholder 3"/>
+          <p:cNvSpPr>
+            <a:spLocks noGrp="1"/>
+          </p:cNvSpPr>
+          <p:nvPr>
+            <p:ph type="sldNum" sz="quarter" idx="10"/>
+          </p:nvPr>
+        </p:nvSpPr>
+        <p:spPr/>
+        <p:txBody>
+          <a:bodyPr/>
+          <a:lstStyle/>
+          <a:p>
+            <a:fld id="{F7021451-1387-4CA6-816F-3879F97B5CBC}" type="slidenum">
+              <a:rPr lang="en-US"/>
+              <a:t>3</a:t>
+            </a:fld>
+            <a:endParaRPr lang="en-US"/>
+          </a:p>
+        </p:txBody>
+      </p:sp>
+    </p:spTree>
+    <p:extLst>
+      <p:ext uri="{BB962C8B-B14F-4D97-AF65-F5344CB8AC3E}">
+        <p14:creationId xmlns:p14="http://schemas.microsoft.com/office/powerpoint/2010/main" val="1024086991"/>
+      </p:ext>
+    </p:extLst>
+  </p:cSld>
+  <p:clrMapOvr>
+    <a:masterClrMapping/>
+  </p:clrMapOvr>
+</p:notes>
+</file>
+
+<file path=ppt/notesSlides/notesSlide4.xml><?xml version="1.0" encoding="utf-8"?>
+<p:notes xmlns:a="http://schemas.openxmlformats.org/drawingml/2006/main" xmlns:r="http://schemas.openxmlformats.org/officeDocument/2006/relationships" xmlns:p="http://schemas.openxmlformats.org/presentationml/2006/main">
+  <p:cSld>
+    <p:spTree>
+      <p:nvGrpSpPr>
+        <p:cNvPr id="1" name=""/>
+        <p:cNvGrpSpPr/>
+        <p:nvPr/>
+      </p:nvGrpSpPr>
+      <p:grpSpPr>
+        <a:xfrm>
+          <a:off x="0" y="0"/>
+          <a:ext cx="0" cy="0"/>
+          <a:chOff x="0" y="0"/>
+          <a:chExt cx="0" cy="0"/>
+        </a:xfrm>
+      </p:grpSpPr>
+      <p:sp>
+        <p:nvSpPr>
+          <p:cNvPr id="2" name="Slide Image Placeholder 1"/>
+          <p:cNvSpPr>
+            <a:spLocks noGrp="1" noRot="1" noChangeAspect="1"/>
+          </p:cNvSpPr>
+          <p:nvPr>
+            <p:ph type="sldImg"/>
+          </p:nvPr>
+        </p:nvSpPr>
+        <p:spPr/>
+      </p:sp>
+      <p:sp>
+        <p:nvSpPr>
+          <p:cNvPr id="3" name="Notes Placeholder 2"/>
+          <p:cNvSpPr>
+            <a:spLocks noGrp="1"/>
+          </p:cNvSpPr>
+          <p:nvPr>
+            <p:ph type="body" idx="1"/>
+          </p:nvPr>
+        </p:nvSpPr>
+        <p:spPr/>
+        <p:txBody>
+          <a:bodyPr/>
+          <a:lstStyle/>
+          <a:p>
+            <a:r>
+              <a:rPr lang="en-US" dirty="0"/>
               <a:t>Monthly amounts are the invoices falling in each month, from clause 15 of the draft contract: 20% mobilization, 10% engineering submittal, 10% after SAR approval, 20% material delivery, 20% installation, 10% testing and commissioning (SAT), 10% final acceptance and handover, each prorated per station on the station value. Invoice dates follow the planning baseline on the schedule slide (assumed, not approved by SAR). Month 1 is the first month after the Notice to Proceed (1 Nov 2026 assumed). Amounts exclude 15% VAT.</a:t>
             </a:r>
             <a:endParaRPr lang="en-US" dirty="0"/>
@@ -1753,7 +1843,95 @@
           <a:p>
             <a:fld id="{F7021451-1387-4CA6-816F-3879F97B5CBC}" type="slidenum">
               <a:rPr lang="en-US"/>
-              <a:t>3</a:t>
+              <a:t>4</a:t>
+            </a:fld>
+            <a:endParaRPr lang="en-US"/>
+          </a:p>
+        </p:txBody>
+      </p:sp>
+    </p:spTree>
+    <p:extLst>
+      <p:ext uri="{BB962C8B-B14F-4D97-AF65-F5344CB8AC3E}">
+        <p14:creationId xmlns:p14="http://schemas.microsoft.com/office/powerpoint/2010/main" val="1024086991"/>
+      </p:ext>
+    </p:extLst>
+  </p:cSld>
+  <p:clrMapOvr>
+    <a:masterClrMapping/>
+  </p:clrMapOvr>
+</p:notes>
+</file>
+
+<file path=ppt/notesSlides/notesSlide5.xml><?xml version="1.0" encoding="utf-8"?>
+<p:notes xmlns:a="http://schemas.openxmlformats.org/drawingml/2006/main" xmlns:r="http://schemas.openxmlformats.org/officeDocument/2006/relationships" xmlns:p="http://schemas.openxmlformats.org/presentationml/2006/main">
+  <p:cSld>
+    <p:spTree>
+      <p:nvGrpSpPr>
+        <p:cNvPr id="1" name=""/>
+        <p:cNvGrpSpPr/>
+        <p:nvPr/>
+      </p:nvGrpSpPr>
+      <p:grpSpPr>
+        <a:xfrm>
+          <a:off x="0" y="0"/>
+          <a:ext cx="0" cy="0"/>
+          <a:chOff x="0" y="0"/>
+          <a:chExt cx="0" cy="0"/>
+        </a:xfrm>
+      </p:grpSpPr>
+      <p:sp>
+        <p:nvSpPr>
+          <p:cNvPr id="2" name="Slide Image Placeholder 1"/>
+          <p:cNvSpPr>
+            <a:spLocks noGrp="1" noRot="1" noChangeAspect="1"/>
+          </p:cNvSpPr>
+          <p:nvPr>
+            <p:ph type="sldImg"/>
+          </p:nvPr>
+        </p:nvSpPr>
+        <p:spPr/>
+      </p:sp>
+      <p:sp>
+        <p:nvSpPr>
+          <p:cNvPr id="3" name="Notes Placeholder 2"/>
+          <p:cNvSpPr>
+            <a:spLocks noGrp="1"/>
+          </p:cNvSpPr>
+          <p:nvPr>
+            <p:ph type="body" idx="1"/>
+          </p:nvPr>
+        </p:nvSpPr>
+        <p:spPr/>
+        <p:txBody>
+          <a:bodyPr/>
+          <a:lstStyle/>
+          <a:p>
+            <a:r>
+              <a:rPr lang="en-US" dirty="0"/>
+              <a:t>Closing slide. All figures are from the draft contract and its annexes; schedule dates are a planning baseline, not approved by SAR.</a:t>
+            </a:r>
+            <a:endParaRPr lang="en-US" dirty="0"/>
+          </a:p>
+        </p:txBody>
+      </p:sp>
+      <p:sp>
+        <p:nvSpPr>
+          <p:cNvPr id="4" name="Slide Number Placeholder 3"/>
+          <p:cNvSpPr>
+            <a:spLocks noGrp="1"/>
+          </p:cNvSpPr>
+          <p:nvPr>
+            <p:ph type="sldNum" sz="quarter" idx="10"/>
+          </p:nvPr>
+        </p:nvSpPr>
+        <p:spPr/>
+        <p:txBody>
+          <a:bodyPr/>
+          <a:lstStyle/>
+          <a:p>
+            <a:fld id="{F7021451-1387-4CA6-816F-3879F97B5CBC}" type="slidenum">
+              <a:rPr lang="en-US"/>
+              <a:t>5</a:t>
             </a:fld>
             <a:endParaRPr lang="en-US"/>
           </a:p>
@@ -2096,6 +2274,261 @@
           <a:chExt cx="0" cy="0"/>
         </a:xfrm>
       </p:grpSpPr>
+      <p:sp>
+        <p:nvSpPr>
+          <p:cNvPr id="2" name="Shape 0"/>
+          <p:cNvSpPr/>
+          <p:nvPr/>
+        </p:nvSpPr>
+        <p:spPr>
+          <a:xfrm>
+            <a:off x="1842516" y="3291840"/>
+            <a:ext cx="502920" cy="3566160"/>
+          </a:xfrm>
+          <a:prstGeom prst="parallelogram">
+            <a:avLst/>
+          </a:prstGeom>
+          <a:solidFill>
+            <a:srgbClr val="00778B"/>
+          </a:solidFill>
+          <a:ln w="12700">
+            <a:solidFill>
+              <a:srgbClr val="00778B"/>
+            </a:solidFill>
+            <a:prstDash val="solid"/>
+          </a:ln>
+        </p:spPr>
+      </p:sp>
+      <p:sp>
+        <p:nvSpPr>
+          <p:cNvPr id="3" name="Shape 1"/>
+          <p:cNvSpPr/>
+          <p:nvPr/>
+        </p:nvSpPr>
+        <p:spPr>
+          <a:xfrm flipH="1">
+            <a:off x="9843516" y="3291840"/>
+            <a:ext cx="502920" cy="3566160"/>
+          </a:xfrm>
+          <a:prstGeom prst="parallelogram">
+            <a:avLst/>
+          </a:prstGeom>
+          <a:solidFill>
+            <a:srgbClr val="00778B"/>
+          </a:solidFill>
+          <a:ln w="12700">
+            <a:solidFill>
+              <a:srgbClr val="00778B"/>
+            </a:solidFill>
+            <a:prstDash val="solid"/>
+          </a:ln>
+        </p:spPr>
+      </p:sp>
+      <p:pic>
+        <p:nvPicPr>
+          <p:cNvPr id="4" name="Image 0" descr="preencoded.png">    </p:cNvPr>
+          <p:cNvPicPr>
+            <a:picLocks noChangeAspect="1"/>
+          </p:cNvPicPr>
+          <p:nvPr/>
+        </p:nvPicPr>
+        <p:blipFill>
+          <a:blip r:embed="rId1"/>
+          <a:stretch>
+            <a:fillRect/>
+          </a:stretch>
+        </p:blipFill>
+        <p:spPr>
+          <a:xfrm>
+            <a:off x="5639105" y="502920"/>
+            <a:ext cx="910742" cy="566928"/>
+          </a:xfrm>
+          <a:prstGeom prst="rect">
+            <a:avLst/>
+          </a:prstGeom>
+        </p:spPr>
+      </p:pic>
+      <p:sp>
+        <p:nvSpPr>
+          <p:cNvPr id="5" name="Text 2"/>
+          <p:cNvSpPr/>
+          <p:nvPr/>
+        </p:nvSpPr>
+        <p:spPr>
+          <a:xfrm>
+            <a:off x="1280160" y="1417320"/>
+            <a:ext cx="9601200" cy="685800"/>
+          </a:xfrm>
+          <a:prstGeom prst="rect">
+            <a:avLst/>
+          </a:prstGeom>
+          <a:noFill/>
+          <a:ln/>
+        </p:spPr>
+        <p:txBody>
+          <a:bodyPr wrap="square" lIns="0" tIns="0" rIns="0" bIns="0" rtlCol="0" anchor="ctr"/>
+          <a:lstStyle/>
+          <a:p>
+            <a:pPr algn="ctr" indent="0" marL="0">
+              <a:buNone/>
+            </a:pPr>
+            <a:r>
+              <a:rPr lang="en-US" sz="3200" b="1" dirty="0">
+                <a:solidFill>
+                  <a:srgbClr val="00778B"/>
+                </a:solidFill>
+                <a:latin typeface="Diodrum Arabic" pitchFamily="34" charset="0"/>
+                <a:ea typeface="Diodrum Arabic" pitchFamily="34" charset="-122"/>
+                <a:cs typeface="Diodrum Arabic" pitchFamily="34" charset="-120"/>
+              </a:rPr>
+              <a:t>Passengers' Security Checking</a:t>
+            </a:r>
+            <a:endParaRPr lang="en-US" sz="3200" dirty="0"/>
+          </a:p>
+        </p:txBody>
+      </p:sp>
+      <p:sp>
+        <p:nvSpPr>
+          <p:cNvPr id="6" name="Text 3"/>
+          <p:cNvSpPr/>
+          <p:nvPr/>
+        </p:nvSpPr>
+        <p:spPr>
+          <a:xfrm>
+            <a:off x="1280160" y="2121408"/>
+            <a:ext cx="9601200" cy="365760"/>
+          </a:xfrm>
+          <a:prstGeom prst="rect">
+            <a:avLst/>
+          </a:prstGeom>
+          <a:noFill/>
+          <a:ln/>
+        </p:spPr>
+        <p:txBody>
+          <a:bodyPr wrap="square" lIns="0" tIns="0" rIns="0" bIns="0" rtlCol="0" anchor="ctr"/>
+          <a:lstStyle/>
+          <a:p>
+            <a:pPr algn="ctr" indent="0" marL="0">
+              <a:buNone/>
+            </a:pPr>
+            <a:r>
+              <a:rPr lang="en-US" sz="2200" dirty="0">
+                <a:solidFill>
+                  <a:srgbClr val="768692"/>
+                </a:solidFill>
+                <a:latin typeface="Diodrum Arabic" pitchFamily="34" charset="0"/>
+                <a:ea typeface="Diodrum Arabic" pitchFamily="34" charset="-122"/>
+                <a:cs typeface="Diodrum Arabic" pitchFamily="34" charset="-120"/>
+              </a:rPr>
+              <a:t>Scope of work, Level 2 schedule and cash flow</a:t>
+            </a:r>
+            <a:endParaRPr lang="en-US" sz="2200" dirty="0"/>
+          </a:p>
+        </p:txBody>
+      </p:sp>
+      <p:sp>
+        <p:nvSpPr>
+          <p:cNvPr id="7" name="Text 4"/>
+          <p:cNvSpPr/>
+          <p:nvPr/>
+        </p:nvSpPr>
+        <p:spPr>
+          <a:xfrm>
+            <a:off x="1280160" y="2560320"/>
+            <a:ext cx="9601200" cy="274320"/>
+          </a:xfrm>
+          <a:prstGeom prst="rect">
+            <a:avLst/>
+          </a:prstGeom>
+          <a:noFill/>
+          <a:ln/>
+        </p:spPr>
+        <p:txBody>
+          <a:bodyPr wrap="square" lIns="0" tIns="0" rIns="0" bIns="0" rtlCol="0" anchor="ctr"/>
+          <a:lstStyle/>
+          <a:p>
+            <a:pPr algn="ctr" indent="0" marL="0">
+              <a:buNone/>
+            </a:pPr>
+            <a:r>
+              <a:rPr lang="en-US" sz="1100" dirty="0">
+                <a:solidFill>
+                  <a:srgbClr val="3D3935"/>
+                </a:solidFill>
+                <a:latin typeface="Diodrum Arabic" pitchFamily="34" charset="0"/>
+                <a:ea typeface="Diodrum Arabic" pitchFamily="34" charset="-122"/>
+                <a:cs typeface="Diodrum Arabic" pitchFamily="34" charset="-120"/>
+              </a:rPr>
+              <a:t>Security solutions for HHR, EWR and NSR  ·  14 stations  ·  SAR 62.0M  ·  36 months  |  October 2026</a:t>
+            </a:r>
+            <a:endParaRPr lang="en-US" sz="1100" dirty="0"/>
+          </a:p>
+        </p:txBody>
+      </p:sp>
+      <p:sp>
+        <p:nvSpPr>
+          <p:cNvPr id="8" name="Text 5"/>
+          <p:cNvSpPr/>
+          <p:nvPr/>
+        </p:nvSpPr>
+        <p:spPr>
+          <a:xfrm>
+            <a:off x="8778240" y="6355080"/>
+            <a:ext cx="3017520" cy="274320"/>
+          </a:xfrm>
+          <a:prstGeom prst="rect">
+            <a:avLst/>
+          </a:prstGeom>
+          <a:noFill/>
+          <a:ln/>
+        </p:spPr>
+        <p:txBody>
+          <a:bodyPr wrap="square" lIns="0" tIns="0" rIns="0" bIns="0" rtlCol="0" anchor="ctr"/>
+          <a:lstStyle/>
+          <a:p>
+            <a:pPr algn="r" indent="0" marL="0">
+              <a:buNone/>
+            </a:pPr>
+            <a:r>
+              <a:rPr lang="en-US" sz="900" b="1" dirty="0">
+                <a:solidFill>
+                  <a:srgbClr val="FFFFFF"/>
+                </a:solidFill>
+                <a:latin typeface="Diodrum Arabic" pitchFamily="34" charset="0"/>
+                <a:ea typeface="Diodrum Arabic" pitchFamily="34" charset="-122"/>
+                <a:cs typeface="Diodrum Arabic" pitchFamily="34" charset="-120"/>
+              </a:rPr>
+              <a:t>SAR.COM.SA</a:t>
+            </a:r>
+            <a:endParaRPr lang="en-US" sz="900" dirty="0"/>
+          </a:p>
+        </p:txBody>
+      </p:sp>
+    </p:spTree>
+  </p:cSld>
+  <p:clrMapOvr>
+    <a:masterClrMapping/>
+  </p:clrMapOvr>
+</p:sld>
+</file>
+
+<file path=ppt/slides/slide2.xml><?xml version="1.0" encoding="utf-8"?>
+<p:sld xmlns:a="http://schemas.openxmlformats.org/drawingml/2006/main" xmlns:r="http://schemas.openxmlformats.org/officeDocument/2006/relationships" xmlns:p="http://schemas.openxmlformats.org/presentationml/2006/main">
+  <p:cSld name="Slide 2">
+    <p:spTree>
+      <p:nvGrpSpPr>
+        <p:cNvPr id="1" name=""/>
+        <p:cNvGrpSpPr/>
+        <p:nvPr/>
+      </p:nvGrpSpPr>
+      <p:grpSpPr>
+        <a:xfrm>
+          <a:off x="0" y="0"/>
+          <a:ext cx="0" cy="0"/>
+          <a:chOff x="0" y="0"/>
+          <a:chExt cx="0" cy="0"/>
+        </a:xfrm>
+      </p:grpSpPr>
       <p:pic>
         <p:nvPicPr>
           <p:cNvPr id="2" name="Image 0" descr="preencoded.png">    </p:cNvPr>
@@ -2192,7 +2625,7 @@
                 <a:ea typeface="Diodrum Arabic" pitchFamily="34" charset="-122"/>
                 <a:cs typeface="Diodrum Arabic" pitchFamily="34" charset="-120"/>
               </a:rPr>
-              <a:t>1</a:t>
+              <a:t>2</a:t>
             </a:r>
             <a:endParaRPr lang="en-US" sz="900" dirty="0"/>
           </a:p>
@@ -4054,9 +4487,9 @@
 </p:sld>
 </file>
 
-<file path=ppt/slides/slide2.xml><?xml version="1.0" encoding="utf-8"?>
+<file path=ppt/slides/slide3.xml><?xml version="1.0" encoding="utf-8"?>
 <p:sld xmlns:a="http://schemas.openxmlformats.org/drawingml/2006/main" xmlns:r="http://schemas.openxmlformats.org/officeDocument/2006/relationships" xmlns:p="http://schemas.openxmlformats.org/presentationml/2006/main">
-  <p:cSld name="Slide 2">
+  <p:cSld name="Slide 3">
     <p:spTree>
       <p:nvGrpSpPr>
         <p:cNvPr id="1" name=""/>
@@ -4167,7 +4600,7 @@
                 <a:ea typeface="Diodrum Arabic" pitchFamily="34" charset="-122"/>
                 <a:cs typeface="Diodrum Arabic" pitchFamily="34" charset="-120"/>
               </a:rPr>
-              <a:t>2</a:t>
+              <a:t>3</a:t>
             </a:r>
             <a:endParaRPr lang="en-US" sz="900" dirty="0"/>
           </a:p>
@@ -7378,9 +7811,9 @@
 </p:sld>
 </file>
 
-<file path=ppt/slides/slide3.xml><?xml version="1.0" encoding="utf-8"?>
+<file path=ppt/slides/slide4.xml><?xml version="1.0" encoding="utf-8"?>
 <p:sld xmlns:a="http://schemas.openxmlformats.org/drawingml/2006/main" xmlns:r="http://schemas.openxmlformats.org/officeDocument/2006/relationships" xmlns:p="http://schemas.openxmlformats.org/presentationml/2006/main">
-  <p:cSld name="Slide 3">
+  <p:cSld name="Slide 4">
     <p:spTree>
       <p:nvGrpSpPr>
         <p:cNvPr id="1" name=""/>
@@ -7491,7 +7924,7 @@
                 <a:ea typeface="Diodrum Arabic" pitchFamily="34" charset="-122"/>
                 <a:cs typeface="Diodrum Arabic" pitchFamily="34" charset="-120"/>
               </a:rPr>
-              <a:t>3</a:t>
+              <a:t>4</a:t>
             </a:r>
             <a:endParaRPr lang="en-US" sz="900" dirty="0"/>
           </a:p>
@@ -7650,7 +8083,7 @@
       </p:sp>
       <p:graphicFrame>
         <p:nvGraphicFramePr>
-          <p:cNvPr id="4" name="Table 0"/>
+          <p:cNvPr id="5" name="Table 0"/>
           <p:cNvGraphicFramePr>
             <a:graphicFrameLocks noGrp="1"/>
           </p:cNvGraphicFramePr>
@@ -16437,7 +16870,7 @@
       </p:graphicFrame>
       <p:graphicFrame>
         <p:nvGraphicFramePr>
-          <p:cNvPr id="7" name="Table 1"/>
+          <p:cNvPr id="9" name="Table 1"/>
           <p:cNvGraphicFramePr>
             <a:graphicFrameLocks noGrp="1"/>
           </p:cNvGraphicFramePr>
@@ -18922,6 +19355,190 @@
           </a:graphicData>
         </a:graphic>
       </p:graphicFrame>
+    </p:spTree>
+  </p:cSld>
+  <p:clrMapOvr>
+    <a:masterClrMapping/>
+  </p:clrMapOvr>
+</p:sld>
+</file>
+
+<file path=ppt/slides/slide5.xml><?xml version="1.0" encoding="utf-8"?>
+<p:sld xmlns:a="http://schemas.openxmlformats.org/drawingml/2006/main" xmlns:r="http://schemas.openxmlformats.org/officeDocument/2006/relationships" xmlns:p="http://schemas.openxmlformats.org/presentationml/2006/main">
+  <p:cSld name="Slide 5">
+    <p:bg>
+      <p:bgPr>
+        <a:solidFill>
+          <a:srgbClr val="00778B"/>
+        </a:solidFill>
+      </p:bgPr>
+    </p:bg>
+    <p:spTree>
+      <p:nvGrpSpPr>
+        <p:cNvPr id="1" name=""/>
+        <p:cNvGrpSpPr/>
+        <p:nvPr/>
+      </p:nvGrpSpPr>
+      <p:grpSpPr>
+        <a:xfrm>
+          <a:off x="0" y="0"/>
+          <a:ext cx="0" cy="0"/>
+          <a:chOff x="0" y="0"/>
+          <a:chExt cx="0" cy="0"/>
+        </a:xfrm>
+      </p:grpSpPr>
+      <p:sp>
+        <p:nvSpPr>
+          <p:cNvPr id="2" name="Shape 0"/>
+          <p:cNvSpPr/>
+          <p:nvPr/>
+        </p:nvSpPr>
+        <p:spPr>
+          <a:xfrm>
+            <a:off x="3534156" y="3246120"/>
+            <a:ext cx="914400" cy="3611880"/>
+          </a:xfrm>
+          <a:prstGeom prst="parallelogram">
+            <a:avLst/>
+          </a:prstGeom>
+          <a:solidFill>
+            <a:srgbClr val="FFFFFF"/>
+          </a:solidFill>
+          <a:ln w="12700">
+            <a:solidFill>
+              <a:srgbClr val="FFFFFF"/>
+            </a:solidFill>
+            <a:prstDash val="solid"/>
+          </a:ln>
+        </p:spPr>
+      </p:sp>
+      <p:sp>
+        <p:nvSpPr>
+          <p:cNvPr id="3" name="Shape 1"/>
+          <p:cNvSpPr/>
+          <p:nvPr/>
+        </p:nvSpPr>
+        <p:spPr>
+          <a:xfrm flipH="1">
+            <a:off x="7740396" y="3246120"/>
+            <a:ext cx="914400" cy="3611880"/>
+          </a:xfrm>
+          <a:prstGeom prst="parallelogram">
+            <a:avLst/>
+          </a:prstGeom>
+          <a:solidFill>
+            <a:srgbClr val="FFFFFF"/>
+          </a:solidFill>
+          <a:ln w="12700">
+            <a:solidFill>
+              <a:srgbClr val="FFFFFF"/>
+            </a:solidFill>
+            <a:prstDash val="solid"/>
+          </a:ln>
+        </p:spPr>
+      </p:sp>
+      <p:pic>
+        <p:nvPicPr>
+          <p:cNvPr id="4" name="Image 0" descr="preencoded.png">    </p:cNvPr>
+          <p:cNvPicPr>
+            <a:picLocks noChangeAspect="1"/>
+          </p:cNvPicPr>
+          <p:nvPr/>
+        </p:nvPicPr>
+        <p:blipFill>
+          <a:blip r:embed="rId1"/>
+          <a:stretch>
+            <a:fillRect/>
+          </a:stretch>
+        </p:blipFill>
+        <p:spPr>
+          <a:xfrm>
+            <a:off x="5690311" y="4160520"/>
+            <a:ext cx="808330" cy="502920"/>
+          </a:xfrm>
+          <a:prstGeom prst="rect">
+            <a:avLst/>
+          </a:prstGeom>
+        </p:spPr>
+      </p:pic>
+      <p:sp>
+        <p:nvSpPr>
+          <p:cNvPr id="5" name="Text 2"/>
+          <p:cNvSpPr/>
+          <p:nvPr/>
+        </p:nvSpPr>
+        <p:spPr>
+          <a:xfrm>
+            <a:off x="0" y="1965960"/>
+            <a:ext cx="12188952" cy="822960"/>
+          </a:xfrm>
+          <a:prstGeom prst="rect">
+            <a:avLst/>
+          </a:prstGeom>
+          <a:noFill/>
+          <a:ln/>
+        </p:spPr>
+        <p:txBody>
+          <a:bodyPr wrap="square" lIns="0" tIns="0" rIns="0" bIns="0" rtlCol="0" anchor="ctr"/>
+          <a:lstStyle/>
+          <a:p>
+            <a:pPr algn="ctr" indent="0" marL="0">
+              <a:buNone/>
+            </a:pPr>
+            <a:r>
+              <a:rPr lang="en-US" sz="3600" b="1" dirty="0">
+                <a:solidFill>
+                  <a:srgbClr val="FFFFFF"/>
+                </a:solidFill>
+                <a:latin typeface="Diodrum Arabic" pitchFamily="34" charset="0"/>
+                <a:ea typeface="Diodrum Arabic" pitchFamily="34" charset="-122"/>
+                <a:cs typeface="Diodrum Arabic" pitchFamily="34" charset="-120"/>
+              </a:rPr>
+              <a:t>Thank You</a:t>
+            </a:r>
+            <a:endParaRPr lang="en-US" sz="3600" dirty="0"/>
+          </a:p>
+        </p:txBody>
+      </p:sp>
+      <p:sp>
+        <p:nvSpPr>
+          <p:cNvPr id="6" name="Text 3"/>
+          <p:cNvSpPr/>
+          <p:nvPr/>
+        </p:nvSpPr>
+        <p:spPr>
+          <a:xfrm>
+            <a:off x="0" y="6172200"/>
+            <a:ext cx="12188952" cy="274320"/>
+          </a:xfrm>
+          <a:prstGeom prst="rect">
+            <a:avLst/>
+          </a:prstGeom>
+          <a:noFill/>
+          <a:ln/>
+        </p:spPr>
+        <p:txBody>
+          <a:bodyPr wrap="square" lIns="0" tIns="0" rIns="0" bIns="0" rtlCol="0" anchor="ctr"/>
+          <a:lstStyle/>
+          <a:p>
+            <a:pPr algn="ctr" indent="0" marL="0">
+              <a:buNone/>
+            </a:pPr>
+            <a:r>
+              <a:rPr lang="en-US" sz="900" dirty="0">
+                <a:solidFill>
+                  <a:srgbClr val="FFFFFF"/>
+                </a:solidFill>
+                <a:latin typeface="Diodrum Arabic" pitchFamily="34" charset="0"/>
+                <a:ea typeface="Diodrum Arabic" pitchFamily="34" charset="-122"/>
+                <a:cs typeface="Diodrum Arabic" pitchFamily="34" charset="-120"/>
+              </a:rPr>
+              <a:t>SAR.COM.SA</a:t>
+            </a:r>
+            <a:endParaRPr lang="en-US" sz="900" dirty="0"/>
+          </a:p>
+        </p:txBody>
+      </p:sp>
     </p:spTree>
   </p:cSld>
   <p:clrMapOvr>

--- a/presentation/SAR_Security_Program_Presentation.pptx
+++ b/presentation/SAR_Security_Program_Presentation.pptx
@@ -10,9 +10,11 @@
     <p:sldId id="258" r:id="rId4"/>
     <p:sldId id="259" r:id="rId5"/>
     <p:sldId id="260" r:id="rId6"/>
+    <p:sldId id="261" r:id="rId7"/>
+    <p:sldId id="262" r:id="rId8"/>
   </p:sldIdLst>
   <p:notesMasterIdLst>
-    <p:notesMasterId r:id="rId7"/>
+    <p:notesMasterId r:id="rId9"/>
   </p:notesMasterIdLst>
   <p:sldSz cx="12192000" cy="6858000"/>
   <p:notesSz cx="6858000" cy="12192000"/>
@@ -112,6 +114,300 @@
 </file>
 
 <file path=ppt/charts/chart1.xml><?xml version="1.0" encoding="utf-8"?>
+<c:chartSpace xmlns:c="http://schemas.openxmlformats.org/drawingml/2006/chart" xmlns:a="http://schemas.openxmlformats.org/drawingml/2006/main" xmlns:r="http://schemas.openxmlformats.org/officeDocument/2006/relationships">
+  <c:date1904 val="0"/>
+  <c:roundedCorners val="1"/>
+  <c:chart>
+    <c:title>
+      <c:tx>
+        <c:rich>
+          <a:bodyPr/>
+          <a:lstStyle/>
+          <a:p>
+            <a:pPr>
+              <a:defRPr sz="1100" b="0" i="0" u="none" strike="noStrike">
+                <a:solidFill>
+                  <a:srgbClr val="00778B"/>
+                </a:solidFill>
+                <a:latin typeface="Diodrum Arabic"/>
+              </a:defRPr>
+            </a:pPr>
+            <a:r>
+              <a:rPr sz="1100" b="0" i="0" u="none" strike="noStrike">
+                <a:solidFill>
+                  <a:srgbClr val="00778B"/>
+                </a:solidFill>
+                <a:latin typeface="Diodrum Arabic"/>
+              </a:rPr>
+              <a:t>Cameras by type (2,481 in total)</a:t>
+            </a:r>
+          </a:p>
+        </c:rich>
+      </c:tx>
+      <c:layout/>
+      <c:overlay val="0"/>
+    </c:title>
+    <c:autoTitleDeleted val="0"/>
+    <c:plotArea>
+      <c:layout/>
+      <c:barChart>
+        <c:barDir val="bar"/>
+        <c:grouping val="clustered"/>
+        <c:varyColors val="0"/>
+        <c:ser>
+          <c:idx val="0"/>
+          <c:order val="0"/>
+          <c:tx>
+            <c:strRef>
+              <c:f>Sheet1!$B$1</c:f>
+              <c:strCache>
+                <c:ptCount val="1"/>
+                <c:pt idx="0">
+                  <c:v>Cameras</c:v>
+                </c:pt>
+              </c:strCache>
+            </c:strRef>
+          </c:tx>
+          <c:spPr>
+            <a:solidFill>
+              <a:srgbClr val="00778B"/>
+            </a:solidFill>
+            <a:effectLst/>
+          </c:spPr>
+          <c:invertIfNegative val="0"/>
+          <c:dLbls>
+            <c:numFmt formatCode="#,##0" sourceLinked="0"/>
+            <c:txPr>
+              <a:bodyPr/>
+              <a:lstStyle/>
+              <a:p>
+                <a:pPr>
+                  <a:defRPr b="0" i="0" strike="noStrike" sz="900" u="none">
+                    <a:solidFill>
+                      <a:srgbClr val="3D3935"/>
+                    </a:solidFill>
+                    <a:latin typeface="Diodrum Arabic"/>
+                  </a:defRPr>
+                </a:pPr>
+              </a:p>
+            </c:txPr>
+            <c:showLegendKey val="0"/>
+            <c:showVal val="1"/>
+            <c:showCatName val="0"/>
+            <c:showSerName val="0"/>
+            <c:showPercent val="0"/>
+            <c:showBubbleSize val="0"/>
+            <c:showLeaderLines val="0"/>
+          </c:dLbls>
+          <c:cat>
+            <c:multiLvlStrRef>
+              <c:f>Sheet1!$A$2:$A$10</c:f>
+              <c:multiLvlStrCache>
+                <c:ptCount val="9"/>
+                <c:lvl>
+                  <c:pt idx="0">
+                    <c:v>Fixed monitoring (internal / external)</c:v>
+                  </c:pt>
+                  <c:pt idx="1">
+                    <c:v>90° (incl. queue analysis)</c:v>
+                  </c:pt>
+                  <c:pt idx="2">
+                    <c:v>Face recognition</c:v>
+                  </c:pt>
+                  <c:pt idx="3">
+                    <c:v>180° tandem + PTZ</c:v>
+                  </c:pt>
+                  <c:pt idx="4">
+                    <c:v>Direction detection</c:v>
+                  </c:pt>
+                  <c:pt idx="5">
+                    <c:v>ANPR</c:v>
+                  </c:pt>
+                  <c:pt idx="6">
+                    <c:v>Limited-space internal</c:v>
+                  </c:pt>
+                  <c:pt idx="7">
+                    <c:v>360° dome</c:v>
+                  </c:pt>
+                  <c:pt idx="8">
+                    <c:v>180° panoramic</c:v>
+                  </c:pt>
+                </c:lvl>
+              </c:multiLvlStrCache>
+            </c:multiLvlStrRef>
+          </c:cat>
+          <c:val>
+            <c:numRef>
+              <c:f>Sheet1!$B$2:$B$10</c:f>
+              <c:numCache>
+                <c:formatCode>General</c:formatCode>
+                <c:ptCount val="9"/>
+                <c:pt idx="0">
+                  <c:v>1866</c:v>
+                </c:pt>
+                <c:pt idx="1">
+                  <c:v>177</c:v>
+                </c:pt>
+                <c:pt idx="2">
+                  <c:v>162</c:v>
+                </c:pt>
+                <c:pt idx="3">
+                  <c:v>103</c:v>
+                </c:pt>
+                <c:pt idx="4">
+                  <c:v>40</c:v>
+                </c:pt>
+                <c:pt idx="5">
+                  <c:v>39</c:v>
+                </c:pt>
+                <c:pt idx="6">
+                  <c:v>36</c:v>
+                </c:pt>
+                <c:pt idx="7">
+                  <c:v>32</c:v>
+                </c:pt>
+                <c:pt idx="8">
+                  <c:v>26</c:v>
+                </c:pt>
+              </c:numCache>
+            </c:numRef>
+          </c:val>
+        </c:ser>
+        <c:dLbls>
+          <c:numFmt formatCode="#,##0" sourceLinked="0"/>
+          <c:txPr>
+            <a:bodyPr/>
+            <a:lstStyle/>
+            <a:p>
+              <a:pPr>
+                <a:defRPr b="0" i="0" strike="noStrike" sz="900" u="none">
+                  <a:solidFill>
+                    <a:srgbClr val="3D3935"/>
+                  </a:solidFill>
+                  <a:latin typeface="Diodrum Arabic"/>
+                </a:defRPr>
+              </a:pPr>
+            </a:p>
+          </c:txPr>
+          <c:showLegendKey val="0"/>
+          <c:showVal val="1"/>
+          <c:showCatName val="0"/>
+          <c:showSerName val="0"/>
+          <c:showPercent val="0"/>
+          <c:showBubbleSize val="0"/>
+          <c:showLeaderLines val="0"/>
+        </c:dLbls>
+        <c:gapWidth val="35"/>
+        <c:overlap val="0"/>
+        <c:axId val="2094734554"/>
+        <c:axId val="2094734552"/>
+        <c:axId val="2094734556"/>
+      </c:barChart>
+      <c:catAx>
+        <c:axId val="2094734554"/>
+        <c:scaling>
+          <c:orientation val="maxMin"/>
+        </c:scaling>
+        <c:delete val="0"/>
+        <c:axPos val="l"/>
+        <c:numFmt formatCode="General" sourceLinked="1"/>
+        <c:majorTickMark val="out"/>
+        <c:minorTickMark val="none"/>
+        <c:tickLblPos val="nextTo"/>
+        <c:spPr>
+          <a:ln w="12700" cap="flat">
+            <a:solidFill>
+              <a:srgbClr val="888888"/>
+            </a:solidFill>
+            <a:prstDash val="solid"/>
+            <a:round/>
+          </a:ln>
+        </c:spPr>
+        <c:txPr>
+          <a:bodyPr/>
+          <a:lstStyle/>
+          <a:p>
+            <a:pPr>
+              <a:defRPr sz="900" b="0" i="0" u="none" strike="noStrike">
+                <a:solidFill>
+                  <a:srgbClr val="3D3935"/>
+                </a:solidFill>
+                <a:latin typeface="Diodrum Arabic"/>
+              </a:defRPr>
+            </a:pPr>
+            <a:endParaRPr lang="en-US"/>
+          </a:p>
+        </c:txPr>
+        <c:crossAx val="2094734552"/>
+        <c:crosses val="autoZero"/>
+        <c:auto val="1"/>
+        <c:lblAlgn val="ctr"/>
+        <c:noMultiLvlLbl val="1"/>
+      </c:catAx>
+      <c:valAx>
+        <c:axId val="2094734552"/>
+        <c:scaling>
+          <c:orientation val="minMax"/>
+        </c:scaling>
+        <c:delete val="1"/>
+        <c:axPos val="b"/>
+        <c:numFmt formatCode="General" sourceLinked="0"/>
+        <c:majorTickMark val="out"/>
+        <c:minorTickMark val="none"/>
+        <c:tickLblPos val="low"/>
+        <c:spPr>
+          <a:ln w="12700" cap="flat">
+            <a:solidFill>
+              <a:srgbClr val="888888"/>
+            </a:solidFill>
+            <a:prstDash val="solid"/>
+            <a:round/>
+          </a:ln>
+        </c:spPr>
+        <c:txPr>
+          <a:bodyPr/>
+          <a:lstStyle/>
+          <a:p>
+            <a:pPr>
+              <a:defRPr sz="1200" b="0" i="0" u="none" strike="noStrike">
+                <a:solidFill>
+                  <a:srgbClr val="000000"/>
+                </a:solidFill>
+                <a:latin typeface="Arial"/>
+              </a:defRPr>
+            </a:pPr>
+            <a:endParaRPr lang="en-US"/>
+          </a:p>
+        </c:txPr>
+        <c:crossAx val="2094734554"/>
+        <c:crosses val="autoZero"/>
+        <c:crossBetween val="between"/>
+      </c:valAx>
+      <c:spPr>
+        <a:noFill/>
+        <a:ln>
+          <a:noFill/>
+        </a:ln>
+        <a:effectLst/>
+      </c:spPr>
+    </c:plotArea>
+    <c:plotVisOnly val="1"/>
+    <c:dispBlanksAs val="span"/>
+  </c:chart>
+  <c:spPr>
+    <a:noFill/>
+    <a:ln>
+      <a:noFill/>
+    </a:ln>
+    <a:effectLst/>
+  </c:spPr>
+  <c:externalData r:id="rId1">
+    <c:autoUpdate val="0"/>
+  </c:externalData>
+</c:chartSpace>
+</file>
+
+<file path=ppt/charts/chart2.xml><?xml version="1.0" encoding="utf-8"?>
 <c:chartSpace xmlns:c="http://schemas.openxmlformats.org/drawingml/2006/chart" xmlns:a="http://schemas.openxmlformats.org/drawingml/2006/main" xmlns:r="http://schemas.openxmlformats.org/officeDocument/2006/relationships">
   <c:date1904 val="0"/>
   <c:roundedCorners val="1"/>
@@ -1732,7 +2028,7 @@
           <a:p>
             <a:r>
               <a:rPr lang="en-US" dirty="0"/>
-              <a:t>Contract facts: 36-month term from Notice to Proceed (Annex 1); initial baseline within 10 days of the effective date, detailed baseline 21 days after the mobilization and survey works, SAR review at most 21 days (clause 3, Baseline Programme); trial operation maximum 45 days; defects liability 1 year from each Taking-Over Certificate. Everything else is a planning assumption: Riyadh starts in weeks 6 and 8 with expedited procurement; other stations are spread so the last final acceptance falls at month 36; NTP 1 Nov 2026 is an editable assumption. Level 3 and 4 detail is in the interactive dashboard.</a:t>
+              <a:t>Source: contract Annex 3 price table, Revised-02 (NSR 20,499,295; EWR 11,113,215; HHR 30,387,490; total 62,000,000 excluding VAT). Camera counts are the quantities in the CCTV section of each station. Madinah is priced at 50% of the Makkah BOQ. Optional items (centralized control-room servers, PSIM licences) are not included in the price.</a:t>
             </a:r>
             <a:endParaRPr lang="en-US" dirty="0"/>
           </a:p>
@@ -1820,7 +2116,7 @@
           <a:p>
             <a:r>
               <a:rPr lang="en-US" dirty="0"/>
-              <a:t>Monthly amounts are the invoices falling in each month, from clause 15 of the draft contract: 20% mobilization, 10% engineering submittal, 10% after SAR approval, 20% material delivery, 20% installation, 10% testing and commissioning (SAT), 10% final acceptance and handover, each prorated per station on the station value. Invoice dates follow the planning baseline on the schedule slide (assumed, not approved by SAR). Month 1 is the first month after the Notice to Proceed (1 Nov 2026 assumed). Amounts exclude 15% VAT.</a:t>
+              <a:t>Sources: contract clauses 3 (Baseline Programme), 10 (time for performance), 15 (payments), acceptance and defects liability clauses; Annex 2 clauses 3, 5, 6, 9 to 13; Annex 3 terms (exclusions, FAT, delivery, warranty); Annex 5 (SAR responses: inner areas only, fast-track project, laydown area, integration conditions). Trial operation is defined in the contract as a maximum of 45 days.</a:t>
             </a:r>
             <a:endParaRPr lang="en-US" dirty="0"/>
           </a:p>
@@ -1908,6 +2204,182 @@
           <a:p>
             <a:r>
               <a:rPr lang="en-US" dirty="0"/>
+              <a:t>Contract facts: 36-month term from Notice to Proceed (Annex 1); initial baseline within 10 days of the effective date, detailed baseline 21 days after the mobilization and survey works, SAR review at most 21 days (clause 3, Baseline Programme); trial operation maximum 45 days; defects liability 1 year from each Taking-Over Certificate. Everything else is a planning assumption: Riyadh starts in weeks 6 and 8 with expedited procurement; other stations are spread so the last final acceptance falls at month 36; NTP 1 Nov 2026 is an editable assumption. Level 3 and 4 detail is in the interactive dashboard.</a:t>
+            </a:r>
+            <a:endParaRPr lang="en-US" dirty="0"/>
+          </a:p>
+        </p:txBody>
+      </p:sp>
+      <p:sp>
+        <p:nvSpPr>
+          <p:cNvPr id="4" name="Slide Number Placeholder 3"/>
+          <p:cNvSpPr>
+            <a:spLocks noGrp="1"/>
+          </p:cNvSpPr>
+          <p:nvPr>
+            <p:ph type="sldNum" sz="quarter" idx="10"/>
+          </p:nvPr>
+        </p:nvSpPr>
+        <p:spPr/>
+        <p:txBody>
+          <a:bodyPr/>
+          <a:lstStyle/>
+          <a:p>
+            <a:fld id="{F7021451-1387-4CA6-816F-3879F97B5CBC}" type="slidenum">
+              <a:rPr lang="en-US"/>
+              <a:t>5</a:t>
+            </a:fld>
+            <a:endParaRPr lang="en-US"/>
+          </a:p>
+        </p:txBody>
+      </p:sp>
+    </p:spTree>
+    <p:extLst>
+      <p:ext uri="{BB962C8B-B14F-4D97-AF65-F5344CB8AC3E}">
+        <p14:creationId xmlns:p14="http://schemas.microsoft.com/office/powerpoint/2010/main" val="1024086991"/>
+      </p:ext>
+    </p:extLst>
+  </p:cSld>
+  <p:clrMapOvr>
+    <a:masterClrMapping/>
+  </p:clrMapOvr>
+</p:notes>
+</file>
+
+<file path=ppt/notesSlides/notesSlide6.xml><?xml version="1.0" encoding="utf-8"?>
+<p:notes xmlns:a="http://schemas.openxmlformats.org/drawingml/2006/main" xmlns:r="http://schemas.openxmlformats.org/officeDocument/2006/relationships" xmlns:p="http://schemas.openxmlformats.org/presentationml/2006/main">
+  <p:cSld>
+    <p:spTree>
+      <p:nvGrpSpPr>
+        <p:cNvPr id="1" name=""/>
+        <p:cNvGrpSpPr/>
+        <p:nvPr/>
+      </p:nvGrpSpPr>
+      <p:grpSpPr>
+        <a:xfrm>
+          <a:off x="0" y="0"/>
+          <a:ext cx="0" cy="0"/>
+          <a:chOff x="0" y="0"/>
+          <a:chExt cx="0" cy="0"/>
+        </a:xfrm>
+      </p:grpSpPr>
+      <p:sp>
+        <p:nvSpPr>
+          <p:cNvPr id="2" name="Slide Image Placeholder 1"/>
+          <p:cNvSpPr>
+            <a:spLocks noGrp="1" noRot="1" noChangeAspect="1"/>
+          </p:cNvSpPr>
+          <p:nvPr>
+            <p:ph type="sldImg"/>
+          </p:nvPr>
+        </p:nvSpPr>
+        <p:spPr/>
+      </p:sp>
+      <p:sp>
+        <p:nvSpPr>
+          <p:cNvPr id="3" name="Notes Placeholder 2"/>
+          <p:cNvSpPr>
+            <a:spLocks noGrp="1"/>
+          </p:cNvSpPr>
+          <p:nvPr>
+            <p:ph type="body" idx="1"/>
+          </p:nvPr>
+        </p:nvSpPr>
+        <p:spPr/>
+        <p:txBody>
+          <a:bodyPr/>
+          <a:lstStyle/>
+          <a:p>
+            <a:r>
+              <a:rPr lang="en-US" dirty="0"/>
+              <a:t>Monthly amounts are the invoices falling in each month, from clause 15 of the draft contract: 20% mobilization, 10% engineering submittal, 10% after SAR approval, 20% material delivery, 20% installation, 10% testing and commissioning (SAT), 10% final acceptance and handover, each prorated per station on the station value. Invoice dates follow the planning baseline on the schedule slide (assumed, not approved by SAR). Month 1 is the first month after the Notice to Proceed (1 Nov 2026 assumed). Amounts exclude 15% VAT.</a:t>
+            </a:r>
+            <a:endParaRPr lang="en-US" dirty="0"/>
+          </a:p>
+        </p:txBody>
+      </p:sp>
+      <p:sp>
+        <p:nvSpPr>
+          <p:cNvPr id="4" name="Slide Number Placeholder 3"/>
+          <p:cNvSpPr>
+            <a:spLocks noGrp="1"/>
+          </p:cNvSpPr>
+          <p:nvPr>
+            <p:ph type="sldNum" sz="quarter" idx="10"/>
+          </p:nvPr>
+        </p:nvSpPr>
+        <p:spPr/>
+        <p:txBody>
+          <a:bodyPr/>
+          <a:lstStyle/>
+          <a:p>
+            <a:fld id="{F7021451-1387-4CA6-816F-3879F97B5CBC}" type="slidenum">
+              <a:rPr lang="en-US"/>
+              <a:t>6</a:t>
+            </a:fld>
+            <a:endParaRPr lang="en-US"/>
+          </a:p>
+        </p:txBody>
+      </p:sp>
+    </p:spTree>
+    <p:extLst>
+      <p:ext uri="{BB962C8B-B14F-4D97-AF65-F5344CB8AC3E}">
+        <p14:creationId xmlns:p14="http://schemas.microsoft.com/office/powerpoint/2010/main" val="1024086991"/>
+      </p:ext>
+    </p:extLst>
+  </p:cSld>
+  <p:clrMapOvr>
+    <a:masterClrMapping/>
+  </p:clrMapOvr>
+</p:notes>
+</file>
+
+<file path=ppt/notesSlides/notesSlide7.xml><?xml version="1.0" encoding="utf-8"?>
+<p:notes xmlns:a="http://schemas.openxmlformats.org/drawingml/2006/main" xmlns:r="http://schemas.openxmlformats.org/officeDocument/2006/relationships" xmlns:p="http://schemas.openxmlformats.org/presentationml/2006/main">
+  <p:cSld>
+    <p:spTree>
+      <p:nvGrpSpPr>
+        <p:cNvPr id="1" name=""/>
+        <p:cNvGrpSpPr/>
+        <p:nvPr/>
+      </p:nvGrpSpPr>
+      <p:grpSpPr>
+        <a:xfrm>
+          <a:off x="0" y="0"/>
+          <a:ext cx="0" cy="0"/>
+          <a:chOff x="0" y="0"/>
+          <a:chExt cx="0" cy="0"/>
+        </a:xfrm>
+      </p:grpSpPr>
+      <p:sp>
+        <p:nvSpPr>
+          <p:cNvPr id="2" name="Slide Image Placeholder 1"/>
+          <p:cNvSpPr>
+            <a:spLocks noGrp="1" noRot="1" noChangeAspect="1"/>
+          </p:cNvSpPr>
+          <p:nvPr>
+            <p:ph type="sldImg"/>
+          </p:nvPr>
+        </p:nvSpPr>
+        <p:spPr/>
+      </p:sp>
+      <p:sp>
+        <p:nvSpPr>
+          <p:cNvPr id="3" name="Notes Placeholder 2"/>
+          <p:cNvSpPr>
+            <a:spLocks noGrp="1"/>
+          </p:cNvSpPr>
+          <p:nvPr>
+            <p:ph type="body" idx="1"/>
+          </p:nvPr>
+        </p:nvSpPr>
+        <p:spPr/>
+        <p:txBody>
+          <a:bodyPr/>
+          <a:lstStyle/>
+          <a:p>
+            <a:r>
+              <a:rPr lang="en-US" dirty="0"/>
               <a:t>Closing slide. All figures are from the draft contract and its annexes; schedule dates are a planning baseline, not approved by SAR.</a:t>
             </a:r>
             <a:endParaRPr lang="en-US" dirty="0"/>
@@ -1931,7 +2403,7 @@
           <a:p>
             <a:fld id="{F7021451-1387-4CA6-816F-3879F97B5CBC}" type="slidenum">
               <a:rPr lang="en-US"/>
-              <a:t>5</a:t>
+              <a:t>7</a:t>
             </a:fld>
             <a:endParaRPr lang="en-US"/>
           </a:p>
@@ -2586,7 +3058,7 @@
                 <a:ea typeface="Diodrum Arabic" pitchFamily="34" charset="-122"/>
                 <a:cs typeface="Diodrum Arabic" pitchFamily="34" charset="-120"/>
               </a:rPr>
-              <a:t>Passengers' Security Checking  |  Scope of work</a:t>
+              <a:t>Passengers' Security Checking  |  Scope of work (1 of 3)</a:t>
             </a:r>
             <a:endParaRPr lang="en-US" sz="900" dirty="0"/>
           </a:p>
@@ -4561,6 +5033,7822 @@
                 <a:ea typeface="Diodrum Arabic" pitchFamily="34" charset="-122"/>
                 <a:cs typeface="Diodrum Arabic" pitchFamily="34" charset="-120"/>
               </a:rPr>
+              <a:t>Passengers' Security Checking  |  Scope of work (2 of 3)</a:t>
+            </a:r>
+            <a:endParaRPr lang="en-US" sz="900" dirty="0"/>
+          </a:p>
+        </p:txBody>
+      </p:sp>
+      <p:sp>
+        <p:nvSpPr>
+          <p:cNvPr id="4" name="Text 1"/>
+          <p:cNvSpPr txBox="1"/>
+          <p:nvPr/>
+        </p:nvSpPr>
+        <p:spPr>
+          <a:xfrm>
+            <a:off x="11338560" y="530352"/>
+            <a:ext cx="457200" cy="228600"/>
+          </a:xfrm>
+          <a:prstGeom prst="rect">
+            <a:avLst/>
+          </a:prstGeom>
+          <a:noFill/>
+          <a:ln/>
+        </p:spPr>
+        <p:txBody>
+          <a:bodyPr wrap="square" lIns="0" tIns="0" rIns="0" bIns="0" rtlCol="0" anchor="ctr"/>
+          <a:lstStyle/>
+          <a:p>
+            <a:pPr algn="r" indent="0" marL="0">
+              <a:buNone/>
+            </a:pPr>
+            <a:r>
+              <a:rPr lang="en-US" sz="900" dirty="0">
+                <a:solidFill>
+                  <a:srgbClr val="768692"/>
+                </a:solidFill>
+                <a:latin typeface="Diodrum Arabic" pitchFamily="34" charset="0"/>
+                <a:ea typeface="Diodrum Arabic" pitchFamily="34" charset="-122"/>
+                <a:cs typeface="Diodrum Arabic" pitchFamily="34" charset="-120"/>
+              </a:rPr>
+              <a:t>3</a:t>
+            </a:r>
+            <a:endParaRPr lang="en-US" sz="900" dirty="0"/>
+          </a:p>
+        </p:txBody>
+      </p:sp>
+      <p:sp>
+        <p:nvSpPr>
+          <p:cNvPr id="5" name="Shape 2"/>
+          <p:cNvSpPr/>
+          <p:nvPr/>
+        </p:nvSpPr>
+        <p:spPr>
+          <a:xfrm>
+            <a:off x="411480" y="6382512"/>
+            <a:ext cx="11365992" cy="0"/>
+          </a:xfrm>
+          <a:prstGeom prst="line">
+            <a:avLst/>
+          </a:prstGeom>
+          <a:noFill/>
+          <a:ln w="12700">
+            <a:solidFill>
+              <a:srgbClr val="00778B"/>
+            </a:solidFill>
+            <a:prstDash val="solid"/>
+          </a:ln>
+        </p:spPr>
+      </p:sp>
+      <p:sp>
+        <p:nvSpPr>
+          <p:cNvPr id="6" name="Shape 3"/>
+          <p:cNvSpPr/>
+          <p:nvPr/>
+        </p:nvSpPr>
+        <p:spPr>
+          <a:xfrm>
+            <a:off x="11521440" y="6272784"/>
+            <a:ext cx="219456" cy="219456"/>
+          </a:xfrm>
+          <a:prstGeom prst="ellipse">
+            <a:avLst/>
+          </a:prstGeom>
+          <a:solidFill>
+            <a:srgbClr val="FFFFFF"/>
+          </a:solidFill>
+          <a:ln w="12700">
+            <a:solidFill>
+              <a:srgbClr val="00778B"/>
+            </a:solidFill>
+            <a:prstDash val="solid"/>
+          </a:ln>
+        </p:spPr>
+      </p:sp>
+      <p:sp>
+        <p:nvSpPr>
+          <p:cNvPr id="7" name="Shape 4"/>
+          <p:cNvSpPr/>
+          <p:nvPr/>
+        </p:nvSpPr>
+        <p:spPr>
+          <a:xfrm>
+            <a:off x="411480" y="841248"/>
+            <a:ext cx="182880" cy="475488"/>
+          </a:xfrm>
+          <a:prstGeom prst="parallelogram">
+            <a:avLst/>
+          </a:prstGeom>
+          <a:solidFill>
+            <a:srgbClr val="00778B"/>
+          </a:solidFill>
+          <a:ln w="12700">
+            <a:solidFill>
+              <a:srgbClr val="00778B"/>
+            </a:solidFill>
+            <a:prstDash val="solid"/>
+          </a:ln>
+        </p:spPr>
+      </p:sp>
+      <p:sp>
+        <p:nvSpPr>
+          <p:cNvPr id="8" name="Text 5"/>
+          <p:cNvSpPr txBox="1"/>
+          <p:nvPr/>
+        </p:nvSpPr>
+        <p:spPr>
+          <a:xfrm>
+            <a:off x="777240" y="804672"/>
+            <a:ext cx="10881360" cy="457200"/>
+          </a:xfrm>
+          <a:prstGeom prst="rect">
+            <a:avLst/>
+          </a:prstGeom>
+          <a:noFill/>
+          <a:ln/>
+        </p:spPr>
+        <p:txBody>
+          <a:bodyPr wrap="square" lIns="0" tIns="0" rIns="0" bIns="0" rtlCol="0" anchor="ctr"/>
+          <a:lstStyle/>
+          <a:p>
+            <a:pPr indent="0" marL="0">
+              <a:buNone/>
+            </a:pPr>
+            <a:r>
+              <a:rPr lang="en-US" sz="2200" b="1" dirty="0">
+                <a:solidFill>
+                  <a:srgbClr val="00778B"/>
+                </a:solidFill>
+                <a:latin typeface="Diodrum Arabic" pitchFamily="34" charset="0"/>
+                <a:ea typeface="Diodrum Arabic" pitchFamily="34" charset="-122"/>
+                <a:cs typeface="Diodrum Arabic" pitchFamily="34" charset="-120"/>
+              </a:rPr>
+              <a:t>Scope in detail: what is priced, by sub-system and railway</a:t>
+            </a:r>
+            <a:endParaRPr lang="en-US" sz="2200" dirty="0"/>
+          </a:p>
+        </p:txBody>
+      </p:sp>
+      <p:sp>
+        <p:nvSpPr>
+          <p:cNvPr id="9" name="Text 6"/>
+          <p:cNvSpPr txBox="1"/>
+          <p:nvPr/>
+        </p:nvSpPr>
+        <p:spPr>
+          <a:xfrm>
+            <a:off x="777240" y="1261872"/>
+            <a:ext cx="10881360" cy="274320"/>
+          </a:xfrm>
+          <a:prstGeom prst="rect">
+            <a:avLst/>
+          </a:prstGeom>
+          <a:noFill/>
+          <a:ln/>
+        </p:spPr>
+        <p:txBody>
+          <a:bodyPr wrap="square" lIns="0" tIns="0" rIns="0" bIns="0" rtlCol="0" anchor="ctr"/>
+          <a:lstStyle/>
+          <a:p>
+            <a:pPr indent="0" marL="0">
+              <a:buNone/>
+            </a:pPr>
+            <a:r>
+              <a:rPr lang="en-US" sz="1200" dirty="0">
+                <a:solidFill>
+                  <a:srgbClr val="768692"/>
+                </a:solidFill>
+                <a:latin typeface="Diodrum Arabic" pitchFamily="34" charset="0"/>
+                <a:ea typeface="Diodrum Arabic" pitchFamily="34" charset="-122"/>
+                <a:cs typeface="Diodrum Arabic" pitchFamily="34" charset="-120"/>
+              </a:rPr>
+              <a:t>Annex 3 price table (Revised-02), SAR million excluding VAT; station sections are priced per station, services per railway</a:t>
+            </a:r>
+            <a:endParaRPr lang="en-US" sz="1200" dirty="0"/>
+          </a:p>
+        </p:txBody>
+      </p:sp>
+      <p:graphicFrame>
+        <p:nvGraphicFramePr>
+          <p:cNvPr id="4" name="Table 0"/>
+          <p:cNvGraphicFramePr>
+            <a:graphicFrameLocks noGrp="1"/>
+          </p:cNvGraphicFramePr>
+          <p:nvPr>
+            <p:extLst>
+              <p:ext uri="{D42A27DB-BD31-4B8C-83A1-F6EECF244321}">
+                <p14:modId xmlns:p14="http://schemas.microsoft.com/office/powerpoint/2010/main" val="1579011935"/>
+              </p:ext>
+            </p:extLst>
+          </p:nvPr>
+        </p:nvGraphicFramePr>
+        <p:xfrm>
+          <a:off x="777240" y="1691640"/>
+          <a:ext cx="6766560" cy="914400"/>
+        </p:xfrm>
+        <a:graphic>
+          <a:graphicData uri="http://schemas.openxmlformats.org/drawingml/2006/table">
+            <a:tbl>
+              <a:tblPr/>
+              <a:tblGrid>
+                <a:gridCol w="2743200"/>
+                <a:gridCol w="804672"/>
+                <a:gridCol w="804672"/>
+                <a:gridCol w="804672"/>
+                <a:gridCol w="804672"/>
+                <a:gridCol w="804672"/>
+              </a:tblGrid>
+              <a:tr h="239573">
+                <a:tc>
+                  <a:txBody>
+                    <a:bodyPr/>
+                    <a:lstStyle/>
+                    <a:p>
+                      <a:pPr algn="l" indent="0" marL="0">
+                        <a:buNone/>
+                      </a:pPr>
+                      <a:r>
+                        <a:rPr lang="en-US" sz="1000" b="1" dirty="0">
+                          <a:solidFill>
+                            <a:srgbClr val="FFFFFF"/>
+                          </a:solidFill>
+                          <a:latin typeface="Diodrum Arabic" pitchFamily="34" charset="0"/>
+                          <a:ea typeface="Diodrum Arabic" pitchFamily="34" charset="-122"/>
+                          <a:cs typeface="Diodrum Arabic" pitchFamily="34" charset="-120"/>
+                        </a:rPr>
+                        <a:t>Sub-system</a:t>
+                      </a:r>
+                      <a:endParaRPr lang="en-US" sz="1000" dirty="0">
+                        <a:latin typeface="Diodrum Arabic" charset="0"/>
+                        <a:ea typeface="Diodrum Arabic" charset="0"/>
+                        <a:cs typeface="Diodrum Arabic" charset="0"/>
+                      </a:endParaRPr>
+                    </a:p>
+                  </a:txBody>
+                  <a:tcPr marL="54864" marR="54864" marT="0" marB="0" anchor="ctr">
+                    <a:lnL w="6350" cap="flat" cmpd="sng" algn="ctr">
+                      <a:solidFill>
+                        <a:srgbClr val="C8C9C7"/>
+                      </a:solidFill>
+                      <a:prstDash val="solid"/>
+                      <a:round/>
+                      <a:headEnd type="none" w="med" len="med"/>
+                      <a:tailEnd type="none" w="med" len="med"/>
+                    </a:lnL>
+                    <a:lnR w="6350" cap="flat" cmpd="sng" algn="ctr">
+                      <a:solidFill>
+                        <a:srgbClr val="C8C9C7"/>
+                      </a:solidFill>
+                      <a:prstDash val="solid"/>
+                      <a:round/>
+                      <a:headEnd type="none" w="med" len="med"/>
+                      <a:tailEnd type="none" w="med" len="med"/>
+                    </a:lnR>
+                    <a:lnT w="6350" cap="flat" cmpd="sng" algn="ctr">
+                      <a:solidFill>
+                        <a:srgbClr val="C8C9C7"/>
+                      </a:solidFill>
+                      <a:prstDash val="solid"/>
+                      <a:round/>
+                      <a:headEnd type="none" w="med" len="med"/>
+                      <a:tailEnd type="none" w="med" len="med"/>
+                    </a:lnT>
+                    <a:lnB w="6350" cap="flat" cmpd="sng" algn="ctr">
+                      <a:solidFill>
+                        <a:srgbClr val="C8C9C7"/>
+                      </a:solidFill>
+                      <a:prstDash val="solid"/>
+                      <a:round/>
+                      <a:headEnd type="none" w="med" len="med"/>
+                      <a:tailEnd type="none" w="med" len="med"/>
+                    </a:lnB>
+                    <a:solidFill>
+                      <a:srgbClr val="00778B"/>
+                    </a:solidFill>
+                  </a:tcPr>
+                </a:tc>
+                <a:tc>
+                  <a:txBody>
+                    <a:bodyPr/>
+                    <a:lstStyle/>
+                    <a:p>
+                      <a:pPr algn="r" indent="0" marL="0">
+                        <a:buNone/>
+                      </a:pPr>
+                      <a:r>
+                        <a:rPr lang="en-US" sz="1000" b="1" dirty="0">
+                          <a:solidFill>
+                            <a:srgbClr val="FFFFFF"/>
+                          </a:solidFill>
+                          <a:latin typeface="Diodrum Arabic" pitchFamily="34" charset="0"/>
+                          <a:ea typeface="Diodrum Arabic" pitchFamily="34" charset="-122"/>
+                          <a:cs typeface="Diodrum Arabic" pitchFamily="34" charset="-120"/>
+                        </a:rPr>
+                        <a:t>NSR</a:t>
+                      </a:r>
+                      <a:endParaRPr lang="en-US" sz="1000" dirty="0">
+                        <a:latin typeface="Diodrum Arabic" charset="0"/>
+                        <a:ea typeface="Diodrum Arabic" charset="0"/>
+                        <a:cs typeface="Diodrum Arabic" charset="0"/>
+                      </a:endParaRPr>
+                    </a:p>
+                  </a:txBody>
+                  <a:tcPr marL="54864" marR="54864" marT="0" marB="0" anchor="ctr">
+                    <a:lnL w="6350" cap="flat" cmpd="sng" algn="ctr">
+                      <a:solidFill>
+                        <a:srgbClr val="C8C9C7"/>
+                      </a:solidFill>
+                      <a:prstDash val="solid"/>
+                      <a:round/>
+                      <a:headEnd type="none" w="med" len="med"/>
+                      <a:tailEnd type="none" w="med" len="med"/>
+                    </a:lnL>
+                    <a:lnR w="6350" cap="flat" cmpd="sng" algn="ctr">
+                      <a:solidFill>
+                        <a:srgbClr val="C8C9C7"/>
+                      </a:solidFill>
+                      <a:prstDash val="solid"/>
+                      <a:round/>
+                      <a:headEnd type="none" w="med" len="med"/>
+                      <a:tailEnd type="none" w="med" len="med"/>
+                    </a:lnR>
+                    <a:lnT w="6350" cap="flat" cmpd="sng" algn="ctr">
+                      <a:solidFill>
+                        <a:srgbClr val="C8C9C7"/>
+                      </a:solidFill>
+                      <a:prstDash val="solid"/>
+                      <a:round/>
+                      <a:headEnd type="none" w="med" len="med"/>
+                      <a:tailEnd type="none" w="med" len="med"/>
+                    </a:lnT>
+                    <a:lnB w="6350" cap="flat" cmpd="sng" algn="ctr">
+                      <a:solidFill>
+                        <a:srgbClr val="C8C9C7"/>
+                      </a:solidFill>
+                      <a:prstDash val="solid"/>
+                      <a:round/>
+                      <a:headEnd type="none" w="med" len="med"/>
+                      <a:tailEnd type="none" w="med" len="med"/>
+                    </a:lnB>
+                    <a:solidFill>
+                      <a:srgbClr val="00778B"/>
+                    </a:solidFill>
+                  </a:tcPr>
+                </a:tc>
+                <a:tc>
+                  <a:txBody>
+                    <a:bodyPr/>
+                    <a:lstStyle/>
+                    <a:p>
+                      <a:pPr algn="r" indent="0" marL="0">
+                        <a:buNone/>
+                      </a:pPr>
+                      <a:r>
+                        <a:rPr lang="en-US" sz="1000" b="1" dirty="0">
+                          <a:solidFill>
+                            <a:srgbClr val="FFFFFF"/>
+                          </a:solidFill>
+                          <a:latin typeface="Diodrum Arabic" pitchFamily="34" charset="0"/>
+                          <a:ea typeface="Diodrum Arabic" pitchFamily="34" charset="-122"/>
+                          <a:cs typeface="Diodrum Arabic" pitchFamily="34" charset="-120"/>
+                        </a:rPr>
+                        <a:t>EWR</a:t>
+                      </a:r>
+                      <a:endParaRPr lang="en-US" sz="1000" dirty="0">
+                        <a:latin typeface="Diodrum Arabic" charset="0"/>
+                        <a:ea typeface="Diodrum Arabic" charset="0"/>
+                        <a:cs typeface="Diodrum Arabic" charset="0"/>
+                      </a:endParaRPr>
+                    </a:p>
+                  </a:txBody>
+                  <a:tcPr marL="54864" marR="54864" marT="0" marB="0" anchor="ctr">
+                    <a:lnL w="6350" cap="flat" cmpd="sng" algn="ctr">
+                      <a:solidFill>
+                        <a:srgbClr val="C8C9C7"/>
+                      </a:solidFill>
+                      <a:prstDash val="solid"/>
+                      <a:round/>
+                      <a:headEnd type="none" w="med" len="med"/>
+                      <a:tailEnd type="none" w="med" len="med"/>
+                    </a:lnL>
+                    <a:lnR w="6350" cap="flat" cmpd="sng" algn="ctr">
+                      <a:solidFill>
+                        <a:srgbClr val="C8C9C7"/>
+                      </a:solidFill>
+                      <a:prstDash val="solid"/>
+                      <a:round/>
+                      <a:headEnd type="none" w="med" len="med"/>
+                      <a:tailEnd type="none" w="med" len="med"/>
+                    </a:lnR>
+                    <a:lnT w="6350" cap="flat" cmpd="sng" algn="ctr">
+                      <a:solidFill>
+                        <a:srgbClr val="C8C9C7"/>
+                      </a:solidFill>
+                      <a:prstDash val="solid"/>
+                      <a:round/>
+                      <a:headEnd type="none" w="med" len="med"/>
+                      <a:tailEnd type="none" w="med" len="med"/>
+                    </a:lnT>
+                    <a:lnB w="6350" cap="flat" cmpd="sng" algn="ctr">
+                      <a:solidFill>
+                        <a:srgbClr val="C8C9C7"/>
+                      </a:solidFill>
+                      <a:prstDash val="solid"/>
+                      <a:round/>
+                      <a:headEnd type="none" w="med" len="med"/>
+                      <a:tailEnd type="none" w="med" len="med"/>
+                    </a:lnB>
+                    <a:solidFill>
+                      <a:srgbClr val="00778B"/>
+                    </a:solidFill>
+                  </a:tcPr>
+                </a:tc>
+                <a:tc>
+                  <a:txBody>
+                    <a:bodyPr/>
+                    <a:lstStyle/>
+                    <a:p>
+                      <a:pPr algn="r" indent="0" marL="0">
+                        <a:buNone/>
+                      </a:pPr>
+                      <a:r>
+                        <a:rPr lang="en-US" sz="1000" b="1" dirty="0">
+                          <a:solidFill>
+                            <a:srgbClr val="FFFFFF"/>
+                          </a:solidFill>
+                          <a:latin typeface="Diodrum Arabic" pitchFamily="34" charset="0"/>
+                          <a:ea typeface="Diodrum Arabic" pitchFamily="34" charset="-122"/>
+                          <a:cs typeface="Diodrum Arabic" pitchFamily="34" charset="-120"/>
+                        </a:rPr>
+                        <a:t>HHR</a:t>
+                      </a:r>
+                      <a:endParaRPr lang="en-US" sz="1000" dirty="0">
+                        <a:latin typeface="Diodrum Arabic" charset="0"/>
+                        <a:ea typeface="Diodrum Arabic" charset="0"/>
+                        <a:cs typeface="Diodrum Arabic" charset="0"/>
+                      </a:endParaRPr>
+                    </a:p>
+                  </a:txBody>
+                  <a:tcPr marL="54864" marR="54864" marT="0" marB="0" anchor="ctr">
+                    <a:lnL w="6350" cap="flat" cmpd="sng" algn="ctr">
+                      <a:solidFill>
+                        <a:srgbClr val="C8C9C7"/>
+                      </a:solidFill>
+                      <a:prstDash val="solid"/>
+                      <a:round/>
+                      <a:headEnd type="none" w="med" len="med"/>
+                      <a:tailEnd type="none" w="med" len="med"/>
+                    </a:lnL>
+                    <a:lnR w="6350" cap="flat" cmpd="sng" algn="ctr">
+                      <a:solidFill>
+                        <a:srgbClr val="C8C9C7"/>
+                      </a:solidFill>
+                      <a:prstDash val="solid"/>
+                      <a:round/>
+                      <a:headEnd type="none" w="med" len="med"/>
+                      <a:tailEnd type="none" w="med" len="med"/>
+                    </a:lnR>
+                    <a:lnT w="6350" cap="flat" cmpd="sng" algn="ctr">
+                      <a:solidFill>
+                        <a:srgbClr val="C8C9C7"/>
+                      </a:solidFill>
+                      <a:prstDash val="solid"/>
+                      <a:round/>
+                      <a:headEnd type="none" w="med" len="med"/>
+                      <a:tailEnd type="none" w="med" len="med"/>
+                    </a:lnT>
+                    <a:lnB w="6350" cap="flat" cmpd="sng" algn="ctr">
+                      <a:solidFill>
+                        <a:srgbClr val="C8C9C7"/>
+                      </a:solidFill>
+                      <a:prstDash val="solid"/>
+                      <a:round/>
+                      <a:headEnd type="none" w="med" len="med"/>
+                      <a:tailEnd type="none" w="med" len="med"/>
+                    </a:lnB>
+                    <a:solidFill>
+                      <a:srgbClr val="00778B"/>
+                    </a:solidFill>
+                  </a:tcPr>
+                </a:tc>
+                <a:tc>
+                  <a:txBody>
+                    <a:bodyPr/>
+                    <a:lstStyle/>
+                    <a:p>
+                      <a:pPr algn="r" indent="0" marL="0">
+                        <a:buNone/>
+                      </a:pPr>
+                      <a:r>
+                        <a:rPr lang="en-US" sz="1000" b="1" dirty="0">
+                          <a:solidFill>
+                            <a:srgbClr val="FFFFFF"/>
+                          </a:solidFill>
+                          <a:latin typeface="Diodrum Arabic" pitchFamily="34" charset="0"/>
+                          <a:ea typeface="Diodrum Arabic" pitchFamily="34" charset="-122"/>
+                          <a:cs typeface="Diodrum Arabic" pitchFamily="34" charset="-120"/>
+                        </a:rPr>
+                        <a:t>Total</a:t>
+                      </a:r>
+                      <a:endParaRPr lang="en-US" sz="1000" dirty="0">
+                        <a:latin typeface="Diodrum Arabic" charset="0"/>
+                        <a:ea typeface="Diodrum Arabic" charset="0"/>
+                        <a:cs typeface="Diodrum Arabic" charset="0"/>
+                      </a:endParaRPr>
+                    </a:p>
+                  </a:txBody>
+                  <a:tcPr marL="54864" marR="54864" marT="0" marB="0" anchor="ctr">
+                    <a:lnL w="6350" cap="flat" cmpd="sng" algn="ctr">
+                      <a:solidFill>
+                        <a:srgbClr val="C8C9C7"/>
+                      </a:solidFill>
+                      <a:prstDash val="solid"/>
+                      <a:round/>
+                      <a:headEnd type="none" w="med" len="med"/>
+                      <a:tailEnd type="none" w="med" len="med"/>
+                    </a:lnL>
+                    <a:lnR w="6350" cap="flat" cmpd="sng" algn="ctr">
+                      <a:solidFill>
+                        <a:srgbClr val="C8C9C7"/>
+                      </a:solidFill>
+                      <a:prstDash val="solid"/>
+                      <a:round/>
+                      <a:headEnd type="none" w="med" len="med"/>
+                      <a:tailEnd type="none" w="med" len="med"/>
+                    </a:lnR>
+                    <a:lnT w="6350" cap="flat" cmpd="sng" algn="ctr">
+                      <a:solidFill>
+                        <a:srgbClr val="C8C9C7"/>
+                      </a:solidFill>
+                      <a:prstDash val="solid"/>
+                      <a:round/>
+                      <a:headEnd type="none" w="med" len="med"/>
+                      <a:tailEnd type="none" w="med" len="med"/>
+                    </a:lnT>
+                    <a:lnB w="6350" cap="flat" cmpd="sng" algn="ctr">
+                      <a:solidFill>
+                        <a:srgbClr val="C8C9C7"/>
+                      </a:solidFill>
+                      <a:prstDash val="solid"/>
+                      <a:round/>
+                      <a:headEnd type="none" w="med" len="med"/>
+                      <a:tailEnd type="none" w="med" len="med"/>
+                    </a:lnB>
+                    <a:solidFill>
+                      <a:srgbClr val="00778B"/>
+                    </a:solidFill>
+                  </a:tcPr>
+                </a:tc>
+                <a:tc>
+                  <a:txBody>
+                    <a:bodyPr/>
+                    <a:lstStyle/>
+                    <a:p>
+                      <a:pPr algn="r" indent="0" marL="0">
+                        <a:buNone/>
+                      </a:pPr>
+                      <a:r>
+                        <a:rPr lang="en-US" sz="1000" b="1" dirty="0">
+                          <a:solidFill>
+                            <a:srgbClr val="FFFFFF"/>
+                          </a:solidFill>
+                          <a:latin typeface="Diodrum Arabic" pitchFamily="34" charset="0"/>
+                          <a:ea typeface="Diodrum Arabic" pitchFamily="34" charset="-122"/>
+                          <a:cs typeface="Diodrum Arabic" pitchFamily="34" charset="-120"/>
+                        </a:rPr>
+                        <a:t>Share</a:t>
+                      </a:r>
+                      <a:endParaRPr lang="en-US" sz="1000" dirty="0">
+                        <a:latin typeface="Diodrum Arabic" charset="0"/>
+                        <a:ea typeface="Diodrum Arabic" charset="0"/>
+                        <a:cs typeface="Diodrum Arabic" charset="0"/>
+                      </a:endParaRPr>
+                    </a:p>
+                  </a:txBody>
+                  <a:tcPr marL="54864" marR="54864" marT="0" marB="0" anchor="ctr">
+                    <a:lnL w="6350" cap="flat" cmpd="sng" algn="ctr">
+                      <a:solidFill>
+                        <a:srgbClr val="C8C9C7"/>
+                      </a:solidFill>
+                      <a:prstDash val="solid"/>
+                      <a:round/>
+                      <a:headEnd type="none" w="med" len="med"/>
+                      <a:tailEnd type="none" w="med" len="med"/>
+                    </a:lnL>
+                    <a:lnR w="6350" cap="flat" cmpd="sng" algn="ctr">
+                      <a:solidFill>
+                        <a:srgbClr val="C8C9C7"/>
+                      </a:solidFill>
+                      <a:prstDash val="solid"/>
+                      <a:round/>
+                      <a:headEnd type="none" w="med" len="med"/>
+                      <a:tailEnd type="none" w="med" len="med"/>
+                    </a:lnR>
+                    <a:lnT w="6350" cap="flat" cmpd="sng" algn="ctr">
+                      <a:solidFill>
+                        <a:srgbClr val="C8C9C7"/>
+                      </a:solidFill>
+                      <a:prstDash val="solid"/>
+                      <a:round/>
+                      <a:headEnd type="none" w="med" len="med"/>
+                      <a:tailEnd type="none" w="med" len="med"/>
+                    </a:lnT>
+                    <a:lnB w="6350" cap="flat" cmpd="sng" algn="ctr">
+                      <a:solidFill>
+                        <a:srgbClr val="C8C9C7"/>
+                      </a:solidFill>
+                      <a:prstDash val="solid"/>
+                      <a:round/>
+                      <a:headEnd type="none" w="med" len="med"/>
+                      <a:tailEnd type="none" w="med" len="med"/>
+                    </a:lnB>
+                    <a:solidFill>
+                      <a:srgbClr val="00778B"/>
+                    </a:solidFill>
+                  </a:tcPr>
+                </a:tc>
+              </a:tr>
+              <a:tr h="239573">
+                <a:tc>
+                  <a:txBody>
+                    <a:bodyPr/>
+                    <a:lstStyle/>
+                    <a:p>
+                      <a:pPr algn="l" indent="0" marL="0">
+                        <a:buNone/>
+                      </a:pPr>
+                      <a:r>
+                        <a:rPr lang="en-US" sz="1000" dirty="0">
+                          <a:solidFill>
+                            <a:srgbClr val="3D3935"/>
+                          </a:solidFill>
+                          <a:latin typeface="Diodrum Arabic" pitchFamily="34" charset="0"/>
+                          <a:ea typeface="Diodrum Arabic" pitchFamily="34" charset="-122"/>
+                          <a:cs typeface="Diodrum Arabic" pitchFamily="34" charset="-120"/>
+                        </a:rPr>
+                        <a:t>CCTV system</a:t>
+                      </a:r>
+                      <a:endParaRPr lang="en-US" sz="1000" dirty="0">
+                        <a:latin typeface="Diodrum Arabic" charset="0"/>
+                        <a:ea typeface="Diodrum Arabic" charset="0"/>
+                        <a:cs typeface="Diodrum Arabic" charset="0"/>
+                      </a:endParaRPr>
+                    </a:p>
+                  </a:txBody>
+                  <a:tcPr marL="54864" marR="54864" marT="0" marB="0" anchor="ctr">
+                    <a:lnL w="6350" cap="flat" cmpd="sng" algn="ctr">
+                      <a:solidFill>
+                        <a:srgbClr val="C8C9C7"/>
+                      </a:solidFill>
+                      <a:prstDash val="solid"/>
+                      <a:round/>
+                      <a:headEnd type="none" w="med" len="med"/>
+                      <a:tailEnd type="none" w="med" len="med"/>
+                    </a:lnL>
+                    <a:lnR w="6350" cap="flat" cmpd="sng" algn="ctr">
+                      <a:solidFill>
+                        <a:srgbClr val="C8C9C7"/>
+                      </a:solidFill>
+                      <a:prstDash val="solid"/>
+                      <a:round/>
+                      <a:headEnd type="none" w="med" len="med"/>
+                      <a:tailEnd type="none" w="med" len="med"/>
+                    </a:lnR>
+                    <a:lnT w="6350" cap="flat" cmpd="sng" algn="ctr">
+                      <a:solidFill>
+                        <a:srgbClr val="C8C9C7"/>
+                      </a:solidFill>
+                      <a:prstDash val="solid"/>
+                      <a:round/>
+                      <a:headEnd type="none" w="med" len="med"/>
+                      <a:tailEnd type="none" w="med" len="med"/>
+                    </a:lnT>
+                    <a:lnB w="6350" cap="flat" cmpd="sng" algn="ctr">
+                      <a:solidFill>
+                        <a:srgbClr val="C8C9C7"/>
+                      </a:solidFill>
+                      <a:prstDash val="solid"/>
+                      <a:round/>
+                      <a:headEnd type="none" w="med" len="med"/>
+                      <a:tailEnd type="none" w="med" len="med"/>
+                    </a:lnB>
+                    <a:solidFill>
+                      <a:srgbClr val="F2F8F9"/>
+                    </a:solidFill>
+                  </a:tcPr>
+                </a:tc>
+                <a:tc>
+                  <a:txBody>
+                    <a:bodyPr/>
+                    <a:lstStyle/>
+                    <a:p>
+                      <a:pPr algn="r" indent="0" marL="0">
+                        <a:buNone/>
+                      </a:pPr>
+                      <a:r>
+                        <a:rPr lang="en-US" sz="1000" dirty="0">
+                          <a:solidFill>
+                            <a:srgbClr val="3D3935"/>
+                          </a:solidFill>
+                          <a:latin typeface="Diodrum Arabic" pitchFamily="34" charset="0"/>
+                          <a:ea typeface="Diodrum Arabic" pitchFamily="34" charset="-122"/>
+                          <a:cs typeface="Diodrum Arabic" pitchFamily="34" charset="-120"/>
+                        </a:rPr>
+                        <a:t>2.03</a:t>
+                      </a:r>
+                      <a:endParaRPr lang="en-US" sz="1000" dirty="0">
+                        <a:latin typeface="Diodrum Arabic" charset="0"/>
+                        <a:ea typeface="Diodrum Arabic" charset="0"/>
+                        <a:cs typeface="Diodrum Arabic" charset="0"/>
+                      </a:endParaRPr>
+                    </a:p>
+                  </a:txBody>
+                  <a:tcPr marL="54864" marR="54864" marT="0" marB="0" anchor="ctr">
+                    <a:lnL w="6350" cap="flat" cmpd="sng" algn="ctr">
+                      <a:solidFill>
+                        <a:srgbClr val="C8C9C7"/>
+                      </a:solidFill>
+                      <a:prstDash val="solid"/>
+                      <a:round/>
+                      <a:headEnd type="none" w="med" len="med"/>
+                      <a:tailEnd type="none" w="med" len="med"/>
+                    </a:lnL>
+                    <a:lnR w="6350" cap="flat" cmpd="sng" algn="ctr">
+                      <a:solidFill>
+                        <a:srgbClr val="C8C9C7"/>
+                      </a:solidFill>
+                      <a:prstDash val="solid"/>
+                      <a:round/>
+                      <a:headEnd type="none" w="med" len="med"/>
+                      <a:tailEnd type="none" w="med" len="med"/>
+                    </a:lnR>
+                    <a:lnT w="6350" cap="flat" cmpd="sng" algn="ctr">
+                      <a:solidFill>
+                        <a:srgbClr val="C8C9C7"/>
+                      </a:solidFill>
+                      <a:prstDash val="solid"/>
+                      <a:round/>
+                      <a:headEnd type="none" w="med" len="med"/>
+                      <a:tailEnd type="none" w="med" len="med"/>
+                    </a:lnT>
+                    <a:lnB w="6350" cap="flat" cmpd="sng" algn="ctr">
+                      <a:solidFill>
+                        <a:srgbClr val="C8C9C7"/>
+                      </a:solidFill>
+                      <a:prstDash val="solid"/>
+                      <a:round/>
+                      <a:headEnd type="none" w="med" len="med"/>
+                      <a:tailEnd type="none" w="med" len="med"/>
+                    </a:lnB>
+                    <a:solidFill>
+                      <a:srgbClr val="F2F8F9"/>
+                    </a:solidFill>
+                  </a:tcPr>
+                </a:tc>
+                <a:tc>
+                  <a:txBody>
+                    <a:bodyPr/>
+                    <a:lstStyle/>
+                    <a:p>
+                      <a:pPr algn="r" indent="0" marL="0">
+                        <a:buNone/>
+                      </a:pPr>
+                      <a:r>
+                        <a:rPr lang="en-US" sz="1000" dirty="0">
+                          <a:solidFill>
+                            <a:srgbClr val="3D3935"/>
+                          </a:solidFill>
+                          <a:latin typeface="Diodrum Arabic" pitchFamily="34" charset="0"/>
+                          <a:ea typeface="Diodrum Arabic" pitchFamily="34" charset="-122"/>
+                          <a:cs typeface="Diodrum Arabic" pitchFamily="34" charset="-120"/>
+                        </a:rPr>
+                        <a:t>0.86</a:t>
+                      </a:r>
+                      <a:endParaRPr lang="en-US" sz="1000" dirty="0">
+                        <a:latin typeface="Diodrum Arabic" charset="0"/>
+                        <a:ea typeface="Diodrum Arabic" charset="0"/>
+                        <a:cs typeface="Diodrum Arabic" charset="0"/>
+                      </a:endParaRPr>
+                    </a:p>
+                  </a:txBody>
+                  <a:tcPr marL="54864" marR="54864" marT="0" marB="0" anchor="ctr">
+                    <a:lnL w="6350" cap="flat" cmpd="sng" algn="ctr">
+                      <a:solidFill>
+                        <a:srgbClr val="C8C9C7"/>
+                      </a:solidFill>
+                      <a:prstDash val="solid"/>
+                      <a:round/>
+                      <a:headEnd type="none" w="med" len="med"/>
+                      <a:tailEnd type="none" w="med" len="med"/>
+                    </a:lnL>
+                    <a:lnR w="6350" cap="flat" cmpd="sng" algn="ctr">
+                      <a:solidFill>
+                        <a:srgbClr val="C8C9C7"/>
+                      </a:solidFill>
+                      <a:prstDash val="solid"/>
+                      <a:round/>
+                      <a:headEnd type="none" w="med" len="med"/>
+                      <a:tailEnd type="none" w="med" len="med"/>
+                    </a:lnR>
+                    <a:lnT w="6350" cap="flat" cmpd="sng" algn="ctr">
+                      <a:solidFill>
+                        <a:srgbClr val="C8C9C7"/>
+                      </a:solidFill>
+                      <a:prstDash val="solid"/>
+                      <a:round/>
+                      <a:headEnd type="none" w="med" len="med"/>
+                      <a:tailEnd type="none" w="med" len="med"/>
+                    </a:lnT>
+                    <a:lnB w="6350" cap="flat" cmpd="sng" algn="ctr">
+                      <a:solidFill>
+                        <a:srgbClr val="C8C9C7"/>
+                      </a:solidFill>
+                      <a:prstDash val="solid"/>
+                      <a:round/>
+                      <a:headEnd type="none" w="med" len="med"/>
+                      <a:tailEnd type="none" w="med" len="med"/>
+                    </a:lnB>
+                    <a:solidFill>
+                      <a:srgbClr val="F2F8F9"/>
+                    </a:solidFill>
+                  </a:tcPr>
+                </a:tc>
+                <a:tc>
+                  <a:txBody>
+                    <a:bodyPr/>
+                    <a:lstStyle/>
+                    <a:p>
+                      <a:pPr algn="r" indent="0" marL="0">
+                        <a:buNone/>
+                      </a:pPr>
+                      <a:r>
+                        <a:rPr lang="en-US" sz="1000" dirty="0">
+                          <a:solidFill>
+                            <a:srgbClr val="3D3935"/>
+                          </a:solidFill>
+                          <a:latin typeface="Diodrum Arabic" pitchFamily="34" charset="0"/>
+                          <a:ea typeface="Diodrum Arabic" pitchFamily="34" charset="-122"/>
+                          <a:cs typeface="Diodrum Arabic" pitchFamily="34" charset="-120"/>
+                        </a:rPr>
+                        <a:t>4.94</a:t>
+                      </a:r>
+                      <a:endParaRPr lang="en-US" sz="1000" dirty="0">
+                        <a:latin typeface="Diodrum Arabic" charset="0"/>
+                        <a:ea typeface="Diodrum Arabic" charset="0"/>
+                        <a:cs typeface="Diodrum Arabic" charset="0"/>
+                      </a:endParaRPr>
+                    </a:p>
+                  </a:txBody>
+                  <a:tcPr marL="54864" marR="54864" marT="0" marB="0" anchor="ctr">
+                    <a:lnL w="6350" cap="flat" cmpd="sng" algn="ctr">
+                      <a:solidFill>
+                        <a:srgbClr val="C8C9C7"/>
+                      </a:solidFill>
+                      <a:prstDash val="solid"/>
+                      <a:round/>
+                      <a:headEnd type="none" w="med" len="med"/>
+                      <a:tailEnd type="none" w="med" len="med"/>
+                    </a:lnL>
+                    <a:lnR w="6350" cap="flat" cmpd="sng" algn="ctr">
+                      <a:solidFill>
+                        <a:srgbClr val="C8C9C7"/>
+                      </a:solidFill>
+                      <a:prstDash val="solid"/>
+                      <a:round/>
+                      <a:headEnd type="none" w="med" len="med"/>
+                      <a:tailEnd type="none" w="med" len="med"/>
+                    </a:lnR>
+                    <a:lnT w="6350" cap="flat" cmpd="sng" algn="ctr">
+                      <a:solidFill>
+                        <a:srgbClr val="C8C9C7"/>
+                      </a:solidFill>
+                      <a:prstDash val="solid"/>
+                      <a:round/>
+                      <a:headEnd type="none" w="med" len="med"/>
+                      <a:tailEnd type="none" w="med" len="med"/>
+                    </a:lnT>
+                    <a:lnB w="6350" cap="flat" cmpd="sng" algn="ctr">
+                      <a:solidFill>
+                        <a:srgbClr val="C8C9C7"/>
+                      </a:solidFill>
+                      <a:prstDash val="solid"/>
+                      <a:round/>
+                      <a:headEnd type="none" w="med" len="med"/>
+                      <a:tailEnd type="none" w="med" len="med"/>
+                    </a:lnB>
+                    <a:solidFill>
+                      <a:srgbClr val="F2F8F9"/>
+                    </a:solidFill>
+                  </a:tcPr>
+                </a:tc>
+                <a:tc>
+                  <a:txBody>
+                    <a:bodyPr/>
+                    <a:lstStyle/>
+                    <a:p>
+                      <a:pPr algn="r" indent="0" marL="0">
+                        <a:buNone/>
+                      </a:pPr>
+                      <a:r>
+                        <a:rPr lang="en-US" sz="1000" b="1" dirty="0">
+                          <a:solidFill>
+                            <a:srgbClr val="3D3935"/>
+                          </a:solidFill>
+                          <a:latin typeface="Diodrum Arabic" pitchFamily="34" charset="0"/>
+                          <a:ea typeface="Diodrum Arabic" pitchFamily="34" charset="-122"/>
+                          <a:cs typeface="Diodrum Arabic" pitchFamily="34" charset="-120"/>
+                        </a:rPr>
+                        <a:t>7.83</a:t>
+                      </a:r>
+                      <a:endParaRPr lang="en-US" sz="1000" dirty="0">
+                        <a:latin typeface="Diodrum Arabic" charset="0"/>
+                        <a:ea typeface="Diodrum Arabic" charset="0"/>
+                        <a:cs typeface="Diodrum Arabic" charset="0"/>
+                      </a:endParaRPr>
+                    </a:p>
+                  </a:txBody>
+                  <a:tcPr marL="54864" marR="54864" marT="0" marB="0" anchor="ctr">
+                    <a:lnL w="6350" cap="flat" cmpd="sng" algn="ctr">
+                      <a:solidFill>
+                        <a:srgbClr val="C8C9C7"/>
+                      </a:solidFill>
+                      <a:prstDash val="solid"/>
+                      <a:round/>
+                      <a:headEnd type="none" w="med" len="med"/>
+                      <a:tailEnd type="none" w="med" len="med"/>
+                    </a:lnL>
+                    <a:lnR w="6350" cap="flat" cmpd="sng" algn="ctr">
+                      <a:solidFill>
+                        <a:srgbClr val="C8C9C7"/>
+                      </a:solidFill>
+                      <a:prstDash val="solid"/>
+                      <a:round/>
+                      <a:headEnd type="none" w="med" len="med"/>
+                      <a:tailEnd type="none" w="med" len="med"/>
+                    </a:lnR>
+                    <a:lnT w="6350" cap="flat" cmpd="sng" algn="ctr">
+                      <a:solidFill>
+                        <a:srgbClr val="C8C9C7"/>
+                      </a:solidFill>
+                      <a:prstDash val="solid"/>
+                      <a:round/>
+                      <a:headEnd type="none" w="med" len="med"/>
+                      <a:tailEnd type="none" w="med" len="med"/>
+                    </a:lnT>
+                    <a:lnB w="6350" cap="flat" cmpd="sng" algn="ctr">
+                      <a:solidFill>
+                        <a:srgbClr val="C8C9C7"/>
+                      </a:solidFill>
+                      <a:prstDash val="solid"/>
+                      <a:round/>
+                      <a:headEnd type="none" w="med" len="med"/>
+                      <a:tailEnd type="none" w="med" len="med"/>
+                    </a:lnB>
+                    <a:solidFill>
+                      <a:srgbClr val="F2F8F9"/>
+                    </a:solidFill>
+                  </a:tcPr>
+                </a:tc>
+                <a:tc>
+                  <a:txBody>
+                    <a:bodyPr/>
+                    <a:lstStyle/>
+                    <a:p>
+                      <a:pPr algn="r" indent="0" marL="0">
+                        <a:buNone/>
+                      </a:pPr>
+                      <a:r>
+                        <a:rPr lang="en-US" sz="1000" dirty="0">
+                          <a:solidFill>
+                            <a:srgbClr val="3D3935"/>
+                          </a:solidFill>
+                          <a:latin typeface="Diodrum Arabic" pitchFamily="34" charset="0"/>
+                          <a:ea typeface="Diodrum Arabic" pitchFamily="34" charset="-122"/>
+                          <a:cs typeface="Diodrum Arabic" pitchFamily="34" charset="-120"/>
+                        </a:rPr>
+                        <a:t>12.6%</a:t>
+                      </a:r>
+                      <a:endParaRPr lang="en-US" sz="1000" dirty="0">
+                        <a:latin typeface="Diodrum Arabic" charset="0"/>
+                        <a:ea typeface="Diodrum Arabic" charset="0"/>
+                        <a:cs typeface="Diodrum Arabic" charset="0"/>
+                      </a:endParaRPr>
+                    </a:p>
+                  </a:txBody>
+                  <a:tcPr marL="54864" marR="54864" marT="0" marB="0" anchor="ctr">
+                    <a:lnL w="6350" cap="flat" cmpd="sng" algn="ctr">
+                      <a:solidFill>
+                        <a:srgbClr val="C8C9C7"/>
+                      </a:solidFill>
+                      <a:prstDash val="solid"/>
+                      <a:round/>
+                      <a:headEnd type="none" w="med" len="med"/>
+                      <a:tailEnd type="none" w="med" len="med"/>
+                    </a:lnL>
+                    <a:lnR w="6350" cap="flat" cmpd="sng" algn="ctr">
+                      <a:solidFill>
+                        <a:srgbClr val="C8C9C7"/>
+                      </a:solidFill>
+                      <a:prstDash val="solid"/>
+                      <a:round/>
+                      <a:headEnd type="none" w="med" len="med"/>
+                      <a:tailEnd type="none" w="med" len="med"/>
+                    </a:lnR>
+                    <a:lnT w="6350" cap="flat" cmpd="sng" algn="ctr">
+                      <a:solidFill>
+                        <a:srgbClr val="C8C9C7"/>
+                      </a:solidFill>
+                      <a:prstDash val="solid"/>
+                      <a:round/>
+                      <a:headEnd type="none" w="med" len="med"/>
+                      <a:tailEnd type="none" w="med" len="med"/>
+                    </a:lnT>
+                    <a:lnB w="6350" cap="flat" cmpd="sng" algn="ctr">
+                      <a:solidFill>
+                        <a:srgbClr val="C8C9C7"/>
+                      </a:solidFill>
+                      <a:prstDash val="solid"/>
+                      <a:round/>
+                      <a:headEnd type="none" w="med" len="med"/>
+                      <a:tailEnd type="none" w="med" len="med"/>
+                    </a:lnB>
+                    <a:solidFill>
+                      <a:srgbClr val="F2F8F9"/>
+                    </a:solidFill>
+                  </a:tcPr>
+                </a:tc>
+              </a:tr>
+              <a:tr h="239573">
+                <a:tc>
+                  <a:txBody>
+                    <a:bodyPr/>
+                    <a:lstStyle/>
+                    <a:p>
+                      <a:pPr algn="l" indent="0" marL="0">
+                        <a:buNone/>
+                      </a:pPr>
+                      <a:r>
+                        <a:rPr lang="en-US" sz="1000" dirty="0">
+                          <a:solidFill>
+                            <a:srgbClr val="3D3935"/>
+                          </a:solidFill>
+                          <a:latin typeface="Diodrum Arabic" pitchFamily="34" charset="0"/>
+                          <a:ea typeface="Diodrum Arabic" pitchFamily="34" charset="-122"/>
+                          <a:cs typeface="Diodrum Arabic" pitchFamily="34" charset="-120"/>
+                        </a:rPr>
+                        <a:t>Video management and video wall</a:t>
+                      </a:r>
+                      <a:endParaRPr lang="en-US" sz="1000" dirty="0">
+                        <a:latin typeface="Diodrum Arabic" charset="0"/>
+                        <a:ea typeface="Diodrum Arabic" charset="0"/>
+                        <a:cs typeface="Diodrum Arabic" charset="0"/>
+                      </a:endParaRPr>
+                    </a:p>
+                  </a:txBody>
+                  <a:tcPr marL="54864" marR="54864" marT="0" marB="0" anchor="ctr">
+                    <a:lnL w="6350" cap="flat" cmpd="sng" algn="ctr">
+                      <a:solidFill>
+                        <a:srgbClr val="C8C9C7"/>
+                      </a:solidFill>
+                      <a:prstDash val="solid"/>
+                      <a:round/>
+                      <a:headEnd type="none" w="med" len="med"/>
+                      <a:tailEnd type="none" w="med" len="med"/>
+                    </a:lnL>
+                    <a:lnR w="6350" cap="flat" cmpd="sng" algn="ctr">
+                      <a:solidFill>
+                        <a:srgbClr val="C8C9C7"/>
+                      </a:solidFill>
+                      <a:prstDash val="solid"/>
+                      <a:round/>
+                      <a:headEnd type="none" w="med" len="med"/>
+                      <a:tailEnd type="none" w="med" len="med"/>
+                    </a:lnR>
+                    <a:lnT w="6350" cap="flat" cmpd="sng" algn="ctr">
+                      <a:solidFill>
+                        <a:srgbClr val="C8C9C7"/>
+                      </a:solidFill>
+                      <a:prstDash val="solid"/>
+                      <a:round/>
+                      <a:headEnd type="none" w="med" len="med"/>
+                      <a:tailEnd type="none" w="med" len="med"/>
+                    </a:lnT>
+                    <a:lnB w="6350" cap="flat" cmpd="sng" algn="ctr">
+                      <a:solidFill>
+                        <a:srgbClr val="C8C9C7"/>
+                      </a:solidFill>
+                      <a:prstDash val="solid"/>
+                      <a:round/>
+                      <a:headEnd type="none" w="med" len="med"/>
+                      <a:tailEnd type="none" w="med" len="med"/>
+                    </a:lnB>
+                    <a:solidFill>
+                      <a:srgbClr val="FFFFFF"/>
+                    </a:solidFill>
+                  </a:tcPr>
+                </a:tc>
+                <a:tc>
+                  <a:txBody>
+                    <a:bodyPr/>
+                    <a:lstStyle/>
+                    <a:p>
+                      <a:pPr algn="r" indent="0" marL="0">
+                        <a:buNone/>
+                      </a:pPr>
+                      <a:r>
+                        <a:rPr lang="en-US" sz="1000" dirty="0">
+                          <a:solidFill>
+                            <a:srgbClr val="3D3935"/>
+                          </a:solidFill>
+                          <a:latin typeface="Diodrum Arabic" pitchFamily="34" charset="0"/>
+                          <a:ea typeface="Diodrum Arabic" pitchFamily="34" charset="-122"/>
+                          <a:cs typeface="Diodrum Arabic" pitchFamily="34" charset="-120"/>
+                        </a:rPr>
+                        <a:t>2.21</a:t>
+                      </a:r>
+                      <a:endParaRPr lang="en-US" sz="1000" dirty="0">
+                        <a:latin typeface="Diodrum Arabic" charset="0"/>
+                        <a:ea typeface="Diodrum Arabic" charset="0"/>
+                        <a:cs typeface="Diodrum Arabic" charset="0"/>
+                      </a:endParaRPr>
+                    </a:p>
+                  </a:txBody>
+                  <a:tcPr marL="54864" marR="54864" marT="0" marB="0" anchor="ctr">
+                    <a:lnL w="6350" cap="flat" cmpd="sng" algn="ctr">
+                      <a:solidFill>
+                        <a:srgbClr val="C8C9C7"/>
+                      </a:solidFill>
+                      <a:prstDash val="solid"/>
+                      <a:round/>
+                      <a:headEnd type="none" w="med" len="med"/>
+                      <a:tailEnd type="none" w="med" len="med"/>
+                    </a:lnL>
+                    <a:lnR w="6350" cap="flat" cmpd="sng" algn="ctr">
+                      <a:solidFill>
+                        <a:srgbClr val="C8C9C7"/>
+                      </a:solidFill>
+                      <a:prstDash val="solid"/>
+                      <a:round/>
+                      <a:headEnd type="none" w="med" len="med"/>
+                      <a:tailEnd type="none" w="med" len="med"/>
+                    </a:lnR>
+                    <a:lnT w="6350" cap="flat" cmpd="sng" algn="ctr">
+                      <a:solidFill>
+                        <a:srgbClr val="C8C9C7"/>
+                      </a:solidFill>
+                      <a:prstDash val="solid"/>
+                      <a:round/>
+                      <a:headEnd type="none" w="med" len="med"/>
+                      <a:tailEnd type="none" w="med" len="med"/>
+                    </a:lnT>
+                    <a:lnB w="6350" cap="flat" cmpd="sng" algn="ctr">
+                      <a:solidFill>
+                        <a:srgbClr val="C8C9C7"/>
+                      </a:solidFill>
+                      <a:prstDash val="solid"/>
+                      <a:round/>
+                      <a:headEnd type="none" w="med" len="med"/>
+                      <a:tailEnd type="none" w="med" len="med"/>
+                    </a:lnB>
+                    <a:solidFill>
+                      <a:srgbClr val="FFFFFF"/>
+                    </a:solidFill>
+                  </a:tcPr>
+                </a:tc>
+                <a:tc>
+                  <a:txBody>
+                    <a:bodyPr/>
+                    <a:lstStyle/>
+                    <a:p>
+                      <a:pPr algn="r" indent="0" marL="0">
+                        <a:buNone/>
+                      </a:pPr>
+                      <a:r>
+                        <a:rPr lang="en-US" sz="1000" dirty="0">
+                          <a:solidFill>
+                            <a:srgbClr val="3D3935"/>
+                          </a:solidFill>
+                          <a:latin typeface="Diodrum Arabic" pitchFamily="34" charset="0"/>
+                          <a:ea typeface="Diodrum Arabic" pitchFamily="34" charset="-122"/>
+                          <a:cs typeface="Diodrum Arabic" pitchFamily="34" charset="-120"/>
+                        </a:rPr>
+                        <a:t>1.40</a:t>
+                      </a:r>
+                      <a:endParaRPr lang="en-US" sz="1000" dirty="0">
+                        <a:latin typeface="Diodrum Arabic" charset="0"/>
+                        <a:ea typeface="Diodrum Arabic" charset="0"/>
+                        <a:cs typeface="Diodrum Arabic" charset="0"/>
+                      </a:endParaRPr>
+                    </a:p>
+                  </a:txBody>
+                  <a:tcPr marL="54864" marR="54864" marT="0" marB="0" anchor="ctr">
+                    <a:lnL w="6350" cap="flat" cmpd="sng" algn="ctr">
+                      <a:solidFill>
+                        <a:srgbClr val="C8C9C7"/>
+                      </a:solidFill>
+                      <a:prstDash val="solid"/>
+                      <a:round/>
+                      <a:headEnd type="none" w="med" len="med"/>
+                      <a:tailEnd type="none" w="med" len="med"/>
+                    </a:lnL>
+                    <a:lnR w="6350" cap="flat" cmpd="sng" algn="ctr">
+                      <a:solidFill>
+                        <a:srgbClr val="C8C9C7"/>
+                      </a:solidFill>
+                      <a:prstDash val="solid"/>
+                      <a:round/>
+                      <a:headEnd type="none" w="med" len="med"/>
+                      <a:tailEnd type="none" w="med" len="med"/>
+                    </a:lnR>
+                    <a:lnT w="6350" cap="flat" cmpd="sng" algn="ctr">
+                      <a:solidFill>
+                        <a:srgbClr val="C8C9C7"/>
+                      </a:solidFill>
+                      <a:prstDash val="solid"/>
+                      <a:round/>
+                      <a:headEnd type="none" w="med" len="med"/>
+                      <a:tailEnd type="none" w="med" len="med"/>
+                    </a:lnT>
+                    <a:lnB w="6350" cap="flat" cmpd="sng" algn="ctr">
+                      <a:solidFill>
+                        <a:srgbClr val="C8C9C7"/>
+                      </a:solidFill>
+                      <a:prstDash val="solid"/>
+                      <a:round/>
+                      <a:headEnd type="none" w="med" len="med"/>
+                      <a:tailEnd type="none" w="med" len="med"/>
+                    </a:lnB>
+                    <a:solidFill>
+                      <a:srgbClr val="FFFFFF"/>
+                    </a:solidFill>
+                  </a:tcPr>
+                </a:tc>
+                <a:tc>
+                  <a:txBody>
+                    <a:bodyPr/>
+                    <a:lstStyle/>
+                    <a:p>
+                      <a:pPr algn="r" indent="0" marL="0">
+                        <a:buNone/>
+                      </a:pPr>
+                      <a:r>
+                        <a:rPr lang="en-US" sz="1000" dirty="0">
+                          <a:solidFill>
+                            <a:srgbClr val="3D3935"/>
+                          </a:solidFill>
+                          <a:latin typeface="Diodrum Arabic" pitchFamily="34" charset="0"/>
+                          <a:ea typeface="Diodrum Arabic" pitchFamily="34" charset="-122"/>
+                          <a:cs typeface="Diodrum Arabic" pitchFamily="34" charset="-120"/>
+                        </a:rPr>
+                        <a:t>2.02</a:t>
+                      </a:r>
+                      <a:endParaRPr lang="en-US" sz="1000" dirty="0">
+                        <a:latin typeface="Diodrum Arabic" charset="0"/>
+                        <a:ea typeface="Diodrum Arabic" charset="0"/>
+                        <a:cs typeface="Diodrum Arabic" charset="0"/>
+                      </a:endParaRPr>
+                    </a:p>
+                  </a:txBody>
+                  <a:tcPr marL="54864" marR="54864" marT="0" marB="0" anchor="ctr">
+                    <a:lnL w="6350" cap="flat" cmpd="sng" algn="ctr">
+                      <a:solidFill>
+                        <a:srgbClr val="C8C9C7"/>
+                      </a:solidFill>
+                      <a:prstDash val="solid"/>
+                      <a:round/>
+                      <a:headEnd type="none" w="med" len="med"/>
+                      <a:tailEnd type="none" w="med" len="med"/>
+                    </a:lnL>
+                    <a:lnR w="6350" cap="flat" cmpd="sng" algn="ctr">
+                      <a:solidFill>
+                        <a:srgbClr val="C8C9C7"/>
+                      </a:solidFill>
+                      <a:prstDash val="solid"/>
+                      <a:round/>
+                      <a:headEnd type="none" w="med" len="med"/>
+                      <a:tailEnd type="none" w="med" len="med"/>
+                    </a:lnR>
+                    <a:lnT w="6350" cap="flat" cmpd="sng" algn="ctr">
+                      <a:solidFill>
+                        <a:srgbClr val="C8C9C7"/>
+                      </a:solidFill>
+                      <a:prstDash val="solid"/>
+                      <a:round/>
+                      <a:headEnd type="none" w="med" len="med"/>
+                      <a:tailEnd type="none" w="med" len="med"/>
+                    </a:lnT>
+                    <a:lnB w="6350" cap="flat" cmpd="sng" algn="ctr">
+                      <a:solidFill>
+                        <a:srgbClr val="C8C9C7"/>
+                      </a:solidFill>
+                      <a:prstDash val="solid"/>
+                      <a:round/>
+                      <a:headEnd type="none" w="med" len="med"/>
+                      <a:tailEnd type="none" w="med" len="med"/>
+                    </a:lnB>
+                    <a:solidFill>
+                      <a:srgbClr val="FFFFFF"/>
+                    </a:solidFill>
+                  </a:tcPr>
+                </a:tc>
+                <a:tc>
+                  <a:txBody>
+                    <a:bodyPr/>
+                    <a:lstStyle/>
+                    <a:p>
+                      <a:pPr algn="r" indent="0" marL="0">
+                        <a:buNone/>
+                      </a:pPr>
+                      <a:r>
+                        <a:rPr lang="en-US" sz="1000" b="1" dirty="0">
+                          <a:solidFill>
+                            <a:srgbClr val="3D3935"/>
+                          </a:solidFill>
+                          <a:latin typeface="Diodrum Arabic" pitchFamily="34" charset="0"/>
+                          <a:ea typeface="Diodrum Arabic" pitchFamily="34" charset="-122"/>
+                          <a:cs typeface="Diodrum Arabic" pitchFamily="34" charset="-120"/>
+                        </a:rPr>
+                        <a:t>5.63</a:t>
+                      </a:r>
+                      <a:endParaRPr lang="en-US" sz="1000" dirty="0">
+                        <a:latin typeface="Diodrum Arabic" charset="0"/>
+                        <a:ea typeface="Diodrum Arabic" charset="0"/>
+                        <a:cs typeface="Diodrum Arabic" charset="0"/>
+                      </a:endParaRPr>
+                    </a:p>
+                  </a:txBody>
+                  <a:tcPr marL="54864" marR="54864" marT="0" marB="0" anchor="ctr">
+                    <a:lnL w="6350" cap="flat" cmpd="sng" algn="ctr">
+                      <a:solidFill>
+                        <a:srgbClr val="C8C9C7"/>
+                      </a:solidFill>
+                      <a:prstDash val="solid"/>
+                      <a:round/>
+                      <a:headEnd type="none" w="med" len="med"/>
+                      <a:tailEnd type="none" w="med" len="med"/>
+                    </a:lnL>
+                    <a:lnR w="6350" cap="flat" cmpd="sng" algn="ctr">
+                      <a:solidFill>
+                        <a:srgbClr val="C8C9C7"/>
+                      </a:solidFill>
+                      <a:prstDash val="solid"/>
+                      <a:round/>
+                      <a:headEnd type="none" w="med" len="med"/>
+                      <a:tailEnd type="none" w="med" len="med"/>
+                    </a:lnR>
+                    <a:lnT w="6350" cap="flat" cmpd="sng" algn="ctr">
+                      <a:solidFill>
+                        <a:srgbClr val="C8C9C7"/>
+                      </a:solidFill>
+                      <a:prstDash val="solid"/>
+                      <a:round/>
+                      <a:headEnd type="none" w="med" len="med"/>
+                      <a:tailEnd type="none" w="med" len="med"/>
+                    </a:lnT>
+                    <a:lnB w="6350" cap="flat" cmpd="sng" algn="ctr">
+                      <a:solidFill>
+                        <a:srgbClr val="C8C9C7"/>
+                      </a:solidFill>
+                      <a:prstDash val="solid"/>
+                      <a:round/>
+                      <a:headEnd type="none" w="med" len="med"/>
+                      <a:tailEnd type="none" w="med" len="med"/>
+                    </a:lnB>
+                    <a:solidFill>
+                      <a:srgbClr val="FFFFFF"/>
+                    </a:solidFill>
+                  </a:tcPr>
+                </a:tc>
+                <a:tc>
+                  <a:txBody>
+                    <a:bodyPr/>
+                    <a:lstStyle/>
+                    <a:p>
+                      <a:pPr algn="r" indent="0" marL="0">
+                        <a:buNone/>
+                      </a:pPr>
+                      <a:r>
+                        <a:rPr lang="en-US" sz="1000" dirty="0">
+                          <a:solidFill>
+                            <a:srgbClr val="3D3935"/>
+                          </a:solidFill>
+                          <a:latin typeface="Diodrum Arabic" pitchFamily="34" charset="0"/>
+                          <a:ea typeface="Diodrum Arabic" pitchFamily="34" charset="-122"/>
+                          <a:cs typeface="Diodrum Arabic" pitchFamily="34" charset="-120"/>
+                        </a:rPr>
+                        <a:t>9.1%</a:t>
+                      </a:r>
+                      <a:endParaRPr lang="en-US" sz="1000" dirty="0">
+                        <a:latin typeface="Diodrum Arabic" charset="0"/>
+                        <a:ea typeface="Diodrum Arabic" charset="0"/>
+                        <a:cs typeface="Diodrum Arabic" charset="0"/>
+                      </a:endParaRPr>
+                    </a:p>
+                  </a:txBody>
+                  <a:tcPr marL="54864" marR="54864" marT="0" marB="0" anchor="ctr">
+                    <a:lnL w="6350" cap="flat" cmpd="sng" algn="ctr">
+                      <a:solidFill>
+                        <a:srgbClr val="C8C9C7"/>
+                      </a:solidFill>
+                      <a:prstDash val="solid"/>
+                      <a:round/>
+                      <a:headEnd type="none" w="med" len="med"/>
+                      <a:tailEnd type="none" w="med" len="med"/>
+                    </a:lnL>
+                    <a:lnR w="6350" cap="flat" cmpd="sng" algn="ctr">
+                      <a:solidFill>
+                        <a:srgbClr val="C8C9C7"/>
+                      </a:solidFill>
+                      <a:prstDash val="solid"/>
+                      <a:round/>
+                      <a:headEnd type="none" w="med" len="med"/>
+                      <a:tailEnd type="none" w="med" len="med"/>
+                    </a:lnR>
+                    <a:lnT w="6350" cap="flat" cmpd="sng" algn="ctr">
+                      <a:solidFill>
+                        <a:srgbClr val="C8C9C7"/>
+                      </a:solidFill>
+                      <a:prstDash val="solid"/>
+                      <a:round/>
+                      <a:headEnd type="none" w="med" len="med"/>
+                      <a:tailEnd type="none" w="med" len="med"/>
+                    </a:lnT>
+                    <a:lnB w="6350" cap="flat" cmpd="sng" algn="ctr">
+                      <a:solidFill>
+                        <a:srgbClr val="C8C9C7"/>
+                      </a:solidFill>
+                      <a:prstDash val="solid"/>
+                      <a:round/>
+                      <a:headEnd type="none" w="med" len="med"/>
+                      <a:tailEnd type="none" w="med" len="med"/>
+                    </a:lnB>
+                    <a:solidFill>
+                      <a:srgbClr val="FFFFFF"/>
+                    </a:solidFill>
+                  </a:tcPr>
+                </a:tc>
+              </a:tr>
+              <a:tr h="239573">
+                <a:tc>
+                  <a:txBody>
+                    <a:bodyPr/>
+                    <a:lstStyle/>
+                    <a:p>
+                      <a:pPr algn="l" indent="0" marL="0">
+                        <a:buNone/>
+                      </a:pPr>
+                      <a:r>
+                        <a:rPr lang="en-US" sz="1000" dirty="0">
+                          <a:solidFill>
+                            <a:srgbClr val="3D3935"/>
+                          </a:solidFill>
+                          <a:latin typeface="Diodrum Arabic" pitchFamily="34" charset="0"/>
+                          <a:ea typeface="Diodrum Arabic" pitchFamily="34" charset="-122"/>
+                          <a:cs typeface="Diodrum Arabic" pitchFamily="34" charset="-120"/>
+                        </a:rPr>
+                        <a:t>Access control and intercom</a:t>
+                      </a:r>
+                      <a:endParaRPr lang="en-US" sz="1000" dirty="0">
+                        <a:latin typeface="Diodrum Arabic" charset="0"/>
+                        <a:ea typeface="Diodrum Arabic" charset="0"/>
+                        <a:cs typeface="Diodrum Arabic" charset="0"/>
+                      </a:endParaRPr>
+                    </a:p>
+                  </a:txBody>
+                  <a:tcPr marL="54864" marR="54864" marT="0" marB="0" anchor="ctr">
+                    <a:lnL w="6350" cap="flat" cmpd="sng" algn="ctr">
+                      <a:solidFill>
+                        <a:srgbClr val="C8C9C7"/>
+                      </a:solidFill>
+                      <a:prstDash val="solid"/>
+                      <a:round/>
+                      <a:headEnd type="none" w="med" len="med"/>
+                      <a:tailEnd type="none" w="med" len="med"/>
+                    </a:lnL>
+                    <a:lnR w="6350" cap="flat" cmpd="sng" algn="ctr">
+                      <a:solidFill>
+                        <a:srgbClr val="C8C9C7"/>
+                      </a:solidFill>
+                      <a:prstDash val="solid"/>
+                      <a:round/>
+                      <a:headEnd type="none" w="med" len="med"/>
+                      <a:tailEnd type="none" w="med" len="med"/>
+                    </a:lnR>
+                    <a:lnT w="6350" cap="flat" cmpd="sng" algn="ctr">
+                      <a:solidFill>
+                        <a:srgbClr val="C8C9C7"/>
+                      </a:solidFill>
+                      <a:prstDash val="solid"/>
+                      <a:round/>
+                      <a:headEnd type="none" w="med" len="med"/>
+                      <a:tailEnd type="none" w="med" len="med"/>
+                    </a:lnT>
+                    <a:lnB w="6350" cap="flat" cmpd="sng" algn="ctr">
+                      <a:solidFill>
+                        <a:srgbClr val="C8C9C7"/>
+                      </a:solidFill>
+                      <a:prstDash val="solid"/>
+                      <a:round/>
+                      <a:headEnd type="none" w="med" len="med"/>
+                      <a:tailEnd type="none" w="med" len="med"/>
+                    </a:lnB>
+                    <a:solidFill>
+                      <a:srgbClr val="F2F8F9"/>
+                    </a:solidFill>
+                  </a:tcPr>
+                </a:tc>
+                <a:tc>
+                  <a:txBody>
+                    <a:bodyPr/>
+                    <a:lstStyle/>
+                    <a:p>
+                      <a:pPr algn="r" indent="0" marL="0">
+                        <a:buNone/>
+                      </a:pPr>
+                      <a:r>
+                        <a:rPr lang="en-US" sz="1000" dirty="0">
+                          <a:solidFill>
+                            <a:srgbClr val="3D3935"/>
+                          </a:solidFill>
+                          <a:latin typeface="Diodrum Arabic" pitchFamily="34" charset="0"/>
+                          <a:ea typeface="Diodrum Arabic" pitchFamily="34" charset="-122"/>
+                          <a:cs typeface="Diodrum Arabic" pitchFamily="34" charset="-120"/>
+                        </a:rPr>
+                        <a:t>0.26</a:t>
+                      </a:r>
+                      <a:endParaRPr lang="en-US" sz="1000" dirty="0">
+                        <a:latin typeface="Diodrum Arabic" charset="0"/>
+                        <a:ea typeface="Diodrum Arabic" charset="0"/>
+                        <a:cs typeface="Diodrum Arabic" charset="0"/>
+                      </a:endParaRPr>
+                    </a:p>
+                  </a:txBody>
+                  <a:tcPr marL="54864" marR="54864" marT="0" marB="0" anchor="ctr">
+                    <a:lnL w="6350" cap="flat" cmpd="sng" algn="ctr">
+                      <a:solidFill>
+                        <a:srgbClr val="C8C9C7"/>
+                      </a:solidFill>
+                      <a:prstDash val="solid"/>
+                      <a:round/>
+                      <a:headEnd type="none" w="med" len="med"/>
+                      <a:tailEnd type="none" w="med" len="med"/>
+                    </a:lnL>
+                    <a:lnR w="6350" cap="flat" cmpd="sng" algn="ctr">
+                      <a:solidFill>
+                        <a:srgbClr val="C8C9C7"/>
+                      </a:solidFill>
+                      <a:prstDash val="solid"/>
+                      <a:round/>
+                      <a:headEnd type="none" w="med" len="med"/>
+                      <a:tailEnd type="none" w="med" len="med"/>
+                    </a:lnR>
+                    <a:lnT w="6350" cap="flat" cmpd="sng" algn="ctr">
+                      <a:solidFill>
+                        <a:srgbClr val="C8C9C7"/>
+                      </a:solidFill>
+                      <a:prstDash val="solid"/>
+                      <a:round/>
+                      <a:headEnd type="none" w="med" len="med"/>
+                      <a:tailEnd type="none" w="med" len="med"/>
+                    </a:lnT>
+                    <a:lnB w="6350" cap="flat" cmpd="sng" algn="ctr">
+                      <a:solidFill>
+                        <a:srgbClr val="C8C9C7"/>
+                      </a:solidFill>
+                      <a:prstDash val="solid"/>
+                      <a:round/>
+                      <a:headEnd type="none" w="med" len="med"/>
+                      <a:tailEnd type="none" w="med" len="med"/>
+                    </a:lnB>
+                    <a:solidFill>
+                      <a:srgbClr val="F2F8F9"/>
+                    </a:solidFill>
+                  </a:tcPr>
+                </a:tc>
+                <a:tc>
+                  <a:txBody>
+                    <a:bodyPr/>
+                    <a:lstStyle/>
+                    <a:p>
+                      <a:pPr algn="r" indent="0" marL="0">
+                        <a:buNone/>
+                      </a:pPr>
+                      <a:r>
+                        <a:rPr lang="en-US" sz="1000" dirty="0">
+                          <a:solidFill>
+                            <a:srgbClr val="3D3935"/>
+                          </a:solidFill>
+                          <a:latin typeface="Diodrum Arabic" pitchFamily="34" charset="0"/>
+                          <a:ea typeface="Diodrum Arabic" pitchFamily="34" charset="-122"/>
+                          <a:cs typeface="Diodrum Arabic" pitchFamily="34" charset="-120"/>
+                        </a:rPr>
+                        <a:t>0.18</a:t>
+                      </a:r>
+                      <a:endParaRPr lang="en-US" sz="1000" dirty="0">
+                        <a:latin typeface="Diodrum Arabic" charset="0"/>
+                        <a:ea typeface="Diodrum Arabic" charset="0"/>
+                        <a:cs typeface="Diodrum Arabic" charset="0"/>
+                      </a:endParaRPr>
+                    </a:p>
+                  </a:txBody>
+                  <a:tcPr marL="54864" marR="54864" marT="0" marB="0" anchor="ctr">
+                    <a:lnL w="6350" cap="flat" cmpd="sng" algn="ctr">
+                      <a:solidFill>
+                        <a:srgbClr val="C8C9C7"/>
+                      </a:solidFill>
+                      <a:prstDash val="solid"/>
+                      <a:round/>
+                      <a:headEnd type="none" w="med" len="med"/>
+                      <a:tailEnd type="none" w="med" len="med"/>
+                    </a:lnL>
+                    <a:lnR w="6350" cap="flat" cmpd="sng" algn="ctr">
+                      <a:solidFill>
+                        <a:srgbClr val="C8C9C7"/>
+                      </a:solidFill>
+                      <a:prstDash val="solid"/>
+                      <a:round/>
+                      <a:headEnd type="none" w="med" len="med"/>
+                      <a:tailEnd type="none" w="med" len="med"/>
+                    </a:lnR>
+                    <a:lnT w="6350" cap="flat" cmpd="sng" algn="ctr">
+                      <a:solidFill>
+                        <a:srgbClr val="C8C9C7"/>
+                      </a:solidFill>
+                      <a:prstDash val="solid"/>
+                      <a:round/>
+                      <a:headEnd type="none" w="med" len="med"/>
+                      <a:tailEnd type="none" w="med" len="med"/>
+                    </a:lnT>
+                    <a:lnB w="6350" cap="flat" cmpd="sng" algn="ctr">
+                      <a:solidFill>
+                        <a:srgbClr val="C8C9C7"/>
+                      </a:solidFill>
+                      <a:prstDash val="solid"/>
+                      <a:round/>
+                      <a:headEnd type="none" w="med" len="med"/>
+                      <a:tailEnd type="none" w="med" len="med"/>
+                    </a:lnB>
+                    <a:solidFill>
+                      <a:srgbClr val="F2F8F9"/>
+                    </a:solidFill>
+                  </a:tcPr>
+                </a:tc>
+                <a:tc>
+                  <a:txBody>
+                    <a:bodyPr/>
+                    <a:lstStyle/>
+                    <a:p>
+                      <a:pPr algn="r" indent="0" marL="0">
+                        <a:buNone/>
+                      </a:pPr>
+                      <a:r>
+                        <a:rPr lang="en-US" sz="1000" dirty="0">
+                          <a:solidFill>
+                            <a:srgbClr val="3D3935"/>
+                          </a:solidFill>
+                          <a:latin typeface="Diodrum Arabic" pitchFamily="34" charset="0"/>
+                          <a:ea typeface="Diodrum Arabic" pitchFamily="34" charset="-122"/>
+                          <a:cs typeface="Diodrum Arabic" pitchFamily="34" charset="-120"/>
+                        </a:rPr>
+                        <a:t>0.18</a:t>
+                      </a:r>
+                      <a:endParaRPr lang="en-US" sz="1000" dirty="0">
+                        <a:latin typeface="Diodrum Arabic" charset="0"/>
+                        <a:ea typeface="Diodrum Arabic" charset="0"/>
+                        <a:cs typeface="Diodrum Arabic" charset="0"/>
+                      </a:endParaRPr>
+                    </a:p>
+                  </a:txBody>
+                  <a:tcPr marL="54864" marR="54864" marT="0" marB="0" anchor="ctr">
+                    <a:lnL w="6350" cap="flat" cmpd="sng" algn="ctr">
+                      <a:solidFill>
+                        <a:srgbClr val="C8C9C7"/>
+                      </a:solidFill>
+                      <a:prstDash val="solid"/>
+                      <a:round/>
+                      <a:headEnd type="none" w="med" len="med"/>
+                      <a:tailEnd type="none" w="med" len="med"/>
+                    </a:lnL>
+                    <a:lnR w="6350" cap="flat" cmpd="sng" algn="ctr">
+                      <a:solidFill>
+                        <a:srgbClr val="C8C9C7"/>
+                      </a:solidFill>
+                      <a:prstDash val="solid"/>
+                      <a:round/>
+                      <a:headEnd type="none" w="med" len="med"/>
+                      <a:tailEnd type="none" w="med" len="med"/>
+                    </a:lnR>
+                    <a:lnT w="6350" cap="flat" cmpd="sng" algn="ctr">
+                      <a:solidFill>
+                        <a:srgbClr val="C8C9C7"/>
+                      </a:solidFill>
+                      <a:prstDash val="solid"/>
+                      <a:round/>
+                      <a:headEnd type="none" w="med" len="med"/>
+                      <a:tailEnd type="none" w="med" len="med"/>
+                    </a:lnT>
+                    <a:lnB w="6350" cap="flat" cmpd="sng" algn="ctr">
+                      <a:solidFill>
+                        <a:srgbClr val="C8C9C7"/>
+                      </a:solidFill>
+                      <a:prstDash val="solid"/>
+                      <a:round/>
+                      <a:headEnd type="none" w="med" len="med"/>
+                      <a:tailEnd type="none" w="med" len="med"/>
+                    </a:lnB>
+                    <a:solidFill>
+                      <a:srgbClr val="F2F8F9"/>
+                    </a:solidFill>
+                  </a:tcPr>
+                </a:tc>
+                <a:tc>
+                  <a:txBody>
+                    <a:bodyPr/>
+                    <a:lstStyle/>
+                    <a:p>
+                      <a:pPr algn="r" indent="0" marL="0">
+                        <a:buNone/>
+                      </a:pPr>
+                      <a:r>
+                        <a:rPr lang="en-US" sz="1000" b="1" dirty="0">
+                          <a:solidFill>
+                            <a:srgbClr val="3D3935"/>
+                          </a:solidFill>
+                          <a:latin typeface="Diodrum Arabic" pitchFamily="34" charset="0"/>
+                          <a:ea typeface="Diodrum Arabic" pitchFamily="34" charset="-122"/>
+                          <a:cs typeface="Diodrum Arabic" pitchFamily="34" charset="-120"/>
+                        </a:rPr>
+                        <a:t>0.62</a:t>
+                      </a:r>
+                      <a:endParaRPr lang="en-US" sz="1000" dirty="0">
+                        <a:latin typeface="Diodrum Arabic" charset="0"/>
+                        <a:ea typeface="Diodrum Arabic" charset="0"/>
+                        <a:cs typeface="Diodrum Arabic" charset="0"/>
+                      </a:endParaRPr>
+                    </a:p>
+                  </a:txBody>
+                  <a:tcPr marL="54864" marR="54864" marT="0" marB="0" anchor="ctr">
+                    <a:lnL w="6350" cap="flat" cmpd="sng" algn="ctr">
+                      <a:solidFill>
+                        <a:srgbClr val="C8C9C7"/>
+                      </a:solidFill>
+                      <a:prstDash val="solid"/>
+                      <a:round/>
+                      <a:headEnd type="none" w="med" len="med"/>
+                      <a:tailEnd type="none" w="med" len="med"/>
+                    </a:lnL>
+                    <a:lnR w="6350" cap="flat" cmpd="sng" algn="ctr">
+                      <a:solidFill>
+                        <a:srgbClr val="C8C9C7"/>
+                      </a:solidFill>
+                      <a:prstDash val="solid"/>
+                      <a:round/>
+                      <a:headEnd type="none" w="med" len="med"/>
+                      <a:tailEnd type="none" w="med" len="med"/>
+                    </a:lnR>
+                    <a:lnT w="6350" cap="flat" cmpd="sng" algn="ctr">
+                      <a:solidFill>
+                        <a:srgbClr val="C8C9C7"/>
+                      </a:solidFill>
+                      <a:prstDash val="solid"/>
+                      <a:round/>
+                      <a:headEnd type="none" w="med" len="med"/>
+                      <a:tailEnd type="none" w="med" len="med"/>
+                    </a:lnT>
+                    <a:lnB w="6350" cap="flat" cmpd="sng" algn="ctr">
+                      <a:solidFill>
+                        <a:srgbClr val="C8C9C7"/>
+                      </a:solidFill>
+                      <a:prstDash val="solid"/>
+                      <a:round/>
+                      <a:headEnd type="none" w="med" len="med"/>
+                      <a:tailEnd type="none" w="med" len="med"/>
+                    </a:lnB>
+                    <a:solidFill>
+                      <a:srgbClr val="F2F8F9"/>
+                    </a:solidFill>
+                  </a:tcPr>
+                </a:tc>
+                <a:tc>
+                  <a:txBody>
+                    <a:bodyPr/>
+                    <a:lstStyle/>
+                    <a:p>
+                      <a:pPr algn="r" indent="0" marL="0">
+                        <a:buNone/>
+                      </a:pPr>
+                      <a:r>
+                        <a:rPr lang="en-US" sz="1000" dirty="0">
+                          <a:solidFill>
+                            <a:srgbClr val="3D3935"/>
+                          </a:solidFill>
+                          <a:latin typeface="Diodrum Arabic" pitchFamily="34" charset="0"/>
+                          <a:ea typeface="Diodrum Arabic" pitchFamily="34" charset="-122"/>
+                          <a:cs typeface="Diodrum Arabic" pitchFamily="34" charset="-120"/>
+                        </a:rPr>
+                        <a:t>1.0%</a:t>
+                      </a:r>
+                      <a:endParaRPr lang="en-US" sz="1000" dirty="0">
+                        <a:latin typeface="Diodrum Arabic" charset="0"/>
+                        <a:ea typeface="Diodrum Arabic" charset="0"/>
+                        <a:cs typeface="Diodrum Arabic" charset="0"/>
+                      </a:endParaRPr>
+                    </a:p>
+                  </a:txBody>
+                  <a:tcPr marL="54864" marR="54864" marT="0" marB="0" anchor="ctr">
+                    <a:lnL w="6350" cap="flat" cmpd="sng" algn="ctr">
+                      <a:solidFill>
+                        <a:srgbClr val="C8C9C7"/>
+                      </a:solidFill>
+                      <a:prstDash val="solid"/>
+                      <a:round/>
+                      <a:headEnd type="none" w="med" len="med"/>
+                      <a:tailEnd type="none" w="med" len="med"/>
+                    </a:lnL>
+                    <a:lnR w="6350" cap="flat" cmpd="sng" algn="ctr">
+                      <a:solidFill>
+                        <a:srgbClr val="C8C9C7"/>
+                      </a:solidFill>
+                      <a:prstDash val="solid"/>
+                      <a:round/>
+                      <a:headEnd type="none" w="med" len="med"/>
+                      <a:tailEnd type="none" w="med" len="med"/>
+                    </a:lnR>
+                    <a:lnT w="6350" cap="flat" cmpd="sng" algn="ctr">
+                      <a:solidFill>
+                        <a:srgbClr val="C8C9C7"/>
+                      </a:solidFill>
+                      <a:prstDash val="solid"/>
+                      <a:round/>
+                      <a:headEnd type="none" w="med" len="med"/>
+                      <a:tailEnd type="none" w="med" len="med"/>
+                    </a:lnT>
+                    <a:lnB w="6350" cap="flat" cmpd="sng" algn="ctr">
+                      <a:solidFill>
+                        <a:srgbClr val="C8C9C7"/>
+                      </a:solidFill>
+                      <a:prstDash val="solid"/>
+                      <a:round/>
+                      <a:headEnd type="none" w="med" len="med"/>
+                      <a:tailEnd type="none" w="med" len="med"/>
+                    </a:lnB>
+                    <a:solidFill>
+                      <a:srgbClr val="F2F8F9"/>
+                    </a:solidFill>
+                  </a:tcPr>
+                </a:tc>
+              </a:tr>
+              <a:tr h="239573">
+                <a:tc>
+                  <a:txBody>
+                    <a:bodyPr/>
+                    <a:lstStyle/>
+                    <a:p>
+                      <a:pPr algn="l" indent="0" marL="0">
+                        <a:buNone/>
+                      </a:pPr>
+                      <a:r>
+                        <a:rPr lang="en-US" sz="1000" dirty="0">
+                          <a:solidFill>
+                            <a:srgbClr val="3D3935"/>
+                          </a:solidFill>
+                          <a:latin typeface="Diodrum Arabic" pitchFamily="34" charset="0"/>
+                          <a:ea typeface="Diodrum Arabic" pitchFamily="34" charset="-122"/>
+                          <a:cs typeface="Diodrum Arabic" pitchFamily="34" charset="-120"/>
+                        </a:rPr>
+                        <a:t>UPS (2 hours backup)</a:t>
+                      </a:r>
+                      <a:endParaRPr lang="en-US" sz="1000" dirty="0">
+                        <a:latin typeface="Diodrum Arabic" charset="0"/>
+                        <a:ea typeface="Diodrum Arabic" charset="0"/>
+                        <a:cs typeface="Diodrum Arabic" charset="0"/>
+                      </a:endParaRPr>
+                    </a:p>
+                  </a:txBody>
+                  <a:tcPr marL="54864" marR="54864" marT="0" marB="0" anchor="ctr">
+                    <a:lnL w="6350" cap="flat" cmpd="sng" algn="ctr">
+                      <a:solidFill>
+                        <a:srgbClr val="C8C9C7"/>
+                      </a:solidFill>
+                      <a:prstDash val="solid"/>
+                      <a:round/>
+                      <a:headEnd type="none" w="med" len="med"/>
+                      <a:tailEnd type="none" w="med" len="med"/>
+                    </a:lnL>
+                    <a:lnR w="6350" cap="flat" cmpd="sng" algn="ctr">
+                      <a:solidFill>
+                        <a:srgbClr val="C8C9C7"/>
+                      </a:solidFill>
+                      <a:prstDash val="solid"/>
+                      <a:round/>
+                      <a:headEnd type="none" w="med" len="med"/>
+                      <a:tailEnd type="none" w="med" len="med"/>
+                    </a:lnR>
+                    <a:lnT w="6350" cap="flat" cmpd="sng" algn="ctr">
+                      <a:solidFill>
+                        <a:srgbClr val="C8C9C7"/>
+                      </a:solidFill>
+                      <a:prstDash val="solid"/>
+                      <a:round/>
+                      <a:headEnd type="none" w="med" len="med"/>
+                      <a:tailEnd type="none" w="med" len="med"/>
+                    </a:lnT>
+                    <a:lnB w="6350" cap="flat" cmpd="sng" algn="ctr">
+                      <a:solidFill>
+                        <a:srgbClr val="C8C9C7"/>
+                      </a:solidFill>
+                      <a:prstDash val="solid"/>
+                      <a:round/>
+                      <a:headEnd type="none" w="med" len="med"/>
+                      <a:tailEnd type="none" w="med" len="med"/>
+                    </a:lnB>
+                    <a:solidFill>
+                      <a:srgbClr val="FFFFFF"/>
+                    </a:solidFill>
+                  </a:tcPr>
+                </a:tc>
+                <a:tc>
+                  <a:txBody>
+                    <a:bodyPr/>
+                    <a:lstStyle/>
+                    <a:p>
+                      <a:pPr algn="r" indent="0" marL="0">
+                        <a:buNone/>
+                      </a:pPr>
+                      <a:r>
+                        <a:rPr lang="en-US" sz="1000" dirty="0">
+                          <a:solidFill>
+                            <a:srgbClr val="3D3935"/>
+                          </a:solidFill>
+                          <a:latin typeface="Diodrum Arabic" pitchFamily="34" charset="0"/>
+                          <a:ea typeface="Diodrum Arabic" pitchFamily="34" charset="-122"/>
+                          <a:cs typeface="Diodrum Arabic" pitchFamily="34" charset="-120"/>
+                        </a:rPr>
+                        <a:t>0.34</a:t>
+                      </a:r>
+                      <a:endParaRPr lang="en-US" sz="1000" dirty="0">
+                        <a:latin typeface="Diodrum Arabic" charset="0"/>
+                        <a:ea typeface="Diodrum Arabic" charset="0"/>
+                        <a:cs typeface="Diodrum Arabic" charset="0"/>
+                      </a:endParaRPr>
+                    </a:p>
+                  </a:txBody>
+                  <a:tcPr marL="54864" marR="54864" marT="0" marB="0" anchor="ctr">
+                    <a:lnL w="6350" cap="flat" cmpd="sng" algn="ctr">
+                      <a:solidFill>
+                        <a:srgbClr val="C8C9C7"/>
+                      </a:solidFill>
+                      <a:prstDash val="solid"/>
+                      <a:round/>
+                      <a:headEnd type="none" w="med" len="med"/>
+                      <a:tailEnd type="none" w="med" len="med"/>
+                    </a:lnL>
+                    <a:lnR w="6350" cap="flat" cmpd="sng" algn="ctr">
+                      <a:solidFill>
+                        <a:srgbClr val="C8C9C7"/>
+                      </a:solidFill>
+                      <a:prstDash val="solid"/>
+                      <a:round/>
+                      <a:headEnd type="none" w="med" len="med"/>
+                      <a:tailEnd type="none" w="med" len="med"/>
+                    </a:lnR>
+                    <a:lnT w="6350" cap="flat" cmpd="sng" algn="ctr">
+                      <a:solidFill>
+                        <a:srgbClr val="C8C9C7"/>
+                      </a:solidFill>
+                      <a:prstDash val="solid"/>
+                      <a:round/>
+                      <a:headEnd type="none" w="med" len="med"/>
+                      <a:tailEnd type="none" w="med" len="med"/>
+                    </a:lnT>
+                    <a:lnB w="6350" cap="flat" cmpd="sng" algn="ctr">
+                      <a:solidFill>
+                        <a:srgbClr val="C8C9C7"/>
+                      </a:solidFill>
+                      <a:prstDash val="solid"/>
+                      <a:round/>
+                      <a:headEnd type="none" w="med" len="med"/>
+                      <a:tailEnd type="none" w="med" len="med"/>
+                    </a:lnB>
+                    <a:solidFill>
+                      <a:srgbClr val="FFFFFF"/>
+                    </a:solidFill>
+                  </a:tcPr>
+                </a:tc>
+                <a:tc>
+                  <a:txBody>
+                    <a:bodyPr/>
+                    <a:lstStyle/>
+                    <a:p>
+                      <a:pPr algn="r" indent="0" marL="0">
+                        <a:buNone/>
+                      </a:pPr>
+                      <a:r>
+                        <a:rPr lang="en-US" sz="1000" dirty="0">
+                          <a:solidFill>
+                            <a:srgbClr val="3D3935"/>
+                          </a:solidFill>
+                          <a:latin typeface="Diodrum Arabic" pitchFamily="34" charset="0"/>
+                          <a:ea typeface="Diodrum Arabic" pitchFamily="34" charset="-122"/>
+                          <a:cs typeface="Diodrum Arabic" pitchFamily="34" charset="-120"/>
+                        </a:rPr>
+                        <a:t>0.20</a:t>
+                      </a:r>
+                      <a:endParaRPr lang="en-US" sz="1000" dirty="0">
+                        <a:latin typeface="Diodrum Arabic" charset="0"/>
+                        <a:ea typeface="Diodrum Arabic" charset="0"/>
+                        <a:cs typeface="Diodrum Arabic" charset="0"/>
+                      </a:endParaRPr>
+                    </a:p>
+                  </a:txBody>
+                  <a:tcPr marL="54864" marR="54864" marT="0" marB="0" anchor="ctr">
+                    <a:lnL w="6350" cap="flat" cmpd="sng" algn="ctr">
+                      <a:solidFill>
+                        <a:srgbClr val="C8C9C7"/>
+                      </a:solidFill>
+                      <a:prstDash val="solid"/>
+                      <a:round/>
+                      <a:headEnd type="none" w="med" len="med"/>
+                      <a:tailEnd type="none" w="med" len="med"/>
+                    </a:lnL>
+                    <a:lnR w="6350" cap="flat" cmpd="sng" algn="ctr">
+                      <a:solidFill>
+                        <a:srgbClr val="C8C9C7"/>
+                      </a:solidFill>
+                      <a:prstDash val="solid"/>
+                      <a:round/>
+                      <a:headEnd type="none" w="med" len="med"/>
+                      <a:tailEnd type="none" w="med" len="med"/>
+                    </a:lnR>
+                    <a:lnT w="6350" cap="flat" cmpd="sng" algn="ctr">
+                      <a:solidFill>
+                        <a:srgbClr val="C8C9C7"/>
+                      </a:solidFill>
+                      <a:prstDash val="solid"/>
+                      <a:round/>
+                      <a:headEnd type="none" w="med" len="med"/>
+                      <a:tailEnd type="none" w="med" len="med"/>
+                    </a:lnT>
+                    <a:lnB w="6350" cap="flat" cmpd="sng" algn="ctr">
+                      <a:solidFill>
+                        <a:srgbClr val="C8C9C7"/>
+                      </a:solidFill>
+                      <a:prstDash val="solid"/>
+                      <a:round/>
+                      <a:headEnd type="none" w="med" len="med"/>
+                      <a:tailEnd type="none" w="med" len="med"/>
+                    </a:lnB>
+                    <a:solidFill>
+                      <a:srgbClr val="FFFFFF"/>
+                    </a:solidFill>
+                  </a:tcPr>
+                </a:tc>
+                <a:tc>
+                  <a:txBody>
+                    <a:bodyPr/>
+                    <a:lstStyle/>
+                    <a:p>
+                      <a:pPr algn="r" indent="0" marL="0">
+                        <a:buNone/>
+                      </a:pPr>
+                      <a:r>
+                        <a:rPr lang="en-US" sz="1000" dirty="0">
+                          <a:solidFill>
+                            <a:srgbClr val="3D3935"/>
+                          </a:solidFill>
+                          <a:latin typeface="Diodrum Arabic" pitchFamily="34" charset="0"/>
+                          <a:ea typeface="Diodrum Arabic" pitchFamily="34" charset="-122"/>
+                          <a:cs typeface="Diodrum Arabic" pitchFamily="34" charset="-120"/>
+                        </a:rPr>
+                        <a:t>0.37</a:t>
+                      </a:r>
+                      <a:endParaRPr lang="en-US" sz="1000" dirty="0">
+                        <a:latin typeface="Diodrum Arabic" charset="0"/>
+                        <a:ea typeface="Diodrum Arabic" charset="0"/>
+                        <a:cs typeface="Diodrum Arabic" charset="0"/>
+                      </a:endParaRPr>
+                    </a:p>
+                  </a:txBody>
+                  <a:tcPr marL="54864" marR="54864" marT="0" marB="0" anchor="ctr">
+                    <a:lnL w="6350" cap="flat" cmpd="sng" algn="ctr">
+                      <a:solidFill>
+                        <a:srgbClr val="C8C9C7"/>
+                      </a:solidFill>
+                      <a:prstDash val="solid"/>
+                      <a:round/>
+                      <a:headEnd type="none" w="med" len="med"/>
+                      <a:tailEnd type="none" w="med" len="med"/>
+                    </a:lnL>
+                    <a:lnR w="6350" cap="flat" cmpd="sng" algn="ctr">
+                      <a:solidFill>
+                        <a:srgbClr val="C8C9C7"/>
+                      </a:solidFill>
+                      <a:prstDash val="solid"/>
+                      <a:round/>
+                      <a:headEnd type="none" w="med" len="med"/>
+                      <a:tailEnd type="none" w="med" len="med"/>
+                    </a:lnR>
+                    <a:lnT w="6350" cap="flat" cmpd="sng" algn="ctr">
+                      <a:solidFill>
+                        <a:srgbClr val="C8C9C7"/>
+                      </a:solidFill>
+                      <a:prstDash val="solid"/>
+                      <a:round/>
+                      <a:headEnd type="none" w="med" len="med"/>
+                      <a:tailEnd type="none" w="med" len="med"/>
+                    </a:lnT>
+                    <a:lnB w="6350" cap="flat" cmpd="sng" algn="ctr">
+                      <a:solidFill>
+                        <a:srgbClr val="C8C9C7"/>
+                      </a:solidFill>
+                      <a:prstDash val="solid"/>
+                      <a:round/>
+                      <a:headEnd type="none" w="med" len="med"/>
+                      <a:tailEnd type="none" w="med" len="med"/>
+                    </a:lnB>
+                    <a:solidFill>
+                      <a:srgbClr val="FFFFFF"/>
+                    </a:solidFill>
+                  </a:tcPr>
+                </a:tc>
+                <a:tc>
+                  <a:txBody>
+                    <a:bodyPr/>
+                    <a:lstStyle/>
+                    <a:p>
+                      <a:pPr algn="r" indent="0" marL="0">
+                        <a:buNone/>
+                      </a:pPr>
+                      <a:r>
+                        <a:rPr lang="en-US" sz="1000" b="1" dirty="0">
+                          <a:solidFill>
+                            <a:srgbClr val="3D3935"/>
+                          </a:solidFill>
+                          <a:latin typeface="Diodrum Arabic" pitchFamily="34" charset="0"/>
+                          <a:ea typeface="Diodrum Arabic" pitchFamily="34" charset="-122"/>
+                          <a:cs typeface="Diodrum Arabic" pitchFamily="34" charset="-120"/>
+                        </a:rPr>
+                        <a:t>0.91</a:t>
+                      </a:r>
+                      <a:endParaRPr lang="en-US" sz="1000" dirty="0">
+                        <a:latin typeface="Diodrum Arabic" charset="0"/>
+                        <a:ea typeface="Diodrum Arabic" charset="0"/>
+                        <a:cs typeface="Diodrum Arabic" charset="0"/>
+                      </a:endParaRPr>
+                    </a:p>
+                  </a:txBody>
+                  <a:tcPr marL="54864" marR="54864" marT="0" marB="0" anchor="ctr">
+                    <a:lnL w="6350" cap="flat" cmpd="sng" algn="ctr">
+                      <a:solidFill>
+                        <a:srgbClr val="C8C9C7"/>
+                      </a:solidFill>
+                      <a:prstDash val="solid"/>
+                      <a:round/>
+                      <a:headEnd type="none" w="med" len="med"/>
+                      <a:tailEnd type="none" w="med" len="med"/>
+                    </a:lnL>
+                    <a:lnR w="6350" cap="flat" cmpd="sng" algn="ctr">
+                      <a:solidFill>
+                        <a:srgbClr val="C8C9C7"/>
+                      </a:solidFill>
+                      <a:prstDash val="solid"/>
+                      <a:round/>
+                      <a:headEnd type="none" w="med" len="med"/>
+                      <a:tailEnd type="none" w="med" len="med"/>
+                    </a:lnR>
+                    <a:lnT w="6350" cap="flat" cmpd="sng" algn="ctr">
+                      <a:solidFill>
+                        <a:srgbClr val="C8C9C7"/>
+                      </a:solidFill>
+                      <a:prstDash val="solid"/>
+                      <a:round/>
+                      <a:headEnd type="none" w="med" len="med"/>
+                      <a:tailEnd type="none" w="med" len="med"/>
+                    </a:lnT>
+                    <a:lnB w="6350" cap="flat" cmpd="sng" algn="ctr">
+                      <a:solidFill>
+                        <a:srgbClr val="C8C9C7"/>
+                      </a:solidFill>
+                      <a:prstDash val="solid"/>
+                      <a:round/>
+                      <a:headEnd type="none" w="med" len="med"/>
+                      <a:tailEnd type="none" w="med" len="med"/>
+                    </a:lnB>
+                    <a:solidFill>
+                      <a:srgbClr val="FFFFFF"/>
+                    </a:solidFill>
+                  </a:tcPr>
+                </a:tc>
+                <a:tc>
+                  <a:txBody>
+                    <a:bodyPr/>
+                    <a:lstStyle/>
+                    <a:p>
+                      <a:pPr algn="r" indent="0" marL="0">
+                        <a:buNone/>
+                      </a:pPr>
+                      <a:r>
+                        <a:rPr lang="en-US" sz="1000" dirty="0">
+                          <a:solidFill>
+                            <a:srgbClr val="3D3935"/>
+                          </a:solidFill>
+                          <a:latin typeface="Diodrum Arabic" pitchFamily="34" charset="0"/>
+                          <a:ea typeface="Diodrum Arabic" pitchFamily="34" charset="-122"/>
+                          <a:cs typeface="Diodrum Arabic" pitchFamily="34" charset="-120"/>
+                        </a:rPr>
+                        <a:t>1.5%</a:t>
+                      </a:r>
+                      <a:endParaRPr lang="en-US" sz="1000" dirty="0">
+                        <a:latin typeface="Diodrum Arabic" charset="0"/>
+                        <a:ea typeface="Diodrum Arabic" charset="0"/>
+                        <a:cs typeface="Diodrum Arabic" charset="0"/>
+                      </a:endParaRPr>
+                    </a:p>
+                  </a:txBody>
+                  <a:tcPr marL="54864" marR="54864" marT="0" marB="0" anchor="ctr">
+                    <a:lnL w="6350" cap="flat" cmpd="sng" algn="ctr">
+                      <a:solidFill>
+                        <a:srgbClr val="C8C9C7"/>
+                      </a:solidFill>
+                      <a:prstDash val="solid"/>
+                      <a:round/>
+                      <a:headEnd type="none" w="med" len="med"/>
+                      <a:tailEnd type="none" w="med" len="med"/>
+                    </a:lnL>
+                    <a:lnR w="6350" cap="flat" cmpd="sng" algn="ctr">
+                      <a:solidFill>
+                        <a:srgbClr val="C8C9C7"/>
+                      </a:solidFill>
+                      <a:prstDash val="solid"/>
+                      <a:round/>
+                      <a:headEnd type="none" w="med" len="med"/>
+                      <a:tailEnd type="none" w="med" len="med"/>
+                    </a:lnR>
+                    <a:lnT w="6350" cap="flat" cmpd="sng" algn="ctr">
+                      <a:solidFill>
+                        <a:srgbClr val="C8C9C7"/>
+                      </a:solidFill>
+                      <a:prstDash val="solid"/>
+                      <a:round/>
+                      <a:headEnd type="none" w="med" len="med"/>
+                      <a:tailEnd type="none" w="med" len="med"/>
+                    </a:lnT>
+                    <a:lnB w="6350" cap="flat" cmpd="sng" algn="ctr">
+                      <a:solidFill>
+                        <a:srgbClr val="C8C9C7"/>
+                      </a:solidFill>
+                      <a:prstDash val="solid"/>
+                      <a:round/>
+                      <a:headEnd type="none" w="med" len="med"/>
+                      <a:tailEnd type="none" w="med" len="med"/>
+                    </a:lnB>
+                    <a:solidFill>
+                      <a:srgbClr val="FFFFFF"/>
+                    </a:solidFill>
+                  </a:tcPr>
+                </a:tc>
+              </a:tr>
+              <a:tr h="239573">
+                <a:tc>
+                  <a:txBody>
+                    <a:bodyPr/>
+                    <a:lstStyle/>
+                    <a:p>
+                      <a:pPr algn="l" indent="0" marL="0">
+                        <a:buNone/>
+                      </a:pPr>
+                      <a:r>
+                        <a:rPr lang="en-US" sz="1000" dirty="0">
+                          <a:solidFill>
+                            <a:srgbClr val="3D3935"/>
+                          </a:solidFill>
+                          <a:latin typeface="Diodrum Arabic" pitchFamily="34" charset="0"/>
+                          <a:ea typeface="Diodrum Arabic" pitchFamily="34" charset="-122"/>
+                          <a:cs typeface="Diodrum Arabic" pitchFamily="34" charset="-120"/>
+                        </a:rPr>
+                        <a:t>Poles, field cabinets and network</a:t>
+                      </a:r>
+                      <a:endParaRPr lang="en-US" sz="1000" dirty="0">
+                        <a:latin typeface="Diodrum Arabic" charset="0"/>
+                        <a:ea typeface="Diodrum Arabic" charset="0"/>
+                        <a:cs typeface="Diodrum Arabic" charset="0"/>
+                      </a:endParaRPr>
+                    </a:p>
+                  </a:txBody>
+                  <a:tcPr marL="54864" marR="54864" marT="0" marB="0" anchor="ctr">
+                    <a:lnL w="6350" cap="flat" cmpd="sng" algn="ctr">
+                      <a:solidFill>
+                        <a:srgbClr val="C8C9C7"/>
+                      </a:solidFill>
+                      <a:prstDash val="solid"/>
+                      <a:round/>
+                      <a:headEnd type="none" w="med" len="med"/>
+                      <a:tailEnd type="none" w="med" len="med"/>
+                    </a:lnL>
+                    <a:lnR w="6350" cap="flat" cmpd="sng" algn="ctr">
+                      <a:solidFill>
+                        <a:srgbClr val="C8C9C7"/>
+                      </a:solidFill>
+                      <a:prstDash val="solid"/>
+                      <a:round/>
+                      <a:headEnd type="none" w="med" len="med"/>
+                      <a:tailEnd type="none" w="med" len="med"/>
+                    </a:lnR>
+                    <a:lnT w="6350" cap="flat" cmpd="sng" algn="ctr">
+                      <a:solidFill>
+                        <a:srgbClr val="C8C9C7"/>
+                      </a:solidFill>
+                      <a:prstDash val="solid"/>
+                      <a:round/>
+                      <a:headEnd type="none" w="med" len="med"/>
+                      <a:tailEnd type="none" w="med" len="med"/>
+                    </a:lnT>
+                    <a:lnB w="6350" cap="flat" cmpd="sng" algn="ctr">
+                      <a:solidFill>
+                        <a:srgbClr val="C8C9C7"/>
+                      </a:solidFill>
+                      <a:prstDash val="solid"/>
+                      <a:round/>
+                      <a:headEnd type="none" w="med" len="med"/>
+                      <a:tailEnd type="none" w="med" len="med"/>
+                    </a:lnB>
+                    <a:solidFill>
+                      <a:srgbClr val="F2F8F9"/>
+                    </a:solidFill>
+                  </a:tcPr>
+                </a:tc>
+                <a:tc>
+                  <a:txBody>
+                    <a:bodyPr/>
+                    <a:lstStyle/>
+                    <a:p>
+                      <a:pPr algn="r" indent="0" marL="0">
+                        <a:buNone/>
+                      </a:pPr>
+                      <a:r>
+                        <a:rPr lang="en-US" sz="1000" dirty="0">
+                          <a:solidFill>
+                            <a:srgbClr val="3D3935"/>
+                          </a:solidFill>
+                          <a:latin typeface="Diodrum Arabic" pitchFamily="34" charset="0"/>
+                          <a:ea typeface="Diodrum Arabic" pitchFamily="34" charset="-122"/>
+                          <a:cs typeface="Diodrum Arabic" pitchFamily="34" charset="-120"/>
+                        </a:rPr>
+                        <a:t>5.18</a:t>
+                      </a:r>
+                      <a:endParaRPr lang="en-US" sz="1000" dirty="0">
+                        <a:latin typeface="Diodrum Arabic" charset="0"/>
+                        <a:ea typeface="Diodrum Arabic" charset="0"/>
+                        <a:cs typeface="Diodrum Arabic" charset="0"/>
+                      </a:endParaRPr>
+                    </a:p>
+                  </a:txBody>
+                  <a:tcPr marL="54864" marR="54864" marT="0" marB="0" anchor="ctr">
+                    <a:lnL w="6350" cap="flat" cmpd="sng" algn="ctr">
+                      <a:solidFill>
+                        <a:srgbClr val="C8C9C7"/>
+                      </a:solidFill>
+                      <a:prstDash val="solid"/>
+                      <a:round/>
+                      <a:headEnd type="none" w="med" len="med"/>
+                      <a:tailEnd type="none" w="med" len="med"/>
+                    </a:lnL>
+                    <a:lnR w="6350" cap="flat" cmpd="sng" algn="ctr">
+                      <a:solidFill>
+                        <a:srgbClr val="C8C9C7"/>
+                      </a:solidFill>
+                      <a:prstDash val="solid"/>
+                      <a:round/>
+                      <a:headEnd type="none" w="med" len="med"/>
+                      <a:tailEnd type="none" w="med" len="med"/>
+                    </a:lnR>
+                    <a:lnT w="6350" cap="flat" cmpd="sng" algn="ctr">
+                      <a:solidFill>
+                        <a:srgbClr val="C8C9C7"/>
+                      </a:solidFill>
+                      <a:prstDash val="solid"/>
+                      <a:round/>
+                      <a:headEnd type="none" w="med" len="med"/>
+                      <a:tailEnd type="none" w="med" len="med"/>
+                    </a:lnT>
+                    <a:lnB w="6350" cap="flat" cmpd="sng" algn="ctr">
+                      <a:solidFill>
+                        <a:srgbClr val="C8C9C7"/>
+                      </a:solidFill>
+                      <a:prstDash val="solid"/>
+                      <a:round/>
+                      <a:headEnd type="none" w="med" len="med"/>
+                      <a:tailEnd type="none" w="med" len="med"/>
+                    </a:lnB>
+                    <a:solidFill>
+                      <a:srgbClr val="F2F8F9"/>
+                    </a:solidFill>
+                  </a:tcPr>
+                </a:tc>
+                <a:tc>
+                  <a:txBody>
+                    <a:bodyPr/>
+                    <a:lstStyle/>
+                    <a:p>
+                      <a:pPr algn="r" indent="0" marL="0">
+                        <a:buNone/>
+                      </a:pPr>
+                      <a:r>
+                        <a:rPr lang="en-US" sz="1000" dirty="0">
+                          <a:solidFill>
+                            <a:srgbClr val="3D3935"/>
+                          </a:solidFill>
+                          <a:latin typeface="Diodrum Arabic" pitchFamily="34" charset="0"/>
+                          <a:ea typeface="Diodrum Arabic" pitchFamily="34" charset="-122"/>
+                          <a:cs typeface="Diodrum Arabic" pitchFamily="34" charset="-120"/>
+                        </a:rPr>
+                        <a:t>2.02</a:t>
+                      </a:r>
+                      <a:endParaRPr lang="en-US" sz="1000" dirty="0">
+                        <a:latin typeface="Diodrum Arabic" charset="0"/>
+                        <a:ea typeface="Diodrum Arabic" charset="0"/>
+                        <a:cs typeface="Diodrum Arabic" charset="0"/>
+                      </a:endParaRPr>
+                    </a:p>
+                  </a:txBody>
+                  <a:tcPr marL="54864" marR="54864" marT="0" marB="0" anchor="ctr">
+                    <a:lnL w="6350" cap="flat" cmpd="sng" algn="ctr">
+                      <a:solidFill>
+                        <a:srgbClr val="C8C9C7"/>
+                      </a:solidFill>
+                      <a:prstDash val="solid"/>
+                      <a:round/>
+                      <a:headEnd type="none" w="med" len="med"/>
+                      <a:tailEnd type="none" w="med" len="med"/>
+                    </a:lnL>
+                    <a:lnR w="6350" cap="flat" cmpd="sng" algn="ctr">
+                      <a:solidFill>
+                        <a:srgbClr val="C8C9C7"/>
+                      </a:solidFill>
+                      <a:prstDash val="solid"/>
+                      <a:round/>
+                      <a:headEnd type="none" w="med" len="med"/>
+                      <a:tailEnd type="none" w="med" len="med"/>
+                    </a:lnR>
+                    <a:lnT w="6350" cap="flat" cmpd="sng" algn="ctr">
+                      <a:solidFill>
+                        <a:srgbClr val="C8C9C7"/>
+                      </a:solidFill>
+                      <a:prstDash val="solid"/>
+                      <a:round/>
+                      <a:headEnd type="none" w="med" len="med"/>
+                      <a:tailEnd type="none" w="med" len="med"/>
+                    </a:lnT>
+                    <a:lnB w="6350" cap="flat" cmpd="sng" algn="ctr">
+                      <a:solidFill>
+                        <a:srgbClr val="C8C9C7"/>
+                      </a:solidFill>
+                      <a:prstDash val="solid"/>
+                      <a:round/>
+                      <a:headEnd type="none" w="med" len="med"/>
+                      <a:tailEnd type="none" w="med" len="med"/>
+                    </a:lnB>
+                    <a:solidFill>
+                      <a:srgbClr val="F2F8F9"/>
+                    </a:solidFill>
+                  </a:tcPr>
+                </a:tc>
+                <a:tc>
+                  <a:txBody>
+                    <a:bodyPr/>
+                    <a:lstStyle/>
+                    <a:p>
+                      <a:pPr algn="r" indent="0" marL="0">
+                        <a:buNone/>
+                      </a:pPr>
+                      <a:r>
+                        <a:rPr lang="en-US" sz="1000" dirty="0">
+                          <a:solidFill>
+                            <a:srgbClr val="3D3935"/>
+                          </a:solidFill>
+                          <a:latin typeface="Diodrum Arabic" pitchFamily="34" charset="0"/>
+                          <a:ea typeface="Diodrum Arabic" pitchFamily="34" charset="-122"/>
+                          <a:cs typeface="Diodrum Arabic" pitchFamily="34" charset="-120"/>
+                        </a:rPr>
+                        <a:t>8.59</a:t>
+                      </a:r>
+                      <a:endParaRPr lang="en-US" sz="1000" dirty="0">
+                        <a:latin typeface="Diodrum Arabic" charset="0"/>
+                        <a:ea typeface="Diodrum Arabic" charset="0"/>
+                        <a:cs typeface="Diodrum Arabic" charset="0"/>
+                      </a:endParaRPr>
+                    </a:p>
+                  </a:txBody>
+                  <a:tcPr marL="54864" marR="54864" marT="0" marB="0" anchor="ctr">
+                    <a:lnL w="6350" cap="flat" cmpd="sng" algn="ctr">
+                      <a:solidFill>
+                        <a:srgbClr val="C8C9C7"/>
+                      </a:solidFill>
+                      <a:prstDash val="solid"/>
+                      <a:round/>
+                      <a:headEnd type="none" w="med" len="med"/>
+                      <a:tailEnd type="none" w="med" len="med"/>
+                    </a:lnL>
+                    <a:lnR w="6350" cap="flat" cmpd="sng" algn="ctr">
+                      <a:solidFill>
+                        <a:srgbClr val="C8C9C7"/>
+                      </a:solidFill>
+                      <a:prstDash val="solid"/>
+                      <a:round/>
+                      <a:headEnd type="none" w="med" len="med"/>
+                      <a:tailEnd type="none" w="med" len="med"/>
+                    </a:lnR>
+                    <a:lnT w="6350" cap="flat" cmpd="sng" algn="ctr">
+                      <a:solidFill>
+                        <a:srgbClr val="C8C9C7"/>
+                      </a:solidFill>
+                      <a:prstDash val="solid"/>
+                      <a:round/>
+                      <a:headEnd type="none" w="med" len="med"/>
+                      <a:tailEnd type="none" w="med" len="med"/>
+                    </a:lnT>
+                    <a:lnB w="6350" cap="flat" cmpd="sng" algn="ctr">
+                      <a:solidFill>
+                        <a:srgbClr val="C8C9C7"/>
+                      </a:solidFill>
+                      <a:prstDash val="solid"/>
+                      <a:round/>
+                      <a:headEnd type="none" w="med" len="med"/>
+                      <a:tailEnd type="none" w="med" len="med"/>
+                    </a:lnB>
+                    <a:solidFill>
+                      <a:srgbClr val="F2F8F9"/>
+                    </a:solidFill>
+                  </a:tcPr>
+                </a:tc>
+                <a:tc>
+                  <a:txBody>
+                    <a:bodyPr/>
+                    <a:lstStyle/>
+                    <a:p>
+                      <a:pPr algn="r" indent="0" marL="0">
+                        <a:buNone/>
+                      </a:pPr>
+                      <a:r>
+                        <a:rPr lang="en-US" sz="1000" b="1" dirty="0">
+                          <a:solidFill>
+                            <a:srgbClr val="3D3935"/>
+                          </a:solidFill>
+                          <a:latin typeface="Diodrum Arabic" pitchFamily="34" charset="0"/>
+                          <a:ea typeface="Diodrum Arabic" pitchFamily="34" charset="-122"/>
+                          <a:cs typeface="Diodrum Arabic" pitchFamily="34" charset="-120"/>
+                        </a:rPr>
+                        <a:t>15.79</a:t>
+                      </a:r>
+                      <a:endParaRPr lang="en-US" sz="1000" dirty="0">
+                        <a:latin typeface="Diodrum Arabic" charset="0"/>
+                        <a:ea typeface="Diodrum Arabic" charset="0"/>
+                        <a:cs typeface="Diodrum Arabic" charset="0"/>
+                      </a:endParaRPr>
+                    </a:p>
+                  </a:txBody>
+                  <a:tcPr marL="54864" marR="54864" marT="0" marB="0" anchor="ctr">
+                    <a:lnL w="6350" cap="flat" cmpd="sng" algn="ctr">
+                      <a:solidFill>
+                        <a:srgbClr val="C8C9C7"/>
+                      </a:solidFill>
+                      <a:prstDash val="solid"/>
+                      <a:round/>
+                      <a:headEnd type="none" w="med" len="med"/>
+                      <a:tailEnd type="none" w="med" len="med"/>
+                    </a:lnL>
+                    <a:lnR w="6350" cap="flat" cmpd="sng" algn="ctr">
+                      <a:solidFill>
+                        <a:srgbClr val="C8C9C7"/>
+                      </a:solidFill>
+                      <a:prstDash val="solid"/>
+                      <a:round/>
+                      <a:headEnd type="none" w="med" len="med"/>
+                      <a:tailEnd type="none" w="med" len="med"/>
+                    </a:lnR>
+                    <a:lnT w="6350" cap="flat" cmpd="sng" algn="ctr">
+                      <a:solidFill>
+                        <a:srgbClr val="C8C9C7"/>
+                      </a:solidFill>
+                      <a:prstDash val="solid"/>
+                      <a:round/>
+                      <a:headEnd type="none" w="med" len="med"/>
+                      <a:tailEnd type="none" w="med" len="med"/>
+                    </a:lnT>
+                    <a:lnB w="6350" cap="flat" cmpd="sng" algn="ctr">
+                      <a:solidFill>
+                        <a:srgbClr val="C8C9C7"/>
+                      </a:solidFill>
+                      <a:prstDash val="solid"/>
+                      <a:round/>
+                      <a:headEnd type="none" w="med" len="med"/>
+                      <a:tailEnd type="none" w="med" len="med"/>
+                    </a:lnB>
+                    <a:solidFill>
+                      <a:srgbClr val="F2F8F9"/>
+                    </a:solidFill>
+                  </a:tcPr>
+                </a:tc>
+                <a:tc>
+                  <a:txBody>
+                    <a:bodyPr/>
+                    <a:lstStyle/>
+                    <a:p>
+                      <a:pPr algn="r" indent="0" marL="0">
+                        <a:buNone/>
+                      </a:pPr>
+                      <a:r>
+                        <a:rPr lang="en-US" sz="1000" dirty="0">
+                          <a:solidFill>
+                            <a:srgbClr val="3D3935"/>
+                          </a:solidFill>
+                          <a:latin typeface="Diodrum Arabic" pitchFamily="34" charset="0"/>
+                          <a:ea typeface="Diodrum Arabic" pitchFamily="34" charset="-122"/>
+                          <a:cs typeface="Diodrum Arabic" pitchFamily="34" charset="-120"/>
+                        </a:rPr>
+                        <a:t>25.5%</a:t>
+                      </a:r>
+                      <a:endParaRPr lang="en-US" sz="1000" dirty="0">
+                        <a:latin typeface="Diodrum Arabic" charset="0"/>
+                        <a:ea typeface="Diodrum Arabic" charset="0"/>
+                        <a:cs typeface="Diodrum Arabic" charset="0"/>
+                      </a:endParaRPr>
+                    </a:p>
+                  </a:txBody>
+                  <a:tcPr marL="54864" marR="54864" marT="0" marB="0" anchor="ctr">
+                    <a:lnL w="6350" cap="flat" cmpd="sng" algn="ctr">
+                      <a:solidFill>
+                        <a:srgbClr val="C8C9C7"/>
+                      </a:solidFill>
+                      <a:prstDash val="solid"/>
+                      <a:round/>
+                      <a:headEnd type="none" w="med" len="med"/>
+                      <a:tailEnd type="none" w="med" len="med"/>
+                    </a:lnL>
+                    <a:lnR w="6350" cap="flat" cmpd="sng" algn="ctr">
+                      <a:solidFill>
+                        <a:srgbClr val="C8C9C7"/>
+                      </a:solidFill>
+                      <a:prstDash val="solid"/>
+                      <a:round/>
+                      <a:headEnd type="none" w="med" len="med"/>
+                      <a:tailEnd type="none" w="med" len="med"/>
+                    </a:lnR>
+                    <a:lnT w="6350" cap="flat" cmpd="sng" algn="ctr">
+                      <a:solidFill>
+                        <a:srgbClr val="C8C9C7"/>
+                      </a:solidFill>
+                      <a:prstDash val="solid"/>
+                      <a:round/>
+                      <a:headEnd type="none" w="med" len="med"/>
+                      <a:tailEnd type="none" w="med" len="med"/>
+                    </a:lnT>
+                    <a:lnB w="6350" cap="flat" cmpd="sng" algn="ctr">
+                      <a:solidFill>
+                        <a:srgbClr val="C8C9C7"/>
+                      </a:solidFill>
+                      <a:prstDash val="solid"/>
+                      <a:round/>
+                      <a:headEnd type="none" w="med" len="med"/>
+                      <a:tailEnd type="none" w="med" len="med"/>
+                    </a:lnB>
+                    <a:solidFill>
+                      <a:srgbClr val="F2F8F9"/>
+                    </a:solidFill>
+                  </a:tcPr>
+                </a:tc>
+              </a:tr>
+              <a:tr h="239573">
+                <a:tc>
+                  <a:txBody>
+                    <a:bodyPr/>
+                    <a:lstStyle/>
+                    <a:p>
+                      <a:pPr algn="l" indent="0" marL="0">
+                        <a:buNone/>
+                      </a:pPr>
+                      <a:r>
+                        <a:rPr lang="en-US" sz="1000" dirty="0">
+                          <a:solidFill>
+                            <a:srgbClr val="3D3935"/>
+                          </a:solidFill>
+                          <a:latin typeface="Diodrum Arabic" pitchFamily="34" charset="0"/>
+                          <a:ea typeface="Diodrum Arabic" pitchFamily="34" charset="-122"/>
+                          <a:cs typeface="Diodrum Arabic" pitchFamily="34" charset="-120"/>
+                        </a:rPr>
+                        <a:t>Civil works (trenches, duct banks, poles)</a:t>
+                      </a:r>
+                      <a:endParaRPr lang="en-US" sz="1000" dirty="0">
+                        <a:latin typeface="Diodrum Arabic" charset="0"/>
+                        <a:ea typeface="Diodrum Arabic" charset="0"/>
+                        <a:cs typeface="Diodrum Arabic" charset="0"/>
+                      </a:endParaRPr>
+                    </a:p>
+                  </a:txBody>
+                  <a:tcPr marL="54864" marR="54864" marT="0" marB="0" anchor="ctr">
+                    <a:lnL w="6350" cap="flat" cmpd="sng" algn="ctr">
+                      <a:solidFill>
+                        <a:srgbClr val="C8C9C7"/>
+                      </a:solidFill>
+                      <a:prstDash val="solid"/>
+                      <a:round/>
+                      <a:headEnd type="none" w="med" len="med"/>
+                      <a:tailEnd type="none" w="med" len="med"/>
+                    </a:lnL>
+                    <a:lnR w="6350" cap="flat" cmpd="sng" algn="ctr">
+                      <a:solidFill>
+                        <a:srgbClr val="C8C9C7"/>
+                      </a:solidFill>
+                      <a:prstDash val="solid"/>
+                      <a:round/>
+                      <a:headEnd type="none" w="med" len="med"/>
+                      <a:tailEnd type="none" w="med" len="med"/>
+                    </a:lnR>
+                    <a:lnT w="6350" cap="flat" cmpd="sng" algn="ctr">
+                      <a:solidFill>
+                        <a:srgbClr val="C8C9C7"/>
+                      </a:solidFill>
+                      <a:prstDash val="solid"/>
+                      <a:round/>
+                      <a:headEnd type="none" w="med" len="med"/>
+                      <a:tailEnd type="none" w="med" len="med"/>
+                    </a:lnT>
+                    <a:lnB w="6350" cap="flat" cmpd="sng" algn="ctr">
+                      <a:solidFill>
+                        <a:srgbClr val="C8C9C7"/>
+                      </a:solidFill>
+                      <a:prstDash val="solid"/>
+                      <a:round/>
+                      <a:headEnd type="none" w="med" len="med"/>
+                      <a:tailEnd type="none" w="med" len="med"/>
+                    </a:lnB>
+                    <a:solidFill>
+                      <a:srgbClr val="FFFFFF"/>
+                    </a:solidFill>
+                  </a:tcPr>
+                </a:tc>
+                <a:tc>
+                  <a:txBody>
+                    <a:bodyPr/>
+                    <a:lstStyle/>
+                    <a:p>
+                      <a:pPr algn="r" indent="0" marL="0">
+                        <a:buNone/>
+                      </a:pPr>
+                      <a:r>
+                        <a:rPr lang="en-US" sz="1000" dirty="0">
+                          <a:solidFill>
+                            <a:srgbClr val="3D3935"/>
+                          </a:solidFill>
+                          <a:latin typeface="Diodrum Arabic" pitchFamily="34" charset="0"/>
+                          <a:ea typeface="Diodrum Arabic" pitchFamily="34" charset="-122"/>
+                          <a:cs typeface="Diodrum Arabic" pitchFamily="34" charset="-120"/>
+                        </a:rPr>
+                        <a:t>4.47</a:t>
+                      </a:r>
+                      <a:endParaRPr lang="en-US" sz="1000" dirty="0">
+                        <a:latin typeface="Diodrum Arabic" charset="0"/>
+                        <a:ea typeface="Diodrum Arabic" charset="0"/>
+                        <a:cs typeface="Diodrum Arabic" charset="0"/>
+                      </a:endParaRPr>
+                    </a:p>
+                  </a:txBody>
+                  <a:tcPr marL="54864" marR="54864" marT="0" marB="0" anchor="ctr">
+                    <a:lnL w="6350" cap="flat" cmpd="sng" algn="ctr">
+                      <a:solidFill>
+                        <a:srgbClr val="C8C9C7"/>
+                      </a:solidFill>
+                      <a:prstDash val="solid"/>
+                      <a:round/>
+                      <a:headEnd type="none" w="med" len="med"/>
+                      <a:tailEnd type="none" w="med" len="med"/>
+                    </a:lnL>
+                    <a:lnR w="6350" cap="flat" cmpd="sng" algn="ctr">
+                      <a:solidFill>
+                        <a:srgbClr val="C8C9C7"/>
+                      </a:solidFill>
+                      <a:prstDash val="solid"/>
+                      <a:round/>
+                      <a:headEnd type="none" w="med" len="med"/>
+                      <a:tailEnd type="none" w="med" len="med"/>
+                    </a:lnR>
+                    <a:lnT w="6350" cap="flat" cmpd="sng" algn="ctr">
+                      <a:solidFill>
+                        <a:srgbClr val="C8C9C7"/>
+                      </a:solidFill>
+                      <a:prstDash val="solid"/>
+                      <a:round/>
+                      <a:headEnd type="none" w="med" len="med"/>
+                      <a:tailEnd type="none" w="med" len="med"/>
+                    </a:lnT>
+                    <a:lnB w="6350" cap="flat" cmpd="sng" algn="ctr">
+                      <a:solidFill>
+                        <a:srgbClr val="C8C9C7"/>
+                      </a:solidFill>
+                      <a:prstDash val="solid"/>
+                      <a:round/>
+                      <a:headEnd type="none" w="med" len="med"/>
+                      <a:tailEnd type="none" w="med" len="med"/>
+                    </a:lnB>
+                    <a:solidFill>
+                      <a:srgbClr val="FFFFFF"/>
+                    </a:solidFill>
+                  </a:tcPr>
+                </a:tc>
+                <a:tc>
+                  <a:txBody>
+                    <a:bodyPr/>
+                    <a:lstStyle/>
+                    <a:p>
+                      <a:pPr algn="r" indent="0" marL="0">
+                        <a:buNone/>
+                      </a:pPr>
+                      <a:r>
+                        <a:rPr lang="en-US" sz="1000" dirty="0">
+                          <a:solidFill>
+                            <a:srgbClr val="3D3935"/>
+                          </a:solidFill>
+                          <a:latin typeface="Diodrum Arabic" pitchFamily="34" charset="0"/>
+                          <a:ea typeface="Diodrum Arabic" pitchFamily="34" charset="-122"/>
+                          <a:cs typeface="Diodrum Arabic" pitchFamily="34" charset="-120"/>
+                        </a:rPr>
+                        <a:t>2.44</a:t>
+                      </a:r>
+                      <a:endParaRPr lang="en-US" sz="1000" dirty="0">
+                        <a:latin typeface="Diodrum Arabic" charset="0"/>
+                        <a:ea typeface="Diodrum Arabic" charset="0"/>
+                        <a:cs typeface="Diodrum Arabic" charset="0"/>
+                      </a:endParaRPr>
+                    </a:p>
+                  </a:txBody>
+                  <a:tcPr marL="54864" marR="54864" marT="0" marB="0" anchor="ctr">
+                    <a:lnL w="6350" cap="flat" cmpd="sng" algn="ctr">
+                      <a:solidFill>
+                        <a:srgbClr val="C8C9C7"/>
+                      </a:solidFill>
+                      <a:prstDash val="solid"/>
+                      <a:round/>
+                      <a:headEnd type="none" w="med" len="med"/>
+                      <a:tailEnd type="none" w="med" len="med"/>
+                    </a:lnL>
+                    <a:lnR w="6350" cap="flat" cmpd="sng" algn="ctr">
+                      <a:solidFill>
+                        <a:srgbClr val="C8C9C7"/>
+                      </a:solidFill>
+                      <a:prstDash val="solid"/>
+                      <a:round/>
+                      <a:headEnd type="none" w="med" len="med"/>
+                      <a:tailEnd type="none" w="med" len="med"/>
+                    </a:lnR>
+                    <a:lnT w="6350" cap="flat" cmpd="sng" algn="ctr">
+                      <a:solidFill>
+                        <a:srgbClr val="C8C9C7"/>
+                      </a:solidFill>
+                      <a:prstDash val="solid"/>
+                      <a:round/>
+                      <a:headEnd type="none" w="med" len="med"/>
+                      <a:tailEnd type="none" w="med" len="med"/>
+                    </a:lnT>
+                    <a:lnB w="6350" cap="flat" cmpd="sng" algn="ctr">
+                      <a:solidFill>
+                        <a:srgbClr val="C8C9C7"/>
+                      </a:solidFill>
+                      <a:prstDash val="solid"/>
+                      <a:round/>
+                      <a:headEnd type="none" w="med" len="med"/>
+                      <a:tailEnd type="none" w="med" len="med"/>
+                    </a:lnB>
+                    <a:solidFill>
+                      <a:srgbClr val="FFFFFF"/>
+                    </a:solidFill>
+                  </a:tcPr>
+                </a:tc>
+                <a:tc>
+                  <a:txBody>
+                    <a:bodyPr/>
+                    <a:lstStyle/>
+                    <a:p>
+                      <a:pPr algn="r" indent="0" marL="0">
+                        <a:buNone/>
+                      </a:pPr>
+                      <a:r>
+                        <a:rPr lang="en-US" sz="1000" dirty="0">
+                          <a:solidFill>
+                            <a:srgbClr val="3D3935"/>
+                          </a:solidFill>
+                          <a:latin typeface="Diodrum Arabic" pitchFamily="34" charset="0"/>
+                          <a:ea typeface="Diodrum Arabic" pitchFamily="34" charset="-122"/>
+                          <a:cs typeface="Diodrum Arabic" pitchFamily="34" charset="-120"/>
+                        </a:rPr>
+                        <a:t>1.57</a:t>
+                      </a:r>
+                      <a:endParaRPr lang="en-US" sz="1000" dirty="0">
+                        <a:latin typeface="Diodrum Arabic" charset="0"/>
+                        <a:ea typeface="Diodrum Arabic" charset="0"/>
+                        <a:cs typeface="Diodrum Arabic" charset="0"/>
+                      </a:endParaRPr>
+                    </a:p>
+                  </a:txBody>
+                  <a:tcPr marL="54864" marR="54864" marT="0" marB="0" anchor="ctr">
+                    <a:lnL w="6350" cap="flat" cmpd="sng" algn="ctr">
+                      <a:solidFill>
+                        <a:srgbClr val="C8C9C7"/>
+                      </a:solidFill>
+                      <a:prstDash val="solid"/>
+                      <a:round/>
+                      <a:headEnd type="none" w="med" len="med"/>
+                      <a:tailEnd type="none" w="med" len="med"/>
+                    </a:lnL>
+                    <a:lnR w="6350" cap="flat" cmpd="sng" algn="ctr">
+                      <a:solidFill>
+                        <a:srgbClr val="C8C9C7"/>
+                      </a:solidFill>
+                      <a:prstDash val="solid"/>
+                      <a:round/>
+                      <a:headEnd type="none" w="med" len="med"/>
+                      <a:tailEnd type="none" w="med" len="med"/>
+                    </a:lnR>
+                    <a:lnT w="6350" cap="flat" cmpd="sng" algn="ctr">
+                      <a:solidFill>
+                        <a:srgbClr val="C8C9C7"/>
+                      </a:solidFill>
+                      <a:prstDash val="solid"/>
+                      <a:round/>
+                      <a:headEnd type="none" w="med" len="med"/>
+                      <a:tailEnd type="none" w="med" len="med"/>
+                    </a:lnT>
+                    <a:lnB w="6350" cap="flat" cmpd="sng" algn="ctr">
+                      <a:solidFill>
+                        <a:srgbClr val="C8C9C7"/>
+                      </a:solidFill>
+                      <a:prstDash val="solid"/>
+                      <a:round/>
+                      <a:headEnd type="none" w="med" len="med"/>
+                      <a:tailEnd type="none" w="med" len="med"/>
+                    </a:lnB>
+                    <a:solidFill>
+                      <a:srgbClr val="FFFFFF"/>
+                    </a:solidFill>
+                  </a:tcPr>
+                </a:tc>
+                <a:tc>
+                  <a:txBody>
+                    <a:bodyPr/>
+                    <a:lstStyle/>
+                    <a:p>
+                      <a:pPr algn="r" indent="0" marL="0">
+                        <a:buNone/>
+                      </a:pPr>
+                      <a:r>
+                        <a:rPr lang="en-US" sz="1000" b="1" dirty="0">
+                          <a:solidFill>
+                            <a:srgbClr val="3D3935"/>
+                          </a:solidFill>
+                          <a:latin typeface="Diodrum Arabic" pitchFamily="34" charset="0"/>
+                          <a:ea typeface="Diodrum Arabic" pitchFamily="34" charset="-122"/>
+                          <a:cs typeface="Diodrum Arabic" pitchFamily="34" charset="-120"/>
+                        </a:rPr>
+                        <a:t>8.49</a:t>
+                      </a:r>
+                      <a:endParaRPr lang="en-US" sz="1000" dirty="0">
+                        <a:latin typeface="Diodrum Arabic" charset="0"/>
+                        <a:ea typeface="Diodrum Arabic" charset="0"/>
+                        <a:cs typeface="Diodrum Arabic" charset="0"/>
+                      </a:endParaRPr>
+                    </a:p>
+                  </a:txBody>
+                  <a:tcPr marL="54864" marR="54864" marT="0" marB="0" anchor="ctr">
+                    <a:lnL w="6350" cap="flat" cmpd="sng" algn="ctr">
+                      <a:solidFill>
+                        <a:srgbClr val="C8C9C7"/>
+                      </a:solidFill>
+                      <a:prstDash val="solid"/>
+                      <a:round/>
+                      <a:headEnd type="none" w="med" len="med"/>
+                      <a:tailEnd type="none" w="med" len="med"/>
+                    </a:lnL>
+                    <a:lnR w="6350" cap="flat" cmpd="sng" algn="ctr">
+                      <a:solidFill>
+                        <a:srgbClr val="C8C9C7"/>
+                      </a:solidFill>
+                      <a:prstDash val="solid"/>
+                      <a:round/>
+                      <a:headEnd type="none" w="med" len="med"/>
+                      <a:tailEnd type="none" w="med" len="med"/>
+                    </a:lnR>
+                    <a:lnT w="6350" cap="flat" cmpd="sng" algn="ctr">
+                      <a:solidFill>
+                        <a:srgbClr val="C8C9C7"/>
+                      </a:solidFill>
+                      <a:prstDash val="solid"/>
+                      <a:round/>
+                      <a:headEnd type="none" w="med" len="med"/>
+                      <a:tailEnd type="none" w="med" len="med"/>
+                    </a:lnT>
+                    <a:lnB w="6350" cap="flat" cmpd="sng" algn="ctr">
+                      <a:solidFill>
+                        <a:srgbClr val="C8C9C7"/>
+                      </a:solidFill>
+                      <a:prstDash val="solid"/>
+                      <a:round/>
+                      <a:headEnd type="none" w="med" len="med"/>
+                      <a:tailEnd type="none" w="med" len="med"/>
+                    </a:lnB>
+                    <a:solidFill>
+                      <a:srgbClr val="FFFFFF"/>
+                    </a:solidFill>
+                  </a:tcPr>
+                </a:tc>
+                <a:tc>
+                  <a:txBody>
+                    <a:bodyPr/>
+                    <a:lstStyle/>
+                    <a:p>
+                      <a:pPr algn="r" indent="0" marL="0">
+                        <a:buNone/>
+                      </a:pPr>
+                      <a:r>
+                        <a:rPr lang="en-US" sz="1000" dirty="0">
+                          <a:solidFill>
+                            <a:srgbClr val="3D3935"/>
+                          </a:solidFill>
+                          <a:latin typeface="Diodrum Arabic" pitchFamily="34" charset="0"/>
+                          <a:ea typeface="Diodrum Arabic" pitchFamily="34" charset="-122"/>
+                          <a:cs typeface="Diodrum Arabic" pitchFamily="34" charset="-120"/>
+                        </a:rPr>
+                        <a:t>13.7%</a:t>
+                      </a:r>
+                      <a:endParaRPr lang="en-US" sz="1000" dirty="0">
+                        <a:latin typeface="Diodrum Arabic" charset="0"/>
+                        <a:ea typeface="Diodrum Arabic" charset="0"/>
+                        <a:cs typeface="Diodrum Arabic" charset="0"/>
+                      </a:endParaRPr>
+                    </a:p>
+                  </a:txBody>
+                  <a:tcPr marL="54864" marR="54864" marT="0" marB="0" anchor="ctr">
+                    <a:lnL w="6350" cap="flat" cmpd="sng" algn="ctr">
+                      <a:solidFill>
+                        <a:srgbClr val="C8C9C7"/>
+                      </a:solidFill>
+                      <a:prstDash val="solid"/>
+                      <a:round/>
+                      <a:headEnd type="none" w="med" len="med"/>
+                      <a:tailEnd type="none" w="med" len="med"/>
+                    </a:lnL>
+                    <a:lnR w="6350" cap="flat" cmpd="sng" algn="ctr">
+                      <a:solidFill>
+                        <a:srgbClr val="C8C9C7"/>
+                      </a:solidFill>
+                      <a:prstDash val="solid"/>
+                      <a:round/>
+                      <a:headEnd type="none" w="med" len="med"/>
+                      <a:tailEnd type="none" w="med" len="med"/>
+                    </a:lnR>
+                    <a:lnT w="6350" cap="flat" cmpd="sng" algn="ctr">
+                      <a:solidFill>
+                        <a:srgbClr val="C8C9C7"/>
+                      </a:solidFill>
+                      <a:prstDash val="solid"/>
+                      <a:round/>
+                      <a:headEnd type="none" w="med" len="med"/>
+                      <a:tailEnd type="none" w="med" len="med"/>
+                    </a:lnT>
+                    <a:lnB w="6350" cap="flat" cmpd="sng" algn="ctr">
+                      <a:solidFill>
+                        <a:srgbClr val="C8C9C7"/>
+                      </a:solidFill>
+                      <a:prstDash val="solid"/>
+                      <a:round/>
+                      <a:headEnd type="none" w="med" len="med"/>
+                      <a:tailEnd type="none" w="med" len="med"/>
+                    </a:lnB>
+                    <a:solidFill>
+                      <a:srgbClr val="FFFFFF"/>
+                    </a:solidFill>
+                  </a:tcPr>
+                </a:tc>
+              </a:tr>
+              <a:tr h="239573">
+                <a:tc>
+                  <a:txBody>
+                    <a:bodyPr/>
+                    <a:lstStyle/>
+                    <a:p>
+                      <a:pPr algn="l" indent="0" marL="0">
+                        <a:buNone/>
+                      </a:pPr>
+                      <a:r>
+                        <a:rPr lang="en-US" sz="1000" dirty="0">
+                          <a:solidFill>
+                            <a:srgbClr val="3D3935"/>
+                          </a:solidFill>
+                          <a:latin typeface="Diodrum Arabic" pitchFamily="34" charset="0"/>
+                          <a:ea typeface="Diodrum Arabic" pitchFamily="34" charset="-122"/>
+                          <a:cs typeface="Diodrum Arabic" pitchFamily="34" charset="-120"/>
+                        </a:rPr>
+                        <a:t>Design and engineering</a:t>
+                      </a:r>
+                      <a:endParaRPr lang="en-US" sz="1000" dirty="0">
+                        <a:latin typeface="Diodrum Arabic" charset="0"/>
+                        <a:ea typeface="Diodrum Arabic" charset="0"/>
+                        <a:cs typeface="Diodrum Arabic" charset="0"/>
+                      </a:endParaRPr>
+                    </a:p>
+                  </a:txBody>
+                  <a:tcPr marL="54864" marR="54864" marT="0" marB="0" anchor="ctr">
+                    <a:lnL w="6350" cap="flat" cmpd="sng" algn="ctr">
+                      <a:solidFill>
+                        <a:srgbClr val="C8C9C7"/>
+                      </a:solidFill>
+                      <a:prstDash val="solid"/>
+                      <a:round/>
+                      <a:headEnd type="none" w="med" len="med"/>
+                      <a:tailEnd type="none" w="med" len="med"/>
+                    </a:lnL>
+                    <a:lnR w="6350" cap="flat" cmpd="sng" algn="ctr">
+                      <a:solidFill>
+                        <a:srgbClr val="C8C9C7"/>
+                      </a:solidFill>
+                      <a:prstDash val="solid"/>
+                      <a:round/>
+                      <a:headEnd type="none" w="med" len="med"/>
+                      <a:tailEnd type="none" w="med" len="med"/>
+                    </a:lnR>
+                    <a:lnT w="6350" cap="flat" cmpd="sng" algn="ctr">
+                      <a:solidFill>
+                        <a:srgbClr val="C8C9C7"/>
+                      </a:solidFill>
+                      <a:prstDash val="solid"/>
+                      <a:round/>
+                      <a:headEnd type="none" w="med" len="med"/>
+                      <a:tailEnd type="none" w="med" len="med"/>
+                    </a:lnT>
+                    <a:lnB w="6350" cap="flat" cmpd="sng" algn="ctr">
+                      <a:solidFill>
+                        <a:srgbClr val="C8C9C7"/>
+                      </a:solidFill>
+                      <a:prstDash val="solid"/>
+                      <a:round/>
+                      <a:headEnd type="none" w="med" len="med"/>
+                      <a:tailEnd type="none" w="med" len="med"/>
+                    </a:lnB>
+                    <a:solidFill>
+                      <a:srgbClr val="F2F8F9"/>
+                    </a:solidFill>
+                  </a:tcPr>
+                </a:tc>
+                <a:tc>
+                  <a:txBody>
+                    <a:bodyPr/>
+                    <a:lstStyle/>
+                    <a:p>
+                      <a:pPr algn="r" indent="0" marL="0">
+                        <a:buNone/>
+                      </a:pPr>
+                      <a:r>
+                        <a:rPr lang="en-US" sz="1000" dirty="0">
+                          <a:solidFill>
+                            <a:srgbClr val="3D3935"/>
+                          </a:solidFill>
+                          <a:latin typeface="Diodrum Arabic" pitchFamily="34" charset="0"/>
+                          <a:ea typeface="Diodrum Arabic" pitchFamily="34" charset="-122"/>
+                          <a:cs typeface="Diodrum Arabic" pitchFamily="34" charset="-120"/>
+                        </a:rPr>
+                        <a:t>0.49</a:t>
+                      </a:r>
+                      <a:endParaRPr lang="en-US" sz="1000" dirty="0">
+                        <a:latin typeface="Diodrum Arabic" charset="0"/>
+                        <a:ea typeface="Diodrum Arabic" charset="0"/>
+                        <a:cs typeface="Diodrum Arabic" charset="0"/>
+                      </a:endParaRPr>
+                    </a:p>
+                  </a:txBody>
+                  <a:tcPr marL="54864" marR="54864" marT="0" marB="0" anchor="ctr">
+                    <a:lnL w="6350" cap="flat" cmpd="sng" algn="ctr">
+                      <a:solidFill>
+                        <a:srgbClr val="C8C9C7"/>
+                      </a:solidFill>
+                      <a:prstDash val="solid"/>
+                      <a:round/>
+                      <a:headEnd type="none" w="med" len="med"/>
+                      <a:tailEnd type="none" w="med" len="med"/>
+                    </a:lnL>
+                    <a:lnR w="6350" cap="flat" cmpd="sng" algn="ctr">
+                      <a:solidFill>
+                        <a:srgbClr val="C8C9C7"/>
+                      </a:solidFill>
+                      <a:prstDash val="solid"/>
+                      <a:round/>
+                      <a:headEnd type="none" w="med" len="med"/>
+                      <a:tailEnd type="none" w="med" len="med"/>
+                    </a:lnR>
+                    <a:lnT w="6350" cap="flat" cmpd="sng" algn="ctr">
+                      <a:solidFill>
+                        <a:srgbClr val="C8C9C7"/>
+                      </a:solidFill>
+                      <a:prstDash val="solid"/>
+                      <a:round/>
+                      <a:headEnd type="none" w="med" len="med"/>
+                      <a:tailEnd type="none" w="med" len="med"/>
+                    </a:lnT>
+                    <a:lnB w="6350" cap="flat" cmpd="sng" algn="ctr">
+                      <a:solidFill>
+                        <a:srgbClr val="C8C9C7"/>
+                      </a:solidFill>
+                      <a:prstDash val="solid"/>
+                      <a:round/>
+                      <a:headEnd type="none" w="med" len="med"/>
+                      <a:tailEnd type="none" w="med" len="med"/>
+                    </a:lnB>
+                    <a:solidFill>
+                      <a:srgbClr val="F2F8F9"/>
+                    </a:solidFill>
+                  </a:tcPr>
+                </a:tc>
+                <a:tc>
+                  <a:txBody>
+                    <a:bodyPr/>
+                    <a:lstStyle/>
+                    <a:p>
+                      <a:pPr algn="r" indent="0" marL="0">
+                        <a:buNone/>
+                      </a:pPr>
+                      <a:r>
+                        <a:rPr lang="en-US" sz="1000" dirty="0">
+                          <a:solidFill>
+                            <a:srgbClr val="3D3935"/>
+                          </a:solidFill>
+                          <a:latin typeface="Diodrum Arabic" pitchFamily="34" charset="0"/>
+                          <a:ea typeface="Diodrum Arabic" pitchFamily="34" charset="-122"/>
+                          <a:cs typeface="Diodrum Arabic" pitchFamily="34" charset="-120"/>
+                        </a:rPr>
+                        <a:t>0.31</a:t>
+                      </a:r>
+                      <a:endParaRPr lang="en-US" sz="1000" dirty="0">
+                        <a:latin typeface="Diodrum Arabic" charset="0"/>
+                        <a:ea typeface="Diodrum Arabic" charset="0"/>
+                        <a:cs typeface="Diodrum Arabic" charset="0"/>
+                      </a:endParaRPr>
+                    </a:p>
+                  </a:txBody>
+                  <a:tcPr marL="54864" marR="54864" marT="0" marB="0" anchor="ctr">
+                    <a:lnL w="6350" cap="flat" cmpd="sng" algn="ctr">
+                      <a:solidFill>
+                        <a:srgbClr val="C8C9C7"/>
+                      </a:solidFill>
+                      <a:prstDash val="solid"/>
+                      <a:round/>
+                      <a:headEnd type="none" w="med" len="med"/>
+                      <a:tailEnd type="none" w="med" len="med"/>
+                    </a:lnL>
+                    <a:lnR w="6350" cap="flat" cmpd="sng" algn="ctr">
+                      <a:solidFill>
+                        <a:srgbClr val="C8C9C7"/>
+                      </a:solidFill>
+                      <a:prstDash val="solid"/>
+                      <a:round/>
+                      <a:headEnd type="none" w="med" len="med"/>
+                      <a:tailEnd type="none" w="med" len="med"/>
+                    </a:lnR>
+                    <a:lnT w="6350" cap="flat" cmpd="sng" algn="ctr">
+                      <a:solidFill>
+                        <a:srgbClr val="C8C9C7"/>
+                      </a:solidFill>
+                      <a:prstDash val="solid"/>
+                      <a:round/>
+                      <a:headEnd type="none" w="med" len="med"/>
+                      <a:tailEnd type="none" w="med" len="med"/>
+                    </a:lnT>
+                    <a:lnB w="6350" cap="flat" cmpd="sng" algn="ctr">
+                      <a:solidFill>
+                        <a:srgbClr val="C8C9C7"/>
+                      </a:solidFill>
+                      <a:prstDash val="solid"/>
+                      <a:round/>
+                      <a:headEnd type="none" w="med" len="med"/>
+                      <a:tailEnd type="none" w="med" len="med"/>
+                    </a:lnB>
+                    <a:solidFill>
+                      <a:srgbClr val="F2F8F9"/>
+                    </a:solidFill>
+                  </a:tcPr>
+                </a:tc>
+                <a:tc>
+                  <a:txBody>
+                    <a:bodyPr/>
+                    <a:lstStyle/>
+                    <a:p>
+                      <a:pPr algn="r" indent="0" marL="0">
+                        <a:buNone/>
+                      </a:pPr>
+                      <a:r>
+                        <a:rPr lang="en-US" sz="1000" dirty="0">
+                          <a:solidFill>
+                            <a:srgbClr val="3D3935"/>
+                          </a:solidFill>
+                          <a:latin typeface="Diodrum Arabic" pitchFamily="34" charset="0"/>
+                          <a:ea typeface="Diodrum Arabic" pitchFamily="34" charset="-122"/>
+                          <a:cs typeface="Diodrum Arabic" pitchFamily="34" charset="-120"/>
+                        </a:rPr>
+                        <a:t>1.06</a:t>
+                      </a:r>
+                      <a:endParaRPr lang="en-US" sz="1000" dirty="0">
+                        <a:latin typeface="Diodrum Arabic" charset="0"/>
+                        <a:ea typeface="Diodrum Arabic" charset="0"/>
+                        <a:cs typeface="Diodrum Arabic" charset="0"/>
+                      </a:endParaRPr>
+                    </a:p>
+                  </a:txBody>
+                  <a:tcPr marL="54864" marR="54864" marT="0" marB="0" anchor="ctr">
+                    <a:lnL w="6350" cap="flat" cmpd="sng" algn="ctr">
+                      <a:solidFill>
+                        <a:srgbClr val="C8C9C7"/>
+                      </a:solidFill>
+                      <a:prstDash val="solid"/>
+                      <a:round/>
+                      <a:headEnd type="none" w="med" len="med"/>
+                      <a:tailEnd type="none" w="med" len="med"/>
+                    </a:lnL>
+                    <a:lnR w="6350" cap="flat" cmpd="sng" algn="ctr">
+                      <a:solidFill>
+                        <a:srgbClr val="C8C9C7"/>
+                      </a:solidFill>
+                      <a:prstDash val="solid"/>
+                      <a:round/>
+                      <a:headEnd type="none" w="med" len="med"/>
+                      <a:tailEnd type="none" w="med" len="med"/>
+                    </a:lnR>
+                    <a:lnT w="6350" cap="flat" cmpd="sng" algn="ctr">
+                      <a:solidFill>
+                        <a:srgbClr val="C8C9C7"/>
+                      </a:solidFill>
+                      <a:prstDash val="solid"/>
+                      <a:round/>
+                      <a:headEnd type="none" w="med" len="med"/>
+                      <a:tailEnd type="none" w="med" len="med"/>
+                    </a:lnT>
+                    <a:lnB w="6350" cap="flat" cmpd="sng" algn="ctr">
+                      <a:solidFill>
+                        <a:srgbClr val="C8C9C7"/>
+                      </a:solidFill>
+                      <a:prstDash val="solid"/>
+                      <a:round/>
+                      <a:headEnd type="none" w="med" len="med"/>
+                      <a:tailEnd type="none" w="med" len="med"/>
+                    </a:lnB>
+                    <a:solidFill>
+                      <a:srgbClr val="F2F8F9"/>
+                    </a:solidFill>
+                  </a:tcPr>
+                </a:tc>
+                <a:tc>
+                  <a:txBody>
+                    <a:bodyPr/>
+                    <a:lstStyle/>
+                    <a:p>
+                      <a:pPr algn="r" indent="0" marL="0">
+                        <a:buNone/>
+                      </a:pPr>
+                      <a:r>
+                        <a:rPr lang="en-US" sz="1000" b="1" dirty="0">
+                          <a:solidFill>
+                            <a:srgbClr val="3D3935"/>
+                          </a:solidFill>
+                          <a:latin typeface="Diodrum Arabic" pitchFamily="34" charset="0"/>
+                          <a:ea typeface="Diodrum Arabic" pitchFamily="34" charset="-122"/>
+                          <a:cs typeface="Diodrum Arabic" pitchFamily="34" charset="-120"/>
+                        </a:rPr>
+                        <a:t>1.86</a:t>
+                      </a:r>
+                      <a:endParaRPr lang="en-US" sz="1000" dirty="0">
+                        <a:latin typeface="Diodrum Arabic" charset="0"/>
+                        <a:ea typeface="Diodrum Arabic" charset="0"/>
+                        <a:cs typeface="Diodrum Arabic" charset="0"/>
+                      </a:endParaRPr>
+                    </a:p>
+                  </a:txBody>
+                  <a:tcPr marL="54864" marR="54864" marT="0" marB="0" anchor="ctr">
+                    <a:lnL w="6350" cap="flat" cmpd="sng" algn="ctr">
+                      <a:solidFill>
+                        <a:srgbClr val="C8C9C7"/>
+                      </a:solidFill>
+                      <a:prstDash val="solid"/>
+                      <a:round/>
+                      <a:headEnd type="none" w="med" len="med"/>
+                      <a:tailEnd type="none" w="med" len="med"/>
+                    </a:lnL>
+                    <a:lnR w="6350" cap="flat" cmpd="sng" algn="ctr">
+                      <a:solidFill>
+                        <a:srgbClr val="C8C9C7"/>
+                      </a:solidFill>
+                      <a:prstDash val="solid"/>
+                      <a:round/>
+                      <a:headEnd type="none" w="med" len="med"/>
+                      <a:tailEnd type="none" w="med" len="med"/>
+                    </a:lnR>
+                    <a:lnT w="6350" cap="flat" cmpd="sng" algn="ctr">
+                      <a:solidFill>
+                        <a:srgbClr val="C8C9C7"/>
+                      </a:solidFill>
+                      <a:prstDash val="solid"/>
+                      <a:round/>
+                      <a:headEnd type="none" w="med" len="med"/>
+                      <a:tailEnd type="none" w="med" len="med"/>
+                    </a:lnT>
+                    <a:lnB w="6350" cap="flat" cmpd="sng" algn="ctr">
+                      <a:solidFill>
+                        <a:srgbClr val="C8C9C7"/>
+                      </a:solidFill>
+                      <a:prstDash val="solid"/>
+                      <a:round/>
+                      <a:headEnd type="none" w="med" len="med"/>
+                      <a:tailEnd type="none" w="med" len="med"/>
+                    </a:lnB>
+                    <a:solidFill>
+                      <a:srgbClr val="F2F8F9"/>
+                    </a:solidFill>
+                  </a:tcPr>
+                </a:tc>
+                <a:tc>
+                  <a:txBody>
+                    <a:bodyPr/>
+                    <a:lstStyle/>
+                    <a:p>
+                      <a:pPr algn="r" indent="0" marL="0">
+                        <a:buNone/>
+                      </a:pPr>
+                      <a:r>
+                        <a:rPr lang="en-US" sz="1000" dirty="0">
+                          <a:solidFill>
+                            <a:srgbClr val="3D3935"/>
+                          </a:solidFill>
+                          <a:latin typeface="Diodrum Arabic" pitchFamily="34" charset="0"/>
+                          <a:ea typeface="Diodrum Arabic" pitchFamily="34" charset="-122"/>
+                          <a:cs typeface="Diodrum Arabic" pitchFamily="34" charset="-120"/>
+                        </a:rPr>
+                        <a:t>3.0%</a:t>
+                      </a:r>
+                      <a:endParaRPr lang="en-US" sz="1000" dirty="0">
+                        <a:latin typeface="Diodrum Arabic" charset="0"/>
+                        <a:ea typeface="Diodrum Arabic" charset="0"/>
+                        <a:cs typeface="Diodrum Arabic" charset="0"/>
+                      </a:endParaRPr>
+                    </a:p>
+                  </a:txBody>
+                  <a:tcPr marL="54864" marR="54864" marT="0" marB="0" anchor="ctr">
+                    <a:lnL w="6350" cap="flat" cmpd="sng" algn="ctr">
+                      <a:solidFill>
+                        <a:srgbClr val="C8C9C7"/>
+                      </a:solidFill>
+                      <a:prstDash val="solid"/>
+                      <a:round/>
+                      <a:headEnd type="none" w="med" len="med"/>
+                      <a:tailEnd type="none" w="med" len="med"/>
+                    </a:lnL>
+                    <a:lnR w="6350" cap="flat" cmpd="sng" algn="ctr">
+                      <a:solidFill>
+                        <a:srgbClr val="C8C9C7"/>
+                      </a:solidFill>
+                      <a:prstDash val="solid"/>
+                      <a:round/>
+                      <a:headEnd type="none" w="med" len="med"/>
+                      <a:tailEnd type="none" w="med" len="med"/>
+                    </a:lnR>
+                    <a:lnT w="6350" cap="flat" cmpd="sng" algn="ctr">
+                      <a:solidFill>
+                        <a:srgbClr val="C8C9C7"/>
+                      </a:solidFill>
+                      <a:prstDash val="solid"/>
+                      <a:round/>
+                      <a:headEnd type="none" w="med" len="med"/>
+                      <a:tailEnd type="none" w="med" len="med"/>
+                    </a:lnT>
+                    <a:lnB w="6350" cap="flat" cmpd="sng" algn="ctr">
+                      <a:solidFill>
+                        <a:srgbClr val="C8C9C7"/>
+                      </a:solidFill>
+                      <a:prstDash val="solid"/>
+                      <a:round/>
+                      <a:headEnd type="none" w="med" len="med"/>
+                      <a:tailEnd type="none" w="med" len="med"/>
+                    </a:lnB>
+                    <a:solidFill>
+                      <a:srgbClr val="F2F8F9"/>
+                    </a:solidFill>
+                  </a:tcPr>
+                </a:tc>
+              </a:tr>
+              <a:tr h="239573">
+                <a:tc>
+                  <a:txBody>
+                    <a:bodyPr/>
+                    <a:lstStyle/>
+                    <a:p>
+                      <a:pPr algn="l" indent="0" marL="0">
+                        <a:buNone/>
+                      </a:pPr>
+                      <a:r>
+                        <a:rPr lang="en-US" sz="1000" dirty="0">
+                          <a:solidFill>
+                            <a:srgbClr val="3D3935"/>
+                          </a:solidFill>
+                          <a:latin typeface="Diodrum Arabic" pitchFamily="34" charset="0"/>
+                          <a:ea typeface="Diodrum Arabic" pitchFamily="34" charset="-122"/>
+                          <a:cs typeface="Diodrum Arabic" pitchFamily="34" charset="-120"/>
+                        </a:rPr>
+                        <a:t>Project management</a:t>
+                      </a:r>
+                      <a:endParaRPr lang="en-US" sz="1000" dirty="0">
+                        <a:latin typeface="Diodrum Arabic" charset="0"/>
+                        <a:ea typeface="Diodrum Arabic" charset="0"/>
+                        <a:cs typeface="Diodrum Arabic" charset="0"/>
+                      </a:endParaRPr>
+                    </a:p>
+                  </a:txBody>
+                  <a:tcPr marL="54864" marR="54864" marT="0" marB="0" anchor="ctr">
+                    <a:lnL w="6350" cap="flat" cmpd="sng" algn="ctr">
+                      <a:solidFill>
+                        <a:srgbClr val="C8C9C7"/>
+                      </a:solidFill>
+                      <a:prstDash val="solid"/>
+                      <a:round/>
+                      <a:headEnd type="none" w="med" len="med"/>
+                      <a:tailEnd type="none" w="med" len="med"/>
+                    </a:lnL>
+                    <a:lnR w="6350" cap="flat" cmpd="sng" algn="ctr">
+                      <a:solidFill>
+                        <a:srgbClr val="C8C9C7"/>
+                      </a:solidFill>
+                      <a:prstDash val="solid"/>
+                      <a:round/>
+                      <a:headEnd type="none" w="med" len="med"/>
+                      <a:tailEnd type="none" w="med" len="med"/>
+                    </a:lnR>
+                    <a:lnT w="6350" cap="flat" cmpd="sng" algn="ctr">
+                      <a:solidFill>
+                        <a:srgbClr val="C8C9C7"/>
+                      </a:solidFill>
+                      <a:prstDash val="solid"/>
+                      <a:round/>
+                      <a:headEnd type="none" w="med" len="med"/>
+                      <a:tailEnd type="none" w="med" len="med"/>
+                    </a:lnT>
+                    <a:lnB w="6350" cap="flat" cmpd="sng" algn="ctr">
+                      <a:solidFill>
+                        <a:srgbClr val="C8C9C7"/>
+                      </a:solidFill>
+                      <a:prstDash val="solid"/>
+                      <a:round/>
+                      <a:headEnd type="none" w="med" len="med"/>
+                      <a:tailEnd type="none" w="med" len="med"/>
+                    </a:lnB>
+                    <a:solidFill>
+                      <a:srgbClr val="FFFFFF"/>
+                    </a:solidFill>
+                  </a:tcPr>
+                </a:tc>
+                <a:tc>
+                  <a:txBody>
+                    <a:bodyPr/>
+                    <a:lstStyle/>
+                    <a:p>
+                      <a:pPr algn="r" indent="0" marL="0">
+                        <a:buNone/>
+                      </a:pPr>
+                      <a:r>
+                        <a:rPr lang="en-US" sz="1000" dirty="0">
+                          <a:solidFill>
+                            <a:srgbClr val="3D3935"/>
+                          </a:solidFill>
+                          <a:latin typeface="Diodrum Arabic" pitchFamily="34" charset="0"/>
+                          <a:ea typeface="Diodrum Arabic" pitchFamily="34" charset="-122"/>
+                          <a:cs typeface="Diodrum Arabic" pitchFamily="34" charset="-120"/>
+                        </a:rPr>
+                        <a:t>4.39</a:t>
+                      </a:r>
+                      <a:endParaRPr lang="en-US" sz="1000" dirty="0">
+                        <a:latin typeface="Diodrum Arabic" charset="0"/>
+                        <a:ea typeface="Diodrum Arabic" charset="0"/>
+                        <a:cs typeface="Diodrum Arabic" charset="0"/>
+                      </a:endParaRPr>
+                    </a:p>
+                  </a:txBody>
+                  <a:tcPr marL="54864" marR="54864" marT="0" marB="0" anchor="ctr">
+                    <a:lnL w="6350" cap="flat" cmpd="sng" algn="ctr">
+                      <a:solidFill>
+                        <a:srgbClr val="C8C9C7"/>
+                      </a:solidFill>
+                      <a:prstDash val="solid"/>
+                      <a:round/>
+                      <a:headEnd type="none" w="med" len="med"/>
+                      <a:tailEnd type="none" w="med" len="med"/>
+                    </a:lnL>
+                    <a:lnR w="6350" cap="flat" cmpd="sng" algn="ctr">
+                      <a:solidFill>
+                        <a:srgbClr val="C8C9C7"/>
+                      </a:solidFill>
+                      <a:prstDash val="solid"/>
+                      <a:round/>
+                      <a:headEnd type="none" w="med" len="med"/>
+                      <a:tailEnd type="none" w="med" len="med"/>
+                    </a:lnR>
+                    <a:lnT w="6350" cap="flat" cmpd="sng" algn="ctr">
+                      <a:solidFill>
+                        <a:srgbClr val="C8C9C7"/>
+                      </a:solidFill>
+                      <a:prstDash val="solid"/>
+                      <a:round/>
+                      <a:headEnd type="none" w="med" len="med"/>
+                      <a:tailEnd type="none" w="med" len="med"/>
+                    </a:lnT>
+                    <a:lnB w="6350" cap="flat" cmpd="sng" algn="ctr">
+                      <a:solidFill>
+                        <a:srgbClr val="C8C9C7"/>
+                      </a:solidFill>
+                      <a:prstDash val="solid"/>
+                      <a:round/>
+                      <a:headEnd type="none" w="med" len="med"/>
+                      <a:tailEnd type="none" w="med" len="med"/>
+                    </a:lnB>
+                    <a:solidFill>
+                      <a:srgbClr val="FFFFFF"/>
+                    </a:solidFill>
+                  </a:tcPr>
+                </a:tc>
+                <a:tc>
+                  <a:txBody>
+                    <a:bodyPr/>
+                    <a:lstStyle/>
+                    <a:p>
+                      <a:pPr algn="r" indent="0" marL="0">
+                        <a:buNone/>
+                      </a:pPr>
+                      <a:r>
+                        <a:rPr lang="en-US" sz="1000" dirty="0">
+                          <a:solidFill>
+                            <a:srgbClr val="3D3935"/>
+                          </a:solidFill>
+                          <a:latin typeface="Diodrum Arabic" pitchFamily="34" charset="0"/>
+                          <a:ea typeface="Diodrum Arabic" pitchFamily="34" charset="-122"/>
+                          <a:cs typeface="Diodrum Arabic" pitchFamily="34" charset="-120"/>
+                        </a:rPr>
+                        <a:t>2.80</a:t>
+                      </a:r>
+                      <a:endParaRPr lang="en-US" sz="1000" dirty="0">
+                        <a:latin typeface="Diodrum Arabic" charset="0"/>
+                        <a:ea typeface="Diodrum Arabic" charset="0"/>
+                        <a:cs typeface="Diodrum Arabic" charset="0"/>
+                      </a:endParaRPr>
+                    </a:p>
+                  </a:txBody>
+                  <a:tcPr marL="54864" marR="54864" marT="0" marB="0" anchor="ctr">
+                    <a:lnL w="6350" cap="flat" cmpd="sng" algn="ctr">
+                      <a:solidFill>
+                        <a:srgbClr val="C8C9C7"/>
+                      </a:solidFill>
+                      <a:prstDash val="solid"/>
+                      <a:round/>
+                      <a:headEnd type="none" w="med" len="med"/>
+                      <a:tailEnd type="none" w="med" len="med"/>
+                    </a:lnL>
+                    <a:lnR w="6350" cap="flat" cmpd="sng" algn="ctr">
+                      <a:solidFill>
+                        <a:srgbClr val="C8C9C7"/>
+                      </a:solidFill>
+                      <a:prstDash val="solid"/>
+                      <a:round/>
+                      <a:headEnd type="none" w="med" len="med"/>
+                      <a:tailEnd type="none" w="med" len="med"/>
+                    </a:lnR>
+                    <a:lnT w="6350" cap="flat" cmpd="sng" algn="ctr">
+                      <a:solidFill>
+                        <a:srgbClr val="C8C9C7"/>
+                      </a:solidFill>
+                      <a:prstDash val="solid"/>
+                      <a:round/>
+                      <a:headEnd type="none" w="med" len="med"/>
+                      <a:tailEnd type="none" w="med" len="med"/>
+                    </a:lnT>
+                    <a:lnB w="6350" cap="flat" cmpd="sng" algn="ctr">
+                      <a:solidFill>
+                        <a:srgbClr val="C8C9C7"/>
+                      </a:solidFill>
+                      <a:prstDash val="solid"/>
+                      <a:round/>
+                      <a:headEnd type="none" w="med" len="med"/>
+                      <a:tailEnd type="none" w="med" len="med"/>
+                    </a:lnB>
+                    <a:solidFill>
+                      <a:srgbClr val="FFFFFF"/>
+                    </a:solidFill>
+                  </a:tcPr>
+                </a:tc>
+                <a:tc>
+                  <a:txBody>
+                    <a:bodyPr/>
+                    <a:lstStyle/>
+                    <a:p>
+                      <a:pPr algn="r" indent="0" marL="0">
+                        <a:buNone/>
+                      </a:pPr>
+                      <a:r>
+                        <a:rPr lang="en-US" sz="1000" dirty="0">
+                          <a:solidFill>
+                            <a:srgbClr val="3D3935"/>
+                          </a:solidFill>
+                          <a:latin typeface="Diodrum Arabic" pitchFamily="34" charset="0"/>
+                          <a:ea typeface="Diodrum Arabic" pitchFamily="34" charset="-122"/>
+                          <a:cs typeface="Diodrum Arabic" pitchFamily="34" charset="-120"/>
+                        </a:rPr>
+                        <a:t>9.47</a:t>
+                      </a:r>
+                      <a:endParaRPr lang="en-US" sz="1000" dirty="0">
+                        <a:latin typeface="Diodrum Arabic" charset="0"/>
+                        <a:ea typeface="Diodrum Arabic" charset="0"/>
+                        <a:cs typeface="Diodrum Arabic" charset="0"/>
+                      </a:endParaRPr>
+                    </a:p>
+                  </a:txBody>
+                  <a:tcPr marL="54864" marR="54864" marT="0" marB="0" anchor="ctr">
+                    <a:lnL w="6350" cap="flat" cmpd="sng" algn="ctr">
+                      <a:solidFill>
+                        <a:srgbClr val="C8C9C7"/>
+                      </a:solidFill>
+                      <a:prstDash val="solid"/>
+                      <a:round/>
+                      <a:headEnd type="none" w="med" len="med"/>
+                      <a:tailEnd type="none" w="med" len="med"/>
+                    </a:lnL>
+                    <a:lnR w="6350" cap="flat" cmpd="sng" algn="ctr">
+                      <a:solidFill>
+                        <a:srgbClr val="C8C9C7"/>
+                      </a:solidFill>
+                      <a:prstDash val="solid"/>
+                      <a:round/>
+                      <a:headEnd type="none" w="med" len="med"/>
+                      <a:tailEnd type="none" w="med" len="med"/>
+                    </a:lnR>
+                    <a:lnT w="6350" cap="flat" cmpd="sng" algn="ctr">
+                      <a:solidFill>
+                        <a:srgbClr val="C8C9C7"/>
+                      </a:solidFill>
+                      <a:prstDash val="solid"/>
+                      <a:round/>
+                      <a:headEnd type="none" w="med" len="med"/>
+                      <a:tailEnd type="none" w="med" len="med"/>
+                    </a:lnT>
+                    <a:lnB w="6350" cap="flat" cmpd="sng" algn="ctr">
+                      <a:solidFill>
+                        <a:srgbClr val="C8C9C7"/>
+                      </a:solidFill>
+                      <a:prstDash val="solid"/>
+                      <a:round/>
+                      <a:headEnd type="none" w="med" len="med"/>
+                      <a:tailEnd type="none" w="med" len="med"/>
+                    </a:lnB>
+                    <a:solidFill>
+                      <a:srgbClr val="FFFFFF"/>
+                    </a:solidFill>
+                  </a:tcPr>
+                </a:tc>
+                <a:tc>
+                  <a:txBody>
+                    <a:bodyPr/>
+                    <a:lstStyle/>
+                    <a:p>
+                      <a:pPr algn="r" indent="0" marL="0">
+                        <a:buNone/>
+                      </a:pPr>
+                      <a:r>
+                        <a:rPr lang="en-US" sz="1000" b="1" dirty="0">
+                          <a:solidFill>
+                            <a:srgbClr val="3D3935"/>
+                          </a:solidFill>
+                          <a:latin typeface="Diodrum Arabic" pitchFamily="34" charset="0"/>
+                          <a:ea typeface="Diodrum Arabic" pitchFamily="34" charset="-122"/>
+                          <a:cs typeface="Diodrum Arabic" pitchFamily="34" charset="-120"/>
+                        </a:rPr>
+                        <a:t>16.66</a:t>
+                      </a:r>
+                      <a:endParaRPr lang="en-US" sz="1000" dirty="0">
+                        <a:latin typeface="Diodrum Arabic" charset="0"/>
+                        <a:ea typeface="Diodrum Arabic" charset="0"/>
+                        <a:cs typeface="Diodrum Arabic" charset="0"/>
+                      </a:endParaRPr>
+                    </a:p>
+                  </a:txBody>
+                  <a:tcPr marL="54864" marR="54864" marT="0" marB="0" anchor="ctr">
+                    <a:lnL w="6350" cap="flat" cmpd="sng" algn="ctr">
+                      <a:solidFill>
+                        <a:srgbClr val="C8C9C7"/>
+                      </a:solidFill>
+                      <a:prstDash val="solid"/>
+                      <a:round/>
+                      <a:headEnd type="none" w="med" len="med"/>
+                      <a:tailEnd type="none" w="med" len="med"/>
+                    </a:lnL>
+                    <a:lnR w="6350" cap="flat" cmpd="sng" algn="ctr">
+                      <a:solidFill>
+                        <a:srgbClr val="C8C9C7"/>
+                      </a:solidFill>
+                      <a:prstDash val="solid"/>
+                      <a:round/>
+                      <a:headEnd type="none" w="med" len="med"/>
+                      <a:tailEnd type="none" w="med" len="med"/>
+                    </a:lnR>
+                    <a:lnT w="6350" cap="flat" cmpd="sng" algn="ctr">
+                      <a:solidFill>
+                        <a:srgbClr val="C8C9C7"/>
+                      </a:solidFill>
+                      <a:prstDash val="solid"/>
+                      <a:round/>
+                      <a:headEnd type="none" w="med" len="med"/>
+                      <a:tailEnd type="none" w="med" len="med"/>
+                    </a:lnT>
+                    <a:lnB w="6350" cap="flat" cmpd="sng" algn="ctr">
+                      <a:solidFill>
+                        <a:srgbClr val="C8C9C7"/>
+                      </a:solidFill>
+                      <a:prstDash val="solid"/>
+                      <a:round/>
+                      <a:headEnd type="none" w="med" len="med"/>
+                      <a:tailEnd type="none" w="med" len="med"/>
+                    </a:lnB>
+                    <a:solidFill>
+                      <a:srgbClr val="FFFFFF"/>
+                    </a:solidFill>
+                  </a:tcPr>
+                </a:tc>
+                <a:tc>
+                  <a:txBody>
+                    <a:bodyPr/>
+                    <a:lstStyle/>
+                    <a:p>
+                      <a:pPr algn="r" indent="0" marL="0">
+                        <a:buNone/>
+                      </a:pPr>
+                      <a:r>
+                        <a:rPr lang="en-US" sz="1000" dirty="0">
+                          <a:solidFill>
+                            <a:srgbClr val="3D3935"/>
+                          </a:solidFill>
+                          <a:latin typeface="Diodrum Arabic" pitchFamily="34" charset="0"/>
+                          <a:ea typeface="Diodrum Arabic" pitchFamily="34" charset="-122"/>
+                          <a:cs typeface="Diodrum Arabic" pitchFamily="34" charset="-120"/>
+                        </a:rPr>
+                        <a:t>26.9%</a:t>
+                      </a:r>
+                      <a:endParaRPr lang="en-US" sz="1000" dirty="0">
+                        <a:latin typeface="Diodrum Arabic" charset="0"/>
+                        <a:ea typeface="Diodrum Arabic" charset="0"/>
+                        <a:cs typeface="Diodrum Arabic" charset="0"/>
+                      </a:endParaRPr>
+                    </a:p>
+                  </a:txBody>
+                  <a:tcPr marL="54864" marR="54864" marT="0" marB="0" anchor="ctr">
+                    <a:lnL w="6350" cap="flat" cmpd="sng" algn="ctr">
+                      <a:solidFill>
+                        <a:srgbClr val="C8C9C7"/>
+                      </a:solidFill>
+                      <a:prstDash val="solid"/>
+                      <a:round/>
+                      <a:headEnd type="none" w="med" len="med"/>
+                      <a:tailEnd type="none" w="med" len="med"/>
+                    </a:lnL>
+                    <a:lnR w="6350" cap="flat" cmpd="sng" algn="ctr">
+                      <a:solidFill>
+                        <a:srgbClr val="C8C9C7"/>
+                      </a:solidFill>
+                      <a:prstDash val="solid"/>
+                      <a:round/>
+                      <a:headEnd type="none" w="med" len="med"/>
+                      <a:tailEnd type="none" w="med" len="med"/>
+                    </a:lnR>
+                    <a:lnT w="6350" cap="flat" cmpd="sng" algn="ctr">
+                      <a:solidFill>
+                        <a:srgbClr val="C8C9C7"/>
+                      </a:solidFill>
+                      <a:prstDash val="solid"/>
+                      <a:round/>
+                      <a:headEnd type="none" w="med" len="med"/>
+                      <a:tailEnd type="none" w="med" len="med"/>
+                    </a:lnT>
+                    <a:lnB w="6350" cap="flat" cmpd="sng" algn="ctr">
+                      <a:solidFill>
+                        <a:srgbClr val="C8C9C7"/>
+                      </a:solidFill>
+                      <a:prstDash val="solid"/>
+                      <a:round/>
+                      <a:headEnd type="none" w="med" len="med"/>
+                      <a:tailEnd type="none" w="med" len="med"/>
+                    </a:lnB>
+                    <a:solidFill>
+                      <a:srgbClr val="FFFFFF"/>
+                    </a:solidFill>
+                  </a:tcPr>
+                </a:tc>
+              </a:tr>
+              <a:tr h="239573">
+                <a:tc>
+                  <a:txBody>
+                    <a:bodyPr/>
+                    <a:lstStyle/>
+                    <a:p>
+                      <a:pPr algn="l" indent="0" marL="0">
+                        <a:buNone/>
+                      </a:pPr>
+                      <a:r>
+                        <a:rPr lang="en-US" sz="1000" dirty="0">
+                          <a:solidFill>
+                            <a:srgbClr val="3D3935"/>
+                          </a:solidFill>
+                          <a:latin typeface="Diodrum Arabic" pitchFamily="34" charset="0"/>
+                          <a:ea typeface="Diodrum Arabic" pitchFamily="34" charset="-122"/>
+                          <a:cs typeface="Diodrum Arabic" pitchFamily="34" charset="-120"/>
+                        </a:rPr>
+                        <a:t>Factory acceptance test</a:t>
+                      </a:r>
+                      <a:endParaRPr lang="en-US" sz="1000" dirty="0">
+                        <a:latin typeface="Diodrum Arabic" charset="0"/>
+                        <a:ea typeface="Diodrum Arabic" charset="0"/>
+                        <a:cs typeface="Diodrum Arabic" charset="0"/>
+                      </a:endParaRPr>
+                    </a:p>
+                  </a:txBody>
+                  <a:tcPr marL="54864" marR="54864" marT="0" marB="0" anchor="ctr">
+                    <a:lnL w="6350" cap="flat" cmpd="sng" algn="ctr">
+                      <a:solidFill>
+                        <a:srgbClr val="C8C9C7"/>
+                      </a:solidFill>
+                      <a:prstDash val="solid"/>
+                      <a:round/>
+                      <a:headEnd type="none" w="med" len="med"/>
+                      <a:tailEnd type="none" w="med" len="med"/>
+                    </a:lnL>
+                    <a:lnR w="6350" cap="flat" cmpd="sng" algn="ctr">
+                      <a:solidFill>
+                        <a:srgbClr val="C8C9C7"/>
+                      </a:solidFill>
+                      <a:prstDash val="solid"/>
+                      <a:round/>
+                      <a:headEnd type="none" w="med" len="med"/>
+                      <a:tailEnd type="none" w="med" len="med"/>
+                    </a:lnR>
+                    <a:lnT w="6350" cap="flat" cmpd="sng" algn="ctr">
+                      <a:solidFill>
+                        <a:srgbClr val="C8C9C7"/>
+                      </a:solidFill>
+                      <a:prstDash val="solid"/>
+                      <a:round/>
+                      <a:headEnd type="none" w="med" len="med"/>
+                      <a:tailEnd type="none" w="med" len="med"/>
+                    </a:lnT>
+                    <a:lnB w="6350" cap="flat" cmpd="sng" algn="ctr">
+                      <a:solidFill>
+                        <a:srgbClr val="C8C9C7"/>
+                      </a:solidFill>
+                      <a:prstDash val="solid"/>
+                      <a:round/>
+                      <a:headEnd type="none" w="med" len="med"/>
+                      <a:tailEnd type="none" w="med" len="med"/>
+                    </a:lnB>
+                    <a:solidFill>
+                      <a:srgbClr val="F2F8F9"/>
+                    </a:solidFill>
+                  </a:tcPr>
+                </a:tc>
+                <a:tc>
+                  <a:txBody>
+                    <a:bodyPr/>
+                    <a:lstStyle/>
+                    <a:p>
+                      <a:pPr algn="r" indent="0" marL="0">
+                        <a:buNone/>
+                      </a:pPr>
+                      <a:r>
+                        <a:rPr lang="en-US" sz="1000" dirty="0">
+                          <a:solidFill>
+                            <a:srgbClr val="3D3935"/>
+                          </a:solidFill>
+                          <a:latin typeface="Diodrum Arabic" pitchFamily="34" charset="0"/>
+                          <a:ea typeface="Diodrum Arabic" pitchFamily="34" charset="-122"/>
+                          <a:cs typeface="Diodrum Arabic" pitchFamily="34" charset="-120"/>
+                        </a:rPr>
+                        <a:t>0.20</a:t>
+                      </a:r>
+                      <a:endParaRPr lang="en-US" sz="1000" dirty="0">
+                        <a:latin typeface="Diodrum Arabic" charset="0"/>
+                        <a:ea typeface="Diodrum Arabic" charset="0"/>
+                        <a:cs typeface="Diodrum Arabic" charset="0"/>
+                      </a:endParaRPr>
+                    </a:p>
+                  </a:txBody>
+                  <a:tcPr marL="54864" marR="54864" marT="0" marB="0" anchor="ctr">
+                    <a:lnL w="6350" cap="flat" cmpd="sng" algn="ctr">
+                      <a:solidFill>
+                        <a:srgbClr val="C8C9C7"/>
+                      </a:solidFill>
+                      <a:prstDash val="solid"/>
+                      <a:round/>
+                      <a:headEnd type="none" w="med" len="med"/>
+                      <a:tailEnd type="none" w="med" len="med"/>
+                    </a:lnL>
+                    <a:lnR w="6350" cap="flat" cmpd="sng" algn="ctr">
+                      <a:solidFill>
+                        <a:srgbClr val="C8C9C7"/>
+                      </a:solidFill>
+                      <a:prstDash val="solid"/>
+                      <a:round/>
+                      <a:headEnd type="none" w="med" len="med"/>
+                      <a:tailEnd type="none" w="med" len="med"/>
+                    </a:lnR>
+                    <a:lnT w="6350" cap="flat" cmpd="sng" algn="ctr">
+                      <a:solidFill>
+                        <a:srgbClr val="C8C9C7"/>
+                      </a:solidFill>
+                      <a:prstDash val="solid"/>
+                      <a:round/>
+                      <a:headEnd type="none" w="med" len="med"/>
+                      <a:tailEnd type="none" w="med" len="med"/>
+                    </a:lnT>
+                    <a:lnB w="6350" cap="flat" cmpd="sng" algn="ctr">
+                      <a:solidFill>
+                        <a:srgbClr val="C8C9C7"/>
+                      </a:solidFill>
+                      <a:prstDash val="solid"/>
+                      <a:round/>
+                      <a:headEnd type="none" w="med" len="med"/>
+                      <a:tailEnd type="none" w="med" len="med"/>
+                    </a:lnB>
+                    <a:solidFill>
+                      <a:srgbClr val="F2F8F9"/>
+                    </a:solidFill>
+                  </a:tcPr>
+                </a:tc>
+                <a:tc>
+                  <a:txBody>
+                    <a:bodyPr/>
+                    <a:lstStyle/>
+                    <a:p>
+                      <a:pPr algn="r" indent="0" marL="0">
+                        <a:buNone/>
+                      </a:pPr>
+                      <a:r>
+                        <a:rPr lang="en-US" sz="1000" dirty="0">
+                          <a:solidFill>
+                            <a:srgbClr val="3D3935"/>
+                          </a:solidFill>
+                          <a:latin typeface="Diodrum Arabic" pitchFamily="34" charset="0"/>
+                          <a:ea typeface="Diodrum Arabic" pitchFamily="34" charset="-122"/>
+                          <a:cs typeface="Diodrum Arabic" pitchFamily="34" charset="-120"/>
+                        </a:rPr>
+                        <a:t>0.20</a:t>
+                      </a:r>
+                      <a:endParaRPr lang="en-US" sz="1000" dirty="0">
+                        <a:latin typeface="Diodrum Arabic" charset="0"/>
+                        <a:ea typeface="Diodrum Arabic" charset="0"/>
+                        <a:cs typeface="Diodrum Arabic" charset="0"/>
+                      </a:endParaRPr>
+                    </a:p>
+                  </a:txBody>
+                  <a:tcPr marL="54864" marR="54864" marT="0" marB="0" anchor="ctr">
+                    <a:lnL w="6350" cap="flat" cmpd="sng" algn="ctr">
+                      <a:solidFill>
+                        <a:srgbClr val="C8C9C7"/>
+                      </a:solidFill>
+                      <a:prstDash val="solid"/>
+                      <a:round/>
+                      <a:headEnd type="none" w="med" len="med"/>
+                      <a:tailEnd type="none" w="med" len="med"/>
+                    </a:lnL>
+                    <a:lnR w="6350" cap="flat" cmpd="sng" algn="ctr">
+                      <a:solidFill>
+                        <a:srgbClr val="C8C9C7"/>
+                      </a:solidFill>
+                      <a:prstDash val="solid"/>
+                      <a:round/>
+                      <a:headEnd type="none" w="med" len="med"/>
+                      <a:tailEnd type="none" w="med" len="med"/>
+                    </a:lnR>
+                    <a:lnT w="6350" cap="flat" cmpd="sng" algn="ctr">
+                      <a:solidFill>
+                        <a:srgbClr val="C8C9C7"/>
+                      </a:solidFill>
+                      <a:prstDash val="solid"/>
+                      <a:round/>
+                      <a:headEnd type="none" w="med" len="med"/>
+                      <a:tailEnd type="none" w="med" len="med"/>
+                    </a:lnT>
+                    <a:lnB w="6350" cap="flat" cmpd="sng" algn="ctr">
+                      <a:solidFill>
+                        <a:srgbClr val="C8C9C7"/>
+                      </a:solidFill>
+                      <a:prstDash val="solid"/>
+                      <a:round/>
+                      <a:headEnd type="none" w="med" len="med"/>
+                      <a:tailEnd type="none" w="med" len="med"/>
+                    </a:lnB>
+                    <a:solidFill>
+                      <a:srgbClr val="F2F8F9"/>
+                    </a:solidFill>
+                  </a:tcPr>
+                </a:tc>
+                <a:tc>
+                  <a:txBody>
+                    <a:bodyPr/>
+                    <a:lstStyle/>
+                    <a:p>
+                      <a:pPr algn="r" indent="0" marL="0">
+                        <a:buNone/>
+                      </a:pPr>
+                      <a:r>
+                        <a:rPr lang="en-US" sz="1000" dirty="0">
+                          <a:solidFill>
+                            <a:srgbClr val="3D3935"/>
+                          </a:solidFill>
+                          <a:latin typeface="Diodrum Arabic" pitchFamily="34" charset="0"/>
+                          <a:ea typeface="Diodrum Arabic" pitchFamily="34" charset="-122"/>
+                          <a:cs typeface="Diodrum Arabic" pitchFamily="34" charset="-120"/>
+                        </a:rPr>
+                        <a:t>0.20</a:t>
+                      </a:r>
+                      <a:endParaRPr lang="en-US" sz="1000" dirty="0">
+                        <a:latin typeface="Diodrum Arabic" charset="0"/>
+                        <a:ea typeface="Diodrum Arabic" charset="0"/>
+                        <a:cs typeface="Diodrum Arabic" charset="0"/>
+                      </a:endParaRPr>
+                    </a:p>
+                  </a:txBody>
+                  <a:tcPr marL="54864" marR="54864" marT="0" marB="0" anchor="ctr">
+                    <a:lnL w="6350" cap="flat" cmpd="sng" algn="ctr">
+                      <a:solidFill>
+                        <a:srgbClr val="C8C9C7"/>
+                      </a:solidFill>
+                      <a:prstDash val="solid"/>
+                      <a:round/>
+                      <a:headEnd type="none" w="med" len="med"/>
+                      <a:tailEnd type="none" w="med" len="med"/>
+                    </a:lnL>
+                    <a:lnR w="6350" cap="flat" cmpd="sng" algn="ctr">
+                      <a:solidFill>
+                        <a:srgbClr val="C8C9C7"/>
+                      </a:solidFill>
+                      <a:prstDash val="solid"/>
+                      <a:round/>
+                      <a:headEnd type="none" w="med" len="med"/>
+                      <a:tailEnd type="none" w="med" len="med"/>
+                    </a:lnR>
+                    <a:lnT w="6350" cap="flat" cmpd="sng" algn="ctr">
+                      <a:solidFill>
+                        <a:srgbClr val="C8C9C7"/>
+                      </a:solidFill>
+                      <a:prstDash val="solid"/>
+                      <a:round/>
+                      <a:headEnd type="none" w="med" len="med"/>
+                      <a:tailEnd type="none" w="med" len="med"/>
+                    </a:lnT>
+                    <a:lnB w="6350" cap="flat" cmpd="sng" algn="ctr">
+                      <a:solidFill>
+                        <a:srgbClr val="C8C9C7"/>
+                      </a:solidFill>
+                      <a:prstDash val="solid"/>
+                      <a:round/>
+                      <a:headEnd type="none" w="med" len="med"/>
+                      <a:tailEnd type="none" w="med" len="med"/>
+                    </a:lnB>
+                    <a:solidFill>
+                      <a:srgbClr val="F2F8F9"/>
+                    </a:solidFill>
+                  </a:tcPr>
+                </a:tc>
+                <a:tc>
+                  <a:txBody>
+                    <a:bodyPr/>
+                    <a:lstStyle/>
+                    <a:p>
+                      <a:pPr algn="r" indent="0" marL="0">
+                        <a:buNone/>
+                      </a:pPr>
+                      <a:r>
+                        <a:rPr lang="en-US" sz="1000" b="1" dirty="0">
+                          <a:solidFill>
+                            <a:srgbClr val="3D3935"/>
+                          </a:solidFill>
+                          <a:latin typeface="Diodrum Arabic" pitchFamily="34" charset="0"/>
+                          <a:ea typeface="Diodrum Arabic" pitchFamily="34" charset="-122"/>
+                          <a:cs typeface="Diodrum Arabic" pitchFamily="34" charset="-120"/>
+                        </a:rPr>
+                        <a:t>0.61</a:t>
+                      </a:r>
+                      <a:endParaRPr lang="en-US" sz="1000" dirty="0">
+                        <a:latin typeface="Diodrum Arabic" charset="0"/>
+                        <a:ea typeface="Diodrum Arabic" charset="0"/>
+                        <a:cs typeface="Diodrum Arabic" charset="0"/>
+                      </a:endParaRPr>
+                    </a:p>
+                  </a:txBody>
+                  <a:tcPr marL="54864" marR="54864" marT="0" marB="0" anchor="ctr">
+                    <a:lnL w="6350" cap="flat" cmpd="sng" algn="ctr">
+                      <a:solidFill>
+                        <a:srgbClr val="C8C9C7"/>
+                      </a:solidFill>
+                      <a:prstDash val="solid"/>
+                      <a:round/>
+                      <a:headEnd type="none" w="med" len="med"/>
+                      <a:tailEnd type="none" w="med" len="med"/>
+                    </a:lnL>
+                    <a:lnR w="6350" cap="flat" cmpd="sng" algn="ctr">
+                      <a:solidFill>
+                        <a:srgbClr val="C8C9C7"/>
+                      </a:solidFill>
+                      <a:prstDash val="solid"/>
+                      <a:round/>
+                      <a:headEnd type="none" w="med" len="med"/>
+                      <a:tailEnd type="none" w="med" len="med"/>
+                    </a:lnR>
+                    <a:lnT w="6350" cap="flat" cmpd="sng" algn="ctr">
+                      <a:solidFill>
+                        <a:srgbClr val="C8C9C7"/>
+                      </a:solidFill>
+                      <a:prstDash val="solid"/>
+                      <a:round/>
+                      <a:headEnd type="none" w="med" len="med"/>
+                      <a:tailEnd type="none" w="med" len="med"/>
+                    </a:lnT>
+                    <a:lnB w="6350" cap="flat" cmpd="sng" algn="ctr">
+                      <a:solidFill>
+                        <a:srgbClr val="C8C9C7"/>
+                      </a:solidFill>
+                      <a:prstDash val="solid"/>
+                      <a:round/>
+                      <a:headEnd type="none" w="med" len="med"/>
+                      <a:tailEnd type="none" w="med" len="med"/>
+                    </a:lnB>
+                    <a:solidFill>
+                      <a:srgbClr val="F2F8F9"/>
+                    </a:solidFill>
+                  </a:tcPr>
+                </a:tc>
+                <a:tc>
+                  <a:txBody>
+                    <a:bodyPr/>
+                    <a:lstStyle/>
+                    <a:p>
+                      <a:pPr algn="r" indent="0" marL="0">
+                        <a:buNone/>
+                      </a:pPr>
+                      <a:r>
+                        <a:rPr lang="en-US" sz="1000" dirty="0">
+                          <a:solidFill>
+                            <a:srgbClr val="3D3935"/>
+                          </a:solidFill>
+                          <a:latin typeface="Diodrum Arabic" pitchFamily="34" charset="0"/>
+                          <a:ea typeface="Diodrum Arabic" pitchFamily="34" charset="-122"/>
+                          <a:cs typeface="Diodrum Arabic" pitchFamily="34" charset="-120"/>
+                        </a:rPr>
+                        <a:t>1.0%</a:t>
+                      </a:r>
+                      <a:endParaRPr lang="en-US" sz="1000" dirty="0">
+                        <a:latin typeface="Diodrum Arabic" charset="0"/>
+                        <a:ea typeface="Diodrum Arabic" charset="0"/>
+                        <a:cs typeface="Diodrum Arabic" charset="0"/>
+                      </a:endParaRPr>
+                    </a:p>
+                  </a:txBody>
+                  <a:tcPr marL="54864" marR="54864" marT="0" marB="0" anchor="ctr">
+                    <a:lnL w="6350" cap="flat" cmpd="sng" algn="ctr">
+                      <a:solidFill>
+                        <a:srgbClr val="C8C9C7"/>
+                      </a:solidFill>
+                      <a:prstDash val="solid"/>
+                      <a:round/>
+                      <a:headEnd type="none" w="med" len="med"/>
+                      <a:tailEnd type="none" w="med" len="med"/>
+                    </a:lnL>
+                    <a:lnR w="6350" cap="flat" cmpd="sng" algn="ctr">
+                      <a:solidFill>
+                        <a:srgbClr val="C8C9C7"/>
+                      </a:solidFill>
+                      <a:prstDash val="solid"/>
+                      <a:round/>
+                      <a:headEnd type="none" w="med" len="med"/>
+                      <a:tailEnd type="none" w="med" len="med"/>
+                    </a:lnR>
+                    <a:lnT w="6350" cap="flat" cmpd="sng" algn="ctr">
+                      <a:solidFill>
+                        <a:srgbClr val="C8C9C7"/>
+                      </a:solidFill>
+                      <a:prstDash val="solid"/>
+                      <a:round/>
+                      <a:headEnd type="none" w="med" len="med"/>
+                      <a:tailEnd type="none" w="med" len="med"/>
+                    </a:lnT>
+                    <a:lnB w="6350" cap="flat" cmpd="sng" algn="ctr">
+                      <a:solidFill>
+                        <a:srgbClr val="C8C9C7"/>
+                      </a:solidFill>
+                      <a:prstDash val="solid"/>
+                      <a:round/>
+                      <a:headEnd type="none" w="med" len="med"/>
+                      <a:tailEnd type="none" w="med" len="med"/>
+                    </a:lnB>
+                    <a:solidFill>
+                      <a:srgbClr val="F2F8F9"/>
+                    </a:solidFill>
+                  </a:tcPr>
+                </a:tc>
+              </a:tr>
+              <a:tr h="239573">
+                <a:tc>
+                  <a:txBody>
+                    <a:bodyPr/>
+                    <a:lstStyle/>
+                    <a:p>
+                      <a:pPr algn="l" indent="0" marL="0">
+                        <a:buNone/>
+                      </a:pPr>
+                      <a:r>
+                        <a:rPr lang="en-US" sz="1000" dirty="0">
+                          <a:solidFill>
+                            <a:srgbClr val="3D3935"/>
+                          </a:solidFill>
+                          <a:latin typeface="Diodrum Arabic" pitchFamily="34" charset="0"/>
+                          <a:ea typeface="Diodrum Arabic" pitchFamily="34" charset="-122"/>
+                          <a:cs typeface="Diodrum Arabic" pitchFamily="34" charset="-120"/>
+                        </a:rPr>
+                        <a:t>Commissioning spares</a:t>
+                      </a:r>
+                      <a:endParaRPr lang="en-US" sz="1000" dirty="0">
+                        <a:latin typeface="Diodrum Arabic" charset="0"/>
+                        <a:ea typeface="Diodrum Arabic" charset="0"/>
+                        <a:cs typeface="Diodrum Arabic" charset="0"/>
+                      </a:endParaRPr>
+                    </a:p>
+                  </a:txBody>
+                  <a:tcPr marL="54864" marR="54864" marT="0" marB="0" anchor="ctr">
+                    <a:lnL w="6350" cap="flat" cmpd="sng" algn="ctr">
+                      <a:solidFill>
+                        <a:srgbClr val="C8C9C7"/>
+                      </a:solidFill>
+                      <a:prstDash val="solid"/>
+                      <a:round/>
+                      <a:headEnd type="none" w="med" len="med"/>
+                      <a:tailEnd type="none" w="med" len="med"/>
+                    </a:lnL>
+                    <a:lnR w="6350" cap="flat" cmpd="sng" algn="ctr">
+                      <a:solidFill>
+                        <a:srgbClr val="C8C9C7"/>
+                      </a:solidFill>
+                      <a:prstDash val="solid"/>
+                      <a:round/>
+                      <a:headEnd type="none" w="med" len="med"/>
+                      <a:tailEnd type="none" w="med" len="med"/>
+                    </a:lnR>
+                    <a:lnT w="6350" cap="flat" cmpd="sng" algn="ctr">
+                      <a:solidFill>
+                        <a:srgbClr val="C8C9C7"/>
+                      </a:solidFill>
+                      <a:prstDash val="solid"/>
+                      <a:round/>
+                      <a:headEnd type="none" w="med" len="med"/>
+                      <a:tailEnd type="none" w="med" len="med"/>
+                    </a:lnT>
+                    <a:lnB w="6350" cap="flat" cmpd="sng" algn="ctr">
+                      <a:solidFill>
+                        <a:srgbClr val="C8C9C7"/>
+                      </a:solidFill>
+                      <a:prstDash val="solid"/>
+                      <a:round/>
+                      <a:headEnd type="none" w="med" len="med"/>
+                      <a:tailEnd type="none" w="med" len="med"/>
+                    </a:lnB>
+                    <a:solidFill>
+                      <a:srgbClr val="FFFFFF"/>
+                    </a:solidFill>
+                  </a:tcPr>
+                </a:tc>
+                <a:tc>
+                  <a:txBody>
+                    <a:bodyPr/>
+                    <a:lstStyle/>
+                    <a:p>
+                      <a:pPr algn="r" indent="0" marL="0">
+                        <a:buNone/>
+                      </a:pPr>
+                      <a:r>
+                        <a:rPr lang="en-US" sz="1000" dirty="0">
+                          <a:solidFill>
+                            <a:srgbClr val="3D3935"/>
+                          </a:solidFill>
+                          <a:latin typeface="Diodrum Arabic" pitchFamily="34" charset="0"/>
+                          <a:ea typeface="Diodrum Arabic" pitchFamily="34" charset="-122"/>
+                          <a:cs typeface="Diodrum Arabic" pitchFamily="34" charset="-120"/>
+                        </a:rPr>
+                        <a:t>0.39</a:t>
+                      </a:r>
+                      <a:endParaRPr lang="en-US" sz="1000" dirty="0">
+                        <a:latin typeface="Diodrum Arabic" charset="0"/>
+                        <a:ea typeface="Diodrum Arabic" charset="0"/>
+                        <a:cs typeface="Diodrum Arabic" charset="0"/>
+                      </a:endParaRPr>
+                    </a:p>
+                  </a:txBody>
+                  <a:tcPr marL="54864" marR="54864" marT="0" marB="0" anchor="ctr">
+                    <a:lnL w="6350" cap="flat" cmpd="sng" algn="ctr">
+                      <a:solidFill>
+                        <a:srgbClr val="C8C9C7"/>
+                      </a:solidFill>
+                      <a:prstDash val="solid"/>
+                      <a:round/>
+                      <a:headEnd type="none" w="med" len="med"/>
+                      <a:tailEnd type="none" w="med" len="med"/>
+                    </a:lnL>
+                    <a:lnR w="6350" cap="flat" cmpd="sng" algn="ctr">
+                      <a:solidFill>
+                        <a:srgbClr val="C8C9C7"/>
+                      </a:solidFill>
+                      <a:prstDash val="solid"/>
+                      <a:round/>
+                      <a:headEnd type="none" w="med" len="med"/>
+                      <a:tailEnd type="none" w="med" len="med"/>
+                    </a:lnR>
+                    <a:lnT w="6350" cap="flat" cmpd="sng" algn="ctr">
+                      <a:solidFill>
+                        <a:srgbClr val="C8C9C7"/>
+                      </a:solidFill>
+                      <a:prstDash val="solid"/>
+                      <a:round/>
+                      <a:headEnd type="none" w="med" len="med"/>
+                      <a:tailEnd type="none" w="med" len="med"/>
+                    </a:lnT>
+                    <a:lnB w="6350" cap="flat" cmpd="sng" algn="ctr">
+                      <a:solidFill>
+                        <a:srgbClr val="C8C9C7"/>
+                      </a:solidFill>
+                      <a:prstDash val="solid"/>
+                      <a:round/>
+                      <a:headEnd type="none" w="med" len="med"/>
+                      <a:tailEnd type="none" w="med" len="med"/>
+                    </a:lnB>
+                    <a:solidFill>
+                      <a:srgbClr val="FFFFFF"/>
+                    </a:solidFill>
+                  </a:tcPr>
+                </a:tc>
+                <a:tc>
+                  <a:txBody>
+                    <a:bodyPr/>
+                    <a:lstStyle/>
+                    <a:p>
+                      <a:pPr algn="r" indent="0" marL="0">
+                        <a:buNone/>
+                      </a:pPr>
+                      <a:r>
+                        <a:rPr lang="en-US" sz="1000" dirty="0">
+                          <a:solidFill>
+                            <a:srgbClr val="3D3935"/>
+                          </a:solidFill>
+                          <a:latin typeface="Diodrum Arabic" pitchFamily="34" charset="0"/>
+                          <a:ea typeface="Diodrum Arabic" pitchFamily="34" charset="-122"/>
+                          <a:cs typeface="Diodrum Arabic" pitchFamily="34" charset="-120"/>
+                        </a:rPr>
+                        <a:t>0.38</a:t>
+                      </a:r>
+                      <a:endParaRPr lang="en-US" sz="1000" dirty="0">
+                        <a:latin typeface="Diodrum Arabic" charset="0"/>
+                        <a:ea typeface="Diodrum Arabic" charset="0"/>
+                        <a:cs typeface="Diodrum Arabic" charset="0"/>
+                      </a:endParaRPr>
+                    </a:p>
+                  </a:txBody>
+                  <a:tcPr marL="54864" marR="54864" marT="0" marB="0" anchor="ctr">
+                    <a:lnL w="6350" cap="flat" cmpd="sng" algn="ctr">
+                      <a:solidFill>
+                        <a:srgbClr val="C8C9C7"/>
+                      </a:solidFill>
+                      <a:prstDash val="solid"/>
+                      <a:round/>
+                      <a:headEnd type="none" w="med" len="med"/>
+                      <a:tailEnd type="none" w="med" len="med"/>
+                    </a:lnL>
+                    <a:lnR w="6350" cap="flat" cmpd="sng" algn="ctr">
+                      <a:solidFill>
+                        <a:srgbClr val="C8C9C7"/>
+                      </a:solidFill>
+                      <a:prstDash val="solid"/>
+                      <a:round/>
+                      <a:headEnd type="none" w="med" len="med"/>
+                      <a:tailEnd type="none" w="med" len="med"/>
+                    </a:lnR>
+                    <a:lnT w="6350" cap="flat" cmpd="sng" algn="ctr">
+                      <a:solidFill>
+                        <a:srgbClr val="C8C9C7"/>
+                      </a:solidFill>
+                      <a:prstDash val="solid"/>
+                      <a:round/>
+                      <a:headEnd type="none" w="med" len="med"/>
+                      <a:tailEnd type="none" w="med" len="med"/>
+                    </a:lnT>
+                    <a:lnB w="6350" cap="flat" cmpd="sng" algn="ctr">
+                      <a:solidFill>
+                        <a:srgbClr val="C8C9C7"/>
+                      </a:solidFill>
+                      <a:prstDash val="solid"/>
+                      <a:round/>
+                      <a:headEnd type="none" w="med" len="med"/>
+                      <a:tailEnd type="none" w="med" len="med"/>
+                    </a:lnB>
+                    <a:solidFill>
+                      <a:srgbClr val="FFFFFF"/>
+                    </a:solidFill>
+                  </a:tcPr>
+                </a:tc>
+                <a:tc>
+                  <a:txBody>
+                    <a:bodyPr/>
+                    <a:lstStyle/>
+                    <a:p>
+                      <a:pPr algn="r" indent="0" marL="0">
+                        <a:buNone/>
+                      </a:pPr>
+                      <a:r>
+                        <a:rPr lang="en-US" sz="1000" dirty="0">
+                          <a:solidFill>
+                            <a:srgbClr val="3D3935"/>
+                          </a:solidFill>
+                          <a:latin typeface="Diodrum Arabic" pitchFamily="34" charset="0"/>
+                          <a:ea typeface="Diodrum Arabic" pitchFamily="34" charset="-122"/>
+                          <a:cs typeface="Diodrum Arabic" pitchFamily="34" charset="-120"/>
+                        </a:rPr>
+                        <a:t>0.55</a:t>
+                      </a:r>
+                      <a:endParaRPr lang="en-US" sz="1000" dirty="0">
+                        <a:latin typeface="Diodrum Arabic" charset="0"/>
+                        <a:ea typeface="Diodrum Arabic" charset="0"/>
+                        <a:cs typeface="Diodrum Arabic" charset="0"/>
+                      </a:endParaRPr>
+                    </a:p>
+                  </a:txBody>
+                  <a:tcPr marL="54864" marR="54864" marT="0" marB="0" anchor="ctr">
+                    <a:lnL w="6350" cap="flat" cmpd="sng" algn="ctr">
+                      <a:solidFill>
+                        <a:srgbClr val="C8C9C7"/>
+                      </a:solidFill>
+                      <a:prstDash val="solid"/>
+                      <a:round/>
+                      <a:headEnd type="none" w="med" len="med"/>
+                      <a:tailEnd type="none" w="med" len="med"/>
+                    </a:lnL>
+                    <a:lnR w="6350" cap="flat" cmpd="sng" algn="ctr">
+                      <a:solidFill>
+                        <a:srgbClr val="C8C9C7"/>
+                      </a:solidFill>
+                      <a:prstDash val="solid"/>
+                      <a:round/>
+                      <a:headEnd type="none" w="med" len="med"/>
+                      <a:tailEnd type="none" w="med" len="med"/>
+                    </a:lnR>
+                    <a:lnT w="6350" cap="flat" cmpd="sng" algn="ctr">
+                      <a:solidFill>
+                        <a:srgbClr val="C8C9C7"/>
+                      </a:solidFill>
+                      <a:prstDash val="solid"/>
+                      <a:round/>
+                      <a:headEnd type="none" w="med" len="med"/>
+                      <a:tailEnd type="none" w="med" len="med"/>
+                    </a:lnT>
+                    <a:lnB w="6350" cap="flat" cmpd="sng" algn="ctr">
+                      <a:solidFill>
+                        <a:srgbClr val="C8C9C7"/>
+                      </a:solidFill>
+                      <a:prstDash val="solid"/>
+                      <a:round/>
+                      <a:headEnd type="none" w="med" len="med"/>
+                      <a:tailEnd type="none" w="med" len="med"/>
+                    </a:lnB>
+                    <a:solidFill>
+                      <a:srgbClr val="FFFFFF"/>
+                    </a:solidFill>
+                  </a:tcPr>
+                </a:tc>
+                <a:tc>
+                  <a:txBody>
+                    <a:bodyPr/>
+                    <a:lstStyle/>
+                    <a:p>
+                      <a:pPr algn="r" indent="0" marL="0">
+                        <a:buNone/>
+                      </a:pPr>
+                      <a:r>
+                        <a:rPr lang="en-US" sz="1000" b="1" dirty="0">
+                          <a:solidFill>
+                            <a:srgbClr val="3D3935"/>
+                          </a:solidFill>
+                          <a:latin typeface="Diodrum Arabic" pitchFamily="34" charset="0"/>
+                          <a:ea typeface="Diodrum Arabic" pitchFamily="34" charset="-122"/>
+                          <a:cs typeface="Diodrum Arabic" pitchFamily="34" charset="-120"/>
+                        </a:rPr>
+                        <a:t>1.33</a:t>
+                      </a:r>
+                      <a:endParaRPr lang="en-US" sz="1000" dirty="0">
+                        <a:latin typeface="Diodrum Arabic" charset="0"/>
+                        <a:ea typeface="Diodrum Arabic" charset="0"/>
+                        <a:cs typeface="Diodrum Arabic" charset="0"/>
+                      </a:endParaRPr>
+                    </a:p>
+                  </a:txBody>
+                  <a:tcPr marL="54864" marR="54864" marT="0" marB="0" anchor="ctr">
+                    <a:lnL w="6350" cap="flat" cmpd="sng" algn="ctr">
+                      <a:solidFill>
+                        <a:srgbClr val="C8C9C7"/>
+                      </a:solidFill>
+                      <a:prstDash val="solid"/>
+                      <a:round/>
+                      <a:headEnd type="none" w="med" len="med"/>
+                      <a:tailEnd type="none" w="med" len="med"/>
+                    </a:lnL>
+                    <a:lnR w="6350" cap="flat" cmpd="sng" algn="ctr">
+                      <a:solidFill>
+                        <a:srgbClr val="C8C9C7"/>
+                      </a:solidFill>
+                      <a:prstDash val="solid"/>
+                      <a:round/>
+                      <a:headEnd type="none" w="med" len="med"/>
+                      <a:tailEnd type="none" w="med" len="med"/>
+                    </a:lnR>
+                    <a:lnT w="6350" cap="flat" cmpd="sng" algn="ctr">
+                      <a:solidFill>
+                        <a:srgbClr val="C8C9C7"/>
+                      </a:solidFill>
+                      <a:prstDash val="solid"/>
+                      <a:round/>
+                      <a:headEnd type="none" w="med" len="med"/>
+                      <a:tailEnd type="none" w="med" len="med"/>
+                    </a:lnT>
+                    <a:lnB w="6350" cap="flat" cmpd="sng" algn="ctr">
+                      <a:solidFill>
+                        <a:srgbClr val="C8C9C7"/>
+                      </a:solidFill>
+                      <a:prstDash val="solid"/>
+                      <a:round/>
+                      <a:headEnd type="none" w="med" len="med"/>
+                      <a:tailEnd type="none" w="med" len="med"/>
+                    </a:lnB>
+                    <a:solidFill>
+                      <a:srgbClr val="FFFFFF"/>
+                    </a:solidFill>
+                  </a:tcPr>
+                </a:tc>
+                <a:tc>
+                  <a:txBody>
+                    <a:bodyPr/>
+                    <a:lstStyle/>
+                    <a:p>
+                      <a:pPr algn="r" indent="0" marL="0">
+                        <a:buNone/>
+                      </a:pPr>
+                      <a:r>
+                        <a:rPr lang="en-US" sz="1000" dirty="0">
+                          <a:solidFill>
+                            <a:srgbClr val="3D3935"/>
+                          </a:solidFill>
+                          <a:latin typeface="Diodrum Arabic" pitchFamily="34" charset="0"/>
+                          <a:ea typeface="Diodrum Arabic" pitchFamily="34" charset="-122"/>
+                          <a:cs typeface="Diodrum Arabic" pitchFamily="34" charset="-120"/>
+                        </a:rPr>
+                        <a:t>2.1%</a:t>
+                      </a:r>
+                      <a:endParaRPr lang="en-US" sz="1000" dirty="0">
+                        <a:latin typeface="Diodrum Arabic" charset="0"/>
+                        <a:ea typeface="Diodrum Arabic" charset="0"/>
+                        <a:cs typeface="Diodrum Arabic" charset="0"/>
+                      </a:endParaRPr>
+                    </a:p>
+                  </a:txBody>
+                  <a:tcPr marL="54864" marR="54864" marT="0" marB="0" anchor="ctr">
+                    <a:lnL w="6350" cap="flat" cmpd="sng" algn="ctr">
+                      <a:solidFill>
+                        <a:srgbClr val="C8C9C7"/>
+                      </a:solidFill>
+                      <a:prstDash val="solid"/>
+                      <a:round/>
+                      <a:headEnd type="none" w="med" len="med"/>
+                      <a:tailEnd type="none" w="med" len="med"/>
+                    </a:lnL>
+                    <a:lnR w="6350" cap="flat" cmpd="sng" algn="ctr">
+                      <a:solidFill>
+                        <a:srgbClr val="C8C9C7"/>
+                      </a:solidFill>
+                      <a:prstDash val="solid"/>
+                      <a:round/>
+                      <a:headEnd type="none" w="med" len="med"/>
+                      <a:tailEnd type="none" w="med" len="med"/>
+                    </a:lnR>
+                    <a:lnT w="6350" cap="flat" cmpd="sng" algn="ctr">
+                      <a:solidFill>
+                        <a:srgbClr val="C8C9C7"/>
+                      </a:solidFill>
+                      <a:prstDash val="solid"/>
+                      <a:round/>
+                      <a:headEnd type="none" w="med" len="med"/>
+                      <a:tailEnd type="none" w="med" len="med"/>
+                    </a:lnT>
+                    <a:lnB w="6350" cap="flat" cmpd="sng" algn="ctr">
+                      <a:solidFill>
+                        <a:srgbClr val="C8C9C7"/>
+                      </a:solidFill>
+                      <a:prstDash val="solid"/>
+                      <a:round/>
+                      <a:headEnd type="none" w="med" len="med"/>
+                      <a:tailEnd type="none" w="med" len="med"/>
+                    </a:lnB>
+                    <a:solidFill>
+                      <a:srgbClr val="FFFFFF"/>
+                    </a:solidFill>
+                  </a:tcPr>
+                </a:tc>
+              </a:tr>
+              <a:tr h="239573">
+                <a:tc>
+                  <a:txBody>
+                    <a:bodyPr/>
+                    <a:lstStyle/>
+                    <a:p>
+                      <a:pPr algn="l" indent="0" marL="0">
+                        <a:buNone/>
+                      </a:pPr>
+                      <a:r>
+                        <a:rPr lang="en-US" sz="1000" dirty="0">
+                          <a:solidFill>
+                            <a:srgbClr val="3D3935"/>
+                          </a:solidFill>
+                          <a:latin typeface="Diodrum Arabic" pitchFamily="34" charset="0"/>
+                          <a:ea typeface="Diodrum Arabic" pitchFamily="34" charset="-122"/>
+                          <a:cs typeface="Diodrum Arabic" pitchFamily="34" charset="-120"/>
+                        </a:rPr>
+                        <a:t>Training</a:t>
+                      </a:r>
+                      <a:endParaRPr lang="en-US" sz="1000" dirty="0">
+                        <a:latin typeface="Diodrum Arabic" charset="0"/>
+                        <a:ea typeface="Diodrum Arabic" charset="0"/>
+                        <a:cs typeface="Diodrum Arabic" charset="0"/>
+                      </a:endParaRPr>
+                    </a:p>
+                  </a:txBody>
+                  <a:tcPr marL="54864" marR="54864" marT="0" marB="0" anchor="ctr">
+                    <a:lnL w="6350" cap="flat" cmpd="sng" algn="ctr">
+                      <a:solidFill>
+                        <a:srgbClr val="C8C9C7"/>
+                      </a:solidFill>
+                      <a:prstDash val="solid"/>
+                      <a:round/>
+                      <a:headEnd type="none" w="med" len="med"/>
+                      <a:tailEnd type="none" w="med" len="med"/>
+                    </a:lnL>
+                    <a:lnR w="6350" cap="flat" cmpd="sng" algn="ctr">
+                      <a:solidFill>
+                        <a:srgbClr val="C8C9C7"/>
+                      </a:solidFill>
+                      <a:prstDash val="solid"/>
+                      <a:round/>
+                      <a:headEnd type="none" w="med" len="med"/>
+                      <a:tailEnd type="none" w="med" len="med"/>
+                    </a:lnR>
+                    <a:lnT w="6350" cap="flat" cmpd="sng" algn="ctr">
+                      <a:solidFill>
+                        <a:srgbClr val="C8C9C7"/>
+                      </a:solidFill>
+                      <a:prstDash val="solid"/>
+                      <a:round/>
+                      <a:headEnd type="none" w="med" len="med"/>
+                      <a:tailEnd type="none" w="med" len="med"/>
+                    </a:lnT>
+                    <a:lnB w="6350" cap="flat" cmpd="sng" algn="ctr">
+                      <a:solidFill>
+                        <a:srgbClr val="C8C9C7"/>
+                      </a:solidFill>
+                      <a:prstDash val="solid"/>
+                      <a:round/>
+                      <a:headEnd type="none" w="med" len="med"/>
+                      <a:tailEnd type="none" w="med" len="med"/>
+                    </a:lnB>
+                    <a:solidFill>
+                      <a:srgbClr val="F2F8F9"/>
+                    </a:solidFill>
+                  </a:tcPr>
+                </a:tc>
+                <a:tc>
+                  <a:txBody>
+                    <a:bodyPr/>
+                    <a:lstStyle/>
+                    <a:p>
+                      <a:pPr algn="r" indent="0" marL="0">
+                        <a:buNone/>
+                      </a:pPr>
+                      <a:r>
+                        <a:rPr lang="en-US" sz="1000" dirty="0">
+                          <a:solidFill>
+                            <a:srgbClr val="3D3935"/>
+                          </a:solidFill>
+                          <a:latin typeface="Diodrum Arabic" pitchFamily="34" charset="0"/>
+                          <a:ea typeface="Diodrum Arabic" pitchFamily="34" charset="-122"/>
+                          <a:cs typeface="Diodrum Arabic" pitchFamily="34" charset="-120"/>
+                        </a:rPr>
+                        <a:t>0.04</a:t>
+                      </a:r>
+                      <a:endParaRPr lang="en-US" sz="1000" dirty="0">
+                        <a:latin typeface="Diodrum Arabic" charset="0"/>
+                        <a:ea typeface="Diodrum Arabic" charset="0"/>
+                        <a:cs typeface="Diodrum Arabic" charset="0"/>
+                      </a:endParaRPr>
+                    </a:p>
+                  </a:txBody>
+                  <a:tcPr marL="54864" marR="54864" marT="0" marB="0" anchor="ctr">
+                    <a:lnL w="6350" cap="flat" cmpd="sng" algn="ctr">
+                      <a:solidFill>
+                        <a:srgbClr val="C8C9C7"/>
+                      </a:solidFill>
+                      <a:prstDash val="solid"/>
+                      <a:round/>
+                      <a:headEnd type="none" w="med" len="med"/>
+                      <a:tailEnd type="none" w="med" len="med"/>
+                    </a:lnL>
+                    <a:lnR w="6350" cap="flat" cmpd="sng" algn="ctr">
+                      <a:solidFill>
+                        <a:srgbClr val="C8C9C7"/>
+                      </a:solidFill>
+                      <a:prstDash val="solid"/>
+                      <a:round/>
+                      <a:headEnd type="none" w="med" len="med"/>
+                      <a:tailEnd type="none" w="med" len="med"/>
+                    </a:lnR>
+                    <a:lnT w="6350" cap="flat" cmpd="sng" algn="ctr">
+                      <a:solidFill>
+                        <a:srgbClr val="C8C9C7"/>
+                      </a:solidFill>
+                      <a:prstDash val="solid"/>
+                      <a:round/>
+                      <a:headEnd type="none" w="med" len="med"/>
+                      <a:tailEnd type="none" w="med" len="med"/>
+                    </a:lnT>
+                    <a:lnB w="6350" cap="flat" cmpd="sng" algn="ctr">
+                      <a:solidFill>
+                        <a:srgbClr val="C8C9C7"/>
+                      </a:solidFill>
+                      <a:prstDash val="solid"/>
+                      <a:round/>
+                      <a:headEnd type="none" w="med" len="med"/>
+                      <a:tailEnd type="none" w="med" len="med"/>
+                    </a:lnB>
+                    <a:solidFill>
+                      <a:srgbClr val="F2F8F9"/>
+                    </a:solidFill>
+                  </a:tcPr>
+                </a:tc>
+                <a:tc>
+                  <a:txBody>
+                    <a:bodyPr/>
+                    <a:lstStyle/>
+                    <a:p>
+                      <a:pPr algn="r" indent="0" marL="0">
+                        <a:buNone/>
+                      </a:pPr>
+                      <a:r>
+                        <a:rPr lang="en-US" sz="1000" dirty="0">
+                          <a:solidFill>
+                            <a:srgbClr val="3D3935"/>
+                          </a:solidFill>
+                          <a:latin typeface="Diodrum Arabic" pitchFamily="34" charset="0"/>
+                          <a:ea typeface="Diodrum Arabic" pitchFamily="34" charset="-122"/>
+                          <a:cs typeface="Diodrum Arabic" pitchFamily="34" charset="-120"/>
+                        </a:rPr>
+                        <a:t>0.07</a:t>
+                      </a:r>
+                      <a:endParaRPr lang="en-US" sz="1000" dirty="0">
+                        <a:latin typeface="Diodrum Arabic" charset="0"/>
+                        <a:ea typeface="Diodrum Arabic" charset="0"/>
+                        <a:cs typeface="Diodrum Arabic" charset="0"/>
+                      </a:endParaRPr>
+                    </a:p>
+                  </a:txBody>
+                  <a:tcPr marL="54864" marR="54864" marT="0" marB="0" anchor="ctr">
+                    <a:lnL w="6350" cap="flat" cmpd="sng" algn="ctr">
+                      <a:solidFill>
+                        <a:srgbClr val="C8C9C7"/>
+                      </a:solidFill>
+                      <a:prstDash val="solid"/>
+                      <a:round/>
+                      <a:headEnd type="none" w="med" len="med"/>
+                      <a:tailEnd type="none" w="med" len="med"/>
+                    </a:lnL>
+                    <a:lnR w="6350" cap="flat" cmpd="sng" algn="ctr">
+                      <a:solidFill>
+                        <a:srgbClr val="C8C9C7"/>
+                      </a:solidFill>
+                      <a:prstDash val="solid"/>
+                      <a:round/>
+                      <a:headEnd type="none" w="med" len="med"/>
+                      <a:tailEnd type="none" w="med" len="med"/>
+                    </a:lnR>
+                    <a:lnT w="6350" cap="flat" cmpd="sng" algn="ctr">
+                      <a:solidFill>
+                        <a:srgbClr val="C8C9C7"/>
+                      </a:solidFill>
+                      <a:prstDash val="solid"/>
+                      <a:round/>
+                      <a:headEnd type="none" w="med" len="med"/>
+                      <a:tailEnd type="none" w="med" len="med"/>
+                    </a:lnT>
+                    <a:lnB w="6350" cap="flat" cmpd="sng" algn="ctr">
+                      <a:solidFill>
+                        <a:srgbClr val="C8C9C7"/>
+                      </a:solidFill>
+                      <a:prstDash val="solid"/>
+                      <a:round/>
+                      <a:headEnd type="none" w="med" len="med"/>
+                      <a:tailEnd type="none" w="med" len="med"/>
+                    </a:lnB>
+                    <a:solidFill>
+                      <a:srgbClr val="F2F8F9"/>
+                    </a:solidFill>
+                  </a:tcPr>
+                </a:tc>
+                <a:tc>
+                  <a:txBody>
+                    <a:bodyPr/>
+                    <a:lstStyle/>
+                    <a:p>
+                      <a:pPr algn="r" indent="0" marL="0">
+                        <a:buNone/>
+                      </a:pPr>
+                      <a:r>
+                        <a:rPr lang="en-US" sz="1000" dirty="0">
+                          <a:solidFill>
+                            <a:srgbClr val="3D3935"/>
+                          </a:solidFill>
+                          <a:latin typeface="Diodrum Arabic" pitchFamily="34" charset="0"/>
+                          <a:ea typeface="Diodrum Arabic" pitchFamily="34" charset="-122"/>
+                          <a:cs typeface="Diodrum Arabic" pitchFamily="34" charset="-120"/>
+                        </a:rPr>
+                        <a:t>0.07</a:t>
+                      </a:r>
+                      <a:endParaRPr lang="en-US" sz="1000" dirty="0">
+                        <a:latin typeface="Diodrum Arabic" charset="0"/>
+                        <a:ea typeface="Diodrum Arabic" charset="0"/>
+                        <a:cs typeface="Diodrum Arabic" charset="0"/>
+                      </a:endParaRPr>
+                    </a:p>
+                  </a:txBody>
+                  <a:tcPr marL="54864" marR="54864" marT="0" marB="0" anchor="ctr">
+                    <a:lnL w="6350" cap="flat" cmpd="sng" algn="ctr">
+                      <a:solidFill>
+                        <a:srgbClr val="C8C9C7"/>
+                      </a:solidFill>
+                      <a:prstDash val="solid"/>
+                      <a:round/>
+                      <a:headEnd type="none" w="med" len="med"/>
+                      <a:tailEnd type="none" w="med" len="med"/>
+                    </a:lnL>
+                    <a:lnR w="6350" cap="flat" cmpd="sng" algn="ctr">
+                      <a:solidFill>
+                        <a:srgbClr val="C8C9C7"/>
+                      </a:solidFill>
+                      <a:prstDash val="solid"/>
+                      <a:round/>
+                      <a:headEnd type="none" w="med" len="med"/>
+                      <a:tailEnd type="none" w="med" len="med"/>
+                    </a:lnR>
+                    <a:lnT w="6350" cap="flat" cmpd="sng" algn="ctr">
+                      <a:solidFill>
+                        <a:srgbClr val="C8C9C7"/>
+                      </a:solidFill>
+                      <a:prstDash val="solid"/>
+                      <a:round/>
+                      <a:headEnd type="none" w="med" len="med"/>
+                      <a:tailEnd type="none" w="med" len="med"/>
+                    </a:lnT>
+                    <a:lnB w="6350" cap="flat" cmpd="sng" algn="ctr">
+                      <a:solidFill>
+                        <a:srgbClr val="C8C9C7"/>
+                      </a:solidFill>
+                      <a:prstDash val="solid"/>
+                      <a:round/>
+                      <a:headEnd type="none" w="med" len="med"/>
+                      <a:tailEnd type="none" w="med" len="med"/>
+                    </a:lnB>
+                    <a:solidFill>
+                      <a:srgbClr val="F2F8F9"/>
+                    </a:solidFill>
+                  </a:tcPr>
+                </a:tc>
+                <a:tc>
+                  <a:txBody>
+                    <a:bodyPr/>
+                    <a:lstStyle/>
+                    <a:p>
+                      <a:pPr algn="r" indent="0" marL="0">
+                        <a:buNone/>
+                      </a:pPr>
+                      <a:r>
+                        <a:rPr lang="en-US" sz="1000" b="1" dirty="0">
+                          <a:solidFill>
+                            <a:srgbClr val="3D3935"/>
+                          </a:solidFill>
+                          <a:latin typeface="Diodrum Arabic" pitchFamily="34" charset="0"/>
+                          <a:ea typeface="Diodrum Arabic" pitchFamily="34" charset="-122"/>
+                          <a:cs typeface="Diodrum Arabic" pitchFamily="34" charset="-120"/>
+                        </a:rPr>
+                        <a:t>0.17</a:t>
+                      </a:r>
+                      <a:endParaRPr lang="en-US" sz="1000" dirty="0">
+                        <a:latin typeface="Diodrum Arabic" charset="0"/>
+                        <a:ea typeface="Diodrum Arabic" charset="0"/>
+                        <a:cs typeface="Diodrum Arabic" charset="0"/>
+                      </a:endParaRPr>
+                    </a:p>
+                  </a:txBody>
+                  <a:tcPr marL="54864" marR="54864" marT="0" marB="0" anchor="ctr">
+                    <a:lnL w="6350" cap="flat" cmpd="sng" algn="ctr">
+                      <a:solidFill>
+                        <a:srgbClr val="C8C9C7"/>
+                      </a:solidFill>
+                      <a:prstDash val="solid"/>
+                      <a:round/>
+                      <a:headEnd type="none" w="med" len="med"/>
+                      <a:tailEnd type="none" w="med" len="med"/>
+                    </a:lnL>
+                    <a:lnR w="6350" cap="flat" cmpd="sng" algn="ctr">
+                      <a:solidFill>
+                        <a:srgbClr val="C8C9C7"/>
+                      </a:solidFill>
+                      <a:prstDash val="solid"/>
+                      <a:round/>
+                      <a:headEnd type="none" w="med" len="med"/>
+                      <a:tailEnd type="none" w="med" len="med"/>
+                    </a:lnR>
+                    <a:lnT w="6350" cap="flat" cmpd="sng" algn="ctr">
+                      <a:solidFill>
+                        <a:srgbClr val="C8C9C7"/>
+                      </a:solidFill>
+                      <a:prstDash val="solid"/>
+                      <a:round/>
+                      <a:headEnd type="none" w="med" len="med"/>
+                      <a:tailEnd type="none" w="med" len="med"/>
+                    </a:lnT>
+                    <a:lnB w="6350" cap="flat" cmpd="sng" algn="ctr">
+                      <a:solidFill>
+                        <a:srgbClr val="C8C9C7"/>
+                      </a:solidFill>
+                      <a:prstDash val="solid"/>
+                      <a:round/>
+                      <a:headEnd type="none" w="med" len="med"/>
+                      <a:tailEnd type="none" w="med" len="med"/>
+                    </a:lnB>
+                    <a:solidFill>
+                      <a:srgbClr val="F2F8F9"/>
+                    </a:solidFill>
+                  </a:tcPr>
+                </a:tc>
+                <a:tc>
+                  <a:txBody>
+                    <a:bodyPr/>
+                    <a:lstStyle/>
+                    <a:p>
+                      <a:pPr algn="r" indent="0" marL="0">
+                        <a:buNone/>
+                      </a:pPr>
+                      <a:r>
+                        <a:rPr lang="en-US" sz="1000" dirty="0">
+                          <a:solidFill>
+                            <a:srgbClr val="3D3935"/>
+                          </a:solidFill>
+                          <a:latin typeface="Diodrum Arabic" pitchFamily="34" charset="0"/>
+                          <a:ea typeface="Diodrum Arabic" pitchFamily="34" charset="-122"/>
+                          <a:cs typeface="Diodrum Arabic" pitchFamily="34" charset="-120"/>
+                        </a:rPr>
+                        <a:t>0.3%</a:t>
+                      </a:r>
+                      <a:endParaRPr lang="en-US" sz="1000" dirty="0">
+                        <a:latin typeface="Diodrum Arabic" charset="0"/>
+                        <a:ea typeface="Diodrum Arabic" charset="0"/>
+                        <a:cs typeface="Diodrum Arabic" charset="0"/>
+                      </a:endParaRPr>
+                    </a:p>
+                  </a:txBody>
+                  <a:tcPr marL="54864" marR="54864" marT="0" marB="0" anchor="ctr">
+                    <a:lnL w="6350" cap="flat" cmpd="sng" algn="ctr">
+                      <a:solidFill>
+                        <a:srgbClr val="C8C9C7"/>
+                      </a:solidFill>
+                      <a:prstDash val="solid"/>
+                      <a:round/>
+                      <a:headEnd type="none" w="med" len="med"/>
+                      <a:tailEnd type="none" w="med" len="med"/>
+                    </a:lnL>
+                    <a:lnR w="6350" cap="flat" cmpd="sng" algn="ctr">
+                      <a:solidFill>
+                        <a:srgbClr val="C8C9C7"/>
+                      </a:solidFill>
+                      <a:prstDash val="solid"/>
+                      <a:round/>
+                      <a:headEnd type="none" w="med" len="med"/>
+                      <a:tailEnd type="none" w="med" len="med"/>
+                    </a:lnR>
+                    <a:lnT w="6350" cap="flat" cmpd="sng" algn="ctr">
+                      <a:solidFill>
+                        <a:srgbClr val="C8C9C7"/>
+                      </a:solidFill>
+                      <a:prstDash val="solid"/>
+                      <a:round/>
+                      <a:headEnd type="none" w="med" len="med"/>
+                      <a:tailEnd type="none" w="med" len="med"/>
+                    </a:lnT>
+                    <a:lnB w="6350" cap="flat" cmpd="sng" algn="ctr">
+                      <a:solidFill>
+                        <a:srgbClr val="C8C9C7"/>
+                      </a:solidFill>
+                      <a:prstDash val="solid"/>
+                      <a:round/>
+                      <a:headEnd type="none" w="med" len="med"/>
+                      <a:tailEnd type="none" w="med" len="med"/>
+                    </a:lnB>
+                    <a:solidFill>
+                      <a:srgbClr val="F2F8F9"/>
+                    </a:solidFill>
+                  </a:tcPr>
+                </a:tc>
+              </a:tr>
+              <a:tr h="239573">
+                <a:tc>
+                  <a:txBody>
+                    <a:bodyPr/>
+                    <a:lstStyle/>
+                    <a:p>
+                      <a:pPr algn="l" indent="0" marL="0">
+                        <a:buNone/>
+                      </a:pPr>
+                      <a:r>
+                        <a:rPr lang="en-US" sz="1000" dirty="0">
+                          <a:solidFill>
+                            <a:srgbClr val="3D3935"/>
+                          </a:solidFill>
+                          <a:latin typeface="Diodrum Arabic" pitchFamily="34" charset="0"/>
+                          <a:ea typeface="Diodrum Arabic" pitchFamily="34" charset="-122"/>
+                          <a:cs typeface="Diodrum Arabic" pitchFamily="34" charset="-120"/>
+                        </a:rPr>
+                        <a:t>Cloud storage, 12 months</a:t>
+                      </a:r>
+                      <a:endParaRPr lang="en-US" sz="1000" dirty="0">
+                        <a:latin typeface="Diodrum Arabic" charset="0"/>
+                        <a:ea typeface="Diodrum Arabic" charset="0"/>
+                        <a:cs typeface="Diodrum Arabic" charset="0"/>
+                      </a:endParaRPr>
+                    </a:p>
+                  </a:txBody>
+                  <a:tcPr marL="54864" marR="54864" marT="0" marB="0" anchor="ctr">
+                    <a:lnL w="6350" cap="flat" cmpd="sng" algn="ctr">
+                      <a:solidFill>
+                        <a:srgbClr val="C8C9C7"/>
+                      </a:solidFill>
+                      <a:prstDash val="solid"/>
+                      <a:round/>
+                      <a:headEnd type="none" w="med" len="med"/>
+                      <a:tailEnd type="none" w="med" len="med"/>
+                    </a:lnL>
+                    <a:lnR w="6350" cap="flat" cmpd="sng" algn="ctr">
+                      <a:solidFill>
+                        <a:srgbClr val="C8C9C7"/>
+                      </a:solidFill>
+                      <a:prstDash val="solid"/>
+                      <a:round/>
+                      <a:headEnd type="none" w="med" len="med"/>
+                      <a:tailEnd type="none" w="med" len="med"/>
+                    </a:lnR>
+                    <a:lnT w="6350" cap="flat" cmpd="sng" algn="ctr">
+                      <a:solidFill>
+                        <a:srgbClr val="C8C9C7"/>
+                      </a:solidFill>
+                      <a:prstDash val="solid"/>
+                      <a:round/>
+                      <a:headEnd type="none" w="med" len="med"/>
+                      <a:tailEnd type="none" w="med" len="med"/>
+                    </a:lnT>
+                    <a:lnB w="6350" cap="flat" cmpd="sng" algn="ctr">
+                      <a:solidFill>
+                        <a:srgbClr val="C8C9C7"/>
+                      </a:solidFill>
+                      <a:prstDash val="solid"/>
+                      <a:round/>
+                      <a:headEnd type="none" w="med" len="med"/>
+                      <a:tailEnd type="none" w="med" len="med"/>
+                    </a:lnB>
+                    <a:solidFill>
+                      <a:srgbClr val="FFFFFF"/>
+                    </a:solidFill>
+                  </a:tcPr>
+                </a:tc>
+                <a:tc>
+                  <a:txBody>
+                    <a:bodyPr/>
+                    <a:lstStyle/>
+                    <a:p>
+                      <a:pPr algn="r" indent="0" marL="0">
+                        <a:buNone/>
+                      </a:pPr>
+                      <a:r>
+                        <a:rPr lang="en-US" sz="1000" dirty="0">
+                          <a:solidFill>
+                            <a:srgbClr val="3D3935"/>
+                          </a:solidFill>
+                          <a:latin typeface="Diodrum Arabic" pitchFamily="34" charset="0"/>
+                          <a:ea typeface="Diodrum Arabic" pitchFamily="34" charset="-122"/>
+                          <a:cs typeface="Diodrum Arabic" pitchFamily="34" charset="-120"/>
+                        </a:rPr>
+                        <a:t>0.48</a:t>
+                      </a:r>
+                      <a:endParaRPr lang="en-US" sz="1000" dirty="0">
+                        <a:latin typeface="Diodrum Arabic" charset="0"/>
+                        <a:ea typeface="Diodrum Arabic" charset="0"/>
+                        <a:cs typeface="Diodrum Arabic" charset="0"/>
+                      </a:endParaRPr>
+                    </a:p>
+                  </a:txBody>
+                  <a:tcPr marL="54864" marR="54864" marT="0" marB="0" anchor="ctr">
+                    <a:lnL w="6350" cap="flat" cmpd="sng" algn="ctr">
+                      <a:solidFill>
+                        <a:srgbClr val="C8C9C7"/>
+                      </a:solidFill>
+                      <a:prstDash val="solid"/>
+                      <a:round/>
+                      <a:headEnd type="none" w="med" len="med"/>
+                      <a:tailEnd type="none" w="med" len="med"/>
+                    </a:lnL>
+                    <a:lnR w="6350" cap="flat" cmpd="sng" algn="ctr">
+                      <a:solidFill>
+                        <a:srgbClr val="C8C9C7"/>
+                      </a:solidFill>
+                      <a:prstDash val="solid"/>
+                      <a:round/>
+                      <a:headEnd type="none" w="med" len="med"/>
+                      <a:tailEnd type="none" w="med" len="med"/>
+                    </a:lnR>
+                    <a:lnT w="6350" cap="flat" cmpd="sng" algn="ctr">
+                      <a:solidFill>
+                        <a:srgbClr val="C8C9C7"/>
+                      </a:solidFill>
+                      <a:prstDash val="solid"/>
+                      <a:round/>
+                      <a:headEnd type="none" w="med" len="med"/>
+                      <a:tailEnd type="none" w="med" len="med"/>
+                    </a:lnT>
+                    <a:lnB w="6350" cap="flat" cmpd="sng" algn="ctr">
+                      <a:solidFill>
+                        <a:srgbClr val="C8C9C7"/>
+                      </a:solidFill>
+                      <a:prstDash val="solid"/>
+                      <a:round/>
+                      <a:headEnd type="none" w="med" len="med"/>
+                      <a:tailEnd type="none" w="med" len="med"/>
+                    </a:lnB>
+                    <a:solidFill>
+                      <a:srgbClr val="FFFFFF"/>
+                    </a:solidFill>
+                  </a:tcPr>
+                </a:tc>
+                <a:tc>
+                  <a:txBody>
+                    <a:bodyPr/>
+                    <a:lstStyle/>
+                    <a:p>
+                      <a:pPr algn="r" indent="0" marL="0">
+                        <a:buNone/>
+                      </a:pPr>
+                      <a:r>
+                        <a:rPr lang="en-US" sz="1000" dirty="0">
+                          <a:solidFill>
+                            <a:srgbClr val="3D3935"/>
+                          </a:solidFill>
+                          <a:latin typeface="Diodrum Arabic" pitchFamily="34" charset="0"/>
+                          <a:ea typeface="Diodrum Arabic" pitchFamily="34" charset="-122"/>
+                          <a:cs typeface="Diodrum Arabic" pitchFamily="34" charset="-120"/>
+                        </a:rPr>
+                        <a:t>0.26</a:t>
+                      </a:r>
+                      <a:endParaRPr lang="en-US" sz="1000" dirty="0">
+                        <a:latin typeface="Diodrum Arabic" charset="0"/>
+                        <a:ea typeface="Diodrum Arabic" charset="0"/>
+                        <a:cs typeface="Diodrum Arabic" charset="0"/>
+                      </a:endParaRPr>
+                    </a:p>
+                  </a:txBody>
+                  <a:tcPr marL="54864" marR="54864" marT="0" marB="0" anchor="ctr">
+                    <a:lnL w="6350" cap="flat" cmpd="sng" algn="ctr">
+                      <a:solidFill>
+                        <a:srgbClr val="C8C9C7"/>
+                      </a:solidFill>
+                      <a:prstDash val="solid"/>
+                      <a:round/>
+                      <a:headEnd type="none" w="med" len="med"/>
+                      <a:tailEnd type="none" w="med" len="med"/>
+                    </a:lnL>
+                    <a:lnR w="6350" cap="flat" cmpd="sng" algn="ctr">
+                      <a:solidFill>
+                        <a:srgbClr val="C8C9C7"/>
+                      </a:solidFill>
+                      <a:prstDash val="solid"/>
+                      <a:round/>
+                      <a:headEnd type="none" w="med" len="med"/>
+                      <a:tailEnd type="none" w="med" len="med"/>
+                    </a:lnR>
+                    <a:lnT w="6350" cap="flat" cmpd="sng" algn="ctr">
+                      <a:solidFill>
+                        <a:srgbClr val="C8C9C7"/>
+                      </a:solidFill>
+                      <a:prstDash val="solid"/>
+                      <a:round/>
+                      <a:headEnd type="none" w="med" len="med"/>
+                      <a:tailEnd type="none" w="med" len="med"/>
+                    </a:lnT>
+                    <a:lnB w="6350" cap="flat" cmpd="sng" algn="ctr">
+                      <a:solidFill>
+                        <a:srgbClr val="C8C9C7"/>
+                      </a:solidFill>
+                      <a:prstDash val="solid"/>
+                      <a:round/>
+                      <a:headEnd type="none" w="med" len="med"/>
+                      <a:tailEnd type="none" w="med" len="med"/>
+                    </a:lnB>
+                    <a:solidFill>
+                      <a:srgbClr val="FFFFFF"/>
+                    </a:solidFill>
+                  </a:tcPr>
+                </a:tc>
+                <a:tc>
+                  <a:txBody>
+                    <a:bodyPr/>
+                    <a:lstStyle/>
+                    <a:p>
+                      <a:pPr algn="r" indent="0" marL="0">
+                        <a:buNone/>
+                      </a:pPr>
+                      <a:r>
+                        <a:rPr lang="en-US" sz="1000" dirty="0">
+                          <a:solidFill>
+                            <a:srgbClr val="3D3935"/>
+                          </a:solidFill>
+                          <a:latin typeface="Diodrum Arabic" pitchFamily="34" charset="0"/>
+                          <a:ea typeface="Diodrum Arabic" pitchFamily="34" charset="-122"/>
+                          <a:cs typeface="Diodrum Arabic" pitchFamily="34" charset="-120"/>
+                        </a:rPr>
+                        <a:t>1.38</a:t>
+                      </a:r>
+                      <a:endParaRPr lang="en-US" sz="1000" dirty="0">
+                        <a:latin typeface="Diodrum Arabic" charset="0"/>
+                        <a:ea typeface="Diodrum Arabic" charset="0"/>
+                        <a:cs typeface="Diodrum Arabic" charset="0"/>
+                      </a:endParaRPr>
+                    </a:p>
+                  </a:txBody>
+                  <a:tcPr marL="54864" marR="54864" marT="0" marB="0" anchor="ctr">
+                    <a:lnL w="6350" cap="flat" cmpd="sng" algn="ctr">
+                      <a:solidFill>
+                        <a:srgbClr val="C8C9C7"/>
+                      </a:solidFill>
+                      <a:prstDash val="solid"/>
+                      <a:round/>
+                      <a:headEnd type="none" w="med" len="med"/>
+                      <a:tailEnd type="none" w="med" len="med"/>
+                    </a:lnL>
+                    <a:lnR w="6350" cap="flat" cmpd="sng" algn="ctr">
+                      <a:solidFill>
+                        <a:srgbClr val="C8C9C7"/>
+                      </a:solidFill>
+                      <a:prstDash val="solid"/>
+                      <a:round/>
+                      <a:headEnd type="none" w="med" len="med"/>
+                      <a:tailEnd type="none" w="med" len="med"/>
+                    </a:lnR>
+                    <a:lnT w="6350" cap="flat" cmpd="sng" algn="ctr">
+                      <a:solidFill>
+                        <a:srgbClr val="C8C9C7"/>
+                      </a:solidFill>
+                      <a:prstDash val="solid"/>
+                      <a:round/>
+                      <a:headEnd type="none" w="med" len="med"/>
+                      <a:tailEnd type="none" w="med" len="med"/>
+                    </a:lnT>
+                    <a:lnB w="6350" cap="flat" cmpd="sng" algn="ctr">
+                      <a:solidFill>
+                        <a:srgbClr val="C8C9C7"/>
+                      </a:solidFill>
+                      <a:prstDash val="solid"/>
+                      <a:round/>
+                      <a:headEnd type="none" w="med" len="med"/>
+                      <a:tailEnd type="none" w="med" len="med"/>
+                    </a:lnB>
+                    <a:solidFill>
+                      <a:srgbClr val="FFFFFF"/>
+                    </a:solidFill>
+                  </a:tcPr>
+                </a:tc>
+                <a:tc>
+                  <a:txBody>
+                    <a:bodyPr/>
+                    <a:lstStyle/>
+                    <a:p>
+                      <a:pPr algn="r" indent="0" marL="0">
+                        <a:buNone/>
+                      </a:pPr>
+                      <a:r>
+                        <a:rPr lang="en-US" sz="1000" b="1" dirty="0">
+                          <a:solidFill>
+                            <a:srgbClr val="3D3935"/>
+                          </a:solidFill>
+                          <a:latin typeface="Diodrum Arabic" pitchFamily="34" charset="0"/>
+                          <a:ea typeface="Diodrum Arabic" pitchFamily="34" charset="-122"/>
+                          <a:cs typeface="Diodrum Arabic" pitchFamily="34" charset="-120"/>
+                        </a:rPr>
+                        <a:t>2.12</a:t>
+                      </a:r>
+                      <a:endParaRPr lang="en-US" sz="1000" dirty="0">
+                        <a:latin typeface="Diodrum Arabic" charset="0"/>
+                        <a:ea typeface="Diodrum Arabic" charset="0"/>
+                        <a:cs typeface="Diodrum Arabic" charset="0"/>
+                      </a:endParaRPr>
+                    </a:p>
+                  </a:txBody>
+                  <a:tcPr marL="54864" marR="54864" marT="0" marB="0" anchor="ctr">
+                    <a:lnL w="6350" cap="flat" cmpd="sng" algn="ctr">
+                      <a:solidFill>
+                        <a:srgbClr val="C8C9C7"/>
+                      </a:solidFill>
+                      <a:prstDash val="solid"/>
+                      <a:round/>
+                      <a:headEnd type="none" w="med" len="med"/>
+                      <a:tailEnd type="none" w="med" len="med"/>
+                    </a:lnL>
+                    <a:lnR w="6350" cap="flat" cmpd="sng" algn="ctr">
+                      <a:solidFill>
+                        <a:srgbClr val="C8C9C7"/>
+                      </a:solidFill>
+                      <a:prstDash val="solid"/>
+                      <a:round/>
+                      <a:headEnd type="none" w="med" len="med"/>
+                      <a:tailEnd type="none" w="med" len="med"/>
+                    </a:lnR>
+                    <a:lnT w="6350" cap="flat" cmpd="sng" algn="ctr">
+                      <a:solidFill>
+                        <a:srgbClr val="C8C9C7"/>
+                      </a:solidFill>
+                      <a:prstDash val="solid"/>
+                      <a:round/>
+                      <a:headEnd type="none" w="med" len="med"/>
+                      <a:tailEnd type="none" w="med" len="med"/>
+                    </a:lnT>
+                    <a:lnB w="6350" cap="flat" cmpd="sng" algn="ctr">
+                      <a:solidFill>
+                        <a:srgbClr val="C8C9C7"/>
+                      </a:solidFill>
+                      <a:prstDash val="solid"/>
+                      <a:round/>
+                      <a:headEnd type="none" w="med" len="med"/>
+                      <a:tailEnd type="none" w="med" len="med"/>
+                    </a:lnB>
+                    <a:solidFill>
+                      <a:srgbClr val="FFFFFF"/>
+                    </a:solidFill>
+                  </a:tcPr>
+                </a:tc>
+                <a:tc>
+                  <a:txBody>
+                    <a:bodyPr/>
+                    <a:lstStyle/>
+                    <a:p>
+                      <a:pPr algn="r" indent="0" marL="0">
+                        <a:buNone/>
+                      </a:pPr>
+                      <a:r>
+                        <a:rPr lang="en-US" sz="1000" dirty="0">
+                          <a:solidFill>
+                            <a:srgbClr val="3D3935"/>
+                          </a:solidFill>
+                          <a:latin typeface="Diodrum Arabic" pitchFamily="34" charset="0"/>
+                          <a:ea typeface="Diodrum Arabic" pitchFamily="34" charset="-122"/>
+                          <a:cs typeface="Diodrum Arabic" pitchFamily="34" charset="-120"/>
+                        </a:rPr>
+                        <a:t>3.4%</a:t>
+                      </a:r>
+                      <a:endParaRPr lang="en-US" sz="1000" dirty="0">
+                        <a:latin typeface="Diodrum Arabic" charset="0"/>
+                        <a:ea typeface="Diodrum Arabic" charset="0"/>
+                        <a:cs typeface="Diodrum Arabic" charset="0"/>
+                      </a:endParaRPr>
+                    </a:p>
+                  </a:txBody>
+                  <a:tcPr marL="54864" marR="54864" marT="0" marB="0" anchor="ctr">
+                    <a:lnL w="6350" cap="flat" cmpd="sng" algn="ctr">
+                      <a:solidFill>
+                        <a:srgbClr val="C8C9C7"/>
+                      </a:solidFill>
+                      <a:prstDash val="solid"/>
+                      <a:round/>
+                      <a:headEnd type="none" w="med" len="med"/>
+                      <a:tailEnd type="none" w="med" len="med"/>
+                    </a:lnL>
+                    <a:lnR w="6350" cap="flat" cmpd="sng" algn="ctr">
+                      <a:solidFill>
+                        <a:srgbClr val="C8C9C7"/>
+                      </a:solidFill>
+                      <a:prstDash val="solid"/>
+                      <a:round/>
+                      <a:headEnd type="none" w="med" len="med"/>
+                      <a:tailEnd type="none" w="med" len="med"/>
+                    </a:lnR>
+                    <a:lnT w="6350" cap="flat" cmpd="sng" algn="ctr">
+                      <a:solidFill>
+                        <a:srgbClr val="C8C9C7"/>
+                      </a:solidFill>
+                      <a:prstDash val="solid"/>
+                      <a:round/>
+                      <a:headEnd type="none" w="med" len="med"/>
+                      <a:tailEnd type="none" w="med" len="med"/>
+                    </a:lnT>
+                    <a:lnB w="6350" cap="flat" cmpd="sng" algn="ctr">
+                      <a:solidFill>
+                        <a:srgbClr val="C8C9C7"/>
+                      </a:solidFill>
+                      <a:prstDash val="solid"/>
+                      <a:round/>
+                      <a:headEnd type="none" w="med" len="med"/>
+                      <a:tailEnd type="none" w="med" len="med"/>
+                    </a:lnB>
+                    <a:solidFill>
+                      <a:srgbClr val="FFFFFF"/>
+                    </a:solidFill>
+                  </a:tcPr>
+                </a:tc>
+              </a:tr>
+              <a:tr h="239573">
+                <a:tc>
+                  <a:txBody>
+                    <a:bodyPr/>
+                    <a:lstStyle/>
+                    <a:p>
+                      <a:pPr algn="l" indent="0" marL="0">
+                        <a:buNone/>
+                      </a:pPr>
+                      <a:r>
+                        <a:rPr lang="en-US" sz="1000" b="1" dirty="0">
+                          <a:solidFill>
+                            <a:srgbClr val="00778B"/>
+                          </a:solidFill>
+                          <a:latin typeface="Diodrum Arabic" pitchFamily="34" charset="0"/>
+                          <a:ea typeface="Diodrum Arabic" pitchFamily="34" charset="-122"/>
+                          <a:cs typeface="Diodrum Arabic" pitchFamily="34" charset="-120"/>
+                        </a:rPr>
+                        <a:t>Total</a:t>
+                      </a:r>
+                      <a:endParaRPr lang="en-US" sz="1000" dirty="0">
+                        <a:latin typeface="Diodrum Arabic" charset="0"/>
+                        <a:ea typeface="Diodrum Arabic" charset="0"/>
+                        <a:cs typeface="Diodrum Arabic" charset="0"/>
+                      </a:endParaRPr>
+                    </a:p>
+                  </a:txBody>
+                  <a:tcPr marL="54864" marR="54864" marT="0" marB="0" anchor="ctr">
+                    <a:lnL w="6350" cap="flat" cmpd="sng" algn="ctr">
+                      <a:solidFill>
+                        <a:srgbClr val="C8C9C7"/>
+                      </a:solidFill>
+                      <a:prstDash val="solid"/>
+                      <a:round/>
+                      <a:headEnd type="none" w="med" len="med"/>
+                      <a:tailEnd type="none" w="med" len="med"/>
+                    </a:lnL>
+                    <a:lnR w="6350" cap="flat" cmpd="sng" algn="ctr">
+                      <a:solidFill>
+                        <a:srgbClr val="C8C9C7"/>
+                      </a:solidFill>
+                      <a:prstDash val="solid"/>
+                      <a:round/>
+                      <a:headEnd type="none" w="med" len="med"/>
+                      <a:tailEnd type="none" w="med" len="med"/>
+                    </a:lnR>
+                    <a:lnT w="6350" cap="flat" cmpd="sng" algn="ctr">
+                      <a:solidFill>
+                        <a:srgbClr val="C8C9C7"/>
+                      </a:solidFill>
+                      <a:prstDash val="solid"/>
+                      <a:round/>
+                      <a:headEnd type="none" w="med" len="med"/>
+                      <a:tailEnd type="none" w="med" len="med"/>
+                    </a:lnT>
+                    <a:lnB w="6350" cap="flat" cmpd="sng" algn="ctr">
+                      <a:solidFill>
+                        <a:srgbClr val="C8C9C7"/>
+                      </a:solidFill>
+                      <a:prstDash val="solid"/>
+                      <a:round/>
+                      <a:headEnd type="none" w="med" len="med"/>
+                      <a:tailEnd type="none" w="med" len="med"/>
+                    </a:lnB>
+                    <a:solidFill>
+                      <a:srgbClr val="E6F1F4"/>
+                    </a:solidFill>
+                  </a:tcPr>
+                </a:tc>
+                <a:tc>
+                  <a:txBody>
+                    <a:bodyPr/>
+                    <a:lstStyle/>
+                    <a:p>
+                      <a:pPr algn="r" indent="0" marL="0">
+                        <a:buNone/>
+                      </a:pPr>
+                      <a:r>
+                        <a:rPr lang="en-US" sz="1000" b="1" dirty="0">
+                          <a:solidFill>
+                            <a:srgbClr val="00778B"/>
+                          </a:solidFill>
+                          <a:latin typeface="Diodrum Arabic" pitchFamily="34" charset="0"/>
+                          <a:ea typeface="Diodrum Arabic" pitchFamily="34" charset="-122"/>
+                          <a:cs typeface="Diodrum Arabic" pitchFamily="34" charset="-120"/>
+                        </a:rPr>
+                        <a:t>20.50</a:t>
+                      </a:r>
+                      <a:endParaRPr lang="en-US" sz="1000" dirty="0">
+                        <a:latin typeface="Diodrum Arabic" charset="0"/>
+                        <a:ea typeface="Diodrum Arabic" charset="0"/>
+                        <a:cs typeface="Diodrum Arabic" charset="0"/>
+                      </a:endParaRPr>
+                    </a:p>
+                  </a:txBody>
+                  <a:tcPr marL="54864" marR="54864" marT="0" marB="0" anchor="ctr">
+                    <a:lnL w="6350" cap="flat" cmpd="sng" algn="ctr">
+                      <a:solidFill>
+                        <a:srgbClr val="C8C9C7"/>
+                      </a:solidFill>
+                      <a:prstDash val="solid"/>
+                      <a:round/>
+                      <a:headEnd type="none" w="med" len="med"/>
+                      <a:tailEnd type="none" w="med" len="med"/>
+                    </a:lnL>
+                    <a:lnR w="6350" cap="flat" cmpd="sng" algn="ctr">
+                      <a:solidFill>
+                        <a:srgbClr val="C8C9C7"/>
+                      </a:solidFill>
+                      <a:prstDash val="solid"/>
+                      <a:round/>
+                      <a:headEnd type="none" w="med" len="med"/>
+                      <a:tailEnd type="none" w="med" len="med"/>
+                    </a:lnR>
+                    <a:lnT w="6350" cap="flat" cmpd="sng" algn="ctr">
+                      <a:solidFill>
+                        <a:srgbClr val="C8C9C7"/>
+                      </a:solidFill>
+                      <a:prstDash val="solid"/>
+                      <a:round/>
+                      <a:headEnd type="none" w="med" len="med"/>
+                      <a:tailEnd type="none" w="med" len="med"/>
+                    </a:lnT>
+                    <a:lnB w="6350" cap="flat" cmpd="sng" algn="ctr">
+                      <a:solidFill>
+                        <a:srgbClr val="C8C9C7"/>
+                      </a:solidFill>
+                      <a:prstDash val="solid"/>
+                      <a:round/>
+                      <a:headEnd type="none" w="med" len="med"/>
+                      <a:tailEnd type="none" w="med" len="med"/>
+                    </a:lnB>
+                    <a:solidFill>
+                      <a:srgbClr val="E6F1F4"/>
+                    </a:solidFill>
+                  </a:tcPr>
+                </a:tc>
+                <a:tc>
+                  <a:txBody>
+                    <a:bodyPr/>
+                    <a:lstStyle/>
+                    <a:p>
+                      <a:pPr algn="r" indent="0" marL="0">
+                        <a:buNone/>
+                      </a:pPr>
+                      <a:r>
+                        <a:rPr lang="en-US" sz="1000" b="1" dirty="0">
+                          <a:solidFill>
+                            <a:srgbClr val="00778B"/>
+                          </a:solidFill>
+                          <a:latin typeface="Diodrum Arabic" pitchFamily="34" charset="0"/>
+                          <a:ea typeface="Diodrum Arabic" pitchFamily="34" charset="-122"/>
+                          <a:cs typeface="Diodrum Arabic" pitchFamily="34" charset="-120"/>
+                        </a:rPr>
+                        <a:t>11.11</a:t>
+                      </a:r>
+                      <a:endParaRPr lang="en-US" sz="1000" dirty="0">
+                        <a:latin typeface="Diodrum Arabic" charset="0"/>
+                        <a:ea typeface="Diodrum Arabic" charset="0"/>
+                        <a:cs typeface="Diodrum Arabic" charset="0"/>
+                      </a:endParaRPr>
+                    </a:p>
+                  </a:txBody>
+                  <a:tcPr marL="54864" marR="54864" marT="0" marB="0" anchor="ctr">
+                    <a:lnL w="6350" cap="flat" cmpd="sng" algn="ctr">
+                      <a:solidFill>
+                        <a:srgbClr val="C8C9C7"/>
+                      </a:solidFill>
+                      <a:prstDash val="solid"/>
+                      <a:round/>
+                      <a:headEnd type="none" w="med" len="med"/>
+                      <a:tailEnd type="none" w="med" len="med"/>
+                    </a:lnL>
+                    <a:lnR w="6350" cap="flat" cmpd="sng" algn="ctr">
+                      <a:solidFill>
+                        <a:srgbClr val="C8C9C7"/>
+                      </a:solidFill>
+                      <a:prstDash val="solid"/>
+                      <a:round/>
+                      <a:headEnd type="none" w="med" len="med"/>
+                      <a:tailEnd type="none" w="med" len="med"/>
+                    </a:lnR>
+                    <a:lnT w="6350" cap="flat" cmpd="sng" algn="ctr">
+                      <a:solidFill>
+                        <a:srgbClr val="C8C9C7"/>
+                      </a:solidFill>
+                      <a:prstDash val="solid"/>
+                      <a:round/>
+                      <a:headEnd type="none" w="med" len="med"/>
+                      <a:tailEnd type="none" w="med" len="med"/>
+                    </a:lnT>
+                    <a:lnB w="6350" cap="flat" cmpd="sng" algn="ctr">
+                      <a:solidFill>
+                        <a:srgbClr val="C8C9C7"/>
+                      </a:solidFill>
+                      <a:prstDash val="solid"/>
+                      <a:round/>
+                      <a:headEnd type="none" w="med" len="med"/>
+                      <a:tailEnd type="none" w="med" len="med"/>
+                    </a:lnB>
+                    <a:solidFill>
+                      <a:srgbClr val="E6F1F4"/>
+                    </a:solidFill>
+                  </a:tcPr>
+                </a:tc>
+                <a:tc>
+                  <a:txBody>
+                    <a:bodyPr/>
+                    <a:lstStyle/>
+                    <a:p>
+                      <a:pPr algn="r" indent="0" marL="0">
+                        <a:buNone/>
+                      </a:pPr>
+                      <a:r>
+                        <a:rPr lang="en-US" sz="1000" b="1" dirty="0">
+                          <a:solidFill>
+                            <a:srgbClr val="00778B"/>
+                          </a:solidFill>
+                          <a:latin typeface="Diodrum Arabic" pitchFamily="34" charset="0"/>
+                          <a:ea typeface="Diodrum Arabic" pitchFamily="34" charset="-122"/>
+                          <a:cs typeface="Diodrum Arabic" pitchFamily="34" charset="-120"/>
+                        </a:rPr>
+                        <a:t>30.39</a:t>
+                      </a:r>
+                      <a:endParaRPr lang="en-US" sz="1000" dirty="0">
+                        <a:latin typeface="Diodrum Arabic" charset="0"/>
+                        <a:ea typeface="Diodrum Arabic" charset="0"/>
+                        <a:cs typeface="Diodrum Arabic" charset="0"/>
+                      </a:endParaRPr>
+                    </a:p>
+                  </a:txBody>
+                  <a:tcPr marL="54864" marR="54864" marT="0" marB="0" anchor="ctr">
+                    <a:lnL w="6350" cap="flat" cmpd="sng" algn="ctr">
+                      <a:solidFill>
+                        <a:srgbClr val="C8C9C7"/>
+                      </a:solidFill>
+                      <a:prstDash val="solid"/>
+                      <a:round/>
+                      <a:headEnd type="none" w="med" len="med"/>
+                      <a:tailEnd type="none" w="med" len="med"/>
+                    </a:lnL>
+                    <a:lnR w="6350" cap="flat" cmpd="sng" algn="ctr">
+                      <a:solidFill>
+                        <a:srgbClr val="C8C9C7"/>
+                      </a:solidFill>
+                      <a:prstDash val="solid"/>
+                      <a:round/>
+                      <a:headEnd type="none" w="med" len="med"/>
+                      <a:tailEnd type="none" w="med" len="med"/>
+                    </a:lnR>
+                    <a:lnT w="6350" cap="flat" cmpd="sng" algn="ctr">
+                      <a:solidFill>
+                        <a:srgbClr val="C8C9C7"/>
+                      </a:solidFill>
+                      <a:prstDash val="solid"/>
+                      <a:round/>
+                      <a:headEnd type="none" w="med" len="med"/>
+                      <a:tailEnd type="none" w="med" len="med"/>
+                    </a:lnT>
+                    <a:lnB w="6350" cap="flat" cmpd="sng" algn="ctr">
+                      <a:solidFill>
+                        <a:srgbClr val="C8C9C7"/>
+                      </a:solidFill>
+                      <a:prstDash val="solid"/>
+                      <a:round/>
+                      <a:headEnd type="none" w="med" len="med"/>
+                      <a:tailEnd type="none" w="med" len="med"/>
+                    </a:lnB>
+                    <a:solidFill>
+                      <a:srgbClr val="E6F1F4"/>
+                    </a:solidFill>
+                  </a:tcPr>
+                </a:tc>
+                <a:tc>
+                  <a:txBody>
+                    <a:bodyPr/>
+                    <a:lstStyle/>
+                    <a:p>
+                      <a:pPr algn="r" indent="0" marL="0">
+                        <a:buNone/>
+                      </a:pPr>
+                      <a:r>
+                        <a:rPr lang="en-US" sz="1000" b="1" dirty="0">
+                          <a:solidFill>
+                            <a:srgbClr val="00778B"/>
+                          </a:solidFill>
+                          <a:latin typeface="Diodrum Arabic" pitchFamily="34" charset="0"/>
+                          <a:ea typeface="Diodrum Arabic" pitchFamily="34" charset="-122"/>
+                          <a:cs typeface="Diodrum Arabic" pitchFamily="34" charset="-120"/>
+                        </a:rPr>
+                        <a:t>62.00</a:t>
+                      </a:r>
+                      <a:endParaRPr lang="en-US" sz="1000" dirty="0">
+                        <a:latin typeface="Diodrum Arabic" charset="0"/>
+                        <a:ea typeface="Diodrum Arabic" charset="0"/>
+                        <a:cs typeface="Diodrum Arabic" charset="0"/>
+                      </a:endParaRPr>
+                    </a:p>
+                  </a:txBody>
+                  <a:tcPr marL="54864" marR="54864" marT="0" marB="0" anchor="ctr">
+                    <a:lnL w="6350" cap="flat" cmpd="sng" algn="ctr">
+                      <a:solidFill>
+                        <a:srgbClr val="C8C9C7"/>
+                      </a:solidFill>
+                      <a:prstDash val="solid"/>
+                      <a:round/>
+                      <a:headEnd type="none" w="med" len="med"/>
+                      <a:tailEnd type="none" w="med" len="med"/>
+                    </a:lnL>
+                    <a:lnR w="6350" cap="flat" cmpd="sng" algn="ctr">
+                      <a:solidFill>
+                        <a:srgbClr val="C8C9C7"/>
+                      </a:solidFill>
+                      <a:prstDash val="solid"/>
+                      <a:round/>
+                      <a:headEnd type="none" w="med" len="med"/>
+                      <a:tailEnd type="none" w="med" len="med"/>
+                    </a:lnR>
+                    <a:lnT w="6350" cap="flat" cmpd="sng" algn="ctr">
+                      <a:solidFill>
+                        <a:srgbClr val="C8C9C7"/>
+                      </a:solidFill>
+                      <a:prstDash val="solid"/>
+                      <a:round/>
+                      <a:headEnd type="none" w="med" len="med"/>
+                      <a:tailEnd type="none" w="med" len="med"/>
+                    </a:lnT>
+                    <a:lnB w="6350" cap="flat" cmpd="sng" algn="ctr">
+                      <a:solidFill>
+                        <a:srgbClr val="C8C9C7"/>
+                      </a:solidFill>
+                      <a:prstDash val="solid"/>
+                      <a:round/>
+                      <a:headEnd type="none" w="med" len="med"/>
+                      <a:tailEnd type="none" w="med" len="med"/>
+                    </a:lnB>
+                    <a:solidFill>
+                      <a:srgbClr val="E6F1F4"/>
+                    </a:solidFill>
+                  </a:tcPr>
+                </a:tc>
+                <a:tc>
+                  <a:txBody>
+                    <a:bodyPr/>
+                    <a:lstStyle/>
+                    <a:p>
+                      <a:pPr algn="r" indent="0" marL="0">
+                        <a:buNone/>
+                      </a:pPr>
+                      <a:r>
+                        <a:rPr lang="en-US" sz="1000" b="1" dirty="0">
+                          <a:solidFill>
+                            <a:srgbClr val="00778B"/>
+                          </a:solidFill>
+                          <a:latin typeface="Diodrum Arabic" pitchFamily="34" charset="0"/>
+                          <a:ea typeface="Diodrum Arabic" pitchFamily="34" charset="-122"/>
+                          <a:cs typeface="Diodrum Arabic" pitchFamily="34" charset="-120"/>
+                        </a:rPr>
+                        <a:t>100%</a:t>
+                      </a:r>
+                      <a:endParaRPr lang="en-US" sz="1000" dirty="0">
+                        <a:latin typeface="Diodrum Arabic" charset="0"/>
+                        <a:ea typeface="Diodrum Arabic" charset="0"/>
+                        <a:cs typeface="Diodrum Arabic" charset="0"/>
+                      </a:endParaRPr>
+                    </a:p>
+                  </a:txBody>
+                  <a:tcPr marL="54864" marR="54864" marT="0" marB="0" anchor="ctr">
+                    <a:lnL w="6350" cap="flat" cmpd="sng" algn="ctr">
+                      <a:solidFill>
+                        <a:srgbClr val="C8C9C7"/>
+                      </a:solidFill>
+                      <a:prstDash val="solid"/>
+                      <a:round/>
+                      <a:headEnd type="none" w="med" len="med"/>
+                      <a:tailEnd type="none" w="med" len="med"/>
+                    </a:lnL>
+                    <a:lnR w="6350" cap="flat" cmpd="sng" algn="ctr">
+                      <a:solidFill>
+                        <a:srgbClr val="C8C9C7"/>
+                      </a:solidFill>
+                      <a:prstDash val="solid"/>
+                      <a:round/>
+                      <a:headEnd type="none" w="med" len="med"/>
+                      <a:tailEnd type="none" w="med" len="med"/>
+                    </a:lnR>
+                    <a:lnT w="6350" cap="flat" cmpd="sng" algn="ctr">
+                      <a:solidFill>
+                        <a:srgbClr val="C8C9C7"/>
+                      </a:solidFill>
+                      <a:prstDash val="solid"/>
+                      <a:round/>
+                      <a:headEnd type="none" w="med" len="med"/>
+                      <a:tailEnd type="none" w="med" len="med"/>
+                    </a:lnT>
+                    <a:lnB w="6350" cap="flat" cmpd="sng" algn="ctr">
+                      <a:solidFill>
+                        <a:srgbClr val="C8C9C7"/>
+                      </a:solidFill>
+                      <a:prstDash val="solid"/>
+                      <a:round/>
+                      <a:headEnd type="none" w="med" len="med"/>
+                      <a:tailEnd type="none" w="med" len="med"/>
+                    </a:lnB>
+                    <a:solidFill>
+                      <a:srgbClr val="E6F1F4"/>
+                    </a:solidFill>
+                  </a:tcPr>
+                </a:tc>
+              </a:tr>
+            </a:tbl>
+          </a:graphicData>
+        </a:graphic>
+      </p:graphicFrame>
+      <p:sp>
+        <p:nvSpPr>
+          <p:cNvPr id="11" name="Text 7"/>
+          <p:cNvSpPr txBox="1"/>
+          <p:nvPr/>
+        </p:nvSpPr>
+        <p:spPr>
+          <a:xfrm>
+            <a:off x="777240" y="5120640"/>
+            <a:ext cx="6766560" cy="365760"/>
+          </a:xfrm>
+          <a:prstGeom prst="rect">
+            <a:avLst/>
+          </a:prstGeom>
+          <a:noFill/>
+          <a:ln/>
+        </p:spPr>
+        <p:txBody>
+          <a:bodyPr wrap="square" lIns="0" tIns="0" rIns="0" bIns="0" rtlCol="0" anchor="t"/>
+          <a:lstStyle/>
+          <a:p>
+            <a:pPr indent="0" marL="0">
+              <a:buNone/>
+            </a:pPr>
+            <a:r>
+              <a:rPr lang="en-US" sz="1000" dirty="0">
+                <a:solidFill>
+                  <a:srgbClr val="768692"/>
+                </a:solidFill>
+                <a:latin typeface="Diodrum Arabic" pitchFamily="34" charset="0"/>
+                <a:ea typeface="Diodrum Arabic" pitchFamily="34" charset="-122"/>
+                <a:cs typeface="Diodrum Arabic" pitchFamily="34" charset="-120"/>
+              </a:rPr>
+              <a:t>The first six rows are priced per station; the last six are the shared packages of each railway.</a:t>
+            </a:r>
+            <a:endParaRPr lang="en-US" sz="1000" dirty="0"/>
+          </a:p>
+        </p:txBody>
+      </p:sp>
+      <p:graphicFrame>
+        <p:nvGraphicFramePr>
+          <p:cNvPr id="12" name="Chart 0" descr=""/>
+          <p:cNvGraphicFramePr/>
+          <p:nvPr/>
+        </p:nvGraphicFramePr>
+        <p:xfrm>
+          <a:off x="7772400" y="1627632"/>
+          <a:ext cx="3749040" cy="3611880"/>
+        </p:xfrm>
+        <a:graphic xmlns:a="http://schemas.openxmlformats.org/drawingml/2006/main">
+          <a:graphicData uri="http://schemas.openxmlformats.org/drawingml/2006/chart">
+            <c:chart xmlns:c="http://schemas.openxmlformats.org/drawingml/2006/chart" r:id="rId2"/>
+          </a:graphicData>
+        </a:graphic>
+      </p:graphicFrame>
+      <p:sp>
+        <p:nvSpPr>
+          <p:cNvPr id="13" name="Shape 8"/>
+          <p:cNvSpPr/>
+          <p:nvPr/>
+        </p:nvSpPr>
+        <p:spPr>
+          <a:xfrm>
+            <a:off x="777240" y="5504688"/>
+            <a:ext cx="3459480" cy="731520"/>
+          </a:xfrm>
+          <a:prstGeom prst="rect">
+            <a:avLst/>
+          </a:prstGeom>
+          <a:solidFill>
+            <a:srgbClr val="00778B"/>
+          </a:solidFill>
+          <a:ln w="12700">
+            <a:solidFill>
+              <a:srgbClr val="00778B"/>
+            </a:solidFill>
+            <a:prstDash val="solid"/>
+          </a:ln>
+        </p:spPr>
+      </p:sp>
+      <p:sp>
+        <p:nvSpPr>
+          <p:cNvPr id="14" name="Text 9"/>
+          <p:cNvSpPr txBox="1"/>
+          <p:nvPr/>
+        </p:nvSpPr>
+        <p:spPr>
+          <a:xfrm>
+            <a:off x="941832" y="5504688"/>
+            <a:ext cx="3185160" cy="731520"/>
+          </a:xfrm>
+          <a:prstGeom prst="rect">
+            <a:avLst/>
+          </a:prstGeom>
+          <a:noFill/>
+          <a:ln/>
+        </p:spPr>
+        <p:txBody>
+          <a:bodyPr wrap="square" lIns="0" tIns="0" rIns="0" bIns="0" rtlCol="0" anchor="ctr"/>
+          <a:lstStyle/>
+          <a:p>
+            <a:pPr indent="0" marL="0">
+              <a:buNone/>
+            </a:pPr>
+            <a:r>
+              <a:rPr lang="en-US" sz="1600" b="1" dirty="0">
+                <a:solidFill>
+                  <a:srgbClr val="FFFFFF"/>
+                </a:solidFill>
+                <a:latin typeface="Diodrum Arabic" pitchFamily="34" charset="0"/>
+                <a:ea typeface="Diodrum Arabic" pitchFamily="34" charset="-122"/>
+                <a:cs typeface="Diodrum Arabic" pitchFamily="34" charset="-120"/>
+              </a:rPr>
+              <a:t>NSR   </a:t>
+            </a:r>
+            <a:pPr indent="0" marL="0">
+              <a:buNone/>
+            </a:pPr>
+            <a:r>
+              <a:rPr lang="en-US" sz="1600" b="1" dirty="0">
+                <a:solidFill>
+                  <a:srgbClr val="FFFFFF"/>
+                </a:solidFill>
+                <a:latin typeface="Diodrum Arabic" pitchFamily="34" charset="0"/>
+                <a:ea typeface="Diodrum Arabic" pitchFamily="34" charset="-122"/>
+                <a:cs typeface="Diodrum Arabic" pitchFamily="34" charset="-120"/>
+              </a:rPr>
+              <a:t>SAR 20.50M</a:t>
+            </a:r>
+            <a:endParaRPr lang="en-US" sz="1600" dirty="0"/>
+          </a:p>
+          <a:p>
+            <a:pPr indent="0" marL="0">
+              <a:buNone/>
+            </a:pPr>
+            <a:r>
+              <a:rPr lang="en-US" sz="1100" dirty="0">
+                <a:solidFill>
+                  <a:srgbClr val="FFFFFF"/>
+                </a:solidFill>
+                <a:latin typeface="Diodrum Arabic" pitchFamily="34" charset="0"/>
+                <a:ea typeface="Diodrum Arabic" pitchFamily="34" charset="-122"/>
+                <a:cs typeface="Diodrum Arabic" pitchFamily="34" charset="-120"/>
+              </a:rPr>
+              <a:t>528 cameras · 6 stations</a:t>
+            </a:r>
+            <a:endParaRPr lang="en-US" sz="1600" dirty="0"/>
+          </a:p>
+        </p:txBody>
+      </p:sp>
+      <p:sp>
+        <p:nvSpPr>
+          <p:cNvPr id="15" name="Shape 10"/>
+          <p:cNvSpPr/>
+          <p:nvPr/>
+        </p:nvSpPr>
+        <p:spPr>
+          <a:xfrm>
+            <a:off x="4419600" y="5504688"/>
+            <a:ext cx="3459480" cy="731520"/>
+          </a:xfrm>
+          <a:prstGeom prst="rect">
+            <a:avLst/>
+          </a:prstGeom>
+          <a:solidFill>
+            <a:srgbClr val="F1B434"/>
+          </a:solidFill>
+          <a:ln w="12700">
+            <a:solidFill>
+              <a:srgbClr val="F1B434"/>
+            </a:solidFill>
+            <a:prstDash val="solid"/>
+          </a:ln>
+        </p:spPr>
+      </p:sp>
+      <p:sp>
+        <p:nvSpPr>
+          <p:cNvPr id="16" name="Text 11"/>
+          <p:cNvSpPr txBox="1"/>
+          <p:nvPr/>
+        </p:nvSpPr>
+        <p:spPr>
+          <a:xfrm>
+            <a:off x="4584192" y="5504688"/>
+            <a:ext cx="3185160" cy="731520"/>
+          </a:xfrm>
+          <a:prstGeom prst="rect">
+            <a:avLst/>
+          </a:prstGeom>
+          <a:noFill/>
+          <a:ln/>
+        </p:spPr>
+        <p:txBody>
+          <a:bodyPr wrap="square" lIns="0" tIns="0" rIns="0" bIns="0" rtlCol="0" anchor="ctr"/>
+          <a:lstStyle/>
+          <a:p>
+            <a:pPr indent="0" marL="0">
+              <a:buNone/>
+            </a:pPr>
+            <a:r>
+              <a:rPr lang="en-US" sz="1600" b="1" dirty="0">
+                <a:solidFill>
+                  <a:srgbClr val="3D3935"/>
+                </a:solidFill>
+                <a:latin typeface="Diodrum Arabic" pitchFamily="34" charset="0"/>
+                <a:ea typeface="Diodrum Arabic" pitchFamily="34" charset="-122"/>
+                <a:cs typeface="Diodrum Arabic" pitchFamily="34" charset="-120"/>
+              </a:rPr>
+              <a:t>EWR   </a:t>
+            </a:r>
+            <a:pPr indent="0" marL="0">
+              <a:buNone/>
+            </a:pPr>
+            <a:r>
+              <a:rPr lang="en-US" sz="1600" b="1" dirty="0">
+                <a:solidFill>
+                  <a:srgbClr val="3D3935"/>
+                </a:solidFill>
+                <a:latin typeface="Diodrum Arabic" pitchFamily="34" charset="0"/>
+                <a:ea typeface="Diodrum Arabic" pitchFamily="34" charset="-122"/>
+                <a:cs typeface="Diodrum Arabic" pitchFamily="34" charset="-120"/>
+              </a:rPr>
+              <a:t>SAR 11.11M</a:t>
+            </a:r>
+            <a:endParaRPr lang="en-US" sz="1600" dirty="0"/>
+          </a:p>
+          <a:p>
+            <a:pPr indent="0" marL="0">
+              <a:buNone/>
+            </a:pPr>
+            <a:r>
+              <a:rPr lang="en-US" sz="1100" dirty="0">
+                <a:solidFill>
+                  <a:srgbClr val="3D3935"/>
+                </a:solidFill>
+                <a:latin typeface="Diodrum Arabic" pitchFamily="34" charset="0"/>
+                <a:ea typeface="Diodrum Arabic" pitchFamily="34" charset="-122"/>
+                <a:cs typeface="Diodrum Arabic" pitchFamily="34" charset="-120"/>
+              </a:rPr>
+              <a:t>228 cameras · 4 stations</a:t>
+            </a:r>
+            <a:endParaRPr lang="en-US" sz="1600" dirty="0"/>
+          </a:p>
+        </p:txBody>
+      </p:sp>
+      <p:sp>
+        <p:nvSpPr>
+          <p:cNvPr id="17" name="Shape 12"/>
+          <p:cNvSpPr/>
+          <p:nvPr/>
+        </p:nvSpPr>
+        <p:spPr>
+          <a:xfrm>
+            <a:off x="8061960" y="5504688"/>
+            <a:ext cx="3459480" cy="731520"/>
+          </a:xfrm>
+          <a:prstGeom prst="rect">
+            <a:avLst/>
+          </a:prstGeom>
+          <a:solidFill>
+            <a:srgbClr val="3D3935"/>
+          </a:solidFill>
+          <a:ln w="12700">
+            <a:solidFill>
+              <a:srgbClr val="3D3935"/>
+            </a:solidFill>
+            <a:prstDash val="solid"/>
+          </a:ln>
+        </p:spPr>
+      </p:sp>
+      <p:sp>
+        <p:nvSpPr>
+          <p:cNvPr id="18" name="Text 13"/>
+          <p:cNvSpPr txBox="1"/>
+          <p:nvPr/>
+        </p:nvSpPr>
+        <p:spPr>
+          <a:xfrm>
+            <a:off x="8226552" y="5504688"/>
+            <a:ext cx="3185160" cy="731520"/>
+          </a:xfrm>
+          <a:prstGeom prst="rect">
+            <a:avLst/>
+          </a:prstGeom>
+          <a:noFill/>
+          <a:ln/>
+        </p:spPr>
+        <p:txBody>
+          <a:bodyPr wrap="square" lIns="0" tIns="0" rIns="0" bIns="0" rtlCol="0" anchor="ctr"/>
+          <a:lstStyle/>
+          <a:p>
+            <a:pPr indent="0" marL="0">
+              <a:buNone/>
+            </a:pPr>
+            <a:r>
+              <a:rPr lang="en-US" sz="1600" b="1" dirty="0">
+                <a:solidFill>
+                  <a:srgbClr val="FFFFFF"/>
+                </a:solidFill>
+                <a:latin typeface="Diodrum Arabic" pitchFamily="34" charset="0"/>
+                <a:ea typeface="Diodrum Arabic" pitchFamily="34" charset="-122"/>
+                <a:cs typeface="Diodrum Arabic" pitchFamily="34" charset="-120"/>
+              </a:rPr>
+              <a:t>HHR   </a:t>
+            </a:r>
+            <a:pPr indent="0" marL="0">
+              <a:buNone/>
+            </a:pPr>
+            <a:r>
+              <a:rPr lang="en-US" sz="1600" b="1" dirty="0">
+                <a:solidFill>
+                  <a:srgbClr val="FFFFFF"/>
+                </a:solidFill>
+                <a:latin typeface="Diodrum Arabic" pitchFamily="34" charset="0"/>
+                <a:ea typeface="Diodrum Arabic" pitchFamily="34" charset="-122"/>
+                <a:cs typeface="Diodrum Arabic" pitchFamily="34" charset="-120"/>
+              </a:rPr>
+              <a:t>SAR 30.39M</a:t>
+            </a:r>
+            <a:endParaRPr lang="en-US" sz="1600" dirty="0"/>
+          </a:p>
+          <a:p>
+            <a:pPr indent="0" marL="0">
+              <a:buNone/>
+            </a:pPr>
+            <a:r>
+              <a:rPr lang="en-US" sz="1100" dirty="0">
+                <a:solidFill>
+                  <a:srgbClr val="FFFFFF"/>
+                </a:solidFill>
+                <a:latin typeface="Diodrum Arabic" pitchFamily="34" charset="0"/>
+                <a:ea typeface="Diodrum Arabic" pitchFamily="34" charset="-122"/>
+                <a:cs typeface="Diodrum Arabic" pitchFamily="34" charset="-120"/>
+              </a:rPr>
+              <a:t>1,725 cameras · 4 stations</a:t>
+            </a:r>
+            <a:endParaRPr lang="en-US" sz="1600" dirty="0"/>
+          </a:p>
+        </p:txBody>
+      </p:sp>
+    </p:spTree>
+  </p:cSld>
+  <p:clrMapOvr>
+    <a:masterClrMapping/>
+  </p:clrMapOvr>
+</p:sld>
+</file>
+
+<file path=ppt/slides/slide4.xml><?xml version="1.0" encoding="utf-8"?>
+<p:sld xmlns:a="http://schemas.openxmlformats.org/drawingml/2006/main" xmlns:r="http://schemas.openxmlformats.org/officeDocument/2006/relationships" xmlns:p="http://schemas.openxmlformats.org/presentationml/2006/main">
+  <p:cSld name="Slide 4">
+    <p:spTree>
+      <p:nvGrpSpPr>
+        <p:cNvPr id="1" name=""/>
+        <p:cNvGrpSpPr/>
+        <p:nvPr/>
+      </p:nvGrpSpPr>
+      <p:grpSpPr>
+        <a:xfrm>
+          <a:off x="0" y="0"/>
+          <a:ext cx="0" cy="0"/>
+          <a:chOff x="0" y="0"/>
+          <a:chExt cx="0" cy="0"/>
+        </a:xfrm>
+      </p:grpSpPr>
+      <p:pic>
+        <p:nvPicPr>
+          <p:cNvPr id="2" name="Image 0" descr="preencoded.png">    </p:cNvPr>
+          <p:cNvPicPr>
+            <a:picLocks noChangeAspect="1"/>
+          </p:cNvPicPr>
+          <p:nvPr/>
+        </p:nvPicPr>
+        <p:blipFill>
+          <a:blip r:embed="rId1"/>
+          <a:stretch>
+            <a:fillRect/>
+          </a:stretch>
+        </p:blipFill>
+        <p:spPr>
+          <a:xfrm>
+            <a:off x="411480" y="164592"/>
+            <a:ext cx="675742" cy="420624"/>
+          </a:xfrm>
+          <a:prstGeom prst="rect">
+            <a:avLst/>
+          </a:prstGeom>
+        </p:spPr>
+      </p:pic>
+      <p:sp>
+        <p:nvSpPr>
+          <p:cNvPr id="3" name="Text 0"/>
+          <p:cNvSpPr txBox="1"/>
+          <p:nvPr/>
+        </p:nvSpPr>
+        <p:spPr>
+          <a:xfrm>
+            <a:off x="5852160" y="274320"/>
+            <a:ext cx="5943600" cy="228600"/>
+          </a:xfrm>
+          <a:prstGeom prst="rect">
+            <a:avLst/>
+          </a:prstGeom>
+          <a:noFill/>
+          <a:ln/>
+        </p:spPr>
+        <p:txBody>
+          <a:bodyPr wrap="square" lIns="0" tIns="0" rIns="0" bIns="0" rtlCol="0" anchor="ctr"/>
+          <a:lstStyle/>
+          <a:p>
+            <a:pPr algn="r" indent="0" marL="0">
+              <a:buNone/>
+            </a:pPr>
+            <a:r>
+              <a:rPr lang="en-US" sz="900" dirty="0">
+                <a:solidFill>
+                  <a:srgbClr val="768692"/>
+                </a:solidFill>
+                <a:latin typeface="Diodrum Arabic" pitchFamily="34" charset="0"/>
+                <a:ea typeface="Diodrum Arabic" pitchFamily="34" charset="-122"/>
+                <a:cs typeface="Diodrum Arabic" pitchFamily="34" charset="-120"/>
+              </a:rPr>
+              <a:t>Passengers' Security Checking  |  Scope of work (3 of 3)</a:t>
+            </a:r>
+            <a:endParaRPr lang="en-US" sz="900" dirty="0"/>
+          </a:p>
+        </p:txBody>
+      </p:sp>
+      <p:sp>
+        <p:nvSpPr>
+          <p:cNvPr id="4" name="Text 1"/>
+          <p:cNvSpPr txBox="1"/>
+          <p:nvPr/>
+        </p:nvSpPr>
+        <p:spPr>
+          <a:xfrm>
+            <a:off x="11338560" y="530352"/>
+            <a:ext cx="457200" cy="228600"/>
+          </a:xfrm>
+          <a:prstGeom prst="rect">
+            <a:avLst/>
+          </a:prstGeom>
+          <a:noFill/>
+          <a:ln/>
+        </p:spPr>
+        <p:txBody>
+          <a:bodyPr wrap="square" lIns="0" tIns="0" rIns="0" bIns="0" rtlCol="0" anchor="ctr"/>
+          <a:lstStyle/>
+          <a:p>
+            <a:pPr algn="r" indent="0" marL="0">
+              <a:buNone/>
+            </a:pPr>
+            <a:r>
+              <a:rPr lang="en-US" sz="900" dirty="0">
+                <a:solidFill>
+                  <a:srgbClr val="768692"/>
+                </a:solidFill>
+                <a:latin typeface="Diodrum Arabic" pitchFamily="34" charset="0"/>
+                <a:ea typeface="Diodrum Arabic" pitchFamily="34" charset="-122"/>
+                <a:cs typeface="Diodrum Arabic" pitchFamily="34" charset="-120"/>
+              </a:rPr>
+              <a:t>4</a:t>
+            </a:r>
+            <a:endParaRPr lang="en-US" sz="900" dirty="0"/>
+          </a:p>
+        </p:txBody>
+      </p:sp>
+      <p:sp>
+        <p:nvSpPr>
+          <p:cNvPr id="5" name="Shape 2"/>
+          <p:cNvSpPr/>
+          <p:nvPr/>
+        </p:nvSpPr>
+        <p:spPr>
+          <a:xfrm>
+            <a:off x="411480" y="6382512"/>
+            <a:ext cx="11365992" cy="0"/>
+          </a:xfrm>
+          <a:prstGeom prst="line">
+            <a:avLst/>
+          </a:prstGeom>
+          <a:noFill/>
+          <a:ln w="12700">
+            <a:solidFill>
+              <a:srgbClr val="00778B"/>
+            </a:solidFill>
+            <a:prstDash val="solid"/>
+          </a:ln>
+        </p:spPr>
+      </p:sp>
+      <p:sp>
+        <p:nvSpPr>
+          <p:cNvPr id="6" name="Shape 3"/>
+          <p:cNvSpPr/>
+          <p:nvPr/>
+        </p:nvSpPr>
+        <p:spPr>
+          <a:xfrm>
+            <a:off x="11521440" y="6272784"/>
+            <a:ext cx="219456" cy="219456"/>
+          </a:xfrm>
+          <a:prstGeom prst="ellipse">
+            <a:avLst/>
+          </a:prstGeom>
+          <a:solidFill>
+            <a:srgbClr val="FFFFFF"/>
+          </a:solidFill>
+          <a:ln w="12700">
+            <a:solidFill>
+              <a:srgbClr val="00778B"/>
+            </a:solidFill>
+            <a:prstDash val="solid"/>
+          </a:ln>
+        </p:spPr>
+      </p:sp>
+      <p:sp>
+        <p:nvSpPr>
+          <p:cNvPr id="7" name="Shape 4"/>
+          <p:cNvSpPr/>
+          <p:nvPr/>
+        </p:nvSpPr>
+        <p:spPr>
+          <a:xfrm>
+            <a:off x="411480" y="841248"/>
+            <a:ext cx="182880" cy="475488"/>
+          </a:xfrm>
+          <a:prstGeom prst="parallelogram">
+            <a:avLst/>
+          </a:prstGeom>
+          <a:solidFill>
+            <a:srgbClr val="00778B"/>
+          </a:solidFill>
+          <a:ln w="12700">
+            <a:solidFill>
+              <a:srgbClr val="00778B"/>
+            </a:solidFill>
+            <a:prstDash val="solid"/>
+          </a:ln>
+        </p:spPr>
+      </p:sp>
+      <p:sp>
+        <p:nvSpPr>
+          <p:cNvPr id="8" name="Text 5"/>
+          <p:cNvSpPr txBox="1"/>
+          <p:nvPr/>
+        </p:nvSpPr>
+        <p:spPr>
+          <a:xfrm>
+            <a:off x="777240" y="804672"/>
+            <a:ext cx="10881360" cy="457200"/>
+          </a:xfrm>
+          <a:prstGeom prst="rect">
+            <a:avLst/>
+          </a:prstGeom>
+          <a:noFill/>
+          <a:ln/>
+        </p:spPr>
+        <p:txBody>
+          <a:bodyPr wrap="square" lIns="0" tIns="0" rIns="0" bIns="0" rtlCol="0" anchor="ctr"/>
+          <a:lstStyle/>
+          <a:p>
+            <a:pPr indent="0" marL="0">
+              <a:buNone/>
+            </a:pPr>
+            <a:r>
+              <a:rPr lang="en-US" sz="2200" b="1" dirty="0">
+                <a:solidFill>
+                  <a:srgbClr val="00778B"/>
+                </a:solidFill>
+                <a:latin typeface="Diodrum Arabic" pitchFamily="34" charset="0"/>
+                <a:ea typeface="Diodrum Arabic" pitchFamily="34" charset="-122"/>
+                <a:cs typeface="Diodrum Arabic" pitchFamily="34" charset="-120"/>
+              </a:rPr>
+              <a:t>Scope in detail: obligations, acceptance and conditions</a:t>
+            </a:r>
+            <a:endParaRPr lang="en-US" sz="2200" dirty="0"/>
+          </a:p>
+        </p:txBody>
+      </p:sp>
+      <p:sp>
+        <p:nvSpPr>
+          <p:cNvPr id="9" name="Text 6"/>
+          <p:cNvSpPr txBox="1"/>
+          <p:nvPr/>
+        </p:nvSpPr>
+        <p:spPr>
+          <a:xfrm>
+            <a:off x="777240" y="1261872"/>
+            <a:ext cx="10881360" cy="274320"/>
+          </a:xfrm>
+          <a:prstGeom prst="rect">
+            <a:avLst/>
+          </a:prstGeom>
+          <a:noFill/>
+          <a:ln/>
+        </p:spPr>
+        <p:txBody>
+          <a:bodyPr wrap="square" lIns="0" tIns="0" rIns="0" bIns="0" rtlCol="0" anchor="ctr"/>
+          <a:lstStyle/>
+          <a:p>
+            <a:pPr indent="0" marL="0">
+              <a:buNone/>
+            </a:pPr>
+            <a:r>
+              <a:rPr lang="en-US" sz="1200" dirty="0">
+                <a:solidFill>
+                  <a:srgbClr val="768692"/>
+                </a:solidFill>
+                <a:latin typeface="Diodrum Arabic" pitchFamily="34" charset="0"/>
+                <a:ea typeface="Diodrum Arabic" pitchFamily="34" charset="-122"/>
+                <a:cs typeface="Diodrum Arabic" pitchFamily="34" charset="-120"/>
+              </a:rPr>
+              <a:t>From the contract body, Annex 2 (SAR Scope of Work), Annex 3 terms and Annex 5 clarifications</a:t>
+            </a:r>
+            <a:endParaRPr lang="en-US" sz="1200" dirty="0"/>
+          </a:p>
+        </p:txBody>
+      </p:sp>
+      <p:sp>
+        <p:nvSpPr>
+          <p:cNvPr id="10" name="Shape 7"/>
+          <p:cNvSpPr/>
+          <p:nvPr/>
+        </p:nvSpPr>
+        <p:spPr>
+          <a:xfrm>
+            <a:off x="777240" y="1664208"/>
+            <a:ext cx="3459480" cy="2176272"/>
+          </a:xfrm>
+          <a:prstGeom prst="rect">
+            <a:avLst/>
+          </a:prstGeom>
+          <a:solidFill>
+            <a:srgbClr val="FFFFFF"/>
+          </a:solidFill>
+          <a:ln w="9525">
+            <a:solidFill>
+              <a:srgbClr val="C8C9C7"/>
+            </a:solidFill>
+            <a:prstDash val="solid"/>
+          </a:ln>
+        </p:spPr>
+      </p:sp>
+      <p:sp>
+        <p:nvSpPr>
+          <p:cNvPr id="11" name="Text 8"/>
+          <p:cNvSpPr txBox="1"/>
+          <p:nvPr/>
+        </p:nvSpPr>
+        <p:spPr>
+          <a:xfrm>
+            <a:off x="923544" y="1737360"/>
+            <a:ext cx="3185160" cy="274320"/>
+          </a:xfrm>
+          <a:prstGeom prst="rect">
+            <a:avLst/>
+          </a:prstGeom>
+          <a:noFill/>
+          <a:ln/>
+        </p:spPr>
+        <p:txBody>
+          <a:bodyPr wrap="square" lIns="0" tIns="0" rIns="0" bIns="0" rtlCol="0" anchor="ctr"/>
+          <a:lstStyle/>
+          <a:p>
+            <a:pPr indent="0" marL="0">
+              <a:buNone/>
+            </a:pPr>
+            <a:r>
+              <a:rPr lang="en-US" sz="1200" b="1" dirty="0">
+                <a:solidFill>
+                  <a:srgbClr val="00778B"/>
+                </a:solidFill>
+                <a:latin typeface="Diodrum Arabic" pitchFamily="34" charset="0"/>
+                <a:ea typeface="Diodrum Arabic" pitchFamily="34" charset="-122"/>
+                <a:cs typeface="Diodrum Arabic" pitchFamily="34" charset="-120"/>
+              </a:rPr>
+              <a:t>Contractor obligations (Annex 2)</a:t>
+            </a:r>
+            <a:endParaRPr lang="en-US" sz="1200" dirty="0"/>
+          </a:p>
+        </p:txBody>
+      </p:sp>
+      <p:sp>
+        <p:nvSpPr>
+          <p:cNvPr id="12" name="Text 9"/>
+          <p:cNvSpPr txBox="1"/>
+          <p:nvPr/>
+        </p:nvSpPr>
+        <p:spPr>
+          <a:xfrm>
+            <a:off x="923544" y="2048256"/>
+            <a:ext cx="3185160" cy="1719072"/>
+          </a:xfrm>
+          <a:prstGeom prst="rect">
+            <a:avLst/>
+          </a:prstGeom>
+          <a:noFill/>
+          <a:ln/>
+        </p:spPr>
+        <p:txBody>
+          <a:bodyPr wrap="square" lIns="0" tIns="0" rIns="0" bIns="0" rtlCol="0" anchor="t"/>
+          <a:lstStyle/>
+          <a:p>
+            <a:pPr marL="152400" indent="-152400">
+              <a:spcAft>
+                <a:spcPts val="400"/>
+              </a:spcAft>
+              <a:buSzPct val="100000"/>
+              <a:buChar char="■"/>
+            </a:pPr>
+            <a:r>
+              <a:rPr lang="en-US" sz="1100" dirty="0">
+                <a:solidFill>
+                  <a:srgbClr val="3D3935"/>
+                </a:solidFill>
+                <a:latin typeface="Diodrum Arabic" pitchFamily="34" charset="0"/>
+                <a:ea typeface="Diodrum Arabic" pitchFamily="34" charset="-122"/>
+                <a:cs typeface="Diodrum Arabic" pitchFamily="34" charset="-120"/>
+              </a:rPr>
+              <a:t>Verify existing site conditions before design</a:t>
+            </a:r>
+            <a:endParaRPr lang="en-US" sz="1100" dirty="0"/>
+          </a:p>
+          <a:p>
+            <a:pPr marL="152400" indent="-152400">
+              <a:spcAft>
+                <a:spcPts val="400"/>
+              </a:spcAft>
+              <a:buSzPct val="100000"/>
+              <a:buChar char="■"/>
+            </a:pPr>
+            <a:r>
+              <a:rPr lang="en-US" sz="1100" dirty="0">
+                <a:solidFill>
+                  <a:srgbClr val="3D3935"/>
+                </a:solidFill>
+                <a:latin typeface="Diodrum Arabic" pitchFamily="34" charset="0"/>
+                <a:ea typeface="Diodrum Arabic" pitchFamily="34" charset="-122"/>
+                <a:cs typeface="Diodrum Arabic" pitchFamily="34" charset="-120"/>
+              </a:rPr>
+              <a:t>Detailed design, BOQ with unit rates</a:t>
+            </a:r>
+            <a:endParaRPr lang="en-US" sz="1100" dirty="0"/>
+          </a:p>
+          <a:p>
+            <a:pPr marL="152400" indent="-152400">
+              <a:spcAft>
+                <a:spcPts val="400"/>
+              </a:spcAft>
+              <a:buSzPct val="100000"/>
+              <a:buChar char="■"/>
+            </a:pPr>
+            <a:r>
+              <a:rPr lang="en-US" sz="1100" dirty="0">
+                <a:solidFill>
+                  <a:srgbClr val="3D3935"/>
+                </a:solidFill>
+                <a:latin typeface="Diodrum Arabic" pitchFamily="34" charset="0"/>
+                <a:ea typeface="Diodrum Arabic" pitchFamily="34" charset="-122"/>
+                <a:cs typeface="Diodrum Arabic" pitchFamily="34" charset="-120"/>
+              </a:rPr>
+              <a:t>Mobilization: insurance, QC and ITP, HSE plan</a:t>
+            </a:r>
+            <a:endParaRPr lang="en-US" sz="1100" dirty="0"/>
+          </a:p>
+          <a:p>
+            <a:pPr marL="152400" indent="-152400">
+              <a:spcAft>
+                <a:spcPts val="400"/>
+              </a:spcAft>
+              <a:buSzPct val="100000"/>
+              <a:buChar char="■"/>
+            </a:pPr>
+            <a:r>
+              <a:rPr lang="en-US" sz="1100" dirty="0">
+                <a:solidFill>
+                  <a:srgbClr val="3D3935"/>
+                </a:solidFill>
+                <a:latin typeface="Diodrum Arabic" pitchFamily="34" charset="0"/>
+                <a:ea typeface="Diodrum Arabic" pitchFamily="34" charset="-122"/>
+                <a:cs typeface="Diodrum Arabic" pitchFamily="34" charset="-120"/>
+              </a:rPr>
+              <a:t>As-builts, O&amp;M manuals, 5-year spares list</a:t>
+            </a:r>
+            <a:endParaRPr lang="en-US" sz="1100" dirty="0"/>
+          </a:p>
+          <a:p>
+            <a:pPr marL="152400" indent="-152400">
+              <a:spcAft>
+                <a:spcPts val="400"/>
+              </a:spcAft>
+              <a:buSzPct val="100000"/>
+              <a:buChar char="■"/>
+            </a:pPr>
+            <a:r>
+              <a:rPr lang="en-US" sz="1100" dirty="0">
+                <a:solidFill>
+                  <a:srgbClr val="3D3935"/>
+                </a:solidFill>
+                <a:latin typeface="Diodrum Arabic" pitchFamily="34" charset="0"/>
+                <a:ea typeface="Diodrum Arabic" pitchFamily="34" charset="-122"/>
+                <a:cs typeface="Diodrum Arabic" pitchFamily="34" charset="-120"/>
+              </a:rPr>
+              <a:t>Zoned work that never disturbs operations</a:t>
+            </a:r>
+            <a:endParaRPr lang="en-US" sz="1100" dirty="0"/>
+          </a:p>
+        </p:txBody>
+      </p:sp>
+      <p:sp>
+        <p:nvSpPr>
+          <p:cNvPr id="13" name="Shape 10"/>
+          <p:cNvSpPr/>
+          <p:nvPr/>
+        </p:nvSpPr>
+        <p:spPr>
+          <a:xfrm>
+            <a:off x="4419600" y="1664208"/>
+            <a:ext cx="3459480" cy="2176272"/>
+          </a:xfrm>
+          <a:prstGeom prst="rect">
+            <a:avLst/>
+          </a:prstGeom>
+          <a:solidFill>
+            <a:srgbClr val="F2F8F9"/>
+          </a:solidFill>
+          <a:ln w="9525">
+            <a:solidFill>
+              <a:srgbClr val="C8C9C7"/>
+            </a:solidFill>
+            <a:prstDash val="solid"/>
+          </a:ln>
+        </p:spPr>
+      </p:sp>
+      <p:sp>
+        <p:nvSpPr>
+          <p:cNvPr id="14" name="Text 11"/>
+          <p:cNvSpPr txBox="1"/>
+          <p:nvPr/>
+        </p:nvSpPr>
+        <p:spPr>
+          <a:xfrm>
+            <a:off x="4565904" y="1737360"/>
+            <a:ext cx="3185160" cy="274320"/>
+          </a:xfrm>
+          <a:prstGeom prst="rect">
+            <a:avLst/>
+          </a:prstGeom>
+          <a:noFill/>
+          <a:ln/>
+        </p:spPr>
+        <p:txBody>
+          <a:bodyPr wrap="square" lIns="0" tIns="0" rIns="0" bIns="0" rtlCol="0" anchor="ctr"/>
+          <a:lstStyle/>
+          <a:p>
+            <a:pPr indent="0" marL="0">
+              <a:buNone/>
+            </a:pPr>
+            <a:r>
+              <a:rPr lang="en-US" sz="1200" b="1" dirty="0">
+                <a:solidFill>
+                  <a:srgbClr val="00778B"/>
+                </a:solidFill>
+                <a:latin typeface="Diodrum Arabic" pitchFamily="34" charset="0"/>
+                <a:ea typeface="Diodrum Arabic" pitchFamily="34" charset="-122"/>
+                <a:cs typeface="Diodrum Arabic" pitchFamily="34" charset="-120"/>
+              </a:rPr>
+              <a:t>Planning and reporting</a:t>
+            </a:r>
+            <a:endParaRPr lang="en-US" sz="1200" dirty="0"/>
+          </a:p>
+        </p:txBody>
+      </p:sp>
+      <p:sp>
+        <p:nvSpPr>
+          <p:cNvPr id="15" name="Text 12"/>
+          <p:cNvSpPr txBox="1"/>
+          <p:nvPr/>
+        </p:nvSpPr>
+        <p:spPr>
+          <a:xfrm>
+            <a:off x="4565904" y="2048256"/>
+            <a:ext cx="3185160" cy="1719072"/>
+          </a:xfrm>
+          <a:prstGeom prst="rect">
+            <a:avLst/>
+          </a:prstGeom>
+          <a:noFill/>
+          <a:ln/>
+        </p:spPr>
+        <p:txBody>
+          <a:bodyPr wrap="square" lIns="0" tIns="0" rIns="0" bIns="0" rtlCol="0" anchor="t"/>
+          <a:lstStyle/>
+          <a:p>
+            <a:pPr marL="152400" indent="-152400">
+              <a:spcAft>
+                <a:spcPts val="400"/>
+              </a:spcAft>
+              <a:buSzPct val="100000"/>
+              <a:buChar char="■"/>
+            </a:pPr>
+            <a:r>
+              <a:rPr lang="en-US" sz="1100" dirty="0">
+                <a:solidFill>
+                  <a:srgbClr val="3D3935"/>
+                </a:solidFill>
+                <a:latin typeface="Diodrum Arabic" pitchFamily="34" charset="0"/>
+                <a:ea typeface="Diodrum Arabic" pitchFamily="34" charset="-122"/>
+                <a:cs typeface="Diodrum Arabic" pitchFamily="34" charset="-120"/>
+              </a:rPr>
+              <a:t>Primavera baseline in 10 days, detailed in 21</a:t>
+            </a:r>
+            <a:endParaRPr lang="en-US" sz="1100" dirty="0"/>
+          </a:p>
+          <a:p>
+            <a:pPr marL="152400" indent="-152400">
+              <a:spcAft>
+                <a:spcPts val="400"/>
+              </a:spcAft>
+              <a:buSzPct val="100000"/>
+              <a:buChar char="■"/>
+            </a:pPr>
+            <a:r>
+              <a:rPr lang="en-US" sz="1100" dirty="0">
+                <a:solidFill>
+                  <a:srgbClr val="3D3935"/>
+                </a:solidFill>
+                <a:latin typeface="Diodrum Arabic" pitchFamily="34" charset="0"/>
+                <a:ea typeface="Diodrum Arabic" pitchFamily="34" charset="-122"/>
+                <a:cs typeface="Diodrum Arabic" pitchFamily="34" charset="-120"/>
+              </a:rPr>
+              <a:t>SAR review of submissions: 21 days at most</a:t>
+            </a:r>
+            <a:endParaRPr lang="en-US" sz="1100" dirty="0"/>
+          </a:p>
+          <a:p>
+            <a:pPr marL="152400" indent="-152400">
+              <a:spcAft>
+                <a:spcPts val="400"/>
+              </a:spcAft>
+              <a:buSzPct val="100000"/>
+              <a:buChar char="■"/>
+            </a:pPr>
+            <a:r>
+              <a:rPr lang="en-US" sz="1100" dirty="0">
+                <a:solidFill>
+                  <a:srgbClr val="3D3935"/>
+                </a:solidFill>
+                <a:latin typeface="Diodrum Arabic" pitchFamily="34" charset="0"/>
+                <a:ea typeface="Diodrum Arabic" pitchFamily="34" charset="-122"/>
+                <a:cs typeface="Diodrum Arabic" pitchFamily="34" charset="-120"/>
+              </a:rPr>
+              <a:t>Level 3/4 per unit, consolidated to Level 2</a:t>
+            </a:r>
+            <a:endParaRPr lang="en-US" sz="1100" dirty="0"/>
+          </a:p>
+          <a:p>
+            <a:pPr marL="152400" indent="-152400">
+              <a:spcAft>
+                <a:spcPts val="400"/>
+              </a:spcAft>
+              <a:buSzPct val="100000"/>
+              <a:buChar char="■"/>
+            </a:pPr>
+            <a:r>
+              <a:rPr lang="en-US" sz="1100" dirty="0">
+                <a:solidFill>
+                  <a:srgbClr val="3D3935"/>
+                </a:solidFill>
+                <a:latin typeface="Diodrum Arabic" pitchFamily="34" charset="0"/>
+                <a:ea typeface="Diodrum Arabic" pitchFamily="34" charset="-122"/>
+                <a:cs typeface="Diodrum Arabic" pitchFamily="34" charset="-120"/>
+              </a:rPr>
+              <a:t>S-curves: design, procurement, construction</a:t>
+            </a:r>
+            <a:endParaRPr lang="en-US" sz="1100" dirty="0"/>
+          </a:p>
+          <a:p>
+            <a:pPr marL="152400" indent="-152400">
+              <a:spcAft>
+                <a:spcPts val="400"/>
+              </a:spcAft>
+              <a:buSzPct val="100000"/>
+              <a:buChar char="■"/>
+            </a:pPr>
+            <a:r>
+              <a:rPr lang="en-US" sz="1100" dirty="0">
+                <a:solidFill>
+                  <a:srgbClr val="3D3935"/>
+                </a:solidFill>
+                <a:latin typeface="Diodrum Arabic" pitchFamily="34" charset="0"/>
+                <a:ea typeface="Diodrum Arabic" pitchFamily="34" charset="-122"/>
+                <a:cs typeface="Diodrum Arabic" pitchFamily="34" charset="-120"/>
+              </a:rPr>
+              <a:t>Weekly data; bi-weekly and monthly reports</a:t>
+            </a:r>
+            <a:endParaRPr lang="en-US" sz="1100" dirty="0"/>
+          </a:p>
+        </p:txBody>
+      </p:sp>
+      <p:sp>
+        <p:nvSpPr>
+          <p:cNvPr id="16" name="Shape 13"/>
+          <p:cNvSpPr/>
+          <p:nvPr/>
+        </p:nvSpPr>
+        <p:spPr>
+          <a:xfrm>
+            <a:off x="8061960" y="1664208"/>
+            <a:ext cx="3459480" cy="2176272"/>
+          </a:xfrm>
+          <a:prstGeom prst="rect">
+            <a:avLst/>
+          </a:prstGeom>
+          <a:solidFill>
+            <a:srgbClr val="FFFFFF"/>
+          </a:solidFill>
+          <a:ln w="9525">
+            <a:solidFill>
+              <a:srgbClr val="C8C9C7"/>
+            </a:solidFill>
+            <a:prstDash val="solid"/>
+          </a:ln>
+        </p:spPr>
+      </p:sp>
+      <p:sp>
+        <p:nvSpPr>
+          <p:cNvPr id="17" name="Text 14"/>
+          <p:cNvSpPr txBox="1"/>
+          <p:nvPr/>
+        </p:nvSpPr>
+        <p:spPr>
+          <a:xfrm>
+            <a:off x="8208264" y="1737360"/>
+            <a:ext cx="3185160" cy="274320"/>
+          </a:xfrm>
+          <a:prstGeom prst="rect">
+            <a:avLst/>
+          </a:prstGeom>
+          <a:noFill/>
+          <a:ln/>
+        </p:spPr>
+        <p:txBody>
+          <a:bodyPr wrap="square" lIns="0" tIns="0" rIns="0" bIns="0" rtlCol="0" anchor="ctr"/>
+          <a:lstStyle/>
+          <a:p>
+            <a:pPr indent="0" marL="0">
+              <a:buNone/>
+            </a:pPr>
+            <a:r>
+              <a:rPr lang="en-US" sz="1200" b="1" dirty="0">
+                <a:solidFill>
+                  <a:srgbClr val="00778B"/>
+                </a:solidFill>
+                <a:latin typeface="Diodrum Arabic" pitchFamily="34" charset="0"/>
+                <a:ea typeface="Diodrum Arabic" pitchFamily="34" charset="-122"/>
+                <a:cs typeface="Diodrum Arabic" pitchFamily="34" charset="-120"/>
+              </a:rPr>
+              <a:t>Testing, acceptance and warranty</a:t>
+            </a:r>
+            <a:endParaRPr lang="en-US" sz="1200" dirty="0"/>
+          </a:p>
+        </p:txBody>
+      </p:sp>
+      <p:sp>
+        <p:nvSpPr>
+          <p:cNvPr id="18" name="Text 15"/>
+          <p:cNvSpPr txBox="1"/>
+          <p:nvPr/>
+        </p:nvSpPr>
+        <p:spPr>
+          <a:xfrm>
+            <a:off x="8208264" y="2048256"/>
+            <a:ext cx="3185160" cy="1719072"/>
+          </a:xfrm>
+          <a:prstGeom prst="rect">
+            <a:avLst/>
+          </a:prstGeom>
+          <a:noFill/>
+          <a:ln/>
+        </p:spPr>
+        <p:txBody>
+          <a:bodyPr wrap="square" lIns="0" tIns="0" rIns="0" bIns="0" rtlCol="0" anchor="t"/>
+          <a:lstStyle/>
+          <a:p>
+            <a:pPr marL="152400" indent="-152400">
+              <a:spcAft>
+                <a:spcPts val="400"/>
+              </a:spcAft>
+              <a:buSzPct val="100000"/>
+              <a:buChar char="■"/>
+            </a:pPr>
+            <a:r>
+              <a:rPr lang="en-US" sz="1100" dirty="0">
+                <a:solidFill>
+                  <a:srgbClr val="3D3935"/>
+                </a:solidFill>
+                <a:latin typeface="Diodrum Arabic" pitchFamily="34" charset="0"/>
+                <a:ea typeface="Diodrum Arabic" pitchFamily="34" charset="-122"/>
+                <a:cs typeface="Diodrum Arabic" pitchFamily="34" charset="-120"/>
+              </a:rPr>
+              <a:t>FAT at vendor premises (China, or Dubai)</a:t>
+            </a:r>
+            <a:endParaRPr lang="en-US" sz="1100" dirty="0"/>
+          </a:p>
+          <a:p>
+            <a:pPr marL="152400" indent="-152400">
+              <a:spcAft>
+                <a:spcPts val="400"/>
+              </a:spcAft>
+              <a:buSzPct val="100000"/>
+              <a:buChar char="■"/>
+            </a:pPr>
+            <a:r>
+              <a:rPr lang="en-US" sz="1100" dirty="0">
+                <a:solidFill>
+                  <a:srgbClr val="3D3935"/>
+                </a:solidFill>
+                <a:latin typeface="Diodrum Arabic" pitchFamily="34" charset="0"/>
+                <a:ea typeface="Diodrum Arabic" pitchFamily="34" charset="-122"/>
+                <a:cs typeface="Diodrum Arabic" pitchFamily="34" charset="-120"/>
+              </a:rPr>
+              <a:t>SAT, then trial operation up to 45 days</a:t>
+            </a:r>
+            <a:endParaRPr lang="en-US" sz="1100" dirty="0"/>
+          </a:p>
+          <a:p>
+            <a:pPr marL="152400" indent="-152400">
+              <a:spcAft>
+                <a:spcPts val="400"/>
+              </a:spcAft>
+              <a:buSzPct val="100000"/>
+              <a:buChar char="■"/>
+            </a:pPr>
+            <a:r>
+              <a:rPr lang="en-US" sz="1100" dirty="0">
+                <a:solidFill>
+                  <a:srgbClr val="3D3935"/>
+                </a:solidFill>
+                <a:latin typeface="Diodrum Arabic" pitchFamily="34" charset="0"/>
+                <a:ea typeface="Diodrum Arabic" pitchFamily="34" charset="-122"/>
+                <a:cs typeface="Diodrum Arabic" pitchFamily="34" charset="-120"/>
+              </a:rPr>
+              <a:t>Taking-Over Certificate in 30 days, punch list 45</a:t>
+            </a:r>
+            <a:endParaRPr lang="en-US" sz="1100" dirty="0"/>
+          </a:p>
+          <a:p>
+            <a:pPr marL="152400" indent="-152400">
+              <a:spcAft>
+                <a:spcPts val="400"/>
+              </a:spcAft>
+              <a:buSzPct val="100000"/>
+              <a:buChar char="■"/>
+            </a:pPr>
+            <a:r>
+              <a:rPr lang="en-US" sz="1100" dirty="0">
+                <a:solidFill>
+                  <a:srgbClr val="3D3935"/>
+                </a:solidFill>
+                <a:latin typeface="Diodrum Arabic" pitchFamily="34" charset="0"/>
+                <a:ea typeface="Diodrum Arabic" pitchFamily="34" charset="-122"/>
+                <a:cs typeface="Diodrum Arabic" pitchFamily="34" charset="-120"/>
+              </a:rPr>
+              <a:t>Defects liability 1 year; Dahua 5 yrs, Cisco 1 yr</a:t>
+            </a:r>
+            <a:endParaRPr lang="en-US" sz="1100" dirty="0"/>
+          </a:p>
+          <a:p>
+            <a:pPr marL="152400" indent="-152400">
+              <a:spcAft>
+                <a:spcPts val="400"/>
+              </a:spcAft>
+              <a:buSzPct val="100000"/>
+              <a:buChar char="■"/>
+            </a:pPr>
+            <a:r>
+              <a:rPr lang="en-US" sz="1100" dirty="0">
+                <a:solidFill>
+                  <a:srgbClr val="3D3935"/>
+                </a:solidFill>
+                <a:latin typeface="Diodrum Arabic" pitchFamily="34" charset="0"/>
+                <a:ea typeface="Diodrum Arabic" pitchFamily="34" charset="-122"/>
+                <a:cs typeface="Diodrum Arabic" pitchFamily="34" charset="-120"/>
+              </a:rPr>
+              <a:t>Performance Certificate 28 days after last expiry</a:t>
+            </a:r>
+            <a:endParaRPr lang="en-US" sz="1100" dirty="0"/>
+          </a:p>
+        </p:txBody>
+      </p:sp>
+      <p:sp>
+        <p:nvSpPr>
+          <p:cNvPr id="19" name="Shape 16"/>
+          <p:cNvSpPr/>
+          <p:nvPr/>
+        </p:nvSpPr>
+        <p:spPr>
+          <a:xfrm>
+            <a:off x="777240" y="3931920"/>
+            <a:ext cx="3459480" cy="2176272"/>
+          </a:xfrm>
+          <a:prstGeom prst="rect">
+            <a:avLst/>
+          </a:prstGeom>
+          <a:solidFill>
+            <a:srgbClr val="F2F8F9"/>
+          </a:solidFill>
+          <a:ln w="9525">
+            <a:solidFill>
+              <a:srgbClr val="C8C9C7"/>
+            </a:solidFill>
+            <a:prstDash val="solid"/>
+          </a:ln>
+        </p:spPr>
+      </p:sp>
+      <p:sp>
+        <p:nvSpPr>
+          <p:cNvPr id="20" name="Text 17"/>
+          <p:cNvSpPr txBox="1"/>
+          <p:nvPr/>
+        </p:nvSpPr>
+        <p:spPr>
+          <a:xfrm>
+            <a:off x="923544" y="4005072"/>
+            <a:ext cx="3185160" cy="274320"/>
+          </a:xfrm>
+          <a:prstGeom prst="rect">
+            <a:avLst/>
+          </a:prstGeom>
+          <a:noFill/>
+          <a:ln/>
+        </p:spPr>
+        <p:txBody>
+          <a:bodyPr wrap="square" lIns="0" tIns="0" rIns="0" bIns="0" rtlCol="0" anchor="ctr"/>
+          <a:lstStyle/>
+          <a:p>
+            <a:pPr indent="0" marL="0">
+              <a:buNone/>
+            </a:pPr>
+            <a:r>
+              <a:rPr lang="en-US" sz="1200" b="1" dirty="0">
+                <a:solidFill>
+                  <a:srgbClr val="00778B"/>
+                </a:solidFill>
+                <a:latin typeface="Diodrum Arabic" pitchFamily="34" charset="0"/>
+                <a:ea typeface="Diodrum Arabic" pitchFamily="34" charset="-122"/>
+                <a:cs typeface="Diodrum Arabic" pitchFamily="34" charset="-120"/>
+              </a:rPr>
+              <a:t>Boundaries and conditions</a:t>
+            </a:r>
+            <a:endParaRPr lang="en-US" sz="1200" dirty="0"/>
+          </a:p>
+        </p:txBody>
+      </p:sp>
+      <p:sp>
+        <p:nvSpPr>
+          <p:cNvPr id="21" name="Text 18"/>
+          <p:cNvSpPr txBox="1"/>
+          <p:nvPr/>
+        </p:nvSpPr>
+        <p:spPr>
+          <a:xfrm>
+            <a:off x="923544" y="4315968"/>
+            <a:ext cx="3185160" cy="1719072"/>
+          </a:xfrm>
+          <a:prstGeom prst="rect">
+            <a:avLst/>
+          </a:prstGeom>
+          <a:noFill/>
+          <a:ln/>
+        </p:spPr>
+        <p:txBody>
+          <a:bodyPr wrap="square" lIns="0" tIns="0" rIns="0" bIns="0" rtlCol="0" anchor="t"/>
+          <a:lstStyle/>
+          <a:p>
+            <a:pPr marL="152400" indent="-152400">
+              <a:spcAft>
+                <a:spcPts val="400"/>
+              </a:spcAft>
+              <a:buSzPct val="100000"/>
+              <a:buChar char="■"/>
+            </a:pPr>
+            <a:r>
+              <a:rPr lang="en-US" sz="1100" dirty="0">
+                <a:solidFill>
+                  <a:srgbClr val="3D3935"/>
+                </a:solidFill>
+                <a:latin typeface="Diodrum Arabic" pitchFamily="34" charset="0"/>
+                <a:ea typeface="Diodrum Arabic" pitchFamily="34" charset="-122"/>
+                <a:cs typeface="Diodrum Arabic" pitchFamily="34" charset="-120"/>
+              </a:rPr>
+              <a:t>Inside stations only, doors to platforms</a:t>
+            </a:r>
+            <a:endParaRPr lang="en-US" sz="1100" dirty="0"/>
+          </a:p>
+          <a:p>
+            <a:pPr marL="152400" indent="-152400">
+              <a:spcAft>
+                <a:spcPts val="400"/>
+              </a:spcAft>
+              <a:buSzPct val="100000"/>
+              <a:buChar char="■"/>
+            </a:pPr>
+            <a:r>
+              <a:rPr lang="en-US" sz="1100" dirty="0">
+                <a:solidFill>
+                  <a:srgbClr val="3D3935"/>
+                </a:solidFill>
+                <a:latin typeface="Diodrum Arabic" pitchFamily="34" charset="0"/>
+                <a:ea typeface="Diodrum Arabic" pitchFamily="34" charset="-122"/>
+                <a:cs typeface="Diodrum Arabic" pitchFamily="34" charset="-120"/>
+              </a:rPr>
+              <a:t>Excluded: inter-station fibre, IP telephony, cyber-security, maintenance</a:t>
+            </a:r>
+            <a:endParaRPr lang="en-US" sz="1100" dirty="0"/>
+          </a:p>
+          <a:p>
+            <a:pPr marL="152400" indent="-152400">
+              <a:spcAft>
+                <a:spcPts val="400"/>
+              </a:spcAft>
+              <a:buSzPct val="100000"/>
+              <a:buChar char="■"/>
+            </a:pPr>
+            <a:r>
+              <a:rPr lang="en-US" sz="1100" dirty="0">
+                <a:solidFill>
+                  <a:srgbClr val="3D3935"/>
+                </a:solidFill>
+                <a:latin typeface="Diodrum Arabic" pitchFamily="34" charset="0"/>
+                <a:ea typeface="Diodrum Arabic" pitchFamily="34" charset="-122"/>
+                <a:cs typeface="Diodrum Arabic" pitchFamily="34" charset="-120"/>
+              </a:rPr>
+              <a:t>SAR provides passes, laydown area, control-room network</a:t>
+            </a:r>
+            <a:endParaRPr lang="en-US" sz="1100" dirty="0"/>
+          </a:p>
+          <a:p>
+            <a:pPr marL="152400" indent="-152400">
+              <a:spcAft>
+                <a:spcPts val="400"/>
+              </a:spcAft>
+              <a:buSzPct val="100000"/>
+              <a:buChar char="■"/>
+            </a:pPr>
+            <a:r>
+              <a:rPr lang="en-US" sz="1100" dirty="0">
+                <a:solidFill>
+                  <a:srgbClr val="3D3935"/>
+                </a:solidFill>
+                <a:latin typeface="Diodrum Arabic" pitchFamily="34" charset="0"/>
+                <a:ea typeface="Diodrum Arabic" pitchFamily="34" charset="-122"/>
+                <a:cs typeface="Diodrum Arabic" pitchFamily="34" charset="-120"/>
+              </a:rPr>
+              <a:t>Third-party integration: open API, extra cost</a:t>
+            </a:r>
+            <a:endParaRPr lang="en-US" sz="1100" dirty="0"/>
+          </a:p>
+          <a:p>
+            <a:pPr marL="152400" indent="-152400">
+              <a:spcAft>
+                <a:spcPts val="400"/>
+              </a:spcAft>
+              <a:buSzPct val="100000"/>
+              <a:buChar char="■"/>
+            </a:pPr>
+            <a:r>
+              <a:rPr lang="en-US" sz="1100" dirty="0">
+                <a:solidFill>
+                  <a:srgbClr val="3D3935"/>
+                </a:solidFill>
+                <a:latin typeface="Diodrum Arabic" pitchFamily="34" charset="0"/>
+                <a:ea typeface="Diodrum Arabic" pitchFamily="34" charset="-122"/>
+                <a:cs typeface="Diodrum Arabic" pitchFamily="34" charset="-120"/>
+              </a:rPr>
+              <a:t>Fast-track, no HCIS Stage 1 or 2; Madinah at 50%</a:t>
+            </a:r>
+            <a:endParaRPr lang="en-US" sz="1100" dirty="0"/>
+          </a:p>
+        </p:txBody>
+      </p:sp>
+      <p:sp>
+        <p:nvSpPr>
+          <p:cNvPr id="22" name="Shape 19"/>
+          <p:cNvSpPr/>
+          <p:nvPr/>
+        </p:nvSpPr>
+        <p:spPr>
+          <a:xfrm>
+            <a:off x="4419600" y="3931920"/>
+            <a:ext cx="3459480" cy="2176272"/>
+          </a:xfrm>
+          <a:prstGeom prst="rect">
+            <a:avLst/>
+          </a:prstGeom>
+          <a:solidFill>
+            <a:srgbClr val="FFFFFF"/>
+          </a:solidFill>
+          <a:ln w="9525">
+            <a:solidFill>
+              <a:srgbClr val="C8C9C7"/>
+            </a:solidFill>
+            <a:prstDash val="solid"/>
+          </a:ln>
+        </p:spPr>
+      </p:sp>
+      <p:sp>
+        <p:nvSpPr>
+          <p:cNvPr id="23" name="Text 20"/>
+          <p:cNvSpPr txBox="1"/>
+          <p:nvPr/>
+        </p:nvSpPr>
+        <p:spPr>
+          <a:xfrm>
+            <a:off x="4565904" y="4005072"/>
+            <a:ext cx="3185160" cy="274320"/>
+          </a:xfrm>
+          <a:prstGeom prst="rect">
+            <a:avLst/>
+          </a:prstGeom>
+          <a:noFill/>
+          <a:ln/>
+        </p:spPr>
+        <p:txBody>
+          <a:bodyPr wrap="square" lIns="0" tIns="0" rIns="0" bIns="0" rtlCol="0" anchor="ctr"/>
+          <a:lstStyle/>
+          <a:p>
+            <a:pPr indent="0" marL="0">
+              <a:buNone/>
+            </a:pPr>
+            <a:r>
+              <a:rPr lang="en-US" sz="1200" b="1" dirty="0">
+                <a:solidFill>
+                  <a:srgbClr val="00778B"/>
+                </a:solidFill>
+                <a:latin typeface="Diodrum Arabic" pitchFamily="34" charset="0"/>
+                <a:ea typeface="Diodrum Arabic" pitchFamily="34" charset="-122"/>
+                <a:cs typeface="Diodrum Arabic" pitchFamily="34" charset="-120"/>
+              </a:rPr>
+              <a:t>Commercial terms</a:t>
+            </a:r>
+            <a:endParaRPr lang="en-US" sz="1200" dirty="0"/>
+          </a:p>
+        </p:txBody>
+      </p:sp>
+      <p:sp>
+        <p:nvSpPr>
+          <p:cNvPr id="24" name="Text 21"/>
+          <p:cNvSpPr txBox="1"/>
+          <p:nvPr/>
+        </p:nvSpPr>
+        <p:spPr>
+          <a:xfrm>
+            <a:off x="4565904" y="4315968"/>
+            <a:ext cx="3185160" cy="1719072"/>
+          </a:xfrm>
+          <a:prstGeom prst="rect">
+            <a:avLst/>
+          </a:prstGeom>
+          <a:noFill/>
+          <a:ln/>
+        </p:spPr>
+        <p:txBody>
+          <a:bodyPr wrap="square" lIns="0" tIns="0" rIns="0" bIns="0" rtlCol="0" anchor="t"/>
+          <a:lstStyle/>
+          <a:p>
+            <a:pPr marL="152400" indent="-152400">
+              <a:spcAft>
+                <a:spcPts val="400"/>
+              </a:spcAft>
+              <a:buSzPct val="100000"/>
+              <a:buChar char="■"/>
+            </a:pPr>
+            <a:r>
+              <a:rPr lang="en-US" sz="1100" dirty="0">
+                <a:solidFill>
+                  <a:srgbClr val="3D3935"/>
+                </a:solidFill>
+                <a:latin typeface="Diodrum Arabic" pitchFamily="34" charset="0"/>
+                <a:ea typeface="Diodrum Arabic" pitchFamily="34" charset="-122"/>
+                <a:cs typeface="Diodrum Arabic" pitchFamily="34" charset="-120"/>
+              </a:rPr>
+              <a:t>Price SAR 62.0M ex-VAT; variation +10% / -20%</a:t>
+            </a:r>
+            <a:endParaRPr lang="en-US" sz="1100" dirty="0"/>
+          </a:p>
+          <a:p>
+            <a:pPr marL="152400" indent="-152400">
+              <a:spcAft>
+                <a:spcPts val="400"/>
+              </a:spcAft>
+              <a:buSzPct val="100000"/>
+              <a:buChar char="■"/>
+            </a:pPr>
+            <a:r>
+              <a:rPr lang="en-US" sz="1100" dirty="0">
+                <a:solidFill>
+                  <a:srgbClr val="3D3935"/>
+                </a:solidFill>
+                <a:latin typeface="Diodrum Arabic" pitchFamily="34" charset="0"/>
+                <a:ea typeface="Diodrum Arabic" pitchFamily="34" charset="-122"/>
+                <a:cs typeface="Diodrum Arabic" pitchFamily="34" charset="-120"/>
+              </a:rPr>
+              <a:t>Payment 20/10/10/20/20/10/10% by milestone</a:t>
+            </a:r>
+            <a:endParaRPr lang="en-US" sz="1100" dirty="0"/>
+          </a:p>
+          <a:p>
+            <a:pPr marL="152400" indent="-152400">
+              <a:spcAft>
+                <a:spcPts val="400"/>
+              </a:spcAft>
+              <a:buSzPct val="100000"/>
+              <a:buChar char="■"/>
+            </a:pPr>
+            <a:r>
+              <a:rPr lang="en-US" sz="1100" dirty="0">
+                <a:solidFill>
+                  <a:srgbClr val="3D3935"/>
+                </a:solidFill>
+                <a:latin typeface="Diodrum Arabic" pitchFamily="34" charset="0"/>
+                <a:ea typeface="Diodrum Arabic" pitchFamily="34" charset="-122"/>
+                <a:cs typeface="Diodrum Arabic" pitchFamily="34" charset="-120"/>
+              </a:rPr>
+              <a:t>Delay damages 0.2% a day, capped at 10%</a:t>
+            </a:r>
+            <a:endParaRPr lang="en-US" sz="1100" dirty="0"/>
+          </a:p>
+          <a:p>
+            <a:pPr marL="152400" indent="-152400">
+              <a:spcAft>
+                <a:spcPts val="400"/>
+              </a:spcAft>
+              <a:buSzPct val="100000"/>
+              <a:buChar char="■"/>
+            </a:pPr>
+            <a:r>
+              <a:rPr lang="en-US" sz="1100" dirty="0">
+                <a:solidFill>
+                  <a:srgbClr val="3D3935"/>
+                </a:solidFill>
+                <a:latin typeface="Diodrum Arabic" pitchFamily="34" charset="0"/>
+                <a:ea typeface="Diodrum Arabic" pitchFamily="34" charset="-122"/>
+                <a:cs typeface="Diodrum Arabic" pitchFamily="34" charset="-120"/>
+              </a:rPr>
+              <a:t>Performance bond 5%; liability cap = price</a:t>
+            </a:r>
+            <a:endParaRPr lang="en-US" sz="1100" dirty="0"/>
+          </a:p>
+          <a:p>
+            <a:pPr marL="152400" indent="-152400">
+              <a:spcAft>
+                <a:spcPts val="400"/>
+              </a:spcAft>
+              <a:buSzPct val="100000"/>
+              <a:buChar char="■"/>
+            </a:pPr>
+            <a:r>
+              <a:rPr lang="en-US" sz="1100" dirty="0">
+                <a:solidFill>
+                  <a:srgbClr val="3D3935"/>
+                </a:solidFill>
+                <a:latin typeface="Diodrum Arabic" pitchFamily="34" charset="0"/>
+                <a:ea typeface="Diodrum Arabic" pitchFamily="34" charset="-122"/>
+                <a:cs typeface="Diodrum Arabic" pitchFamily="34" charset="-120"/>
+              </a:rPr>
+              <a:t>Optional, unpriced: control-room servers, PSIM</a:t>
+            </a:r>
+            <a:endParaRPr lang="en-US" sz="1100" dirty="0"/>
+          </a:p>
+        </p:txBody>
+      </p:sp>
+      <p:sp>
+        <p:nvSpPr>
+          <p:cNvPr id="25" name="Shape 22"/>
+          <p:cNvSpPr/>
+          <p:nvPr/>
+        </p:nvSpPr>
+        <p:spPr>
+          <a:xfrm>
+            <a:off x="8061960" y="3931920"/>
+            <a:ext cx="3459480" cy="2176272"/>
+          </a:xfrm>
+          <a:prstGeom prst="rect">
+            <a:avLst/>
+          </a:prstGeom>
+          <a:solidFill>
+            <a:srgbClr val="F2F8F9"/>
+          </a:solidFill>
+          <a:ln w="9525">
+            <a:solidFill>
+              <a:srgbClr val="C8C9C7"/>
+            </a:solidFill>
+            <a:prstDash val="solid"/>
+          </a:ln>
+        </p:spPr>
+      </p:sp>
+      <p:sp>
+        <p:nvSpPr>
+          <p:cNvPr id="26" name="Text 23"/>
+          <p:cNvSpPr txBox="1"/>
+          <p:nvPr/>
+        </p:nvSpPr>
+        <p:spPr>
+          <a:xfrm>
+            <a:off x="8208264" y="4005072"/>
+            <a:ext cx="3185160" cy="274320"/>
+          </a:xfrm>
+          <a:prstGeom prst="rect">
+            <a:avLst/>
+          </a:prstGeom>
+          <a:noFill/>
+          <a:ln/>
+        </p:spPr>
+        <p:txBody>
+          <a:bodyPr wrap="square" lIns="0" tIns="0" rIns="0" bIns="0" rtlCol="0" anchor="ctr"/>
+          <a:lstStyle/>
+          <a:p>
+            <a:pPr indent="0" marL="0">
+              <a:buNone/>
+            </a:pPr>
+            <a:r>
+              <a:rPr lang="en-US" sz="1200" b="1" dirty="0">
+                <a:solidFill>
+                  <a:srgbClr val="00778B"/>
+                </a:solidFill>
+                <a:latin typeface="Diodrum Arabic" pitchFamily="34" charset="0"/>
+                <a:ea typeface="Diodrum Arabic" pitchFamily="34" charset="-122"/>
+                <a:cs typeface="Diodrum Arabic" pitchFamily="34" charset="-120"/>
+              </a:rPr>
+              <a:t>Personnel and quality</a:t>
+            </a:r>
+            <a:endParaRPr lang="en-US" sz="1200" dirty="0"/>
+          </a:p>
+        </p:txBody>
+      </p:sp>
+      <p:sp>
+        <p:nvSpPr>
+          <p:cNvPr id="27" name="Text 24"/>
+          <p:cNvSpPr txBox="1"/>
+          <p:nvPr/>
+        </p:nvSpPr>
+        <p:spPr>
+          <a:xfrm>
+            <a:off x="8208264" y="4315968"/>
+            <a:ext cx="3185160" cy="1719072"/>
+          </a:xfrm>
+          <a:prstGeom prst="rect">
+            <a:avLst/>
+          </a:prstGeom>
+          <a:noFill/>
+          <a:ln/>
+        </p:spPr>
+        <p:txBody>
+          <a:bodyPr wrap="square" lIns="0" tIns="0" rIns="0" bIns="0" rtlCol="0" anchor="t"/>
+          <a:lstStyle/>
+          <a:p>
+            <a:pPr marL="152400" indent="-152400">
+              <a:spcAft>
+                <a:spcPts val="400"/>
+              </a:spcAft>
+              <a:buSzPct val="100000"/>
+              <a:buChar char="■"/>
+            </a:pPr>
+            <a:r>
+              <a:rPr lang="en-US" sz="1100" dirty="0">
+                <a:solidFill>
+                  <a:srgbClr val="3D3935"/>
+                </a:solidFill>
+                <a:latin typeface="Diodrum Arabic" pitchFamily="34" charset="0"/>
+                <a:ea typeface="Diodrum Arabic" pitchFamily="34" charset="-122"/>
+                <a:cs typeface="Diodrum Arabic" pitchFamily="34" charset="-120"/>
+              </a:rPr>
+              <a:t>Key personnel approved by SAR; Saudization</a:t>
+            </a:r>
+            <a:endParaRPr lang="en-US" sz="1100" dirty="0"/>
+          </a:p>
+          <a:p>
+            <a:pPr marL="152400" indent="-152400">
+              <a:spcAft>
+                <a:spcPts val="400"/>
+              </a:spcAft>
+              <a:buSzPct val="100000"/>
+              <a:buChar char="■"/>
+            </a:pPr>
+            <a:r>
+              <a:rPr lang="en-US" sz="1100" dirty="0">
+                <a:solidFill>
+                  <a:srgbClr val="3D3935"/>
+                </a:solidFill>
+                <a:latin typeface="Diodrum Arabic" pitchFamily="34" charset="0"/>
+                <a:ea typeface="Diodrum Arabic" pitchFamily="34" charset="-122"/>
+                <a:cs typeface="Diodrum Arabic" pitchFamily="34" charset="-120"/>
+              </a:rPr>
+              <a:t>ISO 9001:2015; HCIS, NFPA 70, SBC 2019, SASO</a:t>
+            </a:r>
+            <a:endParaRPr lang="en-US" sz="1100" dirty="0"/>
+          </a:p>
+          <a:p>
+            <a:pPr marL="152400" indent="-152400">
+              <a:spcAft>
+                <a:spcPts val="400"/>
+              </a:spcAft>
+              <a:buSzPct val="100000"/>
+              <a:buChar char="■"/>
+            </a:pPr>
+            <a:r>
+              <a:rPr lang="en-US" sz="1100" dirty="0">
+                <a:solidFill>
+                  <a:srgbClr val="3D3935"/>
+                </a:solidFill>
+                <a:latin typeface="Diodrum Arabic" pitchFamily="34" charset="0"/>
+                <a:ea typeface="Diodrum Arabic" pitchFamily="34" charset="-122"/>
+                <a:cs typeface="Diodrum Arabic" pitchFamily="34" charset="-120"/>
+              </a:rPr>
+              <a:t>WARA risk assessment near operating track</a:t>
+            </a:r>
+            <a:endParaRPr lang="en-US" sz="1100" dirty="0"/>
+          </a:p>
+          <a:p>
+            <a:pPr marL="152400" indent="-152400">
+              <a:spcAft>
+                <a:spcPts val="400"/>
+              </a:spcAft>
+              <a:buSzPct val="100000"/>
+              <a:buChar char="■"/>
+            </a:pPr>
+            <a:r>
+              <a:rPr lang="en-US" sz="1100" dirty="0">
+                <a:solidFill>
+                  <a:srgbClr val="3D3935"/>
+                </a:solidFill>
+                <a:latin typeface="Diodrum Arabic" pitchFamily="34" charset="0"/>
+                <a:ea typeface="Diodrum Arabic" pitchFamily="34" charset="-122"/>
+                <a:cs typeface="Diodrum Arabic" pitchFamily="34" charset="-120"/>
+              </a:rPr>
+              <a:t>PTS and protection-officer training for track</a:t>
+            </a:r>
+            <a:endParaRPr lang="en-US" sz="1100" dirty="0"/>
+          </a:p>
+          <a:p>
+            <a:pPr marL="152400" indent="-152400">
+              <a:spcAft>
+                <a:spcPts val="400"/>
+              </a:spcAft>
+              <a:buSzPct val="100000"/>
+              <a:buChar char="■"/>
+            </a:pPr>
+            <a:r>
+              <a:rPr lang="en-US" sz="1100" dirty="0">
+                <a:solidFill>
+                  <a:srgbClr val="3D3935"/>
+                </a:solidFill>
+                <a:latin typeface="Diodrum Arabic" pitchFamily="34" charset="0"/>
+                <a:ea typeface="Diodrum Arabic" pitchFamily="34" charset="-122"/>
+                <a:cs typeface="Diodrum Arabic" pitchFamily="34" charset="-120"/>
+              </a:rPr>
+              <a:t>Supplier spares available for 15 years</a:t>
+            </a:r>
+            <a:endParaRPr lang="en-US" sz="1100" dirty="0"/>
+          </a:p>
+        </p:txBody>
+      </p:sp>
+    </p:spTree>
+  </p:cSld>
+  <p:clrMapOvr>
+    <a:masterClrMapping/>
+  </p:clrMapOvr>
+</p:sld>
+</file>
+
+<file path=ppt/slides/slide5.xml><?xml version="1.0" encoding="utf-8"?>
+<p:sld xmlns:a="http://schemas.openxmlformats.org/drawingml/2006/main" xmlns:r="http://schemas.openxmlformats.org/officeDocument/2006/relationships" xmlns:p="http://schemas.openxmlformats.org/presentationml/2006/main">
+  <p:cSld name="Slide 5">
+    <p:spTree>
+      <p:nvGrpSpPr>
+        <p:cNvPr id="1" name=""/>
+        <p:cNvGrpSpPr/>
+        <p:nvPr/>
+      </p:nvGrpSpPr>
+      <p:grpSpPr>
+        <a:xfrm>
+          <a:off x="0" y="0"/>
+          <a:ext cx="0" cy="0"/>
+          <a:chOff x="0" y="0"/>
+          <a:chExt cx="0" cy="0"/>
+        </a:xfrm>
+      </p:grpSpPr>
+      <p:pic>
+        <p:nvPicPr>
+          <p:cNvPr id="2" name="Image 0" descr="preencoded.png">    </p:cNvPr>
+          <p:cNvPicPr>
+            <a:picLocks noChangeAspect="1"/>
+          </p:cNvPicPr>
+          <p:nvPr/>
+        </p:nvPicPr>
+        <p:blipFill>
+          <a:blip r:embed="rId1"/>
+          <a:stretch>
+            <a:fillRect/>
+          </a:stretch>
+        </p:blipFill>
+        <p:spPr>
+          <a:xfrm>
+            <a:off x="411480" y="164592"/>
+            <a:ext cx="675742" cy="420624"/>
+          </a:xfrm>
+          <a:prstGeom prst="rect">
+            <a:avLst/>
+          </a:prstGeom>
+        </p:spPr>
+      </p:pic>
+      <p:sp>
+        <p:nvSpPr>
+          <p:cNvPr id="3" name="Text 0"/>
+          <p:cNvSpPr txBox="1"/>
+          <p:nvPr/>
+        </p:nvSpPr>
+        <p:spPr>
+          <a:xfrm>
+            <a:off x="5852160" y="274320"/>
+            <a:ext cx="5943600" cy="228600"/>
+          </a:xfrm>
+          <a:prstGeom prst="rect">
+            <a:avLst/>
+          </a:prstGeom>
+          <a:noFill/>
+          <a:ln/>
+        </p:spPr>
+        <p:txBody>
+          <a:bodyPr wrap="square" lIns="0" tIns="0" rIns="0" bIns="0" rtlCol="0" anchor="ctr"/>
+          <a:lstStyle/>
+          <a:p>
+            <a:pPr algn="r" indent="0" marL="0">
+              <a:buNone/>
+            </a:pPr>
+            <a:r>
+              <a:rPr lang="en-US" sz="900" dirty="0">
+                <a:solidFill>
+                  <a:srgbClr val="768692"/>
+                </a:solidFill>
+                <a:latin typeface="Diodrum Arabic" pitchFamily="34" charset="0"/>
+                <a:ea typeface="Diodrum Arabic" pitchFamily="34" charset="-122"/>
+                <a:cs typeface="Diodrum Arabic" pitchFamily="34" charset="-120"/>
+              </a:rPr>
               <a:t>Passengers' Security Checking  |  Schedule, Level 2</a:t>
             </a:r>
             <a:endParaRPr lang="en-US" sz="900" dirty="0"/>
@@ -4600,7 +12888,7 @@
                 <a:ea typeface="Diodrum Arabic" pitchFamily="34" charset="-122"/>
                 <a:cs typeface="Diodrum Arabic" pitchFamily="34" charset="-120"/>
               </a:rPr>
-              <a:t>3</a:t>
+              <a:t>5</a:t>
             </a:r>
             <a:endParaRPr lang="en-US" sz="900" dirty="0"/>
           </a:p>
@@ -7811,9 +16099,9 @@
 </p:sld>
 </file>
 
-<file path=ppt/slides/slide4.xml><?xml version="1.0" encoding="utf-8"?>
+<file path=ppt/slides/slide6.xml><?xml version="1.0" encoding="utf-8"?>
 <p:sld xmlns:a="http://schemas.openxmlformats.org/drawingml/2006/main" xmlns:r="http://schemas.openxmlformats.org/officeDocument/2006/relationships" xmlns:p="http://schemas.openxmlformats.org/presentationml/2006/main">
-  <p:cSld name="Slide 4">
+  <p:cSld name="Slide 6">
     <p:spTree>
       <p:nvGrpSpPr>
         <p:cNvPr id="1" name=""/>
@@ -7924,7 +16212,7 @@
                 <a:ea typeface="Diodrum Arabic" pitchFamily="34" charset="-122"/>
                 <a:cs typeface="Diodrum Arabic" pitchFamily="34" charset="-120"/>
               </a:rPr>
-              <a:t>4</a:t>
+              <a:t>6</a:t>
             </a:r>
             <a:endParaRPr lang="en-US" sz="900" dirty="0"/>
           </a:p>
@@ -8083,7 +16371,7 @@
       </p:sp>
       <p:graphicFrame>
         <p:nvGraphicFramePr>
-          <p:cNvPr id="5" name="Table 0"/>
+          <p:cNvPr id="7" name="Table 0"/>
           <p:cNvGraphicFramePr>
             <a:graphicFrameLocks noGrp="1"/>
           </p:cNvGraphicFramePr>
@@ -16870,7 +25158,7 @@
       </p:graphicFrame>
       <p:graphicFrame>
         <p:nvGraphicFramePr>
-          <p:cNvPr id="9" name="Table 1"/>
+          <p:cNvPr id="13" name="Table 1"/>
           <p:cNvGraphicFramePr>
             <a:graphicFrameLocks noGrp="1"/>
           </p:cNvGraphicFramePr>
@@ -19363,9 +27651,9 @@
 </p:sld>
 </file>
 
-<file path=ppt/slides/slide5.xml><?xml version="1.0" encoding="utf-8"?>
+<file path=ppt/slides/slide7.xml><?xml version="1.0" encoding="utf-8"?>
 <p:sld xmlns:a="http://schemas.openxmlformats.org/drawingml/2006/main" xmlns:r="http://schemas.openxmlformats.org/officeDocument/2006/relationships" xmlns:p="http://schemas.openxmlformats.org/presentationml/2006/main">
-  <p:cSld name="Slide 5">
+  <p:cSld name="Slide 7">
     <p:bg>
       <p:bgPr>
         <a:solidFill>

--- a/presentation/SAR_Security_Program_Presentation.pptx
+++ b/presentation/SAR_Security_Program_Presentation.pptx
@@ -1940,7 +1940,7 @@
           <a:p>
             <a:r>
               <a:rPr lang="en-US" dirty="0"/>
-              <a:t>Source: draft contract between SAR and ETECHS (22 Jan 2024) with Annexes 1 to 5. Station list: Annex 1 deliverables. Quantities and sub-systems: Annex 3 price table (Revised-02, SAR 62,000,000 ex-VAT; EWR 11,113,215, NSR 20,499,295, HHR 30,387,490). Boundaries: Annex 3 terms (exclusions) and Annex 5 SAR responses (inner areas only). Madinah is priced at 50% of the Makkah BOQ.</a:t>
+              <a:t>Source: draft contract between SAR and ETECHS (22 Jan 2024) with Annexes 1 to 5. Station list: Annex 1 deliverables. Quantities and sub-systems: Annex 3 price table (Revised-02, SAR 62,000,000 ex-VAT; EWR 11,113,215, NSR 20,499,295, HHR 30,387,490). Boundaries: Annex 3 terms (exclusions) and Annex 4 SAR responses (inner areas only, item 12). Madinah is priced at 50% of the Makkah BOQ.</a:t>
             </a:r>
             <a:endParaRPr lang="en-US" dirty="0"/>
           </a:p>
@@ -2116,7 +2116,7 @@
           <a:p>
             <a:r>
               <a:rPr lang="en-US" dirty="0"/>
-              <a:t>Sources: contract clauses 3 (Baseline Programme), 10 (time for performance), 15 (payments), acceptance and defects liability clauses; Annex 2 clauses 3, 5, 6, 9 to 13; Annex 3 terms (exclusions, FAT, delivery, warranty); Annex 5 (SAR responses: inner areas only, fast-track project, laydown area, integration conditions). Trial operation is defined in the contract as a maximum of 45 days.</a:t>
+              <a:t>Sources: contract clauses 3 (Baseline Programme), 10 (time for performance), 15 (payments), acceptance and defects liability clauses; Annex 2 clauses 3, 5, 6, 9 to 13; Annex 3 terms (exclusions, FAT, delivery, warranty); Annex 4 (clarifications: SAR responses on inner areas only, item 12; fast-track, item 33; laydown area; integration conditions). Annex 5 is the compliance table (HCIS Stage 3 approval, training, spares, lump sum). Trial operation is defined in the contract as a maximum of 45 days.</a:t>
             </a:r>
             <a:endParaRPr lang="en-US" dirty="0"/>
           </a:p>
@@ -4860,7 +4860,7 @@
                 <a:ea typeface="Diodrum Arabic" pitchFamily="34" charset="-122"/>
                 <a:cs typeface="Diodrum Arabic" pitchFamily="34" charset="-120"/>
               </a:rPr>
-              <a:t>BOUNDARIES (ANNEXES 3 AND 5)</a:t>
+              <a:t>BOUNDARIES (ANNEXES 3 AND 4)</a:t>
             </a:r>
             <a:endParaRPr lang="en-US" sz="1100" dirty="0"/>
           </a:p>
@@ -11615,7 +11615,7 @@
                 <a:ea typeface="Diodrum Arabic" pitchFamily="34" charset="-122"/>
                 <a:cs typeface="Diodrum Arabic" pitchFamily="34" charset="-120"/>
               </a:rPr>
-              <a:t>From the contract body, Annex 2 (SAR Scope of Work), Annex 3 terms and Annex 5 clarifications</a:t>
+              <a:t>From the contract body, Annex 2 (SAR Scope of Work), Annex 3 terms and Annex 4 clarifications</a:t>
             </a:r>
             <a:endParaRPr lang="en-US" sz="1200" dirty="0"/>
           </a:p>
@@ -12379,7 +12379,7 @@
                 <a:ea typeface="Diodrum Arabic" pitchFamily="34" charset="-122"/>
                 <a:cs typeface="Diodrum Arabic" pitchFamily="34" charset="-120"/>
               </a:rPr>
-              <a:t>Fast-track, no HCIS Stage 1 or 2; Madinah at 50%</a:t>
+              <a:t>Fast-track project (Annex 4, item 33); Madinah at 50%</a:t>
             </a:r>
             <a:endParaRPr lang="en-US" sz="1100" dirty="0"/>
           </a:p>
